--- a/regression_deck/Deck1_Measured_Regression.pptx
+++ b/regression_deck/Deck1_Measured_Regression.pptx
@@ -16,9 +16,11 @@
     <p:sldId id="264" r:id="rId10"/>
     <p:sldId id="265" r:id="rId11"/>
     <p:sldId id="266" r:id="rId12"/>
+    <p:sldId id="267" r:id="rId13"/>
+    <p:sldId id="268" r:id="rId14"/>
   </p:sldIdLst>
   <p:notesMasterIdLst>
-    <p:notesMasterId r:id="rId13"/>
+    <p:notesMasterId r:id="rId15"/>
   </p:notesMasterIdLst>
   <p:sldSz cx="12188952" cy="6858000"/>
   <p:notesSz cx="6858000" cy="12188952"/>
@@ -145,7 +147,7 @@
           </c:tx>
           <c:spPr>
             <a:solidFill>
-              <a:srgbClr val="0B5D7A"/>
+              <a:srgbClr val="BE0000"/>
             </a:solidFill>
             <a:effectLst/>
           </c:spPr>
@@ -159,7 +161,7 @@
                 <a:pPr>
                   <a:defRPr b="0" i="0" strike="noStrike" sz="1000" u="none">
                     <a:solidFill>
-                      <a:srgbClr val="1E293B"/>
+                      <a:srgbClr val="2A1618"/>
                     </a:solidFill>
                     <a:latin typeface="Arial"/>
                   </a:defRPr>
@@ -228,7 +230,7 @@
           </c:tx>
           <c:spPr>
             <a:solidFill>
-              <a:srgbClr val="E0A100"/>
+              <a:srgbClr val="C8890B"/>
             </a:solidFill>
             <a:effectLst/>
           </c:spPr>
@@ -242,7 +244,7 @@
                 <a:pPr>
                   <a:defRPr b="0" i="0" strike="noStrike" sz="1000" u="none">
                     <a:solidFill>
-                      <a:srgbClr val="1E293B"/>
+                      <a:srgbClr val="2A1618"/>
                     </a:solidFill>
                     <a:latin typeface="Arial"/>
                   </a:defRPr>
@@ -311,7 +313,7 @@
           </c:tx>
           <c:spPr>
             <a:solidFill>
-              <a:srgbClr val="C3CED6"/>
+              <a:srgbClr val="C9B3AE"/>
             </a:solidFill>
             <a:effectLst/>
           </c:spPr>
@@ -325,7 +327,7 @@
                 <a:pPr>
                   <a:defRPr b="0" i="0" strike="noStrike" sz="1000" u="none">
                     <a:solidFill>
-                      <a:srgbClr val="1E293B"/>
+                      <a:srgbClr val="2A1618"/>
                     </a:solidFill>
                     <a:latin typeface="Arial"/>
                   </a:defRPr>
@@ -387,7 +389,7 @@
               <a:pPr>
                 <a:defRPr b="0" i="0" strike="noStrike" sz="1000" u="none">
                   <a:solidFill>
-                    <a:srgbClr val="1E293B"/>
+                    <a:srgbClr val="2A1618"/>
                   </a:solidFill>
                   <a:latin typeface="Arial"/>
                 </a:defRPr>
@@ -435,7 +437,7 @@
             <a:pPr>
               <a:defRPr sz="1300" b="0" i="0" u="none" strike="noStrike">
                 <a:solidFill>
-                  <a:srgbClr val="1E293B"/>
+                  <a:srgbClr val="2A1618"/>
                 </a:solidFill>
                 <a:latin typeface="Arial"/>
               </a:defRPr>
@@ -462,7 +464,7 @@
           <c:spPr>
             <a:ln w="6350" cap="flat">
               <a:solidFill>
-                <a:srgbClr val="EAF0F4"/>
+                <a:srgbClr val="F0E4E0"/>
               </a:solidFill>
               <a:prstDash val="solid"/>
               <a:round/>
@@ -478,7 +480,7 @@
                 <a:pPr>
                   <a:defRPr sz="1200" b="0" i="0" u="none" strike="noStrike">
                     <a:solidFill>
-                      <a:srgbClr val="5B6B7B"/>
+                      <a:srgbClr val="836A68"/>
                     </a:solidFill>
                     <a:latin typeface="Arial"/>
                   </a:defRPr>
@@ -486,7 +488,7 @@
                 <a:r>
                   <a:rPr sz="1200" b="0" i="0" u="none" strike="noStrike">
                     <a:solidFill>
-                      <a:srgbClr val="5B6B7B"/>
+                      <a:srgbClr val="836A68"/>
                     </a:solidFill>
                     <a:latin typeface="Arial"/>
                   </a:rPr>
@@ -518,7 +520,7 @@
             <a:pPr>
               <a:defRPr sz="1200" b="0" i="0" u="none" strike="noStrike">
                 <a:solidFill>
-                  <a:srgbClr val="5B6B7B"/>
+                  <a:srgbClr val="836A68"/>
                 </a:solidFill>
                 <a:latin typeface="Arial"/>
               </a:defRPr>
@@ -548,7 +550,7 @@
           <a:pPr>
             <a:defRPr sz="1100">
               <a:solidFill>
-                <a:srgbClr val="1E293B"/>
+                <a:srgbClr val="2A1618"/>
               </a:solidFill>
             </a:defRPr>
           </a:pPr>
@@ -593,14 +595,14 @@
               <c:strCache>
                 <c:ptCount val="1"/>
                 <c:pt idx="0">
-                  <c:v>pooled (all sessions)</c:v>
+                  <c:v>pooled (train on all other sessions + positions)</c:v>
                 </c:pt>
               </c:strCache>
             </c:strRef>
           </c:tx>
           <c:spPr>
             <a:solidFill>
-              <a:srgbClr val="1C9AA8"/>
+              <a:srgbClr val="BE0000"/>
             </a:solidFill>
             <a:effectLst/>
           </c:spPr>
@@ -614,7 +616,7 @@
                 <a:pPr>
                   <a:defRPr b="0" i="0" strike="noStrike" sz="1100" u="none">
                     <a:solidFill>
-                      <a:srgbClr val="1E293B"/>
+                      <a:srgbClr val="2A1618"/>
                     </a:solidFill>
                     <a:latin typeface="Arial"/>
                   </a:defRPr>
@@ -676,14 +678,14 @@
               <c:strCache>
                 <c:ptCount val="1"/>
                 <c:pt idx="0">
-                  <c:v>in-session (drift removed)</c:v>
+                  <c:v>in-session (train + test within one session)</c:v>
                 </c:pt>
               </c:strCache>
             </c:strRef>
           </c:tx>
           <c:spPr>
             <a:solidFill>
-              <a:srgbClr val="9AC7CE"/>
+              <a:srgbClr val="E0A99E"/>
             </a:solidFill>
             <a:effectLst/>
           </c:spPr>
@@ -697,7 +699,7 @@
                 <a:pPr>
                   <a:defRPr b="0" i="0" strike="noStrike" sz="1100" u="none">
                     <a:solidFill>
-                      <a:srgbClr val="1E293B"/>
+                      <a:srgbClr val="2A1618"/>
                     </a:solidFill>
                     <a:latin typeface="Arial"/>
                   </a:defRPr>
@@ -759,7 +761,7 @@
               <a:pPr>
                 <a:defRPr b="0" i="0" strike="noStrike" sz="1100" u="none">
                   <a:solidFill>
-                    <a:srgbClr val="1E293B"/>
+                    <a:srgbClr val="2A1618"/>
                   </a:solidFill>
                   <a:latin typeface="Arial"/>
                 </a:defRPr>
@@ -807,7 +809,7 @@
             <a:pPr>
               <a:defRPr sz="1300" b="0" i="0" u="none" strike="noStrike">
                 <a:solidFill>
-                  <a:srgbClr val="1E293B"/>
+                  <a:srgbClr val="2A1618"/>
                 </a:solidFill>
                 <a:latin typeface="Arial"/>
               </a:defRPr>
@@ -834,7 +836,7 @@
           <c:spPr>
             <a:ln w="6350" cap="flat">
               <a:solidFill>
-                <a:srgbClr val="EAF0F4"/>
+                <a:srgbClr val="F0E4E0"/>
               </a:solidFill>
               <a:prstDash val="solid"/>
               <a:round/>
@@ -850,7 +852,7 @@
                 <a:pPr>
                   <a:defRPr sz="1200" b="0" i="0" u="none" strike="noStrike">
                     <a:solidFill>
-                      <a:srgbClr val="5B6B7B"/>
+                      <a:srgbClr val="836A68"/>
                     </a:solidFill>
                     <a:latin typeface="Arial"/>
                   </a:defRPr>
@@ -858,7 +860,7 @@
                 <a:r>
                   <a:rPr sz="1200" b="0" i="0" u="none" strike="noStrike">
                     <a:solidFill>
-                      <a:srgbClr val="5B6B7B"/>
+                      <a:srgbClr val="836A68"/>
                     </a:solidFill>
                     <a:latin typeface="Arial"/>
                   </a:rPr>
@@ -890,7 +892,7 @@
             <a:pPr>
               <a:defRPr sz="1200" b="0" i="0" u="none" strike="noStrike">
                 <a:solidFill>
-                  <a:srgbClr val="5B6B7B"/>
+                  <a:srgbClr val="836A68"/>
                 </a:solidFill>
                 <a:latin typeface="Arial"/>
               </a:defRPr>
@@ -920,7 +922,7 @@
           <a:pPr>
             <a:defRPr sz="1100">
               <a:solidFill>
-                <a:srgbClr val="1E293B"/>
+                <a:srgbClr val="2A1618"/>
               </a:solidFill>
             </a:defRPr>
           </a:pPr>
@@ -965,6 +967,277 @@
               <c:strCache>
                 <c:ptCount val="1"/>
                 <c:pt idx="0">
+                  <c:v>single-position median error</c:v>
+                </c:pt>
+              </c:strCache>
+            </c:strRef>
+          </c:tx>
+          <c:spPr>
+            <a:solidFill>
+              <a:srgbClr val="BE0000"/>
+            </a:solidFill>
+            <a:effectLst/>
+          </c:spPr>
+          <c:invertIfNegative val="0"/>
+          <c:dLbls>
+            <c:numFmt formatCode="0.00" sourceLinked="0"/>
+            <c:txPr>
+              <a:bodyPr/>
+              <a:lstStyle/>
+              <a:p>
+                <a:pPr>
+                  <a:defRPr b="0" i="0" strike="noStrike" sz="1200" u="none">
+                    <a:solidFill>
+                      <a:srgbClr val="2A1618"/>
+                    </a:solidFill>
+                    <a:latin typeface="Arial"/>
+                  </a:defRPr>
+                </a:pPr>
+              </a:p>
+            </c:txPr>
+            <c:showLegendKey val="0"/>
+            <c:showVal val="1"/>
+            <c:showCatName val="0"/>
+            <c:showSerName val="0"/>
+            <c:showPercent val="0"/>
+            <c:showBubbleSize val="0"/>
+            <c:showLeaderLines val="0"/>
+          </c:dLbls>
+          <c:cat>
+            <c:multiLvlStrRef>
+              <c:f>Sheet1!$A$2:$A$4</c:f>
+              <c:multiLvlStrCache>
+                <c:ptCount val="3"/>
+                <c:lvl>
+                  <c:pt idx="0">
+                    <c:v>Empty</c:v>
+                  </c:pt>
+                  <c:pt idx="1">
+                    <c:v>F4 insert</c:v>
+                  </c:pt>
+                  <c:pt idx="2">
+                    <c:v>F5 insert</c:v>
+                  </c:pt>
+                </c:lvl>
+              </c:multiLvlStrCache>
+            </c:multiLvlStrRef>
+          </c:cat>
+          <c:val>
+            <c:numRef>
+              <c:f>Sheet1!$B$2:$B$4</c:f>
+              <c:numCache>
+                <c:formatCode>General</c:formatCode>
+                <c:ptCount val="3"/>
+                <c:pt idx="0">
+                  <c:v>0.392</c:v>
+                </c:pt>
+                <c:pt idx="1">
+                  <c:v/>
+                </c:pt>
+                <c:pt idx="2">
+                  <c:v>0.546</c:v>
+                </c:pt>
+              </c:numCache>
+            </c:numRef>
+          </c:val>
+        </c:ser>
+        <c:dLbls>
+          <c:numFmt formatCode="0.00" sourceLinked="0"/>
+          <c:txPr>
+            <a:bodyPr/>
+            <a:lstStyle/>
+            <a:p>
+              <a:pPr>
+                <a:defRPr b="0" i="0" strike="noStrike" sz="1200" u="none">
+                  <a:solidFill>
+                    <a:srgbClr val="2A1618"/>
+                  </a:solidFill>
+                  <a:latin typeface="Arial"/>
+                </a:defRPr>
+              </a:pPr>
+            </a:p>
+          </c:txPr>
+          <c:showLegendKey val="0"/>
+          <c:showVal val="1"/>
+          <c:showCatName val="0"/>
+          <c:showSerName val="0"/>
+          <c:showPercent val="0"/>
+          <c:showBubbleSize val="0"/>
+          <c:showLeaderLines val="0"/>
+        </c:dLbls>
+        <c:gapWidth val="150"/>
+        <c:overlap val="0"/>
+        <c:axId val="2094734554"/>
+        <c:axId val="2094734552"/>
+        <c:axId val="2094734556"/>
+      </c:barChart>
+      <c:catAx>
+        <c:axId val="2094734554"/>
+        <c:scaling>
+          <c:orientation val="minMax"/>
+        </c:scaling>
+        <c:delete val="0"/>
+        <c:axPos val="b"/>
+        <c:numFmt formatCode="General" sourceLinked="1"/>
+        <c:majorTickMark val="out"/>
+        <c:minorTickMark val="none"/>
+        <c:tickLblPos val="low"/>
+        <c:spPr>
+          <a:ln w="12700" cap="flat">
+            <a:solidFill>
+              <a:srgbClr val="888888"/>
+            </a:solidFill>
+            <a:prstDash val="solid"/>
+            <a:round/>
+          </a:ln>
+        </c:spPr>
+        <c:txPr>
+          <a:bodyPr/>
+          <a:lstStyle/>
+          <a:p>
+            <a:pPr>
+              <a:defRPr sz="1300" b="0" i="0" u="none" strike="noStrike">
+                <a:solidFill>
+                  <a:srgbClr val="2A1618"/>
+                </a:solidFill>
+                <a:latin typeface="Arial"/>
+              </a:defRPr>
+            </a:pPr>
+            <a:endParaRPr lang="en-US"/>
+          </a:p>
+        </c:txPr>
+        <c:crossAx val="2094734552"/>
+        <c:crosses val="autoZero"/>
+        <c:auto val="1"/>
+        <c:lblAlgn val="ctr"/>
+        <c:noMultiLvlLbl val="1"/>
+      </c:catAx>
+      <c:valAx>
+        <c:axId val="2094734552"/>
+        <c:scaling>
+          <c:orientation val="minMax"/>
+          <c:max val="0.7"/>
+          <c:min val="0"/>
+        </c:scaling>
+        <c:delete val="0"/>
+        <c:axPos val="l"/>
+        <c:majorGridlines>
+          <c:spPr>
+            <a:ln w="6350" cap="flat">
+              <a:solidFill>
+                <a:srgbClr val="F0E4E0"/>
+              </a:solidFill>
+              <a:prstDash val="solid"/>
+              <a:round/>
+            </a:ln>
+          </c:spPr>
+        </c:majorGridlines>
+        <c:title>
+          <c:tx>
+            <c:rich>
+              <a:bodyPr/>
+              <a:lstStyle/>
+              <a:p>
+                <a:pPr>
+                  <a:defRPr sz="1200" b="0" i="0" u="none" strike="noStrike">
+                    <a:solidFill>
+                      <a:srgbClr val="836A68"/>
+                    </a:solidFill>
+                    <a:latin typeface="Arial"/>
+                  </a:defRPr>
+                </a:pPr>
+                <a:r>
+                  <a:rPr sz="1200" b="0" i="0" u="none" strike="noStrike">
+                    <a:solidFill>
+                      <a:srgbClr val="836A68"/>
+                    </a:solidFill>
+                    <a:latin typeface="Arial"/>
+                  </a:rPr>
+                  <a:t>median error (inches)</a:t>
+                </a:r>
+              </a:p>
+            </c:rich>
+          </c:tx>
+          <c:layout/>
+          <c:overlay val="0"/>
+        </c:title>
+        <c:numFmt formatCode="General" sourceLinked="0"/>
+        <c:majorTickMark val="out"/>
+        <c:minorTickMark val="none"/>
+        <c:tickLblPos val="nextTo"/>
+        <c:spPr>
+          <a:ln w="12700" cap="flat">
+            <a:solidFill>
+              <a:srgbClr val="888888"/>
+            </a:solidFill>
+            <a:prstDash val="solid"/>
+            <a:round/>
+          </a:ln>
+        </c:spPr>
+        <c:txPr>
+          <a:bodyPr/>
+          <a:lstStyle/>
+          <a:p>
+            <a:pPr>
+              <a:defRPr sz="1200" b="0" i="0" u="none" strike="noStrike">
+                <a:solidFill>
+                  <a:srgbClr val="836A68"/>
+                </a:solidFill>
+                <a:latin typeface="Arial"/>
+              </a:defRPr>
+            </a:pPr>
+            <a:endParaRPr lang="en-US"/>
+          </a:p>
+        </c:txPr>
+        <c:crossAx val="2094734554"/>
+        <c:crosses val="autoZero"/>
+        <c:crossBetween val="between"/>
+      </c:valAx>
+      <c:spPr>
+        <a:noFill/>
+        <a:ln>
+          <a:noFill/>
+        </a:ln>
+        <a:effectLst/>
+      </c:spPr>
+    </c:plotArea>
+    <c:plotVisOnly val="1"/>
+    <c:dispBlanksAs val="span"/>
+  </c:chart>
+  <c:spPr>
+    <a:noFill/>
+    <a:ln>
+      <a:noFill/>
+    </a:ln>
+    <a:effectLst/>
+  </c:spPr>
+  <c:externalData r:id="rId1">
+    <c:autoUpdate val="0"/>
+  </c:externalData>
+</c:chartSpace>
+</file>
+
+<file path=ppt/charts/chart4.xml><?xml version="1.0" encoding="utf-8"?>
+<c:chartSpace xmlns:c="http://schemas.openxmlformats.org/drawingml/2006/chart" xmlns:a="http://schemas.openxmlformats.org/drawingml/2006/main" xmlns:r="http://schemas.openxmlformats.org/officeDocument/2006/relationships">
+  <c:date1904 val="0"/>
+  <c:roundedCorners val="1"/>
+  <c:chart>
+    <c:autoTitleDeleted val="1"/>
+    <c:plotArea>
+      <c:layout/>
+      <c:barChart>
+        <c:barDir val="col"/>
+        <c:grouping val="clustered"/>
+        <c:varyColors val="0"/>
+        <c:ser>
+          <c:idx val="0"/>
+          <c:order val="0"/>
+          <c:tx>
+            <c:strRef>
+              <c:f>Sheet1!$B$1</c:f>
+              <c:strCache>
+                <c:ptCount val="1"/>
+                <c:pt idx="0">
                   <c:v>LOSO (new session)</c:v>
                 </c:pt>
               </c:strCache>
@@ -972,7 +1245,7 @@
           </c:tx>
           <c:spPr>
             <a:solidFill>
-              <a:srgbClr val="0B5D7A"/>
+              <a:srgbClr val="C8890B"/>
             </a:solidFill>
             <a:effectLst/>
           </c:spPr>
@@ -986,7 +1259,7 @@
                 <a:pPr>
                   <a:defRPr b="0" i="0" strike="noStrike" sz="1000" u="none">
                     <a:solidFill>
-                      <a:srgbClr val="1E293B"/>
+                      <a:srgbClr val="2A1618"/>
                     </a:solidFill>
                     <a:latin typeface="Arial"/>
                   </a:defRPr>
@@ -1048,14 +1321,14 @@
               <c:strCache>
                 <c:ptCount val="1"/>
                 <c:pt idx="0">
-                  <c:v>LOPO-subpos (1 point)</c:v>
+                  <c:v>single-position (1 point)</c:v>
                 </c:pt>
               </c:strCache>
             </c:strRef>
           </c:tx>
           <c:spPr>
             <a:solidFill>
-              <a:srgbClr val="2CC4A3"/>
+              <a:srgbClr val="C0564A"/>
             </a:solidFill>
             <a:effectLst/>
           </c:spPr>
@@ -1069,7 +1342,7 @@
                 <a:pPr>
                   <a:defRPr b="0" i="0" strike="noStrike" sz="1000" u="none">
                     <a:solidFill>
-                      <a:srgbClr val="1E293B"/>
+                      <a:srgbClr val="2A1618"/>
                     </a:solidFill>
                     <a:latin typeface="Arial"/>
                   </a:defRPr>
@@ -1138,7 +1411,7 @@
           </c:tx>
           <c:spPr>
             <a:solidFill>
-              <a:srgbClr val="1C9AA8"/>
+              <a:srgbClr val="8E1010"/>
             </a:solidFill>
             <a:effectLst/>
           </c:spPr>
@@ -1152,7 +1425,7 @@
                 <a:pPr>
                   <a:defRPr b="0" i="0" strike="noStrike" sz="1000" u="none">
                     <a:solidFill>
-                      <a:srgbClr val="1E293B"/>
+                      <a:srgbClr val="2A1618"/>
                     </a:solidFill>
                     <a:latin typeface="Arial"/>
                   </a:defRPr>
@@ -1214,7 +1487,7 @@
               <a:pPr>
                 <a:defRPr b="0" i="0" strike="noStrike" sz="1000" u="none">
                   <a:solidFill>
-                    <a:srgbClr val="1E293B"/>
+                    <a:srgbClr val="2A1618"/>
                   </a:solidFill>
                   <a:latin typeface="Arial"/>
                 </a:defRPr>
@@ -1262,7 +1535,7 @@
             <a:pPr>
               <a:defRPr sz="1300" b="0" i="0" u="none" strike="noStrike">
                 <a:solidFill>
-                  <a:srgbClr val="1E293B"/>
+                  <a:srgbClr val="2A1618"/>
                 </a:solidFill>
                 <a:latin typeface="Arial"/>
               </a:defRPr>
@@ -1289,7 +1562,7 @@
           <c:spPr>
             <a:ln w="6350" cap="flat">
               <a:solidFill>
-                <a:srgbClr val="EAF0F4"/>
+                <a:srgbClr val="F0E4E0"/>
               </a:solidFill>
               <a:prstDash val="solid"/>
               <a:round/>
@@ -1305,7 +1578,7 @@
                 <a:pPr>
                   <a:defRPr sz="1200" b="0" i="0" u="none" strike="noStrike">
                     <a:solidFill>
-                      <a:srgbClr val="5B6B7B"/>
+                      <a:srgbClr val="836A68"/>
                     </a:solidFill>
                     <a:latin typeface="Arial"/>
                   </a:defRPr>
@@ -1313,7 +1586,7 @@
                 <a:r>
                   <a:rPr sz="1200" b="0" i="0" u="none" strike="noStrike">
                     <a:solidFill>
-                      <a:srgbClr val="5B6B7B"/>
+                      <a:srgbClr val="836A68"/>
                     </a:solidFill>
                     <a:latin typeface="Arial"/>
                   </a:rPr>
@@ -1345,7 +1618,7 @@
             <a:pPr>
               <a:defRPr sz="1200" b="0" i="0" u="none" strike="noStrike">
                 <a:solidFill>
-                  <a:srgbClr val="5B6B7B"/>
+                  <a:srgbClr val="836A68"/>
                 </a:solidFill>
                 <a:latin typeface="Arial"/>
               </a:defRPr>
@@ -1375,7 +1648,7 @@
           <a:pPr>
             <a:defRPr sz="1100">
               <a:solidFill>
-                <a:srgbClr val="1E293B"/>
+                <a:srgbClr val="2A1618"/>
               </a:solidFill>
             </a:defRPr>
           </a:pPr>
@@ -1399,7 +1672,7 @@
 </c:chartSpace>
 </file>
 
-<file path=ppt/charts/chart4.xml><?xml version="1.0" encoding="utf-8"?>
+<file path=ppt/charts/chart5.xml><?xml version="1.0" encoding="utf-8"?>
 <c:chartSpace xmlns:c="http://schemas.openxmlformats.org/drawingml/2006/chart" xmlns:a="http://schemas.openxmlformats.org/drawingml/2006/main" xmlns:r="http://schemas.openxmlformats.org/officeDocument/2006/relationships">
   <c:date1904 val="0"/>
   <c:roundedCorners val="1"/>
@@ -1427,7 +1700,7 @@
           </c:tx>
           <c:spPr>
             <a:solidFill>
-              <a:srgbClr val="2CC4A3"/>
+              <a:srgbClr val="C9B3AE"/>
             </a:solidFill>
             <a:effectLst/>
           </c:spPr>
@@ -1441,7 +1714,7 @@
                 <a:pPr>
                   <a:defRPr b="0" i="0" strike="noStrike" sz="1100" u="none">
                     <a:solidFill>
-                      <a:srgbClr val="1E293B"/>
+                      <a:srgbClr val="2A1618"/>
                     </a:solidFill>
                     <a:latin typeface="Arial"/>
                   </a:defRPr>
@@ -1462,7 +1735,7 @@
             <c:bubble3D val="0"/>
             <c:spPr>
               <a:solidFill>
-                <a:srgbClr val="2CC4A3"/>
+                <a:srgbClr val="C9B3AE"/>
               </a:solidFill>
               <a:effectLst/>
             </c:spPr>
@@ -1473,7 +1746,7 @@
             <c:bubble3D val="0"/>
             <c:spPr>
               <a:solidFill>
-                <a:srgbClr val="2CC4A3"/>
+                <a:srgbClr val="BE0000"/>
               </a:solidFill>
               <a:effectLst/>
             </c:spPr>
@@ -1484,7 +1757,7 @@
             <c:bubble3D val="0"/>
             <c:spPr>
               <a:solidFill>
-                <a:srgbClr val="D64545"/>
+                <a:srgbClr val="C9B3AE"/>
               </a:solidFill>
               <a:effectLst/>
             </c:spPr>
@@ -1495,7 +1768,7 @@
             <c:bubble3D val="0"/>
             <c:spPr>
               <a:solidFill>
-                <a:srgbClr val="D64545"/>
+                <a:srgbClr val="C9B3AE"/>
               </a:solidFill>
               <a:effectLst/>
             </c:spPr>
@@ -1506,7 +1779,7 @@
             <c:bubble3D val="0"/>
             <c:spPr>
               <a:solidFill>
-                <a:srgbClr val="D64545"/>
+                <a:srgbClr val="C9B3AE"/>
               </a:solidFill>
               <a:effectLst/>
             </c:spPr>
@@ -1517,7 +1790,7 @@
             <c:bubble3D val="0"/>
             <c:spPr>
               <a:solidFill>
-                <a:srgbClr val="D64545"/>
+                <a:srgbClr val="C9B3AE"/>
               </a:solidFill>
               <a:effectLst/>
             </c:spPr>
@@ -1587,7 +1860,7 @@
               <a:pPr>
                 <a:defRPr b="0" i="0" strike="noStrike" sz="1100" u="none">
                   <a:solidFill>
-                    <a:srgbClr val="1E293B"/>
+                    <a:srgbClr val="2A1618"/>
                   </a:solidFill>
                   <a:latin typeface="Arial"/>
                 </a:defRPr>
@@ -1633,9 +1906,9 @@
           <a:lstStyle/>
           <a:p>
             <a:pPr>
-              <a:defRPr sz="1200" b="0" i="0" u="none" strike="noStrike">
-                <a:solidFill>
-                  <a:srgbClr val="1E293B"/>
+              <a:defRPr sz="1300" b="0" i="0" u="none" strike="noStrike">
+                <a:solidFill>
+                  <a:srgbClr val="2A1618"/>
                 </a:solidFill>
                 <a:latin typeface="Arial"/>
               </a:defRPr>
@@ -1662,7 +1935,7 @@
           <c:spPr>
             <a:ln w="6350" cap="flat">
               <a:solidFill>
-                <a:srgbClr val="EAF0F4"/>
+                <a:srgbClr val="F0E4E0"/>
               </a:solidFill>
               <a:prstDash val="solid"/>
               <a:round/>
@@ -1678,7 +1951,7 @@
                 <a:pPr>
                   <a:defRPr sz="1200" b="0" i="0" u="none" strike="noStrike">
                     <a:solidFill>
-                      <a:srgbClr val="5B6B7B"/>
+                      <a:srgbClr val="836A68"/>
                     </a:solidFill>
                     <a:latin typeface="Arial"/>
                   </a:defRPr>
@@ -1686,7 +1959,7 @@
                 <a:r>
                   <a:rPr sz="1200" b="0" i="0" u="none" strike="noStrike">
                     <a:solidFill>
-                      <a:srgbClr val="5B6B7B"/>
+                      <a:srgbClr val="836A68"/>
                     </a:solidFill>
                     <a:latin typeface="Arial"/>
                   </a:rPr>
@@ -1718,7 +1991,7 @@
             <a:pPr>
               <a:defRPr sz="1200" b="0" i="0" u="none" strike="noStrike">
                 <a:solidFill>
-                  <a:srgbClr val="5B6B7B"/>
+                  <a:srgbClr val="836A68"/>
                 </a:solidFill>
                 <a:latin typeface="Arial"/>
               </a:defRPr>
@@ -2349,6 +2622,182 @@
             <a:fld id="{F7021451-1387-4CA6-816F-3879F97B5CBC}" type="slidenum">
               <a:rPr lang="en-US"/>
               <a:t>11</a:t>
+            </a:fld>
+            <a:endParaRPr lang="en-US"/>
+          </a:p>
+        </p:txBody>
+      </p:sp>
+    </p:spTree>
+    <p:extLst>
+      <p:ext uri="{BB962C8B-B14F-4D97-AF65-F5344CB8AC3E}">
+        <p14:creationId xmlns:p14="http://schemas.microsoft.com/office/powerpoint/2010/main" val="1024086991"/>
+      </p:ext>
+    </p:extLst>
+  </p:cSld>
+  <p:clrMapOvr>
+    <a:masterClrMapping/>
+  </p:clrMapOvr>
+</p:notes>
+</file>
+
+<file path=ppt/notesSlides/notesSlide12.xml><?xml version="1.0" encoding="utf-8"?>
+<p:notes xmlns:a="http://schemas.openxmlformats.org/drawingml/2006/main" xmlns:r="http://schemas.openxmlformats.org/officeDocument/2006/relationships" xmlns:p="http://schemas.openxmlformats.org/presentationml/2006/main">
+  <p:cSld>
+    <p:spTree>
+      <p:nvGrpSpPr>
+        <p:cNvPr id="1" name=""/>
+        <p:cNvGrpSpPr/>
+        <p:nvPr/>
+      </p:nvGrpSpPr>
+      <p:grpSpPr>
+        <a:xfrm>
+          <a:off x="0" y="0"/>
+          <a:ext cx="0" cy="0"/>
+          <a:chOff x="0" y="0"/>
+          <a:chExt cx="0" cy="0"/>
+        </a:xfrm>
+      </p:grpSpPr>
+      <p:sp>
+        <p:nvSpPr>
+          <p:cNvPr id="2" name="Slide Image Placeholder 1"/>
+          <p:cNvSpPr>
+            <a:spLocks noGrp="1" noRot="1" noChangeAspect="1"/>
+          </p:cNvSpPr>
+          <p:nvPr>
+            <p:ph type="sldImg"/>
+          </p:nvPr>
+        </p:nvSpPr>
+        <p:spPr/>
+      </p:sp>
+      <p:sp>
+        <p:nvSpPr>
+          <p:cNvPr id="3" name="Notes Placeholder 2"/>
+          <p:cNvSpPr>
+            <a:spLocks noGrp="1"/>
+          </p:cNvSpPr>
+          <p:nvPr>
+            <p:ph type="body" idx="1"/>
+          </p:nvPr>
+        </p:nvSpPr>
+        <p:spPr/>
+        <p:txBody>
+          <a:bodyPr/>
+          <a:lstStyle/>
+          <a:p>
+            <a:r>
+              <a:rPr lang="en-US" dirty="0"/>
+              <a:t/>
+            </a:r>
+            <a:endParaRPr lang="en-US" dirty="0"/>
+          </a:p>
+        </p:txBody>
+      </p:sp>
+      <p:sp>
+        <p:nvSpPr>
+          <p:cNvPr id="4" name="Slide Number Placeholder 3"/>
+          <p:cNvSpPr>
+            <a:spLocks noGrp="1"/>
+          </p:cNvSpPr>
+          <p:nvPr>
+            <p:ph type="sldNum" sz="quarter" idx="10"/>
+          </p:nvPr>
+        </p:nvSpPr>
+        <p:spPr/>
+        <p:txBody>
+          <a:bodyPr/>
+          <a:lstStyle/>
+          <a:p>
+            <a:fld id="{F7021451-1387-4CA6-816F-3879F97B5CBC}" type="slidenum">
+              <a:rPr lang="en-US"/>
+              <a:t>12</a:t>
+            </a:fld>
+            <a:endParaRPr lang="en-US"/>
+          </a:p>
+        </p:txBody>
+      </p:sp>
+    </p:spTree>
+    <p:extLst>
+      <p:ext uri="{BB962C8B-B14F-4D97-AF65-F5344CB8AC3E}">
+        <p14:creationId xmlns:p14="http://schemas.microsoft.com/office/powerpoint/2010/main" val="1024086991"/>
+      </p:ext>
+    </p:extLst>
+  </p:cSld>
+  <p:clrMapOvr>
+    <a:masterClrMapping/>
+  </p:clrMapOvr>
+</p:notes>
+</file>
+
+<file path=ppt/notesSlides/notesSlide13.xml><?xml version="1.0" encoding="utf-8"?>
+<p:notes xmlns:a="http://schemas.openxmlformats.org/drawingml/2006/main" xmlns:r="http://schemas.openxmlformats.org/officeDocument/2006/relationships" xmlns:p="http://schemas.openxmlformats.org/presentationml/2006/main">
+  <p:cSld>
+    <p:spTree>
+      <p:nvGrpSpPr>
+        <p:cNvPr id="1" name=""/>
+        <p:cNvGrpSpPr/>
+        <p:nvPr/>
+      </p:nvGrpSpPr>
+      <p:grpSpPr>
+        <a:xfrm>
+          <a:off x="0" y="0"/>
+          <a:ext cx="0" cy="0"/>
+          <a:chOff x="0" y="0"/>
+          <a:chExt cx="0" cy="0"/>
+        </a:xfrm>
+      </p:grpSpPr>
+      <p:sp>
+        <p:nvSpPr>
+          <p:cNvPr id="2" name="Slide Image Placeholder 1"/>
+          <p:cNvSpPr>
+            <a:spLocks noGrp="1" noRot="1" noChangeAspect="1"/>
+          </p:cNvSpPr>
+          <p:nvPr>
+            <p:ph type="sldImg"/>
+          </p:nvPr>
+        </p:nvSpPr>
+        <p:spPr/>
+      </p:sp>
+      <p:sp>
+        <p:nvSpPr>
+          <p:cNvPr id="3" name="Notes Placeholder 2"/>
+          <p:cNvSpPr>
+            <a:spLocks noGrp="1"/>
+          </p:cNvSpPr>
+          <p:nvPr>
+            <p:ph type="body" idx="1"/>
+          </p:nvPr>
+        </p:nvSpPr>
+        <p:spPr/>
+        <p:txBody>
+          <a:bodyPr/>
+          <a:lstStyle/>
+          <a:p>
+            <a:r>
+              <a:rPr lang="en-US" dirty="0"/>
+              <a:t/>
+            </a:r>
+            <a:endParaRPr lang="en-US" dirty="0"/>
+          </a:p>
+        </p:txBody>
+      </p:sp>
+      <p:sp>
+        <p:nvSpPr>
+          <p:cNvPr id="4" name="Slide Number Placeholder 3"/>
+          <p:cNvSpPr>
+            <a:spLocks noGrp="1"/>
+          </p:cNvSpPr>
+          <p:nvPr>
+            <p:ph type="sldNum" sz="quarter" idx="10"/>
+          </p:nvPr>
+        </p:nvSpPr>
+        <p:spPr/>
+        <p:txBody>
+          <a:bodyPr/>
+          <a:lstStyle/>
+          <a:p>
+            <a:fld id="{F7021451-1387-4CA6-816F-3879F97B5CBC}" type="slidenum">
+              <a:rPr lang="en-US"/>
+              <a:t>13</a:t>
             </a:fld>
             <a:endParaRPr lang="en-US"/>
           </a:p>
@@ -3384,7 +3833,7 @@
     <p:bg>
       <p:bgPr>
         <a:solidFill>
-          <a:srgbClr val="0E2233"/>
+          <a:srgbClr val="2E1214"/>
         </a:solidFill>
       </p:bgPr>
     </p:bg>
@@ -3404,7 +3853,27 @@
       </p:grpSpPr>
       <p:sp>
         <p:nvSpPr>
-          <p:cNvPr id="2" name="Text 0"/>
+          <p:cNvPr id="2" name="Shape 0"/>
+          <p:cNvSpPr/>
+          <p:nvPr/>
+        </p:nvSpPr>
+        <p:spPr>
+          <a:xfrm>
+            <a:off x="0" y="0"/>
+            <a:ext cx="12188952" cy="201168"/>
+          </a:xfrm>
+          <a:prstGeom prst="rect">
+            <a:avLst/>
+          </a:prstGeom>
+          <a:solidFill>
+            <a:srgbClr val="BE0000"/>
+          </a:solidFill>
+          <a:ln/>
+        </p:spPr>
+      </p:sp>
+      <p:sp>
+        <p:nvSpPr>
+          <p:cNvPr id="3" name="Text 1"/>
           <p:cNvSpPr/>
           <p:nvPr/>
         </p:nvSpPr>
@@ -3429,13 +3898,13 @@
             <a:r>
               <a:rPr lang="en-US" sz="1500" b="1" spc="300" kern="0" dirty="0">
                 <a:solidFill>
-                  <a:srgbClr val="2CC4A3"/>
+                  <a:srgbClr val="C8890B"/>
                 </a:solidFill>
                 <a:latin typeface="Calibri" pitchFamily="34" charset="0"/>
                 <a:ea typeface="Calibri" pitchFamily="34" charset="-122"/>
                 <a:cs typeface="Calibri" pitchFamily="34" charset="-120"/>
               </a:rPr>
-              <a:t>PART 1 · PHYSICAL MEASUREMENTS</a:t>
+              <a:t>PART 1 . PHYSICAL MEASUREMENTS</a:t>
             </a:r>
             <a:endParaRPr lang="en-US" sz="1500" dirty="0"/>
           </a:p>
@@ -3443,7 +3912,7 @@
       </p:sp>
       <p:sp>
         <p:nvSpPr>
-          <p:cNvPr id="3" name="Text 1"/>
+          <p:cNvPr id="4" name="Text 2"/>
           <p:cNvSpPr/>
           <p:nvPr/>
         </p:nvSpPr>
@@ -3482,13 +3951,13 @@
       </p:sp>
       <p:sp>
         <p:nvSpPr>
-          <p:cNvPr id="4" name="Text 2"/>
-          <p:cNvSpPr/>
-          <p:nvPr/>
-        </p:nvSpPr>
-        <p:spPr>
-          <a:xfrm>
-            <a:off x="822960" y="3474720"/>
+          <p:cNvPr id="5" name="Text 3"/>
+          <p:cNvSpPr/>
+          <p:nvPr/>
+        </p:nvSpPr>
+        <p:spPr>
+          <a:xfrm>
+            <a:off x="822960" y="3520440"/>
             <a:ext cx="10424160" cy="640080"/>
           </a:xfrm>
           <a:prstGeom prst="rect">
@@ -3507,13 +3976,13 @@
             <a:r>
               <a:rPr lang="en-US" sz="1550" dirty="0">
                 <a:solidFill>
-                  <a:srgbClr val="AECBD6"/>
+                  <a:srgbClr val="EAD3CB"/>
                 </a:solidFill>
                 <a:latin typeface="Calibri" pitchFamily="34" charset="0"/>
                 <a:ea typeface="Calibri" pitchFamily="34" charset="-122"/>
                 <a:cs typeface="Calibri" pitchFamily="34" charset="-120"/>
               </a:rPr>
-              <a:t>Bench VNA S-parameters → continuous coordinate regression — CNN vs MLP, under LOSO, LOPO-cell and single-position hold-out</a:t>
+              <a:t>Bench VNA S-parameters to continuous coordinate regression: CNN vs MLP, under LOSO, LOPO-cell and single-position hold-out</a:t>
             </a:r>
             <a:endParaRPr lang="en-US" sz="1550" dirty="0"/>
           </a:p>
@@ -3521,7 +3990,7 @@
       </p:sp>
       <p:sp>
         <p:nvSpPr>
-          <p:cNvPr id="5" name="Text 3"/>
+          <p:cNvPr id="6" name="Text 4"/>
           <p:cNvSpPr/>
           <p:nvPr/>
         </p:nvSpPr>
@@ -3546,7 +4015,7 @@
             <a:r>
               <a:rPr lang="en-US" sz="2800" b="1" dirty="0">
                 <a:solidFill>
-                  <a:srgbClr val="2CC4A3"/>
+                  <a:srgbClr val="C8890B"/>
                 </a:solidFill>
                 <a:latin typeface="Cambria" pitchFamily="34" charset="0"/>
                 <a:ea typeface="Cambria" pitchFamily="34" charset="-122"/>
@@ -3560,7 +4029,7 @@
       </p:sp>
       <p:sp>
         <p:nvSpPr>
-          <p:cNvPr id="6" name="Text 4"/>
+          <p:cNvPr id="7" name="Text 5"/>
           <p:cNvSpPr/>
           <p:nvPr/>
         </p:nvSpPr>
@@ -3585,7 +4054,7 @@
             <a:r>
               <a:rPr lang="en-US" sz="1250" dirty="0">
                 <a:solidFill>
-                  <a:srgbClr val="AECBD6"/>
+                  <a:srgbClr val="EAD3CB"/>
                 </a:solidFill>
                 <a:latin typeface="Calibri" pitchFamily="34" charset="0"/>
                 <a:ea typeface="Calibri" pitchFamily="34" charset="-122"/>
@@ -3599,7 +4068,7 @@
       </p:sp>
       <p:sp>
         <p:nvSpPr>
-          <p:cNvPr id="7" name="Text 5"/>
+          <p:cNvPr id="8" name="Text 6"/>
           <p:cNvSpPr/>
           <p:nvPr/>
         </p:nvSpPr>
@@ -3624,7 +4093,7 @@
             <a:r>
               <a:rPr lang="en-US" sz="2800" b="1" dirty="0">
                 <a:solidFill>
-                  <a:srgbClr val="2CC4A3"/>
+                  <a:srgbClr val="C8890B"/>
                 </a:solidFill>
                 <a:latin typeface="Cambria" pitchFamily="34" charset="0"/>
                 <a:ea typeface="Cambria" pitchFamily="34" charset="-122"/>
@@ -3638,7 +4107,7 @@
       </p:sp>
       <p:sp>
         <p:nvSpPr>
-          <p:cNvPr id="8" name="Text 6"/>
+          <p:cNvPr id="9" name="Text 7"/>
           <p:cNvSpPr/>
           <p:nvPr/>
         </p:nvSpPr>
@@ -3663,13 +4132,13 @@
             <a:r>
               <a:rPr lang="en-US" sz="1250" dirty="0">
                 <a:solidFill>
-                  <a:srgbClr val="AECBD6"/>
+                  <a:srgbClr val="EAD3CB"/>
                 </a:solidFill>
                 <a:latin typeface="Calibri" pitchFamily="34" charset="0"/>
                 <a:ea typeface="Calibri" pitchFamily="34" charset="-122"/>
                 <a:cs typeface="Calibri" pitchFamily="34" charset="-120"/>
               </a:rPr>
-              <a:t>= a sixth of a grid cell</a:t>
+              <a:t>about a sixth of a grid cell</a:t>
             </a:r>
             <a:endParaRPr lang="en-US" sz="1250" dirty="0"/>
           </a:p>
@@ -3677,7 +4146,7 @@
       </p:sp>
       <p:sp>
         <p:nvSpPr>
-          <p:cNvPr id="9" name="Text 7"/>
+          <p:cNvPr id="10" name="Text 8"/>
           <p:cNvSpPr/>
           <p:nvPr/>
         </p:nvSpPr>
@@ -3702,7 +4171,7 @@
             <a:r>
               <a:rPr lang="en-US" sz="2800" b="1" dirty="0">
                 <a:solidFill>
-                  <a:srgbClr val="2CC4A3"/>
+                  <a:srgbClr val="C8890B"/>
                 </a:solidFill>
                 <a:latin typeface="Cambria" pitchFamily="34" charset="0"/>
                 <a:ea typeface="Cambria" pitchFamily="34" charset="-122"/>
@@ -3716,7 +4185,7 @@
       </p:sp>
       <p:sp>
         <p:nvSpPr>
-          <p:cNvPr id="10" name="Text 8"/>
+          <p:cNvPr id="11" name="Text 9"/>
           <p:cNvSpPr/>
           <p:nvPr/>
         </p:nvSpPr>
@@ -3741,13 +4210,13 @@
             <a:r>
               <a:rPr lang="en-US" sz="1250" dirty="0">
                 <a:solidFill>
-                  <a:srgbClr val="AECBD6"/>
+                  <a:srgbClr val="EAD3CB"/>
                 </a:solidFill>
                 <a:latin typeface="Calibri" pitchFamily="34" charset="0"/>
                 <a:ea typeface="Calibri" pitchFamily="34" charset="-122"/>
                 <a:cs typeface="Calibri" pitchFamily="34" charset="-120"/>
               </a:rPr>
-              <a:t>empty · F4 · F5 inserts</a:t>
+              <a:t>empty, F4, F5 inserts</a:t>
             </a:r>
             <a:endParaRPr lang="en-US" sz="1250" dirty="0"/>
           </a:p>
@@ -3812,13 +4281,13 @@
             <a:r>
               <a:rPr lang="en-US" sz="2900" b="1" dirty="0">
                 <a:solidFill>
-                  <a:srgbClr val="1E293B"/>
+                  <a:srgbClr val="2A1618"/>
                 </a:solidFill>
                 <a:latin typeface="Cambria" pitchFamily="34" charset="0"/>
                 <a:ea typeface="Cambria" pitchFamily="34" charset="-122"/>
                 <a:cs typeface="Cambria" pitchFamily="34" charset="-120"/>
               </a:rPr>
-              <a:t>Can we teach it to interpolate?</a:t>
+              <a:t>Single-position accuracy (CNN, pooled)</a:t>
             </a:r>
             <a:endParaRPr lang="en-US" sz="2900" dirty="0"/>
           </a:p>
@@ -3851,13 +4320,13 @@
             <a:r>
               <a:rPr lang="en-US" sz="1400" b="1" dirty="0">
                 <a:solidFill>
-                  <a:srgbClr val="1C9AA8"/>
+                  <a:srgbClr val="BE0000"/>
                 </a:solidFill>
                 <a:latin typeface="Calibri" pitchFamily="34" charset="0"/>
                 <a:ea typeface="Calibri" pitchFamily="34" charset="-122"/>
                 <a:cs typeface="Calibri" pitchFamily="34" charset="-120"/>
               </a:rPr>
-              <a:t>Three fixes on the hardest case (F5 LOPO-cell, baseline 0.664 in) — only one helps</a:t>
+              <a:t>Leaving cell-mates in training makes this the middle rung of difficulty</a:t>
             </a:r>
             <a:endParaRPr lang="en-US" sz="1400" dirty="0"/>
           </a:p>
@@ -3870,8 +4339,8 @@
           <p:nvPr/>
         </p:nvGraphicFramePr>
         <p:xfrm>
-          <a:off x="548640" y="1600200"/>
-          <a:ext cx="7315200" cy="4572000"/>
+          <a:off x="548640" y="1554480"/>
+          <a:ext cx="7040880" cy="4663440"/>
         </p:xfrm>
         <a:graphic xmlns:a="http://schemas.openxmlformats.org/drawingml/2006/main">
           <a:graphicData uri="http://schemas.openxmlformats.org/drawingml/2006/chart">
@@ -3887,26 +4356,26 @@
         </p:nvSpPr>
         <p:spPr>
           <a:xfrm>
-            <a:off x="8092440" y="1600200"/>
-            <a:ext cx="3520440" cy="4572000"/>
+            <a:off x="7863840" y="1554480"/>
+            <a:ext cx="3749040" cy="4663440"/>
           </a:xfrm>
           <a:prstGeom prst="roundRect">
             <a:avLst>
-              <a:gd name="adj" fmla="val 2338"/>
+              <a:gd name="adj" fmla="val 2195"/>
             </a:avLst>
           </a:prstGeom>
           <a:solidFill>
-            <a:srgbClr val="F3F7FA"/>
+            <a:srgbClr val="FBF4F2"/>
           </a:solidFill>
           <a:ln w="12700">
             <a:solidFill>
-              <a:srgbClr val="D8E2EA"/>
+              <a:srgbClr val="E7D6D1"/>
             </a:solidFill>
             <a:prstDash val="solid"/>
           </a:ln>
           <a:effectLst>
             <a:outerShdw sx="100000" sy="100000" kx="0" ky="0" algn="bl" rotWithShape="0" blurRad="88900" dist="38100" dir="5400000">
-              <a:srgbClr val="5B6B7B">
+              <a:srgbClr val="7A5C5E">
                 <a:alpha val="18000"/>
               </a:srgbClr>
             </a:outerShdw>
@@ -3921,8 +4390,8 @@
         </p:nvSpPr>
         <p:spPr>
           <a:xfrm>
-            <a:off x="8321040" y="1783080"/>
-            <a:ext cx="3108960" cy="365760"/>
+            <a:off x="8092440" y="1737360"/>
+            <a:ext cx="3291840" cy="365760"/>
           </a:xfrm>
           <a:prstGeom prst="rect">
             <a:avLst/>
@@ -3940,13 +4409,13 @@
             <a:r>
               <a:rPr lang="en-US" sz="1600" b="1" dirty="0">
                 <a:solidFill>
-                  <a:srgbClr val="2CC4A3"/>
+                  <a:srgbClr val="BE0000"/>
                 </a:solidFill>
                 <a:latin typeface="Cambria" pitchFamily="34" charset="0"/>
                 <a:ea typeface="Cambria" pitchFamily="34" charset="-122"/>
                 <a:cs typeface="Cambria" pitchFamily="34" charset="-120"/>
               </a:rPr>
-              <a:t>Verdict</a:t>
+              <a:t>Reading it</a:t>
             </a:r>
             <a:endParaRPr lang="en-US" sz="1600" dirty="0"/>
           </a:p>
@@ -3960,8 +4429,8 @@
         </p:nvSpPr>
         <p:spPr>
           <a:xfrm>
-            <a:off x="8321040" y="2240280"/>
-            <a:ext cx="3108960" cy="3840480"/>
+            <a:off x="8092440" y="2194560"/>
+            <a:ext cx="3291840" cy="3840480"/>
           </a:xfrm>
           <a:prstGeom prst="rect">
             <a:avLst/>
@@ -3973,110 +4442,86 @@
           <a:bodyPr wrap="square" lIns="0" tIns="0" rIns="0" bIns="0" rtlCol="0" anchor="t"/>
           <a:lstStyle/>
           <a:p>
-            <a:pPr indent="0" marL="0">
-              <a:buNone/>
-            </a:pPr>
-            <a:r>
-              <a:rPr lang="en-US" sz="1300" b="1" dirty="0">
-                <a:solidFill>
-                  <a:srgbClr val="2CC4A3"/>
+            <a:pPr marL="342900" indent="-342900">
+              <a:spcAft>
+                <a:spcPts val="800"/>
+              </a:spcAft>
+              <a:buSzPct val="100000"/>
+              <a:buChar char="•"/>
+            </a:pPr>
+            <a:r>
+              <a:rPr lang="en-US" sz="1300" dirty="0">
+                <a:solidFill>
+                  <a:srgbClr val="2A1618"/>
                 </a:solidFill>
                 <a:latin typeface="Calibri" pitchFamily="34" charset="0"/>
                 <a:ea typeface="Calibri" pitchFamily="34" charset="-122"/>
                 <a:cs typeface="Calibri" pitchFamily="34" charset="-120"/>
               </a:rPr>
-              <a:t>Mixup — WIN</a:t>
+              <a:t>Empty 0.39 in (9.9 mm), F5 0.55 in (13.9 mm).</a:t>
             </a:r>
             <a:endParaRPr lang="en-US" sz="1300" dirty="0"/>
           </a:p>
           <a:p>
-            <a:pPr indent="0" marL="0">
+            <a:pPr marL="342900" indent="-342900">
               <a:spcAft>
-                <a:spcPts val="1000"/>
+                <a:spcPts val="800"/>
               </a:spcAft>
-              <a:buNone/>
-            </a:pPr>
-            <a:r>
-              <a:rPr lang="en-US" sz="1200" dirty="0">
-                <a:solidFill>
-                  <a:srgbClr val="1E293B"/>
+              <a:buSzPct val="100000"/>
+              <a:buChar char="•"/>
+            </a:pPr>
+            <a:r>
+              <a:rPr lang="en-US" sz="1300" dirty="0">
+                <a:solidFill>
+                  <a:srgbClr val="2A1618"/>
                 </a:solidFill>
                 <a:latin typeface="Calibri" pitchFamily="34" charset="0"/>
                 <a:ea typeface="Calibri" pitchFamily="34" charset="-122"/>
                 <a:cs typeface="Calibri" pitchFamily="34" charset="-120"/>
               </a:rPr>
-              <a:t>blend sample pairs + their (x,y): 0.664 → 0.572, and it helps the barrier region most.</a:t>
+              <a:t>F4 is running and will drop in here.</a:t>
             </a:r>
             <a:endParaRPr lang="en-US" sz="1300" dirty="0"/>
           </a:p>
           <a:p>
-            <a:pPr indent="0" marL="0">
-              <a:buNone/>
-            </a:pPr>
-            <a:r>
-              <a:rPr lang="en-US" sz="1300" b="1" dirty="0">
-                <a:solidFill>
-                  <a:srgbClr val="D64545"/>
+            <a:pPr marL="342900" indent="-342900">
+              <a:spcAft>
+                <a:spcPts val="800"/>
+              </a:spcAft>
+              <a:buSzPct val="100000"/>
+              <a:buChar char="•"/>
+            </a:pPr>
+            <a:r>
+              <a:rPr lang="en-US" sz="1300" dirty="0">
+                <a:solidFill>
+                  <a:srgbClr val="2A1618"/>
                 </a:solidFill>
                 <a:latin typeface="Calibri" pitchFamily="34" charset="0"/>
                 <a:ea typeface="Calibri" pitchFamily="34" charset="-122"/>
                 <a:cs typeface="Calibri" pitchFamily="34" charset="-120"/>
               </a:rPr>
-              <a:t>Position-disjoint validation — no</a:t>
+              <a:t>Both are below the matching whole-cell numbers, since the 3 cell-mates give close anchors.</a:t>
             </a:r>
             <a:endParaRPr lang="en-US" sz="1300" dirty="0"/>
           </a:p>
           <a:p>
-            <a:pPr indent="0" marL="0">
+            <a:pPr marL="342900" indent="-342900">
               <a:spcAft>
-                <a:spcPts val="1000"/>
+                <a:spcPts val="800"/>
               </a:spcAft>
-              <a:buNone/>
-            </a:pPr>
-            <a:r>
-              <a:rPr lang="en-US" sz="1200" dirty="0">
-                <a:solidFill>
-                  <a:srgbClr val="1E293B"/>
+              <a:buSzPct val="100000"/>
+              <a:buChar char="•"/>
+            </a:pPr>
+            <a:r>
+              <a:rPr lang="en-US" sz="1300" dirty="0">
+                <a:solidFill>
+                  <a:srgbClr val="2A1618"/>
                 </a:solidFill>
                 <a:latin typeface="Calibri" pitchFamily="34" charset="0"/>
                 <a:ea typeface="Calibri" pitchFamily="34" charset="-122"/>
                 <a:cs typeface="Calibri" pitchFamily="34" charset="-120"/>
               </a:rPr>
-              <a:t>starves the ~30 scarce training positions.</a:t>
-            </a:r>
-            <a:endParaRPr lang="en-US" sz="1300" dirty="0"/>
-          </a:p>
-          <a:p>
-            <a:pPr indent="0" marL="0">
-              <a:buNone/>
-            </a:pPr>
-            <a:r>
-              <a:rPr lang="en-US" sz="1300" b="1" dirty="0">
-                <a:solidFill>
-                  <a:srgbClr val="D64545"/>
-                </a:solidFill>
-                <a:latin typeface="Calibri" pitchFamily="34" charset="0"/>
-                <a:ea typeface="Calibri" pitchFamily="34" charset="-122"/>
-                <a:cs typeface="Calibri" pitchFamily="34" charset="-120"/>
-              </a:rPr>
-              <a:t>Heatmap output — no</a:t>
-            </a:r>
-            <a:endParaRPr lang="en-US" sz="1300" dirty="0"/>
-          </a:p>
-          <a:p>
-            <a:pPr indent="0" marL="0">
-              <a:buNone/>
-            </a:pPr>
-            <a:r>
-              <a:rPr lang="en-US" sz="1200" dirty="0">
-                <a:solidFill>
-                  <a:srgbClr val="1E293B"/>
-                </a:solidFill>
-                <a:latin typeface="Calibri" pitchFamily="34" charset="0"/>
-                <a:ea typeface="Calibri" pitchFamily="34" charset="-122"/>
-                <a:cs typeface="Calibri" pitchFamily="34" charset="-120"/>
-              </a:rPr>
-              <a:t>centroid readout biases predictions toward centre.</a:t>
+              <a:t>Still above the roughly 6 mm signal floor, so the CNN is data-limited on about 50 positions.</a:t>
             </a:r>
             <a:endParaRPr lang="en-US" sz="1300" dirty="0"/>
           </a:p>
@@ -4096,7 +4541,7 @@
     <p:bg>
       <p:bgPr>
         <a:solidFill>
-          <a:srgbClr val="0E2233"/>
+          <a:srgbClr val="FFFFFF"/>
         </a:solidFill>
       </p:bgPr>
     </p:bg>
@@ -4122,8 +4567,8 @@
         </p:nvSpPr>
         <p:spPr>
           <a:xfrm>
-            <a:off x="822960" y="640080"/>
-            <a:ext cx="10058400" cy="731520"/>
+            <a:off x="548640" y="384048"/>
+            <a:ext cx="11091672" cy="640080"/>
           </a:xfrm>
           <a:prstGeom prst="rect">
             <a:avLst/>
@@ -4139,50 +4584,119 @@
               <a:buNone/>
             </a:pPr>
             <a:r>
-              <a:rPr lang="en-US" sz="2800" b="1" dirty="0">
-                <a:solidFill>
-                  <a:srgbClr val="FFFFFF"/>
+              <a:rPr lang="en-US" sz="2900" b="1" dirty="0">
+                <a:solidFill>
+                  <a:srgbClr val="2A1618"/>
                 </a:solidFill>
                 <a:latin typeface="Cambria" pitchFamily="34" charset="0"/>
                 <a:ea typeface="Cambria" pitchFamily="34" charset="-122"/>
                 <a:cs typeface="Cambria" pitchFamily="34" charset="-120"/>
               </a:rPr>
-              <a:t>Part 1 — bottom line</a:t>
-            </a:r>
-            <a:endParaRPr lang="en-US" sz="2800" dirty="0"/>
-          </a:p>
-        </p:txBody>
-      </p:sp>
-      <p:sp>
-        <p:nvSpPr>
-          <p:cNvPr id="3" name="Shape 1"/>
-          <p:cNvSpPr/>
-          <p:nvPr/>
-        </p:nvSpPr>
-        <p:spPr>
-          <a:xfrm>
-            <a:off x="822960" y="1600200"/>
-            <a:ext cx="384048" cy="384048"/>
-          </a:xfrm>
-          <a:prstGeom prst="ellipse">
-            <a:avLst/>
+              <a:t>All three protocols side by side</a:t>
+            </a:r>
+            <a:endParaRPr lang="en-US" sz="2900" dirty="0"/>
+          </a:p>
+        </p:txBody>
+      </p:sp>
+      <p:sp>
+        <p:nvSpPr>
+          <p:cNvPr id="3" name="Text 1"/>
+          <p:cNvSpPr/>
+          <p:nvPr/>
+        </p:nvSpPr>
+        <p:spPr>
+          <a:xfrm>
+            <a:off x="548640" y="1033272"/>
+            <a:ext cx="11091672" cy="365760"/>
+          </a:xfrm>
+          <a:prstGeom prst="rect">
+            <a:avLst/>
+          </a:prstGeom>
+          <a:noFill/>
+          <a:ln/>
+        </p:spPr>
+        <p:txBody>
+          <a:bodyPr wrap="square" lIns="0" tIns="0" rIns="0" bIns="0" rtlCol="0" anchor="ctr"/>
+          <a:lstStyle/>
+          <a:p>
+            <a:pPr indent="0" marL="0">
+              <a:buNone/>
+            </a:pPr>
+            <a:r>
+              <a:rPr lang="en-US" sz="1400" b="1" dirty="0">
+                <a:solidFill>
+                  <a:srgbClr val="BE0000"/>
+                </a:solidFill>
+                <a:latin typeface="Calibri" pitchFamily="34" charset="0"/>
+                <a:ea typeface="Calibri" pitchFamily="34" charset="-122"/>
+                <a:cs typeface="Calibri" pitchFamily="34" charset="-120"/>
+              </a:rPr>
+              <a:t>How hard is each generalization task? (raw CNN median error, inches)</a:t>
+            </a:r>
+            <a:endParaRPr lang="en-US" sz="1400" dirty="0"/>
+          </a:p>
+        </p:txBody>
+      </p:sp>
+      <p:graphicFrame>
+        <p:nvGraphicFramePr>
+          <p:cNvPr id="4" name="Chart 0" descr=""/>
+          <p:cNvGraphicFramePr/>
+          <p:nvPr/>
+        </p:nvGraphicFramePr>
+        <p:xfrm>
+          <a:off x="548640" y="1554480"/>
+          <a:ext cx="7040880" cy="4663440"/>
+        </p:xfrm>
+        <a:graphic xmlns:a="http://schemas.openxmlformats.org/drawingml/2006/main">
+          <a:graphicData uri="http://schemas.openxmlformats.org/drawingml/2006/chart">
+            <c:chart xmlns:c="http://schemas.openxmlformats.org/drawingml/2006/chart" r:id="rId1"/>
+          </a:graphicData>
+        </a:graphic>
+      </p:graphicFrame>
+      <p:sp>
+        <p:nvSpPr>
+          <p:cNvPr id="5" name="Shape 2"/>
+          <p:cNvSpPr/>
+          <p:nvPr/>
+        </p:nvSpPr>
+        <p:spPr>
+          <a:xfrm>
+            <a:off x="7863840" y="1554480"/>
+            <a:ext cx="3749040" cy="4663440"/>
+          </a:xfrm>
+          <a:prstGeom prst="roundRect">
+            <a:avLst>
+              <a:gd name="adj" fmla="val 2195"/>
+            </a:avLst>
           </a:prstGeom>
           <a:solidFill>
-            <a:srgbClr val="2CC4A3"/>
+            <a:srgbClr val="FBF4F2"/>
           </a:solidFill>
-          <a:ln/>
-        </p:spPr>
-      </p:sp>
-      <p:sp>
-        <p:nvSpPr>
-          <p:cNvPr id="4" name="Text 2"/>
-          <p:cNvSpPr/>
-          <p:nvPr/>
-        </p:nvSpPr>
-        <p:spPr>
-          <a:xfrm>
-            <a:off x="822960" y="1600200"/>
-            <a:ext cx="384048" cy="384048"/>
+          <a:ln w="12700">
+            <a:solidFill>
+              <a:srgbClr val="E7D6D1"/>
+            </a:solidFill>
+            <a:prstDash val="solid"/>
+          </a:ln>
+          <a:effectLst>
+            <a:outerShdw sx="100000" sy="100000" kx="0" ky="0" algn="bl" rotWithShape="0" blurRad="88900" dist="38100" dir="5400000">
+              <a:srgbClr val="7A5C5E">
+                <a:alpha val="18000"/>
+              </a:srgbClr>
+            </a:outerShdw>
+          </a:effectLst>
+        </p:spPr>
+      </p:sp>
+      <p:sp>
+        <p:nvSpPr>
+          <p:cNvPr id="6" name="Text 3"/>
+          <p:cNvSpPr/>
+          <p:nvPr/>
+        </p:nvSpPr>
+        <p:spPr>
+          <a:xfrm>
+            <a:off x="8092440" y="1737360"/>
+            <a:ext cx="3291840" cy="365760"/>
           </a:xfrm>
           <a:prstGeom prst="rect">
             <a:avLst/>
@@ -4194,19 +4708,19 @@
           <a:bodyPr wrap="square" lIns="0" tIns="0" rIns="0" bIns="0" rtlCol="0" anchor="ctr"/>
           <a:lstStyle/>
           <a:p>
-            <a:pPr algn="ctr" indent="0" marL="0">
+            <a:pPr indent="0" marL="0">
               <a:buNone/>
             </a:pPr>
             <a:r>
               <a:rPr lang="en-US" sz="1500" b="1" dirty="0">
                 <a:solidFill>
-                  <a:srgbClr val="0E2233"/>
+                  <a:srgbClr val="BE0000"/>
                 </a:solidFill>
                 <a:latin typeface="Cambria" pitchFamily="34" charset="0"/>
                 <a:ea typeface="Cambria" pitchFamily="34" charset="-122"/>
                 <a:cs typeface="Cambria" pitchFamily="34" charset="-120"/>
               </a:rPr>
-              <a:t>1</a:t>
+              <a:t>The ladder of difficulty</a:t>
             </a:r>
             <a:endParaRPr lang="en-US" sz="1500" dirty="0"/>
           </a:p>
@@ -4214,14 +4728,14 @@
       </p:sp>
       <p:sp>
         <p:nvSpPr>
-          <p:cNvPr id="5" name="Text 3"/>
-          <p:cNvSpPr/>
-          <p:nvPr/>
-        </p:nvSpPr>
-        <p:spPr>
-          <a:xfrm>
-            <a:off x="1371600" y="1508760"/>
-            <a:ext cx="10241280" cy="868680"/>
+          <p:cNvPr id="7" name="Text 4"/>
+          <p:cNvSpPr/>
+          <p:nvPr/>
+        </p:nvSpPr>
+        <p:spPr>
+          <a:xfrm>
+            <a:off x="8092440" y="2194560"/>
+            <a:ext cx="3291840" cy="3840480"/>
           </a:xfrm>
           <a:prstGeom prst="rect">
             <a:avLst/>
@@ -4230,71 +4744,136 @@
           <a:ln/>
         </p:spPr>
         <p:txBody>
-          <a:bodyPr wrap="square" lIns="0" tIns="0" rIns="0" bIns="0" rtlCol="0" anchor="ctr"/>
-          <a:lstStyle/>
-          <a:p>
-            <a:pPr indent="0" marL="0">
-              <a:buNone/>
-            </a:pPr>
-            <a:r>
-              <a:rPr lang="en-US" sz="1400" b="1" dirty="0">
-                <a:solidFill>
-                  <a:srgbClr val="FFFFFF"/>
+          <a:bodyPr wrap="square" lIns="0" tIns="0" rIns="0" bIns="0" rtlCol="0" anchor="t"/>
+          <a:lstStyle/>
+          <a:p>
+            <a:pPr marL="342900" indent="-342900">
+              <a:spcAft>
+                <a:spcPts val="800"/>
+              </a:spcAft>
+              <a:buSzPct val="100000"/>
+              <a:buChar char="•"/>
+            </a:pPr>
+            <a:r>
+              <a:rPr lang="en-US" sz="1300" dirty="0">
+                <a:solidFill>
+                  <a:srgbClr val="2A1618"/>
                 </a:solidFill>
                 <a:latin typeface="Calibri" pitchFamily="34" charset="0"/>
                 <a:ea typeface="Calibri" pitchFamily="34" charset="-122"/>
                 <a:cs typeface="Calibri" pitchFamily="34" charset="-120"/>
               </a:rPr>
-              <a:t>The CNN localizes to a sixth of a cell  —  </a:t>
-            </a:r>
-            <a:pPr indent="0" marL="0">
-              <a:buNone/>
-            </a:pPr>
-            <a:r>
-              <a:rPr lang="en-US" sz="1400" dirty="0">
-                <a:solidFill>
-                  <a:srgbClr val="AECBD6"/>
+              <a:t>LOSO (0.15 to 0.22 in): a new scan of KNOWN positions. Easiest.</a:t>
+            </a:r>
+            <a:endParaRPr lang="en-US" sz="1300" dirty="0"/>
+          </a:p>
+          <a:p>
+            <a:pPr marL="342900" indent="-342900">
+              <a:spcAft>
+                <a:spcPts val="800"/>
+              </a:spcAft>
+              <a:buSzPct val="100000"/>
+              <a:buChar char="•"/>
+            </a:pPr>
+            <a:r>
+              <a:rPr lang="en-US" sz="1300" dirty="0">
+                <a:solidFill>
+                  <a:srgbClr val="2A1618"/>
                 </a:solidFill>
                 <a:latin typeface="Calibri" pitchFamily="34" charset="0"/>
                 <a:ea typeface="Calibri" pitchFamily="34" charset="-122"/>
                 <a:cs typeface="Calibri" pitchFamily="34" charset="-120"/>
               </a:rPr>
-              <a:t>≈0.15 in (3.9 mm) cross-session on empty, &lt;¼ in with a glandular insert — regression works, and the CNN owns it.</a:t>
-            </a:r>
-            <a:endParaRPr lang="en-US" sz="1400" dirty="0"/>
-          </a:p>
-        </p:txBody>
-      </p:sp>
-      <p:sp>
-        <p:nvSpPr>
-          <p:cNvPr id="6" name="Shape 4"/>
-          <p:cNvSpPr/>
-          <p:nvPr/>
-        </p:nvSpPr>
-        <p:spPr>
-          <a:xfrm>
-            <a:off x="822960" y="2569464"/>
-            <a:ext cx="384048" cy="384048"/>
-          </a:xfrm>
-          <a:prstGeom prst="ellipse">
-            <a:avLst/>
-          </a:prstGeom>
-          <a:solidFill>
-            <a:srgbClr val="2CC4A3"/>
-          </a:solidFill>
-          <a:ln/>
-        </p:spPr>
-      </p:sp>
-      <p:sp>
-        <p:nvSpPr>
-          <p:cNvPr id="7" name="Text 5"/>
-          <p:cNvSpPr/>
-          <p:nvPr/>
-        </p:nvSpPr>
-        <p:spPr>
-          <a:xfrm>
-            <a:off x="822960" y="2569464"/>
-            <a:ext cx="384048" cy="384048"/>
+              <a:t>Single-position (0.39 to 0.55): unseen point, close anchors. Medium.</a:t>
+            </a:r>
+            <a:endParaRPr lang="en-US" sz="1300" dirty="0"/>
+          </a:p>
+          <a:p>
+            <a:pPr marL="342900" indent="-342900">
+              <a:spcAft>
+                <a:spcPts val="800"/>
+              </a:spcAft>
+              <a:buSzPct val="100000"/>
+              <a:buChar char="•"/>
+            </a:pPr>
+            <a:r>
+              <a:rPr lang="en-US" sz="1300" dirty="0">
+                <a:solidFill>
+                  <a:srgbClr val="2A1618"/>
+                </a:solidFill>
+                <a:latin typeface="Calibri" pitchFamily="34" charset="0"/>
+                <a:ea typeface="Calibri" pitchFamily="34" charset="-122"/>
+                <a:cs typeface="Calibri" pitchFamily="34" charset="-120"/>
+              </a:rPr>
+              <a:t>LOPO-cell (0.47 to 0.67): unseen 1 in cell, no anchor. Hardest.</a:t>
+            </a:r>
+            <a:endParaRPr lang="en-US" sz="1300" dirty="0"/>
+          </a:p>
+          <a:p>
+            <a:pPr marL="342900" indent="-342900">
+              <a:spcAft>
+                <a:spcPts val="800"/>
+              </a:spcAft>
+              <a:buSzPct val="100000"/>
+              <a:buChar char="•"/>
+            </a:pPr>
+            <a:r>
+              <a:rPr lang="en-US" sz="1300" dirty="0">
+                <a:solidFill>
+                  <a:srgbClr val="2A1618"/>
+                </a:solidFill>
+                <a:latin typeface="Calibri" pitchFamily="34" charset="0"/>
+                <a:ea typeface="Calibri" pitchFamily="34" charset="-122"/>
+                <a:cs typeface="Calibri" pitchFamily="34" charset="-120"/>
+              </a:rPr>
+              <a:t>Insert size raises every bar; the gap widens as the task gets harder.</a:t>
+            </a:r>
+            <a:endParaRPr lang="en-US" sz="1300" dirty="0"/>
+          </a:p>
+        </p:txBody>
+      </p:sp>
+    </p:spTree>
+  </p:cSld>
+  <p:clrMapOvr>
+    <a:masterClrMapping/>
+  </p:clrMapOvr>
+</p:sld>
+</file>
+
+<file path=ppt/slides/slide12.xml><?xml version="1.0" encoding="utf-8"?>
+<p:sld xmlns:a="http://schemas.openxmlformats.org/drawingml/2006/main" xmlns:r="http://schemas.openxmlformats.org/officeDocument/2006/relationships" xmlns:p="http://schemas.openxmlformats.org/presentationml/2006/main">
+  <p:cSld name="Slide 12">
+    <p:bg>
+      <p:bgPr>
+        <a:solidFill>
+          <a:srgbClr val="FFFFFF"/>
+        </a:solidFill>
+      </p:bgPr>
+    </p:bg>
+    <p:spTree>
+      <p:nvGrpSpPr>
+        <p:cNvPr id="1" name=""/>
+        <p:cNvGrpSpPr/>
+        <p:nvPr/>
+      </p:nvGrpSpPr>
+      <p:grpSpPr>
+        <a:xfrm>
+          <a:off x="0" y="0"/>
+          <a:ext cx="0" cy="0"/>
+          <a:chOff x="0" y="0"/>
+          <a:chExt cx="0" cy="0"/>
+        </a:xfrm>
+      </p:grpSpPr>
+      <p:sp>
+        <p:nvSpPr>
+          <p:cNvPr id="2" name="Text 0"/>
+          <p:cNvSpPr/>
+          <p:nvPr/>
+        </p:nvSpPr>
+        <p:spPr>
+          <a:xfrm>
+            <a:off x="548640" y="384048"/>
+            <a:ext cx="11091672" cy="640080"/>
           </a:xfrm>
           <a:prstGeom prst="rect">
             <a:avLst/>
@@ -4306,34 +4885,34 @@
           <a:bodyPr wrap="square" lIns="0" tIns="0" rIns="0" bIns="0" rtlCol="0" anchor="ctr"/>
           <a:lstStyle/>
           <a:p>
-            <a:pPr algn="ctr" indent="0" marL="0">
-              <a:buNone/>
-            </a:pPr>
-            <a:r>
-              <a:rPr lang="en-US" sz="1500" b="1" dirty="0">
-                <a:solidFill>
-                  <a:srgbClr val="0E2233"/>
+            <a:pPr indent="0" marL="0">
+              <a:buNone/>
+            </a:pPr>
+            <a:r>
+              <a:rPr lang="en-US" sz="2900" b="1" dirty="0">
+                <a:solidFill>
+                  <a:srgbClr val="2A1618"/>
                 </a:solidFill>
                 <a:latin typeface="Cambria" pitchFamily="34" charset="0"/>
                 <a:ea typeface="Cambria" pitchFamily="34" charset="-122"/>
                 <a:cs typeface="Cambria" pitchFamily="34" charset="-120"/>
               </a:rPr>
-              <a:t>2</a:t>
-            </a:r>
-            <a:endParaRPr lang="en-US" sz="1500" dirty="0"/>
-          </a:p>
-        </p:txBody>
-      </p:sp>
-      <p:sp>
-        <p:nvSpPr>
-          <p:cNvPr id="8" name="Text 6"/>
-          <p:cNvSpPr/>
-          <p:nvPr/>
-        </p:nvSpPr>
-        <p:spPr>
-          <a:xfrm>
-            <a:off x="1371600" y="2478024"/>
-            <a:ext cx="10241280" cy="868680"/>
+              <a:t>Can we teach it to interpolate better?</a:t>
+            </a:r>
+            <a:endParaRPr lang="en-US" sz="2900" dirty="0"/>
+          </a:p>
+        </p:txBody>
+      </p:sp>
+      <p:sp>
+        <p:nvSpPr>
+          <p:cNvPr id="3" name="Text 1"/>
+          <p:cNvSpPr/>
+          <p:nvPr/>
+        </p:nvSpPr>
+        <p:spPr>
+          <a:xfrm>
+            <a:off x="548640" y="1033272"/>
+            <a:ext cx="11091672" cy="365760"/>
           </a:xfrm>
           <a:prstGeom prst="rect">
             <a:avLst/>
@@ -4351,62 +4930,282 @@
             <a:r>
               <a:rPr lang="en-US" sz="1400" b="1" dirty="0">
                 <a:solidFill>
-                  <a:srgbClr val="FFFFFF"/>
+                  <a:srgbClr val="BE0000"/>
                 </a:solidFill>
                 <a:latin typeface="Calibri" pitchFamily="34" charset="0"/>
                 <a:ea typeface="Calibri" pitchFamily="34" charset="-122"/>
                 <a:cs typeface="Calibri" pitchFamily="34" charset="-120"/>
               </a:rPr>
-              <a:t>Raw beats physics for regression  —  </a:t>
-            </a:r>
+              <a:t>Three tricks tried on the HARDEST case (F5 LOPO-cell, baseline 0.664 in); only one helps</a:t>
+            </a:r>
+            <a:endParaRPr lang="en-US" sz="1400" dirty="0"/>
+          </a:p>
+        </p:txBody>
+      </p:sp>
+      <p:graphicFrame>
+        <p:nvGraphicFramePr>
+          <p:cNvPr id="4" name="Chart 0" descr=""/>
+          <p:cNvGraphicFramePr/>
+          <p:nvPr/>
+        </p:nvGraphicFramePr>
+        <p:xfrm>
+          <a:off x="548640" y="1600200"/>
+          <a:ext cx="7315200" cy="4572000"/>
+        </p:xfrm>
+        <a:graphic xmlns:a="http://schemas.openxmlformats.org/drawingml/2006/main">
+          <a:graphicData uri="http://schemas.openxmlformats.org/drawingml/2006/chart">
+            <c:chart xmlns:c="http://schemas.openxmlformats.org/drawingml/2006/chart" r:id="rId1"/>
+          </a:graphicData>
+        </a:graphic>
+      </p:graphicFrame>
+      <p:sp>
+        <p:nvSpPr>
+          <p:cNvPr id="5" name="Shape 2"/>
+          <p:cNvSpPr/>
+          <p:nvPr/>
+        </p:nvSpPr>
+        <p:spPr>
+          <a:xfrm>
+            <a:off x="8092440" y="1600200"/>
+            <a:ext cx="3520440" cy="4572000"/>
+          </a:xfrm>
+          <a:prstGeom prst="roundRect">
+            <a:avLst>
+              <a:gd name="adj" fmla="val 2338"/>
+            </a:avLst>
+          </a:prstGeom>
+          <a:solidFill>
+            <a:srgbClr val="FBF4F2"/>
+          </a:solidFill>
+          <a:ln w="12700">
+            <a:solidFill>
+              <a:srgbClr val="E7D6D1"/>
+            </a:solidFill>
+            <a:prstDash val="solid"/>
+          </a:ln>
+          <a:effectLst>
+            <a:outerShdw sx="100000" sy="100000" kx="0" ky="0" algn="bl" rotWithShape="0" blurRad="88900" dist="38100" dir="5400000">
+              <a:srgbClr val="7A5C5E">
+                <a:alpha val="18000"/>
+              </a:srgbClr>
+            </a:outerShdw>
+          </a:effectLst>
+        </p:spPr>
+      </p:sp>
+      <p:sp>
+        <p:nvSpPr>
+          <p:cNvPr id="6" name="Text 3"/>
+          <p:cNvSpPr/>
+          <p:nvPr/>
+        </p:nvSpPr>
+        <p:spPr>
+          <a:xfrm>
+            <a:off x="8321040" y="1783080"/>
+            <a:ext cx="3108960" cy="365760"/>
+          </a:xfrm>
+          <a:prstGeom prst="rect">
+            <a:avLst/>
+          </a:prstGeom>
+          <a:noFill/>
+          <a:ln/>
+        </p:spPr>
+        <p:txBody>
+          <a:bodyPr wrap="square" lIns="0" tIns="0" rIns="0" bIns="0" rtlCol="0" anchor="ctr"/>
+          <a:lstStyle/>
+          <a:p>
             <a:pPr indent="0" marL="0">
               <a:buNone/>
             </a:pPr>
             <a:r>
-              <a:rPr lang="en-US" sz="1400" dirty="0">
-                <a:solidFill>
-                  <a:srgbClr val="AECBD6"/>
+              <a:rPr lang="en-US" sz="1600" b="1" dirty="0">
+                <a:solidFill>
+                  <a:srgbClr val="BE0000"/>
+                </a:solidFill>
+                <a:latin typeface="Cambria" pitchFamily="34" charset="0"/>
+                <a:ea typeface="Cambria" pitchFamily="34" charset="-122"/>
+                <a:cs typeface="Cambria" pitchFamily="34" charset="-120"/>
+              </a:rPr>
+              <a:t>What this shows</a:t>
+            </a:r>
+            <a:endParaRPr lang="en-US" sz="1600" dirty="0"/>
+          </a:p>
+        </p:txBody>
+      </p:sp>
+      <p:sp>
+        <p:nvSpPr>
+          <p:cNvPr id="7" name="Text 4"/>
+          <p:cNvSpPr/>
+          <p:nvPr/>
+        </p:nvSpPr>
+        <p:spPr>
+          <a:xfrm>
+            <a:off x="8321040" y="2240280"/>
+            <a:ext cx="3108960" cy="3931920"/>
+          </a:xfrm>
+          <a:prstGeom prst="rect">
+            <a:avLst/>
+          </a:prstGeom>
+          <a:noFill/>
+          <a:ln/>
+        </p:spPr>
+        <p:txBody>
+          <a:bodyPr wrap="square" lIns="0" tIns="0" rIns="0" bIns="0" rtlCol="0" anchor="t"/>
+          <a:lstStyle/>
+          <a:p>
+            <a:pPr indent="0" marL="0">
+              <a:spcAft>
+                <a:spcPts val="1000"/>
+              </a:spcAft>
+              <a:buNone/>
+            </a:pPr>
+            <a:r>
+              <a:rPr lang="en-US" sz="1200" dirty="0">
+                <a:solidFill>
+                  <a:srgbClr val="2A1618"/>
                 </a:solidFill>
                 <a:latin typeface="Calibri" pitchFamily="34" charset="0"/>
                 <a:ea typeface="Calibri" pitchFamily="34" charset="-122"/>
                 <a:cs typeface="Calibri" pitchFamily="34" charset="-120"/>
               </a:rPr>
-              <a:t>physics features are redundant for the CNN and outright break the MLP — the reverse of the classification result.</a:t>
-            </a:r>
-            <a:endParaRPr lang="en-US" sz="1400" dirty="0"/>
-          </a:p>
-        </p:txBody>
-      </p:sp>
-      <p:sp>
-        <p:nvSpPr>
-          <p:cNvPr id="9" name="Shape 7"/>
-          <p:cNvSpPr/>
-          <p:nvPr/>
-        </p:nvSpPr>
-        <p:spPr>
-          <a:xfrm>
-            <a:off x="822960" y="3538728"/>
-            <a:ext cx="384048" cy="384048"/>
-          </a:xfrm>
-          <a:prstGeom prst="ellipse">
+              <a:t>Lower is better. Grey bars made it worse than the baseline; the crimson bar is the only improvement.</a:t>
+            </a:r>
+            <a:endParaRPr lang="en-US" sz="1300" dirty="0"/>
+          </a:p>
+          <a:p>
+            <a:pPr indent="0" marL="0">
+              <a:buNone/>
+            </a:pPr>
+            <a:r>
+              <a:rPr lang="en-US" sz="1300" b="1" dirty="0">
+                <a:solidFill>
+                  <a:srgbClr val="BE0000"/>
+                </a:solidFill>
+                <a:latin typeface="Calibri" pitchFamily="34" charset="0"/>
+                <a:ea typeface="Calibri" pitchFamily="34" charset="-122"/>
+                <a:cs typeface="Calibri" pitchFamily="34" charset="-120"/>
+              </a:rPr>
+              <a:t>Mixup, WIN</a:t>
+            </a:r>
+            <a:endParaRPr lang="en-US" sz="1300" dirty="0"/>
+          </a:p>
+          <a:p>
+            <a:pPr indent="0" marL="0">
+              <a:spcAft>
+                <a:spcPts val="900"/>
+              </a:spcAft>
+              <a:buNone/>
+            </a:pPr>
+            <a:r>
+              <a:rPr lang="en-US" sz="1200" dirty="0">
+                <a:solidFill>
+                  <a:srgbClr val="2A1618"/>
+                </a:solidFill>
+                <a:latin typeface="Calibri" pitchFamily="34" charset="0"/>
+                <a:ea typeface="Calibri" pitchFamily="34" charset="-122"/>
+                <a:cs typeface="Calibri" pitchFamily="34" charset="-120"/>
+              </a:rPr>
+              <a:t>blend sample pairs and their (x,y): 0.664 to 0.572, and it helps the insert region most.</a:t>
+            </a:r>
+            <a:endParaRPr lang="en-US" sz="1300" dirty="0"/>
+          </a:p>
+          <a:p>
+            <a:pPr indent="0" marL="0">
+              <a:buNone/>
+            </a:pPr>
+            <a:r>
+              <a:rPr lang="en-US" sz="1300" b="1" dirty="0">
+                <a:solidFill>
+                  <a:srgbClr val="836A68"/>
+                </a:solidFill>
+                <a:latin typeface="Calibri" pitchFamily="34" charset="0"/>
+                <a:ea typeface="Calibri" pitchFamily="34" charset="-122"/>
+                <a:cs typeface="Calibri" pitchFamily="34" charset="-120"/>
+              </a:rPr>
+              <a:t>Position-split validation and heatmap output, NO</a:t>
+            </a:r>
+            <a:endParaRPr lang="en-US" sz="1300" dirty="0"/>
+          </a:p>
+          <a:p>
+            <a:pPr indent="0" marL="0">
+              <a:buNone/>
+            </a:pPr>
+            <a:r>
+              <a:rPr lang="en-US" sz="1200" dirty="0">
+                <a:solidFill>
+                  <a:srgbClr val="2A1618"/>
+                </a:solidFill>
+                <a:latin typeface="Calibri" pitchFamily="34" charset="0"/>
+                <a:ea typeface="Calibri" pitchFamily="34" charset="-122"/>
+                <a:cs typeface="Calibri" pitchFamily="34" charset="-120"/>
+              </a:rPr>
+              <a:t>one starves the ~30 scarce training positions; the other biases predictions toward centre.</a:t>
+            </a:r>
+            <a:endParaRPr lang="en-US" sz="1300" dirty="0"/>
+          </a:p>
+        </p:txBody>
+      </p:sp>
+    </p:spTree>
+  </p:cSld>
+  <p:clrMapOvr>
+    <a:masterClrMapping/>
+  </p:clrMapOvr>
+</p:sld>
+</file>
+
+<file path=ppt/slides/slide13.xml><?xml version="1.0" encoding="utf-8"?>
+<p:sld xmlns:a="http://schemas.openxmlformats.org/drawingml/2006/main" xmlns:r="http://schemas.openxmlformats.org/officeDocument/2006/relationships" xmlns:p="http://schemas.openxmlformats.org/presentationml/2006/main">
+  <p:cSld name="Slide 13">
+    <p:bg>
+      <p:bgPr>
+        <a:solidFill>
+          <a:srgbClr val="2E1214"/>
+        </a:solidFill>
+      </p:bgPr>
+    </p:bg>
+    <p:spTree>
+      <p:nvGrpSpPr>
+        <p:cNvPr id="1" name=""/>
+        <p:cNvGrpSpPr/>
+        <p:nvPr/>
+      </p:nvGrpSpPr>
+      <p:grpSpPr>
+        <a:xfrm>
+          <a:off x="0" y="0"/>
+          <a:ext cx="0" cy="0"/>
+          <a:chOff x="0" y="0"/>
+          <a:chExt cx="0" cy="0"/>
+        </a:xfrm>
+      </p:grpSpPr>
+      <p:sp>
+        <p:nvSpPr>
+          <p:cNvPr id="2" name="Shape 0"/>
+          <p:cNvSpPr/>
+          <p:nvPr/>
+        </p:nvSpPr>
+        <p:spPr>
+          <a:xfrm>
+            <a:off x="0" y="0"/>
+            <a:ext cx="12188952" cy="201168"/>
+          </a:xfrm>
+          <a:prstGeom prst="rect">
             <a:avLst/>
           </a:prstGeom>
           <a:solidFill>
-            <a:srgbClr val="2CC4A3"/>
+            <a:srgbClr val="BE0000"/>
           </a:solidFill>
           <a:ln/>
         </p:spPr>
       </p:sp>
       <p:sp>
         <p:nvSpPr>
-          <p:cNvPr id="10" name="Text 8"/>
-          <p:cNvSpPr/>
-          <p:nvPr/>
-        </p:nvSpPr>
-        <p:spPr>
-          <a:xfrm>
-            <a:off x="822960" y="3538728"/>
-            <a:ext cx="384048" cy="384048"/>
+          <p:cNvPr id="3" name="Text 1"/>
+          <p:cNvSpPr/>
+          <p:nvPr/>
+        </p:nvSpPr>
+        <p:spPr>
+          <a:xfrm>
+            <a:off x="822960" y="640080"/>
+            <a:ext cx="10058400" cy="731520"/>
           </a:xfrm>
           <a:prstGeom prst="rect">
             <a:avLst/>
@@ -4418,19 +5217,78 @@
           <a:bodyPr wrap="square" lIns="0" tIns="0" rIns="0" bIns="0" rtlCol="0" anchor="ctr"/>
           <a:lstStyle/>
           <a:p>
-            <a:pPr algn="ctr" indent="0" marL="0">
-              <a:buNone/>
-            </a:pPr>
-            <a:r>
-              <a:rPr lang="en-US" sz="1500" b="1" dirty="0">
-                <a:solidFill>
-                  <a:srgbClr val="0E2233"/>
+            <a:pPr indent="0" marL="0">
+              <a:buNone/>
+            </a:pPr>
+            <a:r>
+              <a:rPr lang="en-US" sz="2800" b="1" dirty="0">
+                <a:solidFill>
+                  <a:srgbClr val="FFFFFF"/>
                 </a:solidFill>
                 <a:latin typeface="Cambria" pitchFamily="34" charset="0"/>
                 <a:ea typeface="Cambria" pitchFamily="34" charset="-122"/>
                 <a:cs typeface="Cambria" pitchFamily="34" charset="-120"/>
               </a:rPr>
-              <a:t>3</a:t>
+              <a:t>Part 1, bottom line</a:t>
+            </a:r>
+            <a:endParaRPr lang="en-US" sz="2800" dirty="0"/>
+          </a:p>
+        </p:txBody>
+      </p:sp>
+      <p:sp>
+        <p:nvSpPr>
+          <p:cNvPr id="4" name="Shape 2"/>
+          <p:cNvSpPr/>
+          <p:nvPr/>
+        </p:nvSpPr>
+        <p:spPr>
+          <a:xfrm>
+            <a:off x="822960" y="1600200"/>
+            <a:ext cx="384048" cy="384048"/>
+          </a:xfrm>
+          <a:prstGeom prst="ellipse">
+            <a:avLst/>
+          </a:prstGeom>
+          <a:solidFill>
+            <a:srgbClr val="C8890B"/>
+          </a:solidFill>
+          <a:ln/>
+        </p:spPr>
+      </p:sp>
+      <p:sp>
+        <p:nvSpPr>
+          <p:cNvPr id="5" name="Text 3"/>
+          <p:cNvSpPr/>
+          <p:nvPr/>
+        </p:nvSpPr>
+        <p:spPr>
+          <a:xfrm>
+            <a:off x="822960" y="1600200"/>
+            <a:ext cx="384048" cy="384048"/>
+          </a:xfrm>
+          <a:prstGeom prst="rect">
+            <a:avLst/>
+          </a:prstGeom>
+          <a:noFill/>
+          <a:ln/>
+        </p:spPr>
+        <p:txBody>
+          <a:bodyPr wrap="square" lIns="0" tIns="0" rIns="0" bIns="0" rtlCol="0" anchor="ctr"/>
+          <a:lstStyle/>
+          <a:p>
+            <a:pPr algn="ctr" indent="0" marL="0">
+              <a:buNone/>
+            </a:pPr>
+            <a:r>
+              <a:rPr lang="en-US" sz="1500" b="1" dirty="0">
+                <a:solidFill>
+                  <a:srgbClr val="2E1214"/>
+                </a:solidFill>
+                <a:latin typeface="Cambria" pitchFamily="34" charset="0"/>
+                <a:ea typeface="Cambria" pitchFamily="34" charset="-122"/>
+                <a:cs typeface="Cambria" pitchFamily="34" charset="-120"/>
+              </a:rPr>
+              <a:t>1</a:t>
             </a:r>
             <a:endParaRPr lang="en-US" sz="1500" dirty="0"/>
           </a:p>
@@ -4438,13 +5296,13 @@
       </p:sp>
       <p:sp>
         <p:nvSpPr>
-          <p:cNvPr id="11" name="Text 9"/>
-          <p:cNvSpPr/>
-          <p:nvPr/>
-        </p:nvSpPr>
-        <p:spPr>
-          <a:xfrm>
-            <a:off x="1371600" y="3447288"/>
+          <p:cNvPr id="6" name="Text 4"/>
+          <p:cNvSpPr/>
+          <p:nvPr/>
+        </p:nvSpPr>
+        <p:spPr>
+          <a:xfrm>
+            <a:off x="1371600" y="1508760"/>
             <a:ext cx="10241280" cy="868680"/>
           </a:xfrm>
           <a:prstGeom prst="rect">
@@ -4469,7 +5327,7 @@
                 <a:ea typeface="Calibri" pitchFamily="34" charset="-122"/>
                 <a:cs typeface="Calibri" pitchFamily="34" charset="-120"/>
               </a:rPr>
-              <a:t>Difficulty ladder: LOSO &lt; subpos &lt; cell  —  </a:t>
+              <a:t>The CNN localizes to a sixth of a cell:  </a:t>
             </a:r>
             <a:pPr indent="0" marL="0">
               <a:buNone/>
@@ -4477,13 +5335,13 @@
             <a:r>
               <a:rPr lang="en-US" sz="1400" dirty="0">
                 <a:solidFill>
-                  <a:srgbClr val="AECBD6"/>
+                  <a:srgbClr val="EAD3CB"/>
                 </a:solidFill>
                 <a:latin typeface="Calibri" pitchFamily="34" charset="0"/>
                 <a:ea typeface="Calibri" pitchFamily="34" charset="-122"/>
                 <a:cs typeface="Calibri" pitchFamily="34" charset="-120"/>
               </a:rPr>
-              <a:t>a new scan of known spots is easy; an unseen single point is medium; an unseen whole cell is 3–4× harder than LOSO.</a:t>
+              <a:t>about 0.15 in (3.9 mm) cross-session on empty, under a quarter inch with a glandular insert. Regression works, and the CNN owns it.</a:t>
             </a:r>
             <a:endParaRPr lang="en-US" sz="1400" dirty="0"/>
           </a:p>
@@ -4491,33 +5349,33 @@
       </p:sp>
       <p:sp>
         <p:nvSpPr>
-          <p:cNvPr id="12" name="Shape 10"/>
-          <p:cNvSpPr/>
-          <p:nvPr/>
-        </p:nvSpPr>
-        <p:spPr>
-          <a:xfrm>
-            <a:off x="822960" y="4507992"/>
+          <p:cNvPr id="7" name="Shape 5"/>
+          <p:cNvSpPr/>
+          <p:nvPr/>
+        </p:nvSpPr>
+        <p:spPr>
+          <a:xfrm>
+            <a:off x="822960" y="2569464"/>
             <a:ext cx="384048" cy="384048"/>
           </a:xfrm>
           <a:prstGeom prst="ellipse">
             <a:avLst/>
           </a:prstGeom>
           <a:solidFill>
-            <a:srgbClr val="2CC4A3"/>
+            <a:srgbClr val="C8890B"/>
           </a:solidFill>
           <a:ln/>
         </p:spPr>
       </p:sp>
       <p:sp>
         <p:nvSpPr>
-          <p:cNvPr id="13" name="Text 11"/>
-          <p:cNvSpPr/>
-          <p:nvPr/>
-        </p:nvSpPr>
-        <p:spPr>
-          <a:xfrm>
-            <a:off x="822960" y="4507992"/>
+          <p:cNvPr id="8" name="Text 6"/>
+          <p:cNvSpPr/>
+          <p:nvPr/>
+        </p:nvSpPr>
+        <p:spPr>
+          <a:xfrm>
+            <a:off x="822960" y="2569464"/>
             <a:ext cx="384048" cy="384048"/>
           </a:xfrm>
           <a:prstGeom prst="rect">
@@ -4536,13 +5394,13 @@
             <a:r>
               <a:rPr lang="en-US" sz="1500" b="1" dirty="0">
                 <a:solidFill>
-                  <a:srgbClr val="0E2233"/>
+                  <a:srgbClr val="2E1214"/>
                 </a:solidFill>
                 <a:latin typeface="Cambria" pitchFamily="34" charset="0"/>
                 <a:ea typeface="Cambria" pitchFamily="34" charset="-122"/>
                 <a:cs typeface="Cambria" pitchFamily="34" charset="-120"/>
               </a:rPr>
-              <a:t>4</a:t>
+              <a:t>2</a:t>
             </a:r>
             <a:endParaRPr lang="en-US" sz="1500" dirty="0"/>
           </a:p>
@@ -4550,13 +5408,13 @@
       </p:sp>
       <p:sp>
         <p:nvSpPr>
-          <p:cNvPr id="14" name="Text 12"/>
-          <p:cNvSpPr/>
-          <p:nvPr/>
-        </p:nvSpPr>
-        <p:spPr>
-          <a:xfrm>
-            <a:off x="1371600" y="4416552"/>
+          <p:cNvPr id="9" name="Text 7"/>
+          <p:cNvSpPr/>
+          <p:nvPr/>
+        </p:nvSpPr>
+        <p:spPr>
+          <a:xfrm>
+            <a:off x="1371600" y="2478024"/>
             <a:ext cx="10241280" cy="868680"/>
           </a:xfrm>
           <a:prstGeom prst="rect">
@@ -4581,7 +5439,7 @@
                 <a:ea typeface="Calibri" pitchFamily="34" charset="-122"/>
                 <a:cs typeface="Calibri" pitchFamily="34" charset="-120"/>
               </a:rPr>
-              <a:t>The glandular barrier is real &amp; measurable  —  </a:t>
+              <a:t>Raw beats physics for regression:  </a:t>
             </a:r>
             <a:pPr indent="0" marL="0">
               <a:buNone/>
@@ -4589,13 +5447,13 @@
             <a:r>
               <a:rPr lang="en-US" sz="1400" dirty="0">
                 <a:solidFill>
-                  <a:srgbClr val="AECBD6"/>
+                  <a:srgbClr val="EAD3CB"/>
                 </a:solidFill>
                 <a:latin typeface="Calibri" pitchFamily="34" charset="0"/>
                 <a:ea typeface="Calibri" pitchFamily="34" charset="-122"/>
                 <a:cs typeface="Calibri" pitchFamily="34" charset="-120"/>
               </a:rPr>
-              <a:t>LOPO error concentrates on near-insert cells and grows with insert size — the model can't interpolate across the dielectric jump.</a:t>
+              <a:t>physics features are redundant for the CNN and break the MLP, the reverse of the classification result.</a:t>
             </a:r>
             <a:endParaRPr lang="en-US" sz="1400" dirty="0"/>
           </a:p>
@@ -4603,33 +5461,33 @@
       </p:sp>
       <p:sp>
         <p:nvSpPr>
-          <p:cNvPr id="15" name="Shape 13"/>
-          <p:cNvSpPr/>
-          <p:nvPr/>
-        </p:nvSpPr>
-        <p:spPr>
-          <a:xfrm>
-            <a:off x="822960" y="5477256"/>
+          <p:cNvPr id="10" name="Shape 8"/>
+          <p:cNvSpPr/>
+          <p:nvPr/>
+        </p:nvSpPr>
+        <p:spPr>
+          <a:xfrm>
+            <a:off x="822960" y="3538728"/>
             <a:ext cx="384048" cy="384048"/>
           </a:xfrm>
           <a:prstGeom prst="ellipse">
             <a:avLst/>
           </a:prstGeom>
           <a:solidFill>
-            <a:srgbClr val="2CC4A3"/>
+            <a:srgbClr val="C8890B"/>
           </a:solidFill>
           <a:ln/>
         </p:spPr>
       </p:sp>
       <p:sp>
         <p:nvSpPr>
-          <p:cNvPr id="16" name="Text 14"/>
-          <p:cNvSpPr/>
-          <p:nvPr/>
-        </p:nvSpPr>
-        <p:spPr>
-          <a:xfrm>
-            <a:off x="822960" y="5477256"/>
+          <p:cNvPr id="11" name="Text 9"/>
+          <p:cNvSpPr/>
+          <p:nvPr/>
+        </p:nvSpPr>
+        <p:spPr>
+          <a:xfrm>
+            <a:off x="822960" y="3538728"/>
             <a:ext cx="384048" cy="384048"/>
           </a:xfrm>
           <a:prstGeom prst="rect">
@@ -4648,13 +5506,13 @@
             <a:r>
               <a:rPr lang="en-US" sz="1500" b="1" dirty="0">
                 <a:solidFill>
-                  <a:srgbClr val="0E2233"/>
+                  <a:srgbClr val="2E1214"/>
                 </a:solidFill>
                 <a:latin typeface="Cambria" pitchFamily="34" charset="0"/>
                 <a:ea typeface="Cambria" pitchFamily="34" charset="-122"/>
                 <a:cs typeface="Cambria" pitchFamily="34" charset="-120"/>
               </a:rPr>
-              <a:t>5</a:t>
+              <a:t>3</a:t>
             </a:r>
             <a:endParaRPr lang="en-US" sz="1500" dirty="0"/>
           </a:p>
@@ -4662,13 +5520,13 @@
       </p:sp>
       <p:sp>
         <p:nvSpPr>
-          <p:cNvPr id="17" name="Text 15"/>
-          <p:cNvSpPr/>
-          <p:nvPr/>
-        </p:nvSpPr>
-        <p:spPr>
-          <a:xfrm>
-            <a:off x="1371600" y="5385816"/>
+          <p:cNvPr id="12" name="Text 10"/>
+          <p:cNvSpPr/>
+          <p:nvPr/>
+        </p:nvSpPr>
+        <p:spPr>
+          <a:xfrm>
+            <a:off x="1371600" y="3447288"/>
             <a:ext cx="10241280" cy="868680"/>
           </a:xfrm>
           <a:prstGeom prst="rect">
@@ -4693,7 +5551,7 @@
                 <a:ea typeface="Calibri" pitchFamily="34" charset="-122"/>
                 <a:cs typeface="Calibri" pitchFamily="34" charset="-120"/>
               </a:rPr>
-              <a:t>Mixup is the one lever that helps  —  </a:t>
+              <a:t>Difficulty ladder: LOSO &lt; single-position &lt; cell:  </a:t>
             </a:r>
             <a:pPr indent="0" marL="0">
               <a:buNone/>
@@ -4701,13 +5559,13 @@
             <a:r>
               <a:rPr lang="en-US" sz="1400" dirty="0">
                 <a:solidFill>
-                  <a:srgbClr val="AECBD6"/>
+                  <a:srgbClr val="EAD3CB"/>
                 </a:solidFill>
                 <a:latin typeface="Calibri" pitchFamily="34" charset="0"/>
                 <a:ea typeface="Calibri" pitchFamily="34" charset="-122"/>
                 <a:cs typeface="Calibri" pitchFamily="34" charset="-120"/>
               </a:rPr>
-              <a:t>teaching a smooth signal→coordinate map cuts error 14 %; validation-splitting and heatmap output hurt on this small set.</a:t>
+              <a:t>a new scan of known spots is easy; an unseen single point is medium; an unseen whole cell is 3 to 4x harder than LOSO.</a:t>
             </a:r>
             <a:endParaRPr lang="en-US" sz="1400" dirty="0"/>
           </a:p>
@@ -4715,7 +5573,231 @@
       </p:sp>
       <p:sp>
         <p:nvSpPr>
+          <p:cNvPr id="13" name="Shape 11"/>
+          <p:cNvSpPr/>
+          <p:nvPr/>
+        </p:nvSpPr>
+        <p:spPr>
+          <a:xfrm>
+            <a:off x="822960" y="4507992"/>
+            <a:ext cx="384048" cy="384048"/>
+          </a:xfrm>
+          <a:prstGeom prst="ellipse">
+            <a:avLst/>
+          </a:prstGeom>
+          <a:solidFill>
+            <a:srgbClr val="C8890B"/>
+          </a:solidFill>
+          <a:ln/>
+        </p:spPr>
+      </p:sp>
+      <p:sp>
+        <p:nvSpPr>
+          <p:cNvPr id="14" name="Text 12"/>
+          <p:cNvSpPr/>
+          <p:nvPr/>
+        </p:nvSpPr>
+        <p:spPr>
+          <a:xfrm>
+            <a:off x="822960" y="4507992"/>
+            <a:ext cx="384048" cy="384048"/>
+          </a:xfrm>
+          <a:prstGeom prst="rect">
+            <a:avLst/>
+          </a:prstGeom>
+          <a:noFill/>
+          <a:ln/>
+        </p:spPr>
+        <p:txBody>
+          <a:bodyPr wrap="square" lIns="0" tIns="0" rIns="0" bIns="0" rtlCol="0" anchor="ctr"/>
+          <a:lstStyle/>
+          <a:p>
+            <a:pPr algn="ctr" indent="0" marL="0">
+              <a:buNone/>
+            </a:pPr>
+            <a:r>
+              <a:rPr lang="en-US" sz="1500" b="1" dirty="0">
+                <a:solidFill>
+                  <a:srgbClr val="2E1214"/>
+                </a:solidFill>
+                <a:latin typeface="Cambria" pitchFamily="34" charset="0"/>
+                <a:ea typeface="Cambria" pitchFamily="34" charset="-122"/>
+                <a:cs typeface="Cambria" pitchFamily="34" charset="-120"/>
+              </a:rPr>
+              <a:t>4</a:t>
+            </a:r>
+            <a:endParaRPr lang="en-US" sz="1500" dirty="0"/>
+          </a:p>
+        </p:txBody>
+      </p:sp>
+      <p:sp>
+        <p:nvSpPr>
+          <p:cNvPr id="15" name="Text 13"/>
+          <p:cNvSpPr/>
+          <p:nvPr/>
+        </p:nvSpPr>
+        <p:spPr>
+          <a:xfrm>
+            <a:off x="1371600" y="4416552"/>
+            <a:ext cx="10241280" cy="868680"/>
+          </a:xfrm>
+          <a:prstGeom prst="rect">
+            <a:avLst/>
+          </a:prstGeom>
+          <a:noFill/>
+          <a:ln/>
+        </p:spPr>
+        <p:txBody>
+          <a:bodyPr wrap="square" lIns="0" tIns="0" rIns="0" bIns="0" rtlCol="0" anchor="ctr"/>
+          <a:lstStyle/>
+          <a:p>
+            <a:pPr indent="0" marL="0">
+              <a:buNone/>
+            </a:pPr>
+            <a:r>
+              <a:rPr lang="en-US" sz="1400" b="1" dirty="0">
+                <a:solidFill>
+                  <a:srgbClr val="FFFFFF"/>
+                </a:solidFill>
+                <a:latin typeface="Calibri" pitchFamily="34" charset="0"/>
+                <a:ea typeface="Calibri" pitchFamily="34" charset="-122"/>
+                <a:cs typeface="Calibri" pitchFamily="34" charset="-120"/>
+              </a:rPr>
+              <a:t>The glandular insert is visible in the errors:  </a:t>
+            </a:r>
+            <a:pPr indent="0" marL="0">
+              <a:buNone/>
+            </a:pPr>
+            <a:r>
+              <a:rPr lang="en-US" sz="1400" dirty="0">
+                <a:solidFill>
+                  <a:srgbClr val="EAD3CB"/>
+                </a:solidFill>
+                <a:latin typeface="Calibri" pitchFamily="34" charset="0"/>
+                <a:ea typeface="Calibri" pitchFamily="34" charset="-122"/>
+                <a:cs typeface="Calibri" pitchFamily="34" charset="-120"/>
+              </a:rPr>
+              <a:t>LOPO predictions pull inward and concentrate over the traced insert, which the CNN never sampled.</a:t>
+            </a:r>
+            <a:endParaRPr lang="en-US" sz="1400" dirty="0"/>
+          </a:p>
+        </p:txBody>
+      </p:sp>
+      <p:sp>
+        <p:nvSpPr>
+          <p:cNvPr id="16" name="Shape 14"/>
+          <p:cNvSpPr/>
+          <p:nvPr/>
+        </p:nvSpPr>
+        <p:spPr>
+          <a:xfrm>
+            <a:off x="822960" y="5477256"/>
+            <a:ext cx="384048" cy="384048"/>
+          </a:xfrm>
+          <a:prstGeom prst="ellipse">
+            <a:avLst/>
+          </a:prstGeom>
+          <a:solidFill>
+            <a:srgbClr val="C8890B"/>
+          </a:solidFill>
+          <a:ln/>
+        </p:spPr>
+      </p:sp>
+      <p:sp>
+        <p:nvSpPr>
+          <p:cNvPr id="17" name="Text 15"/>
+          <p:cNvSpPr/>
+          <p:nvPr/>
+        </p:nvSpPr>
+        <p:spPr>
+          <a:xfrm>
+            <a:off x="822960" y="5477256"/>
+            <a:ext cx="384048" cy="384048"/>
+          </a:xfrm>
+          <a:prstGeom prst="rect">
+            <a:avLst/>
+          </a:prstGeom>
+          <a:noFill/>
+          <a:ln/>
+        </p:spPr>
+        <p:txBody>
+          <a:bodyPr wrap="square" lIns="0" tIns="0" rIns="0" bIns="0" rtlCol="0" anchor="ctr"/>
+          <a:lstStyle/>
+          <a:p>
+            <a:pPr algn="ctr" indent="0" marL="0">
+              <a:buNone/>
+            </a:pPr>
+            <a:r>
+              <a:rPr lang="en-US" sz="1500" b="1" dirty="0">
+                <a:solidFill>
+                  <a:srgbClr val="2E1214"/>
+                </a:solidFill>
+                <a:latin typeface="Cambria" pitchFamily="34" charset="0"/>
+                <a:ea typeface="Cambria" pitchFamily="34" charset="-122"/>
+                <a:cs typeface="Cambria" pitchFamily="34" charset="-120"/>
+              </a:rPr>
+              <a:t>5</a:t>
+            </a:r>
+            <a:endParaRPr lang="en-US" sz="1500" dirty="0"/>
+          </a:p>
+        </p:txBody>
+      </p:sp>
+      <p:sp>
+        <p:nvSpPr>
           <p:cNvPr id="18" name="Text 16"/>
+          <p:cNvSpPr/>
+          <p:nvPr/>
+        </p:nvSpPr>
+        <p:spPr>
+          <a:xfrm>
+            <a:off x="1371600" y="5385816"/>
+            <a:ext cx="10241280" cy="868680"/>
+          </a:xfrm>
+          <a:prstGeom prst="rect">
+            <a:avLst/>
+          </a:prstGeom>
+          <a:noFill/>
+          <a:ln/>
+        </p:spPr>
+        <p:txBody>
+          <a:bodyPr wrap="square" lIns="0" tIns="0" rIns="0" bIns="0" rtlCol="0" anchor="ctr"/>
+          <a:lstStyle/>
+          <a:p>
+            <a:pPr indent="0" marL="0">
+              <a:buNone/>
+            </a:pPr>
+            <a:r>
+              <a:rPr lang="en-US" sz="1400" b="1" dirty="0">
+                <a:solidFill>
+                  <a:srgbClr val="FFFFFF"/>
+                </a:solidFill>
+                <a:latin typeface="Calibri" pitchFamily="34" charset="0"/>
+                <a:ea typeface="Calibri" pitchFamily="34" charset="-122"/>
+                <a:cs typeface="Calibri" pitchFamily="34" charset="-120"/>
+              </a:rPr>
+              <a:t>Mixup is the one lever that helps:  </a:t>
+            </a:r>
+            <a:pPr indent="0" marL="0">
+              <a:buNone/>
+            </a:pPr>
+            <a:r>
+              <a:rPr lang="en-US" sz="1400" dirty="0">
+                <a:solidFill>
+                  <a:srgbClr val="EAD3CB"/>
+                </a:solidFill>
+                <a:latin typeface="Calibri" pitchFamily="34" charset="0"/>
+                <a:ea typeface="Calibri" pitchFamily="34" charset="-122"/>
+                <a:cs typeface="Calibri" pitchFamily="34" charset="-120"/>
+              </a:rPr>
+              <a:t>teaching a smooth signal-to-coordinate map cuts error 14 percent; validation-splitting and heatmap output hurt on this small set.</a:t>
+            </a:r>
+            <a:endParaRPr lang="en-US" sz="1400" dirty="0"/>
+          </a:p>
+        </p:txBody>
+      </p:sp>
+      <p:sp>
+        <p:nvSpPr>
+          <p:cNvPr id="19" name="Text 17"/>
           <p:cNvSpPr/>
           <p:nvPr/>
         </p:nvSpPr>
@@ -4740,7 +5822,7 @@
             <a:r>
               <a:rPr lang="en-US" sz="1100" dirty="0">
                 <a:solidFill>
-                  <a:srgbClr val="1C9AA8"/>
+                  <a:srgbClr val="C8890B"/>
                 </a:solidFill>
                 <a:latin typeface="Calibri" pitchFamily="34" charset="0"/>
                 <a:ea typeface="Calibri" pitchFamily="34" charset="-122"/>
@@ -4811,7 +5893,7 @@
             <a:r>
               <a:rPr lang="en-US" sz="2900" b="1" dirty="0">
                 <a:solidFill>
-                  <a:srgbClr val="1E293B"/>
+                  <a:srgbClr val="2A1618"/>
                 </a:solidFill>
                 <a:latin typeface="Cambria" pitchFamily="34" charset="0"/>
                 <a:ea typeface="Cambria" pitchFamily="34" charset="-122"/>
@@ -4850,13 +5932,13 @@
             <a:r>
               <a:rPr lang="en-US" sz="1400" b="1" dirty="0">
                 <a:solidFill>
-                  <a:srgbClr val="1C9AA8"/>
+                  <a:srgbClr val="BE0000"/>
                 </a:solidFill>
                 <a:latin typeface="Calibri" pitchFamily="34" charset="0"/>
                 <a:ea typeface="Calibri" pitchFamily="34" charset="-122"/>
                 <a:cs typeface="Calibri" pitchFamily="34" charset="-120"/>
               </a:rPr>
-              <a:t>4-port VNA · A3 breast phantom in canola oil · Sam Medium antennas</a:t>
+              <a:t>4-port VNA, A3 breast phantom in canola oil, Sam Medium antennas</a:t>
             </a:r>
             <a:endParaRPr lang="en-US" sz="1400" dirty="0"/>
           </a:p>
@@ -4879,17 +5961,17 @@
             </a:avLst>
           </a:prstGeom>
           <a:solidFill>
-            <a:srgbClr val="F3F7FA"/>
+            <a:srgbClr val="FBF4F2"/>
           </a:solidFill>
           <a:ln w="12700">
             <a:solidFill>
-              <a:srgbClr val="D8E2EA"/>
+              <a:srgbClr val="E7D6D1"/>
             </a:solidFill>
             <a:prstDash val="solid"/>
           </a:ln>
           <a:effectLst>
             <a:outerShdw sx="100000" sy="100000" kx="0" ky="0" algn="bl" rotWithShape="0" blurRad="88900" dist="38100" dir="5400000">
-              <a:srgbClr val="5B6B7B">
+              <a:srgbClr val="7A5C5E">
                 <a:alpha val="18000"/>
               </a:srgbClr>
             </a:outerShdw>
@@ -4911,7 +5993,7 @@
             <a:avLst/>
           </a:prstGeom>
           <a:solidFill>
-            <a:srgbClr val="0B5D7A"/>
+            <a:srgbClr val="BE0000"/>
           </a:solidFill>
           <a:ln/>
         </p:spPr>
@@ -4982,7 +6064,7 @@
             <a:r>
               <a:rPr lang="en-US" sz="1700" b="1" dirty="0">
                 <a:solidFill>
-                  <a:srgbClr val="0B5D7A"/>
+                  <a:srgbClr val="BE0000"/>
                 </a:solidFill>
                 <a:latin typeface="Cambria" pitchFamily="34" charset="0"/>
                 <a:ea typeface="Cambria" pitchFamily="34" charset="-122"/>
@@ -5002,8 +6084,8 @@
         </p:nvSpPr>
         <p:spPr>
           <a:xfrm>
-            <a:off x="3886200" y="1673352"/>
-            <a:ext cx="7571232" cy="877824"/>
+            <a:off x="3886200" y="1655064"/>
+            <a:ext cx="7571232" cy="914400"/>
           </a:xfrm>
           <a:prstGeom prst="rect">
             <a:avLst/>
@@ -5019,17 +6101,17 @@
               <a:buNone/>
             </a:pPr>
             <a:r>
-              <a:rPr lang="en-US" sz="1300" dirty="0">
-                <a:solidFill>
-                  <a:srgbClr val="1E293B"/>
+              <a:rPr lang="en-US" sz="1270" dirty="0">
+                <a:solidFill>
+                  <a:srgbClr val="2A1618"/>
                 </a:solidFill>
                 <a:latin typeface="Calibri" pitchFamily="34" charset="0"/>
                 <a:ea typeface="Calibri" pitchFamily="34" charset="-122"/>
                 <a:cs typeface="Calibri" pitchFamily="34" charset="-120"/>
               </a:rPr>
-              <a:t>A3 breast phantom submerged in canola oil (breast-tissue-like permittivity). A metal 'fishing-weight' tumor is moved to each grid position.</a:t>
-            </a:r>
-            <a:endParaRPr lang="en-US" sz="1300" dirty="0"/>
+              <a:t>A3 breast phantom submerged in canola oil (breast-tissue-like permittivity). A metal fishing-weight tumor is moved to each grid position.</a:t>
+            </a:r>
+            <a:endParaRPr lang="en-US" sz="1270" dirty="0"/>
           </a:p>
         </p:txBody>
       </p:sp>
@@ -5050,17 +6132,17 @@
             </a:avLst>
           </a:prstGeom>
           <a:solidFill>
-            <a:srgbClr val="F3F7FA"/>
+            <a:srgbClr val="FBF4F2"/>
           </a:solidFill>
           <a:ln w="12700">
             <a:solidFill>
-              <a:srgbClr val="D8E2EA"/>
+              <a:srgbClr val="E7D6D1"/>
             </a:solidFill>
             <a:prstDash val="solid"/>
           </a:ln>
           <a:effectLst>
             <a:outerShdw sx="100000" sy="100000" kx="0" ky="0" algn="bl" rotWithShape="0" blurRad="88900" dist="38100" dir="5400000">
-              <a:srgbClr val="5B6B7B">
+              <a:srgbClr val="7A5C5E">
                 <a:alpha val="18000"/>
               </a:srgbClr>
             </a:outerShdw>
@@ -5082,7 +6164,7 @@
             <a:avLst/>
           </a:prstGeom>
           <a:solidFill>
-            <a:srgbClr val="0B5D7A"/>
+            <a:srgbClr val="BE0000"/>
           </a:solidFill>
           <a:ln/>
         </p:spPr>
@@ -5153,7 +6235,7 @@
             <a:r>
               <a:rPr lang="en-US" sz="1700" b="1" dirty="0">
                 <a:solidFill>
-                  <a:srgbClr val="0B5D7A"/>
+                  <a:srgbClr val="BE0000"/>
                 </a:solidFill>
                 <a:latin typeface="Cambria" pitchFamily="34" charset="0"/>
                 <a:ea typeface="Cambria" pitchFamily="34" charset="-122"/>
@@ -5173,8 +6255,8 @@
         </p:nvSpPr>
         <p:spPr>
           <a:xfrm>
-            <a:off x="3886200" y="2843784"/>
-            <a:ext cx="7571232" cy="877824"/>
+            <a:off x="3886200" y="2825496"/>
+            <a:ext cx="7571232" cy="914400"/>
           </a:xfrm>
           <a:prstGeom prst="rect">
             <a:avLst/>
@@ -5190,17 +6272,17 @@
               <a:buNone/>
             </a:pPr>
             <a:r>
-              <a:rPr lang="en-US" sz="1300" dirty="0">
-                <a:solidFill>
-                  <a:srgbClr val="1E293B"/>
+              <a:rPr lang="en-US" sz="1270" dirty="0">
+                <a:solidFill>
+                  <a:srgbClr val="2A1618"/>
                 </a:solidFill>
                 <a:latin typeface="Calibri" pitchFamily="34" charset="0"/>
                 <a:ea typeface="Calibri" pitchFamily="34" charset="-122"/>
                 <a:cs typeface="Calibri" pitchFamily="34" charset="-120"/>
               </a:rPr>
-              <a:t>4 antennas → 4-port VNA. Full 4×4 S-matrix (16 S-parameters), magnitude+phase, swept 0.1–8 GHz (791 points).</a:t>
-            </a:r>
-            <a:endParaRPr lang="en-US" sz="1300" dirty="0"/>
+              <a:t>4 antennas into a 4-port VNA. Full 4x4 S-matrix (16 S-parameters), magnitude and phase, swept 0.1 to 8 GHz (791 points).</a:t>
+            </a:r>
+            <a:endParaRPr lang="en-US" sz="1270" dirty="0"/>
           </a:p>
         </p:txBody>
       </p:sp>
@@ -5221,17 +6303,17 @@
             </a:avLst>
           </a:prstGeom>
           <a:solidFill>
-            <a:srgbClr val="F3F7FA"/>
+            <a:srgbClr val="FBF4F2"/>
           </a:solidFill>
           <a:ln w="12700">
             <a:solidFill>
-              <a:srgbClr val="D8E2EA"/>
+              <a:srgbClr val="E7D6D1"/>
             </a:solidFill>
             <a:prstDash val="solid"/>
           </a:ln>
           <a:effectLst>
             <a:outerShdw sx="100000" sy="100000" kx="0" ky="0" algn="bl" rotWithShape="0" blurRad="88900" dist="38100" dir="5400000">
-              <a:srgbClr val="5B6B7B">
+              <a:srgbClr val="7A5C5E">
                 <a:alpha val="18000"/>
               </a:srgbClr>
             </a:outerShdw>
@@ -5253,7 +6335,7 @@
             <a:avLst/>
           </a:prstGeom>
           <a:solidFill>
-            <a:srgbClr val="0B5D7A"/>
+            <a:srgbClr val="BE0000"/>
           </a:solidFill>
           <a:ln/>
         </p:spPr>
@@ -5324,7 +6406,7 @@
             <a:r>
               <a:rPr lang="en-US" sz="1700" b="1" dirty="0">
                 <a:solidFill>
-                  <a:srgbClr val="0B5D7A"/>
+                  <a:srgbClr val="BE0000"/>
                 </a:solidFill>
                 <a:latin typeface="Cambria" pitchFamily="34" charset="0"/>
                 <a:ea typeface="Cambria" pitchFamily="34" charset="-122"/>
@@ -5344,8 +6426,8 @@
         </p:nvSpPr>
         <p:spPr>
           <a:xfrm>
-            <a:off x="3886200" y="4014216"/>
-            <a:ext cx="7571232" cy="877824"/>
+            <a:off x="3886200" y="3995928"/>
+            <a:ext cx="7571232" cy="914400"/>
           </a:xfrm>
           <a:prstGeom prst="rect">
             <a:avLst/>
@@ -5361,17 +6443,17 @@
               <a:buNone/>
             </a:pPr>
             <a:r>
-              <a:rPr lang="en-US" sz="1300" dirty="0">
-                <a:solidFill>
-                  <a:srgbClr val="1E293B"/>
+              <a:rPr lang="en-US" sz="1270" dirty="0">
+                <a:solidFill>
+                  <a:srgbClr val="2A1618"/>
                 </a:solidFill>
                 <a:latin typeface="Calibri" pitchFamily="34" charset="0"/>
                 <a:ea typeface="Calibri" pitchFamily="34" charset="-122"/>
                 <a:cs typeface="Calibri" pitchFamily="34" charset="-120"/>
               </a:rPr>
-              <a:t>6×6 array of cells, pitch ≈25.4×23.85 mm. Each cell has 4 sub-positions at its corners (±9.5 mm). ~51 sub-positions measured on the empty phantom.</a:t>
-            </a:r>
-            <a:endParaRPr lang="en-US" sz="1300" dirty="0"/>
+              <a:t>6x6 array of cells, pitch about 25.4 x 23.85 mm. Each cell has 4 sub-positions at its corners (about 9.5 mm in). Roughly 51 sub-positions on the empty phantom.</a:t>
+            </a:r>
+            <a:endParaRPr lang="en-US" sz="1270" dirty="0"/>
           </a:p>
         </p:txBody>
       </p:sp>
@@ -5392,17 +6474,17 @@
             </a:avLst>
           </a:prstGeom>
           <a:solidFill>
-            <a:srgbClr val="F3F7FA"/>
+            <a:srgbClr val="FBF4F2"/>
           </a:solidFill>
           <a:ln w="12700">
             <a:solidFill>
-              <a:srgbClr val="D8E2EA"/>
+              <a:srgbClr val="E7D6D1"/>
             </a:solidFill>
             <a:prstDash val="solid"/>
           </a:ln>
           <a:effectLst>
             <a:outerShdw sx="100000" sy="100000" kx="0" ky="0" algn="bl" rotWithShape="0" blurRad="88900" dist="38100" dir="5400000">
-              <a:srgbClr val="5B6B7B">
+              <a:srgbClr val="7A5C5E">
                 <a:alpha val="18000"/>
               </a:srgbClr>
             </a:outerShdw>
@@ -5424,7 +6506,7 @@
             <a:avLst/>
           </a:prstGeom>
           <a:solidFill>
-            <a:srgbClr val="0B5D7A"/>
+            <a:srgbClr val="BE0000"/>
           </a:solidFill>
           <a:ln/>
         </p:spPr>
@@ -5495,7 +6577,7 @@
             <a:r>
               <a:rPr lang="en-US" sz="1700" b="1" dirty="0">
                 <a:solidFill>
-                  <a:srgbClr val="0B5D7A"/>
+                  <a:srgbClr val="BE0000"/>
                 </a:solidFill>
                 <a:latin typeface="Cambria" pitchFamily="34" charset="0"/>
                 <a:ea typeface="Cambria" pitchFamily="34" charset="-122"/>
@@ -5515,8 +6597,8 @@
         </p:nvSpPr>
         <p:spPr>
           <a:xfrm>
-            <a:off x="3886200" y="5184648"/>
-            <a:ext cx="7571232" cy="877824"/>
+            <a:off x="3886200" y="5166360"/>
+            <a:ext cx="7571232" cy="914400"/>
           </a:xfrm>
           <a:prstGeom prst="rect">
             <a:avLst/>
@@ -5532,17 +6614,17 @@
               <a:buNone/>
             </a:pPr>
             <a:r>
-              <a:rPr lang="en-US" sz="1300" dirty="0">
-                <a:solidFill>
-                  <a:srgbClr val="1E293B"/>
+              <a:rPr lang="en-US" sz="1270" dirty="0">
+                <a:solidFill>
+                  <a:srgbClr val="2A1618"/>
                 </a:solidFill>
                 <a:latin typeface="Calibri" pitchFamily="34" charset="0"/>
                 <a:ea typeface="Calibri" pitchFamily="34" charset="-122"/>
                 <a:cs typeface="Calibri" pitchFamily="34" charset="-120"/>
               </a:rPr>
-              <a:t>16 takes per position; 3 sessions per phantom (re-set between sessions → real drift). Three phantom variants: empty, F4 (small glandular insert), F5 (large insert).</a:t>
-            </a:r>
-            <a:endParaRPr lang="en-US" sz="1300" dirty="0"/>
+              <a:t>16 takes per position; 3 to 4 sessions per phantom (re-set between sessions, so real drift). Three variants: empty, F4 (small insert), F5 (large insert).</a:t>
+            </a:r>
+            <a:endParaRPr lang="en-US" sz="1270" dirty="0"/>
           </a:p>
         </p:txBody>
       </p:sp>
@@ -5605,7 +6687,7 @@
             <a:r>
               <a:rPr lang="en-US" sz="2900" b="1" dirty="0">
                 <a:solidFill>
-                  <a:srgbClr val="1E293B"/>
+                  <a:srgbClr val="2A1618"/>
                 </a:solidFill>
                 <a:latin typeface="Cambria" pitchFamily="34" charset="0"/>
                 <a:ea typeface="Cambria" pitchFamily="34" charset="-122"/>
@@ -5644,13 +6726,13 @@
             <a:r>
               <a:rPr lang="en-US" sz="1400" b="1" dirty="0">
                 <a:solidFill>
-                  <a:srgbClr val="1C9AA8"/>
+                  <a:srgbClr val="BE0000"/>
                 </a:solidFill>
                 <a:latin typeface="Calibri" pitchFamily="34" charset="0"/>
                 <a:ea typeface="Calibri" pitchFamily="34" charset="-122"/>
                 <a:cs typeface="Calibri" pitchFamily="34" charset="-120"/>
               </a:rPr>
-              <a:t>Same CNN &amp; MLP as the classifier — the head swapped for coordinate regression</a:t>
+              <a:t>Same CNN and MLP as the classifier, with the head swapped for coordinate regression</a:t>
             </a:r>
             <a:endParaRPr lang="en-US" sz="1400" dirty="0"/>
           </a:p>
@@ -5673,17 +6755,17 @@
             </a:avLst>
           </a:prstGeom>
           <a:solidFill>
-            <a:srgbClr val="F3F7FA"/>
+            <a:srgbClr val="FBF4F2"/>
           </a:solidFill>
           <a:ln w="12700">
             <a:solidFill>
-              <a:srgbClr val="D8E2EA"/>
+              <a:srgbClr val="E7D6D1"/>
             </a:solidFill>
             <a:prstDash val="solid"/>
           </a:ln>
           <a:effectLst>
             <a:outerShdw sx="100000" sy="100000" kx="0" ky="0" algn="bl" rotWithShape="0" blurRad="88900" dist="38100" dir="5400000">
-              <a:srgbClr val="5B6B7B">
+              <a:srgbClr val="7A5C5E">
                 <a:alpha val="18000"/>
               </a:srgbClr>
             </a:outerShdw>
@@ -5705,7 +6787,7 @@
             <a:avLst/>
           </a:prstGeom>
           <a:solidFill>
-            <a:srgbClr val="1C9AA8"/>
+            <a:srgbClr val="BE0000"/>
           </a:solidFill>
           <a:ln/>
         </p:spPr>
@@ -5758,7 +6840,7 @@
         <p:spPr>
           <a:xfrm>
             <a:off x="1508760" y="1746504"/>
-            <a:ext cx="2194560" cy="731520"/>
+            <a:ext cx="2286000" cy="731520"/>
           </a:xfrm>
           <a:prstGeom prst="rect">
             <a:avLst/>
@@ -5776,7 +6858,7 @@
             <a:r>
               <a:rPr lang="en-US" sz="1700" b="1" dirty="0">
                 <a:solidFill>
-                  <a:srgbClr val="1C9AA8"/>
+                  <a:srgbClr val="BE0000"/>
                 </a:solidFill>
                 <a:latin typeface="Cambria" pitchFamily="34" charset="0"/>
                 <a:ea typeface="Cambria" pitchFamily="34" charset="-122"/>
@@ -5796,8 +6878,8 @@
         </p:nvSpPr>
         <p:spPr>
           <a:xfrm>
-            <a:off x="3749040" y="1655064"/>
-            <a:ext cx="7708392" cy="914400"/>
+            <a:off x="3886200" y="1655064"/>
+            <a:ext cx="7571232" cy="914400"/>
           </a:xfrm>
           <a:prstGeom prst="rect">
             <a:avLst/>
@@ -5813,17 +6895,17 @@
               <a:buNone/>
             </a:pPr>
             <a:r>
-              <a:rPr lang="en-US" sz="1250" dirty="0">
-                <a:solidFill>
-                  <a:srgbClr val="1E293B"/>
+              <a:rPr lang="en-US" sz="1270" dirty="0">
+                <a:solidFill>
+                  <a:srgbClr val="2A1618"/>
                 </a:solidFill>
                 <a:latin typeface="Calibri" pitchFamily="34" charset="0"/>
                 <a:ea typeface="Calibri" pitchFamily="34" charset="-122"/>
                 <a:cs typeface="Calibri" pitchFamily="34" charset="-120"/>
               </a:rPr>
-              <a:t>Grid label RnCmPp → true (x,y) in inches (±0.375 in corner offsets; photo-digitized where an insert blocked a corner). Never snapped to a grid point.</a:t>
-            </a:r>
-            <a:endParaRPr lang="en-US" sz="1250" dirty="0"/>
+              <a:t>Grid label RnCmPp to a true (x,y) in inches (corner offsets of 0.375 in; photo-digitized where an insert blocked a corner). Never snapped to a grid point.</a:t>
+            </a:r>
+            <a:endParaRPr lang="en-US" sz="1270" dirty="0"/>
           </a:p>
         </p:txBody>
       </p:sp>
@@ -5844,17 +6926,17 @@
             </a:avLst>
           </a:prstGeom>
           <a:solidFill>
-            <a:srgbClr val="F3F7FA"/>
+            <a:srgbClr val="FBF4F2"/>
           </a:solidFill>
           <a:ln w="12700">
             <a:solidFill>
-              <a:srgbClr val="D8E2EA"/>
+              <a:srgbClr val="E7D6D1"/>
             </a:solidFill>
             <a:prstDash val="solid"/>
           </a:ln>
           <a:effectLst>
             <a:outerShdw sx="100000" sy="100000" kx="0" ky="0" algn="bl" rotWithShape="0" blurRad="88900" dist="38100" dir="5400000">
-              <a:srgbClr val="5B6B7B">
+              <a:srgbClr val="7A5C5E">
                 <a:alpha val="18000"/>
               </a:srgbClr>
             </a:outerShdw>
@@ -5876,7 +6958,7 @@
             <a:avLst/>
           </a:prstGeom>
           <a:solidFill>
-            <a:srgbClr val="1C9AA8"/>
+            <a:srgbClr val="BE0000"/>
           </a:solidFill>
           <a:ln/>
         </p:spPr>
@@ -5929,7 +7011,7 @@
         <p:spPr>
           <a:xfrm>
             <a:off x="1508760" y="2916936"/>
-            <a:ext cx="2194560" cy="731520"/>
+            <a:ext cx="2286000" cy="731520"/>
           </a:xfrm>
           <a:prstGeom prst="rect">
             <a:avLst/>
@@ -5947,7 +7029,7 @@
             <a:r>
               <a:rPr lang="en-US" sz="1700" b="1" dirty="0">
                 <a:solidFill>
-                  <a:srgbClr val="1C9AA8"/>
+                  <a:srgbClr val="BE0000"/>
                 </a:solidFill>
                 <a:latin typeface="Cambria" pitchFamily="34" charset="0"/>
                 <a:ea typeface="Cambria" pitchFamily="34" charset="-122"/>
@@ -5967,8 +7049,8 @@
         </p:nvSpPr>
         <p:spPr>
           <a:xfrm>
-            <a:off x="3749040" y="2825496"/>
-            <a:ext cx="7708392" cy="914400"/>
+            <a:off x="3886200" y="2825496"/>
+            <a:ext cx="7571232" cy="914400"/>
           </a:xfrm>
           <a:prstGeom prst="rect">
             <a:avLst/>
@@ -5984,17 +7066,17 @@
               <a:buNone/>
             </a:pPr>
             <a:r>
-              <a:rPr lang="en-US" sz="1250" dirty="0">
-                <a:solidFill>
-                  <a:srgbClr val="1E293B"/>
+              <a:rPr lang="en-US" sz="1270" dirty="0">
+                <a:solidFill>
+                  <a:srgbClr val="2A1618"/>
                 </a:solidFill>
                 <a:latin typeface="Calibri" pitchFamily="34" charset="0"/>
                 <a:ea typeface="Calibri" pitchFamily="34" charset="-122"/>
                 <a:cs typeface="Calibri" pitchFamily="34" charset="-120"/>
               </a:rPr>
-              <a:t>CNN: conv trunk (32→32) → fc(2) + regression. MLP: 3-seed ensemble. Input = raw 16 S-params as a 32×freq image; per-session z-score; v2 preprocessing (no session-mean).</a:t>
-            </a:r>
-            <a:endParaRPr lang="en-US" sz="1250" dirty="0"/>
+              <a:t>CNN: conv trunk (32 to 32) then fc(2) + regression. MLP: 3-seed ensemble. Input = raw 16 S-params as a 32 x freq image; per-session z-score; v2 preprocessing.</a:t>
+            </a:r>
+            <a:endParaRPr lang="en-US" sz="1270" dirty="0"/>
           </a:p>
         </p:txBody>
       </p:sp>
@@ -6015,17 +7097,17 @@
             </a:avLst>
           </a:prstGeom>
           <a:solidFill>
-            <a:srgbClr val="F3F7FA"/>
+            <a:srgbClr val="FBF4F2"/>
           </a:solidFill>
           <a:ln w="12700">
             <a:solidFill>
-              <a:srgbClr val="D8E2EA"/>
+              <a:srgbClr val="E7D6D1"/>
             </a:solidFill>
             <a:prstDash val="solid"/>
           </a:ln>
           <a:effectLst>
             <a:outerShdw sx="100000" sy="100000" kx="0" ky="0" algn="bl" rotWithShape="0" blurRad="88900" dist="38100" dir="5400000">
-              <a:srgbClr val="5B6B7B">
+              <a:srgbClr val="7A5C5E">
                 <a:alpha val="18000"/>
               </a:srgbClr>
             </a:outerShdw>
@@ -6047,7 +7129,7 @@
             <a:avLst/>
           </a:prstGeom>
           <a:solidFill>
-            <a:srgbClr val="1C9AA8"/>
+            <a:srgbClr val="BE0000"/>
           </a:solidFill>
           <a:ln/>
         </p:spPr>
@@ -6100,7 +7182,7 @@
         <p:spPr>
           <a:xfrm>
             <a:off x="1508760" y="4087368"/>
-            <a:ext cx="2194560" cy="731520"/>
+            <a:ext cx="2286000" cy="731520"/>
           </a:xfrm>
           <a:prstGeom prst="rect">
             <a:avLst/>
@@ -6118,7 +7200,7 @@
             <a:r>
               <a:rPr lang="en-US" sz="1700" b="1" dirty="0">
                 <a:solidFill>
-                  <a:srgbClr val="1C9AA8"/>
+                  <a:srgbClr val="BE0000"/>
                 </a:solidFill>
                 <a:latin typeface="Cambria" pitchFamily="34" charset="0"/>
                 <a:ea typeface="Cambria" pitchFamily="34" charset="-122"/>
@@ -6138,8 +7220,8 @@
         </p:nvSpPr>
         <p:spPr>
           <a:xfrm>
-            <a:off x="3749040" y="3995928"/>
-            <a:ext cx="7708392" cy="914400"/>
+            <a:off x="3886200" y="3995928"/>
+            <a:ext cx="7571232" cy="914400"/>
           </a:xfrm>
           <a:prstGeom prst="rect">
             <a:avLst/>
@@ -6155,17 +7237,17 @@
               <a:buNone/>
             </a:pPr>
             <a:r>
-              <a:rPr lang="en-US" sz="1250" dirty="0">
-                <a:solidFill>
-                  <a:srgbClr val="1E293B"/>
+              <a:rPr lang="en-US" sz="1270" dirty="0">
+                <a:solidFill>
+                  <a:srgbClr val="2A1618"/>
                 </a:solidFill>
                 <a:latin typeface="Calibri" pitchFamily="34" charset="0"/>
                 <a:ea typeface="Calibri" pitchFamily="34" charset="-122"/>
                 <a:cs typeface="Calibri" pitchFamily="34" charset="-120"/>
               </a:rPr>
-              <a:t>Euclidean error in inches (×25.4 = mm). Median error + % within the 0.5-in half-cell; near-insert vs exterior reported separately.</a:t>
-            </a:r>
-            <a:endParaRPr lang="en-US" sz="1250" dirty="0"/>
+              <a:t>Euclidean error in inches (x25.4 = mm). Median error plus percent within the 0.5 in half-cell.</a:t>
+            </a:r>
+            <a:endParaRPr lang="en-US" sz="1270" dirty="0"/>
           </a:p>
         </p:txBody>
       </p:sp>
@@ -6186,17 +7268,17 @@
             </a:avLst>
           </a:prstGeom>
           <a:solidFill>
-            <a:srgbClr val="F3F7FA"/>
+            <a:srgbClr val="FBF4F2"/>
           </a:solidFill>
           <a:ln w="12700">
             <a:solidFill>
-              <a:srgbClr val="D8E2EA"/>
+              <a:srgbClr val="E7D6D1"/>
             </a:solidFill>
             <a:prstDash val="solid"/>
           </a:ln>
           <a:effectLst>
             <a:outerShdw sx="100000" sy="100000" kx="0" ky="0" algn="bl" rotWithShape="0" blurRad="88900" dist="38100" dir="5400000">
-              <a:srgbClr val="5B6B7B">
+              <a:srgbClr val="7A5C5E">
                 <a:alpha val="18000"/>
               </a:srgbClr>
             </a:outerShdw>
@@ -6218,7 +7300,7 @@
             <a:avLst/>
           </a:prstGeom>
           <a:solidFill>
-            <a:srgbClr val="1C9AA8"/>
+            <a:srgbClr val="BE0000"/>
           </a:solidFill>
           <a:ln/>
         </p:spPr>
@@ -6271,7 +7353,7 @@
         <p:spPr>
           <a:xfrm>
             <a:off x="1508760" y="5257800"/>
-            <a:ext cx="2194560" cy="731520"/>
+            <a:ext cx="2286000" cy="731520"/>
           </a:xfrm>
           <a:prstGeom prst="rect">
             <a:avLst/>
@@ -6289,7 +7371,7 @@
             <a:r>
               <a:rPr lang="en-US" sz="1700" b="1" dirty="0">
                 <a:solidFill>
-                  <a:srgbClr val="1C9AA8"/>
+                  <a:srgbClr val="BE0000"/>
                 </a:solidFill>
                 <a:latin typeface="Cambria" pitchFamily="34" charset="0"/>
                 <a:ea typeface="Cambria" pitchFamily="34" charset="-122"/>
@@ -6309,8 +7391,8 @@
         </p:nvSpPr>
         <p:spPr>
           <a:xfrm>
-            <a:off x="3749040" y="5166360"/>
-            <a:ext cx="7708392" cy="914400"/>
+            <a:off x="3886200" y="5166360"/>
+            <a:ext cx="7571232" cy="914400"/>
           </a:xfrm>
           <a:prstGeom prst="rect">
             <a:avLst/>
@@ -6326,17 +7408,17 @@
               <a:buNone/>
             </a:pPr>
             <a:r>
-              <a:rPr lang="en-US" sz="1250" dirty="0">
-                <a:solidFill>
-                  <a:srgbClr val="1E293B"/>
+              <a:rPr lang="en-US" sz="1270" dirty="0">
+                <a:solidFill>
+                  <a:srgbClr val="2A1618"/>
                 </a:solidFill>
                 <a:latin typeface="Calibri" pitchFamily="34" charset="0"/>
                 <a:ea typeface="Calibri" pitchFamily="34" charset="-122"/>
                 <a:cs typeface="Calibri" pitchFamily="34" charset="-120"/>
               </a:rPr>
-              <a:t>LOSO = hold out a whole session. LOPO-cell = hold out a whole 1-in cell. LOPO-subpos = hold out a single sub-position (its cell-mates stay in training).</a:t>
-            </a:r>
-            <a:endParaRPr lang="en-US" sz="1250" dirty="0"/>
+              <a:t>LOSO holds out a whole session. LOPO-cell holds out a whole 1 in cell. LOPO single-position holds out one sub-position (its cell-mates stay in training).</a:t>
+            </a:r>
+            <a:endParaRPr lang="en-US" sz="1270" dirty="0"/>
           </a:p>
         </p:txBody>
       </p:sp>
@@ -6399,13 +7481,13 @@
             <a:r>
               <a:rPr lang="en-US" sz="2900" b="1" dirty="0">
                 <a:solidFill>
-                  <a:srgbClr val="1E293B"/>
+                  <a:srgbClr val="2A1618"/>
                 </a:solidFill>
                 <a:latin typeface="Cambria" pitchFamily="34" charset="0"/>
                 <a:ea typeface="Cambria" pitchFamily="34" charset="-122"/>
                 <a:cs typeface="Cambria" pitchFamily="34" charset="-120"/>
               </a:rPr>
-              <a:t>New scan of a known grid (LOSO)</a:t>
+              <a:t>Three ways to test the model</a:t>
             </a:r>
             <a:endParaRPr lang="en-US" sz="2900" dirty="0"/>
           </a:p>
@@ -6438,62 +7520,46 @@
             <a:r>
               <a:rPr lang="en-US" sz="1400" b="1" dirty="0">
                 <a:solidFill>
-                  <a:srgbClr val="1C9AA8"/>
+                  <a:srgbClr val="BE0000"/>
                 </a:solidFill>
                 <a:latin typeface="Calibri" pitchFamily="34" charset="0"/>
                 <a:ea typeface="Calibri" pitchFamily="34" charset="-122"/>
                 <a:cs typeface="Calibri" pitchFamily="34" charset="-120"/>
               </a:rPr>
-              <a:t>Median localization error — the CNN nails it; the MLP lags and physics features break it</a:t>
+              <a:t>Each hold-out asks a harder question about generalization</a:t>
             </a:r>
             <a:endParaRPr lang="en-US" sz="1400" dirty="0"/>
           </a:p>
         </p:txBody>
       </p:sp>
-      <p:graphicFrame>
-        <p:nvGraphicFramePr>
-          <p:cNvPr id="4" name="Chart 0" descr=""/>
-          <p:cNvGraphicFramePr/>
-          <p:nvPr/>
-        </p:nvGraphicFramePr>
-        <p:xfrm>
-          <a:off x="548640" y="1554480"/>
-          <a:ext cx="6858000" cy="4663440"/>
-        </p:xfrm>
-        <a:graphic xmlns:a="http://schemas.openxmlformats.org/drawingml/2006/main">
-          <a:graphicData uri="http://schemas.openxmlformats.org/drawingml/2006/chart">
-            <c:chart xmlns:c="http://schemas.openxmlformats.org/drawingml/2006/chart" r:id="rId1"/>
-          </a:graphicData>
-        </a:graphic>
-      </p:graphicFrame>
-      <p:sp>
-        <p:nvSpPr>
-          <p:cNvPr id="5" name="Shape 2"/>
-          <p:cNvSpPr/>
-          <p:nvPr/>
-        </p:nvSpPr>
-        <p:spPr>
-          <a:xfrm>
-            <a:off x="7772400" y="1554480"/>
-            <a:ext cx="3840480" cy="4663440"/>
+      <p:sp>
+        <p:nvSpPr>
+          <p:cNvPr id="4" name="Shape 2"/>
+          <p:cNvSpPr/>
+          <p:nvPr/>
+        </p:nvSpPr>
+        <p:spPr>
+          <a:xfrm>
+            <a:off x="640080" y="1600200"/>
+            <a:ext cx="3246120" cy="4526280"/>
           </a:xfrm>
           <a:prstGeom prst="roundRect">
             <a:avLst>
-              <a:gd name="adj" fmla="val 2143"/>
+              <a:gd name="adj" fmla="val 2535"/>
             </a:avLst>
           </a:prstGeom>
           <a:solidFill>
-            <a:srgbClr val="F3F7FA"/>
+            <a:srgbClr val="FBF4F2"/>
           </a:solidFill>
           <a:ln w="12700">
             <a:solidFill>
-              <a:srgbClr val="D8E2EA"/>
+              <a:srgbClr val="E7D6D1"/>
             </a:solidFill>
             <a:prstDash val="solid"/>
           </a:ln>
           <a:effectLst>
             <a:outerShdw sx="100000" sy="100000" kx="0" ky="0" algn="bl" rotWithShape="0" blurRad="88900" dist="38100" dir="5400000">
-              <a:srgbClr val="5B6B7B">
+              <a:srgbClr val="7A5C5E">
                 <a:alpha val="18000"/>
               </a:srgbClr>
             </a:outerShdw>
@@ -6502,14 +7568,14 @@
       </p:sp>
       <p:sp>
         <p:nvSpPr>
-          <p:cNvPr id="6" name="Text 3"/>
-          <p:cNvSpPr/>
-          <p:nvPr/>
-        </p:nvSpPr>
-        <p:spPr>
-          <a:xfrm>
-            <a:off x="8001000" y="1737360"/>
-            <a:ext cx="3383280" cy="365760"/>
+          <p:cNvPr id="5" name="Text 3"/>
+          <p:cNvSpPr/>
+          <p:nvPr/>
+        </p:nvSpPr>
+        <p:spPr>
+          <a:xfrm>
+            <a:off x="822960" y="1801368"/>
+            <a:ext cx="2880360" cy="457200"/>
           </a:xfrm>
           <a:prstGeom prst="rect">
             <a:avLst/>
@@ -6525,30 +7591,30 @@
               <a:buNone/>
             </a:pPr>
             <a:r>
-              <a:rPr lang="en-US" sz="1600" b="1" dirty="0">
-                <a:solidFill>
-                  <a:srgbClr val="0B5D7A"/>
+              <a:rPr lang="en-US" sz="1900" b="1" dirty="0">
+                <a:solidFill>
+                  <a:srgbClr val="BE0000"/>
                 </a:solidFill>
                 <a:latin typeface="Cambria" pitchFamily="34" charset="0"/>
                 <a:ea typeface="Cambria" pitchFamily="34" charset="-122"/>
                 <a:cs typeface="Cambria" pitchFamily="34" charset="-120"/>
               </a:rPr>
-              <a:t>What it says</a:t>
-            </a:r>
-            <a:endParaRPr lang="en-US" sz="1600" dirty="0"/>
-          </a:p>
-        </p:txBody>
-      </p:sp>
-      <p:sp>
-        <p:nvSpPr>
-          <p:cNvPr id="7" name="Text 4"/>
-          <p:cNvSpPr/>
-          <p:nvPr/>
-        </p:nvSpPr>
-        <p:spPr>
-          <a:xfrm>
-            <a:off x="8001000" y="2194560"/>
-            <a:ext cx="3383280" cy="3840480"/>
+              <a:t>LOSO</a:t>
+            </a:r>
+            <a:endParaRPr lang="en-US" sz="1900" dirty="0"/>
+          </a:p>
+        </p:txBody>
+      </p:sp>
+      <p:sp>
+        <p:nvSpPr>
+          <p:cNvPr id="6" name="Text 4"/>
+          <p:cNvSpPr/>
+          <p:nvPr/>
+        </p:nvSpPr>
+        <p:spPr>
+          <a:xfrm>
+            <a:off x="822960" y="2258568"/>
+            <a:ext cx="2880360" cy="292608"/>
           </a:xfrm>
           <a:prstGeom prst="rect">
             <a:avLst/>
@@ -6557,91 +7623,1542 @@
           <a:ln/>
         </p:spPr>
         <p:txBody>
-          <a:bodyPr wrap="square" lIns="0" tIns="0" rIns="0" bIns="0" rtlCol="0" anchor="t"/>
-          <a:lstStyle/>
-          <a:p>
-            <a:pPr marL="342900" indent="-342900">
-              <a:spcAft>
-                <a:spcPts val="800"/>
-              </a:spcAft>
-              <a:buSzPct val="100000"/>
-              <a:buChar char="•"/>
-            </a:pPr>
-            <a:r>
-              <a:rPr lang="en-US" sz="1300" dirty="0">
-                <a:solidFill>
-                  <a:srgbClr val="1E293B"/>
+          <a:bodyPr wrap="square" lIns="0" tIns="0" rIns="0" bIns="0" rtlCol="0" anchor="ctr"/>
+          <a:lstStyle/>
+          <a:p>
+            <a:pPr indent="0" marL="0">
+              <a:buNone/>
+            </a:pPr>
+            <a:r>
+              <a:rPr lang="en-US" sz="1250" i="1" dirty="0">
+                <a:solidFill>
+                  <a:srgbClr val="836A68"/>
                 </a:solidFill>
                 <a:latin typeface="Calibri" pitchFamily="34" charset="0"/>
                 <a:ea typeface="Calibri" pitchFamily="34" charset="-122"/>
                 <a:cs typeface="Calibri" pitchFamily="34" charset="-120"/>
               </a:rPr>
-              <a:t>CNN wins everywhere — 0.15 in (3.9 mm) on empty, under ¼ in even on F5.</a:t>
-            </a:r>
-            <a:endParaRPr lang="en-US" sz="1300" dirty="0"/>
-          </a:p>
-          <a:p>
-            <a:pPr marL="342900" indent="-342900">
-              <a:spcAft>
-                <a:spcPts val="800"/>
-              </a:spcAft>
-              <a:buSzPct val="100000"/>
-              <a:buChar char="•"/>
-            </a:pPr>
-            <a:r>
-              <a:rPr lang="en-US" sz="1300" dirty="0">
-                <a:solidFill>
-                  <a:srgbClr val="1E293B"/>
+              <a:t>leave one session out</a:t>
+            </a:r>
+            <a:endParaRPr lang="en-US" sz="1250" dirty="0"/>
+          </a:p>
+        </p:txBody>
+      </p:sp>
+      <p:sp>
+        <p:nvSpPr>
+          <p:cNvPr id="7" name="Shape 5"/>
+          <p:cNvSpPr/>
+          <p:nvPr/>
+        </p:nvSpPr>
+        <p:spPr>
+          <a:xfrm>
+            <a:off x="1143000" y="2651760"/>
+            <a:ext cx="2240280" cy="365760"/>
+          </a:xfrm>
+          <a:prstGeom prst="roundRect">
+            <a:avLst>
+              <a:gd name="adj" fmla="val 10000"/>
+            </a:avLst>
+          </a:prstGeom>
+          <a:solidFill>
+            <a:srgbClr val="FBF4F2"/>
+          </a:solidFill>
+          <a:ln w="12700">
+            <a:solidFill>
+              <a:srgbClr val="E7D6D1"/>
+            </a:solidFill>
+            <a:prstDash val="solid"/>
+          </a:ln>
+        </p:spPr>
+      </p:sp>
+      <p:sp>
+        <p:nvSpPr>
+          <p:cNvPr id="8" name="Text 6"/>
+          <p:cNvSpPr/>
+          <p:nvPr/>
+        </p:nvSpPr>
+        <p:spPr>
+          <a:xfrm>
+            <a:off x="1143000" y="2651760"/>
+            <a:ext cx="2240280" cy="365760"/>
+          </a:xfrm>
+          <a:prstGeom prst="rect">
+            <a:avLst/>
+          </a:prstGeom>
+          <a:noFill/>
+          <a:ln/>
+        </p:spPr>
+        <p:txBody>
+          <a:bodyPr wrap="square" lIns="0" tIns="0" rIns="0" bIns="0" rtlCol="0" anchor="ctr"/>
+          <a:lstStyle/>
+          <a:p>
+            <a:pPr algn="ctr" indent="0" marL="0">
+              <a:buNone/>
+            </a:pPr>
+            <a:r>
+              <a:rPr lang="en-US" sz="1100" dirty="0">
+                <a:solidFill>
+                  <a:srgbClr val="836A68"/>
                 </a:solidFill>
                 <a:latin typeface="Calibri" pitchFamily="34" charset="0"/>
                 <a:ea typeface="Calibri" pitchFamily="34" charset="-122"/>
                 <a:cs typeface="Calibri" pitchFamily="34" charset="-120"/>
               </a:rPr>
-              <a:t>Raw ≈ physics for the CNN, so raw is the pick (simpler, faster).</a:t>
-            </a:r>
-            <a:endParaRPr lang="en-US" sz="1300" dirty="0"/>
-          </a:p>
-          <a:p>
-            <a:pPr marL="342900" indent="-342900">
-              <a:spcAft>
-                <a:spcPts val="800"/>
-              </a:spcAft>
-              <a:buSzPct val="100000"/>
-              <a:buChar char="•"/>
-            </a:pPr>
-            <a:r>
-              <a:rPr lang="en-US" sz="1300" dirty="0">
-                <a:solidFill>
-                  <a:srgbClr val="1E293B"/>
+              <a:t>S1 train</a:t>
+            </a:r>
+            <a:endParaRPr lang="en-US" sz="1100" dirty="0"/>
+          </a:p>
+        </p:txBody>
+      </p:sp>
+      <p:sp>
+        <p:nvSpPr>
+          <p:cNvPr id="9" name="Shape 7"/>
+          <p:cNvSpPr/>
+          <p:nvPr/>
+        </p:nvSpPr>
+        <p:spPr>
+          <a:xfrm>
+            <a:off x="1143000" y="3108960"/>
+            <a:ext cx="2240280" cy="365760"/>
+          </a:xfrm>
+          <a:prstGeom prst="roundRect">
+            <a:avLst>
+              <a:gd name="adj" fmla="val 10000"/>
+            </a:avLst>
+          </a:prstGeom>
+          <a:solidFill>
+            <a:srgbClr val="FBF4F2"/>
+          </a:solidFill>
+          <a:ln w="12700">
+            <a:solidFill>
+              <a:srgbClr val="E7D6D1"/>
+            </a:solidFill>
+            <a:prstDash val="solid"/>
+          </a:ln>
+        </p:spPr>
+      </p:sp>
+      <p:sp>
+        <p:nvSpPr>
+          <p:cNvPr id="10" name="Text 8"/>
+          <p:cNvSpPr/>
+          <p:nvPr/>
+        </p:nvSpPr>
+        <p:spPr>
+          <a:xfrm>
+            <a:off x="1143000" y="3108960"/>
+            <a:ext cx="2240280" cy="365760"/>
+          </a:xfrm>
+          <a:prstGeom prst="rect">
+            <a:avLst/>
+          </a:prstGeom>
+          <a:noFill/>
+          <a:ln/>
+        </p:spPr>
+        <p:txBody>
+          <a:bodyPr wrap="square" lIns="0" tIns="0" rIns="0" bIns="0" rtlCol="0" anchor="ctr"/>
+          <a:lstStyle/>
+          <a:p>
+            <a:pPr algn="ctr" indent="0" marL="0">
+              <a:buNone/>
+            </a:pPr>
+            <a:r>
+              <a:rPr lang="en-US" sz="1100" dirty="0">
+                <a:solidFill>
+                  <a:srgbClr val="836A68"/>
                 </a:solidFill>
                 <a:latin typeface="Calibri" pitchFamily="34" charset="0"/>
                 <a:ea typeface="Calibri" pitchFamily="34" charset="-122"/>
                 <a:cs typeface="Calibri" pitchFamily="34" charset="-120"/>
               </a:rPr>
-              <a:t>MLP is 3–4× worse; with physics it collapses to the predict-centre baseline.</a:t>
-            </a:r>
-            <a:endParaRPr lang="en-US" sz="1300" dirty="0"/>
-          </a:p>
-          <a:p>
-            <a:pPr marL="342900" indent="-342900">
-              <a:spcAft>
-                <a:spcPts val="800"/>
-              </a:spcAft>
-              <a:buSzPct val="100000"/>
-              <a:buChar char="•"/>
-            </a:pPr>
-            <a:r>
-              <a:rPr lang="en-US" sz="1300" dirty="0">
-                <a:solidFill>
-                  <a:srgbClr val="1E293B"/>
+              <a:t>S2 train</a:t>
+            </a:r>
+            <a:endParaRPr lang="en-US" sz="1100" dirty="0"/>
+          </a:p>
+        </p:txBody>
+      </p:sp>
+      <p:sp>
+        <p:nvSpPr>
+          <p:cNvPr id="11" name="Shape 9"/>
+          <p:cNvSpPr/>
+          <p:nvPr/>
+        </p:nvSpPr>
+        <p:spPr>
+          <a:xfrm>
+            <a:off x="1143000" y="3566160"/>
+            <a:ext cx="2240280" cy="365760"/>
+          </a:xfrm>
+          <a:prstGeom prst="roundRect">
+            <a:avLst>
+              <a:gd name="adj" fmla="val 10000"/>
+            </a:avLst>
+          </a:prstGeom>
+          <a:solidFill>
+            <a:srgbClr val="BE0000"/>
+          </a:solidFill>
+          <a:ln w="12700">
+            <a:solidFill>
+              <a:srgbClr val="BE0000"/>
+            </a:solidFill>
+            <a:prstDash val="solid"/>
+          </a:ln>
+        </p:spPr>
+      </p:sp>
+      <p:sp>
+        <p:nvSpPr>
+          <p:cNvPr id="12" name="Text 10"/>
+          <p:cNvSpPr/>
+          <p:nvPr/>
+        </p:nvSpPr>
+        <p:spPr>
+          <a:xfrm>
+            <a:off x="1143000" y="3566160"/>
+            <a:ext cx="2240280" cy="365760"/>
+          </a:xfrm>
+          <a:prstGeom prst="rect">
+            <a:avLst/>
+          </a:prstGeom>
+          <a:noFill/>
+          <a:ln/>
+        </p:spPr>
+        <p:txBody>
+          <a:bodyPr wrap="square" lIns="0" tIns="0" rIns="0" bIns="0" rtlCol="0" anchor="ctr"/>
+          <a:lstStyle/>
+          <a:p>
+            <a:pPr algn="ctr" indent="0" marL="0">
+              <a:buNone/>
+            </a:pPr>
+            <a:r>
+              <a:rPr lang="en-US" sz="1100" b="1" dirty="0">
+                <a:solidFill>
+                  <a:srgbClr val="FFFFFF"/>
                 </a:solidFill>
                 <a:latin typeface="Calibri" pitchFamily="34" charset="0"/>
                 <a:ea typeface="Calibri" pitchFamily="34" charset="-122"/>
                 <a:cs typeface="Calibri" pitchFamily="34" charset="-120"/>
               </a:rPr>
-              <a:t>≥90 % of positions land within the half-cell on all three phantoms.</a:t>
-            </a:r>
-            <a:endParaRPr lang="en-US" sz="1300" dirty="0"/>
+              <a:t>S3 test</a:t>
+            </a:r>
+            <a:endParaRPr lang="en-US" sz="1100" dirty="0"/>
+          </a:p>
+        </p:txBody>
+      </p:sp>
+      <p:sp>
+        <p:nvSpPr>
+          <p:cNvPr id="13" name="Text 11"/>
+          <p:cNvSpPr/>
+          <p:nvPr/>
+        </p:nvSpPr>
+        <p:spPr>
+          <a:xfrm>
+            <a:off x="822960" y="4480560"/>
+            <a:ext cx="2880360" cy="548640"/>
+          </a:xfrm>
+          <a:prstGeom prst="rect">
+            <a:avLst/>
+          </a:prstGeom>
+          <a:noFill/>
+          <a:ln/>
+        </p:spPr>
+        <p:txBody>
+          <a:bodyPr wrap="square" lIns="0" tIns="0" rIns="0" bIns="0" rtlCol="0" anchor="t"/>
+          <a:lstStyle/>
+          <a:p>
+            <a:pPr indent="0" marL="0">
+              <a:buNone/>
+            </a:pPr>
+            <a:r>
+              <a:rPr lang="en-US" sz="1150" b="1" dirty="0">
+                <a:solidFill>
+                  <a:srgbClr val="2A1618"/>
+                </a:solidFill>
+                <a:latin typeface="Calibri" pitchFamily="34" charset="0"/>
+                <a:ea typeface="Calibri" pitchFamily="34" charset="-122"/>
+                <a:cs typeface="Calibri" pitchFamily="34" charset="-120"/>
+              </a:rPr>
+              <a:t>Held out:  </a:t>
+            </a:r>
+            <a:pPr indent="0" marL="0">
+              <a:buNone/>
+            </a:pPr>
+            <a:r>
+              <a:rPr lang="en-US" sz="1150" dirty="0">
+                <a:solidFill>
+                  <a:srgbClr val="2A1618"/>
+                </a:solidFill>
+                <a:latin typeface="Calibri" pitchFamily="34" charset="0"/>
+                <a:ea typeface="Calibri" pitchFamily="34" charset="-122"/>
+                <a:cs typeface="Calibri" pitchFamily="34" charset="-120"/>
+              </a:rPr>
+              <a:t>a whole recording session</a:t>
+            </a:r>
+            <a:endParaRPr lang="en-US" sz="1150" dirty="0"/>
+          </a:p>
+        </p:txBody>
+      </p:sp>
+      <p:sp>
+        <p:nvSpPr>
+          <p:cNvPr id="14" name="Text 12"/>
+          <p:cNvSpPr/>
+          <p:nvPr/>
+        </p:nvSpPr>
+        <p:spPr>
+          <a:xfrm>
+            <a:off x="822960" y="5029200"/>
+            <a:ext cx="2880360" cy="685800"/>
+          </a:xfrm>
+          <a:prstGeom prst="rect">
+            <a:avLst/>
+          </a:prstGeom>
+          <a:noFill/>
+          <a:ln/>
+        </p:spPr>
+        <p:txBody>
+          <a:bodyPr wrap="square" lIns="0" tIns="0" rIns="0" bIns="0" rtlCol="0" anchor="t"/>
+          <a:lstStyle/>
+          <a:p>
+            <a:pPr indent="0" marL="0">
+              <a:buNone/>
+            </a:pPr>
+            <a:r>
+              <a:rPr lang="en-US" sz="1150" b="1" dirty="0">
+                <a:solidFill>
+                  <a:srgbClr val="2A1618"/>
+                </a:solidFill>
+                <a:latin typeface="Calibri" pitchFamily="34" charset="0"/>
+                <a:ea typeface="Calibri" pitchFamily="34" charset="-122"/>
+                <a:cs typeface="Calibri" pitchFamily="34" charset="-120"/>
+              </a:rPr>
+              <a:t>Question:  </a:t>
+            </a:r>
+            <a:pPr indent="0" marL="0">
+              <a:buNone/>
+            </a:pPr>
+            <a:r>
+              <a:rPr lang="en-US" sz="1150" dirty="0">
+                <a:solidFill>
+                  <a:srgbClr val="2A1618"/>
+                </a:solidFill>
+                <a:latin typeface="Calibri" pitchFamily="34" charset="0"/>
+                <a:ea typeface="Calibri" pitchFamily="34" charset="-122"/>
+                <a:cs typeface="Calibri" pitchFamily="34" charset="-120"/>
+              </a:rPr>
+              <a:t>Can it read a NEW scan of positions it already knows?</a:t>
+            </a:r>
+            <a:endParaRPr lang="en-US" sz="1150" dirty="0"/>
+          </a:p>
+        </p:txBody>
+      </p:sp>
+      <p:sp>
+        <p:nvSpPr>
+          <p:cNvPr id="15" name="Shape 13"/>
+          <p:cNvSpPr/>
+          <p:nvPr/>
+        </p:nvSpPr>
+        <p:spPr>
+          <a:xfrm>
+            <a:off x="822960" y="5669280"/>
+            <a:ext cx="1371600" cy="310896"/>
+          </a:xfrm>
+          <a:prstGeom prst="roundRect">
+            <a:avLst>
+              <a:gd name="adj" fmla="val 50000"/>
+            </a:avLst>
+          </a:prstGeom>
+          <a:solidFill>
+            <a:srgbClr val="C8890B"/>
+          </a:solidFill>
+          <a:ln/>
+        </p:spPr>
+      </p:sp>
+      <p:sp>
+        <p:nvSpPr>
+          <p:cNvPr id="16" name="Text 14"/>
+          <p:cNvSpPr/>
+          <p:nvPr/>
+        </p:nvSpPr>
+        <p:spPr>
+          <a:xfrm>
+            <a:off x="822960" y="5669280"/>
+            <a:ext cx="1371600" cy="310896"/>
+          </a:xfrm>
+          <a:prstGeom prst="rect">
+            <a:avLst/>
+          </a:prstGeom>
+          <a:noFill/>
+          <a:ln/>
+        </p:spPr>
+        <p:txBody>
+          <a:bodyPr wrap="square" lIns="0" tIns="0" rIns="0" bIns="0" rtlCol="0" anchor="ctr"/>
+          <a:lstStyle/>
+          <a:p>
+            <a:pPr algn="ctr" indent="0" marL="0">
+              <a:buNone/>
+            </a:pPr>
+            <a:r>
+              <a:rPr lang="en-US" sz="1100" b="1" dirty="0">
+                <a:solidFill>
+                  <a:srgbClr val="FFFFFF"/>
+                </a:solidFill>
+                <a:latin typeface="Calibri" pitchFamily="34" charset="0"/>
+                <a:ea typeface="Calibri" pitchFamily="34" charset="-122"/>
+                <a:cs typeface="Calibri" pitchFamily="34" charset="-120"/>
+              </a:rPr>
+              <a:t>Easiest</a:t>
+            </a:r>
+            <a:endParaRPr lang="en-US" sz="1100" dirty="0"/>
+          </a:p>
+        </p:txBody>
+      </p:sp>
+      <p:sp>
+        <p:nvSpPr>
+          <p:cNvPr id="17" name="Shape 15"/>
+          <p:cNvSpPr/>
+          <p:nvPr/>
+        </p:nvSpPr>
+        <p:spPr>
+          <a:xfrm>
+            <a:off x="4617720" y="1600200"/>
+            <a:ext cx="3246120" cy="4526280"/>
+          </a:xfrm>
+          <a:prstGeom prst="roundRect">
+            <a:avLst>
+              <a:gd name="adj" fmla="val 2535"/>
+            </a:avLst>
+          </a:prstGeom>
+          <a:solidFill>
+            <a:srgbClr val="FBF4F2"/>
+          </a:solidFill>
+          <a:ln w="12700">
+            <a:solidFill>
+              <a:srgbClr val="E7D6D1"/>
+            </a:solidFill>
+            <a:prstDash val="solid"/>
+          </a:ln>
+          <a:effectLst>
+            <a:outerShdw sx="100000" sy="100000" kx="0" ky="0" algn="bl" rotWithShape="0" blurRad="88900" dist="38100" dir="5400000">
+              <a:srgbClr val="7A5C5E">
+                <a:alpha val="18000"/>
+              </a:srgbClr>
+            </a:outerShdw>
+          </a:effectLst>
+        </p:spPr>
+      </p:sp>
+      <p:sp>
+        <p:nvSpPr>
+          <p:cNvPr id="18" name="Text 16"/>
+          <p:cNvSpPr/>
+          <p:nvPr/>
+        </p:nvSpPr>
+        <p:spPr>
+          <a:xfrm>
+            <a:off x="4800600" y="1801368"/>
+            <a:ext cx="2880360" cy="457200"/>
+          </a:xfrm>
+          <a:prstGeom prst="rect">
+            <a:avLst/>
+          </a:prstGeom>
+          <a:noFill/>
+          <a:ln/>
+        </p:spPr>
+        <p:txBody>
+          <a:bodyPr wrap="square" lIns="0" tIns="0" rIns="0" bIns="0" rtlCol="0" anchor="ctr"/>
+          <a:lstStyle/>
+          <a:p>
+            <a:pPr indent="0" marL="0">
+              <a:buNone/>
+            </a:pPr>
+            <a:r>
+              <a:rPr lang="en-US" sz="1900" b="1" dirty="0">
+                <a:solidFill>
+                  <a:srgbClr val="BE0000"/>
+                </a:solidFill>
+                <a:latin typeface="Cambria" pitchFamily="34" charset="0"/>
+                <a:ea typeface="Cambria" pitchFamily="34" charset="-122"/>
+                <a:cs typeface="Cambria" pitchFamily="34" charset="-120"/>
+              </a:rPr>
+              <a:t>LOPO single-position</a:t>
+            </a:r>
+            <a:endParaRPr lang="en-US" sz="1900" dirty="0"/>
+          </a:p>
+        </p:txBody>
+      </p:sp>
+      <p:sp>
+        <p:nvSpPr>
+          <p:cNvPr id="19" name="Text 17"/>
+          <p:cNvSpPr/>
+          <p:nvPr/>
+        </p:nvSpPr>
+        <p:spPr>
+          <a:xfrm>
+            <a:off x="4800600" y="2258568"/>
+            <a:ext cx="2880360" cy="292608"/>
+          </a:xfrm>
+          <a:prstGeom prst="rect">
+            <a:avLst/>
+          </a:prstGeom>
+          <a:noFill/>
+          <a:ln/>
+        </p:spPr>
+        <p:txBody>
+          <a:bodyPr wrap="square" lIns="0" tIns="0" rIns="0" bIns="0" rtlCol="0" anchor="ctr"/>
+          <a:lstStyle/>
+          <a:p>
+            <a:pPr indent="0" marL="0">
+              <a:buNone/>
+            </a:pPr>
+            <a:r>
+              <a:rPr lang="en-US" sz="1250" i="1" dirty="0">
+                <a:solidFill>
+                  <a:srgbClr val="836A68"/>
+                </a:solidFill>
+                <a:latin typeface="Calibri" pitchFamily="34" charset="0"/>
+                <a:ea typeface="Calibri" pitchFamily="34" charset="-122"/>
+                <a:cs typeface="Calibri" pitchFamily="34" charset="-120"/>
+              </a:rPr>
+              <a:t>leave one sub-position out</a:t>
+            </a:r>
+            <a:endParaRPr lang="en-US" sz="1250" dirty="0"/>
+          </a:p>
+        </p:txBody>
+      </p:sp>
+      <p:sp>
+        <p:nvSpPr>
+          <p:cNvPr id="20" name="Shape 18"/>
+          <p:cNvSpPr/>
+          <p:nvPr/>
+        </p:nvSpPr>
+        <p:spPr>
+          <a:xfrm>
+            <a:off x="5856732" y="2916936"/>
+            <a:ext cx="201168" cy="201168"/>
+          </a:xfrm>
+          <a:prstGeom prst="ellipse">
+            <a:avLst/>
+          </a:prstGeom>
+          <a:solidFill>
+            <a:srgbClr val="BE0000"/>
+          </a:solidFill>
+          <a:ln w="12700">
+            <a:solidFill>
+              <a:srgbClr val="BE0000"/>
+            </a:solidFill>
+            <a:prstDash val="solid"/>
+          </a:ln>
+        </p:spPr>
+      </p:sp>
+      <p:sp>
+        <p:nvSpPr>
+          <p:cNvPr id="21" name="Shape 19"/>
+          <p:cNvSpPr/>
+          <p:nvPr/>
+        </p:nvSpPr>
+        <p:spPr>
+          <a:xfrm>
+            <a:off x="6423660" y="2916936"/>
+            <a:ext cx="201168" cy="201168"/>
+          </a:xfrm>
+          <a:prstGeom prst="ellipse">
+            <a:avLst/>
+          </a:prstGeom>
+          <a:solidFill>
+            <a:srgbClr val="FBF4F2"/>
+          </a:solidFill>
+          <a:ln w="12700">
+            <a:solidFill>
+              <a:srgbClr val="836A68"/>
+            </a:solidFill>
+            <a:prstDash val="solid"/>
+          </a:ln>
+        </p:spPr>
+      </p:sp>
+      <p:sp>
+        <p:nvSpPr>
+          <p:cNvPr id="22" name="Shape 20"/>
+          <p:cNvSpPr/>
+          <p:nvPr/>
+        </p:nvSpPr>
+        <p:spPr>
+          <a:xfrm>
+            <a:off x="5856732" y="3483864"/>
+            <a:ext cx="201168" cy="201168"/>
+          </a:xfrm>
+          <a:prstGeom prst="ellipse">
+            <a:avLst/>
+          </a:prstGeom>
+          <a:solidFill>
+            <a:srgbClr val="FBF4F2"/>
+          </a:solidFill>
+          <a:ln w="12700">
+            <a:solidFill>
+              <a:srgbClr val="836A68"/>
+            </a:solidFill>
+            <a:prstDash val="solid"/>
+          </a:ln>
+        </p:spPr>
+      </p:sp>
+      <p:sp>
+        <p:nvSpPr>
+          <p:cNvPr id="23" name="Shape 21"/>
+          <p:cNvSpPr/>
+          <p:nvPr/>
+        </p:nvSpPr>
+        <p:spPr>
+          <a:xfrm>
+            <a:off x="6423660" y="3483864"/>
+            <a:ext cx="201168" cy="201168"/>
+          </a:xfrm>
+          <a:prstGeom prst="ellipse">
+            <a:avLst/>
+          </a:prstGeom>
+          <a:solidFill>
+            <a:srgbClr val="FBF4F2"/>
+          </a:solidFill>
+          <a:ln w="12700">
+            <a:solidFill>
+              <a:srgbClr val="836A68"/>
+            </a:solidFill>
+            <a:prstDash val="solid"/>
+          </a:ln>
+        </p:spPr>
+      </p:sp>
+      <p:sp>
+        <p:nvSpPr>
+          <p:cNvPr id="24" name="Text 22"/>
+          <p:cNvSpPr/>
+          <p:nvPr/>
+        </p:nvSpPr>
+        <p:spPr>
+          <a:xfrm>
+            <a:off x="4800600" y="4105656"/>
+            <a:ext cx="2880360" cy="457200"/>
+          </a:xfrm>
+          <a:prstGeom prst="rect">
+            <a:avLst/>
+          </a:prstGeom>
+          <a:noFill/>
+          <a:ln/>
+        </p:spPr>
+        <p:txBody>
+          <a:bodyPr wrap="square" lIns="0" tIns="0" rIns="0" bIns="0" rtlCol="0" anchor="ctr"/>
+          <a:lstStyle/>
+          <a:p>
+            <a:pPr algn="ctr" indent="0" marL="0">
+              <a:buNone/>
+            </a:pPr>
+            <a:r>
+              <a:rPr lang="en-US" sz="1050" dirty="0">
+                <a:solidFill>
+                  <a:srgbClr val="836A68"/>
+                </a:solidFill>
+                <a:latin typeface="Calibri" pitchFamily="34" charset="0"/>
+                <a:ea typeface="Calibri" pitchFamily="34" charset="-122"/>
+                <a:cs typeface="Calibri" pitchFamily="34" charset="-120"/>
+              </a:rPr>
+              <a:t>one point held out,</a:t>
+            </a:r>
+            <a:endParaRPr lang="en-US" sz="1050" dirty="0"/>
+          </a:p>
+          <a:p>
+            <a:pPr algn="ctr" indent="0" marL="0">
+              <a:buNone/>
+            </a:pPr>
+            <a:r>
+              <a:rPr lang="en-US" sz="1050" dirty="0">
+                <a:solidFill>
+                  <a:srgbClr val="836A68"/>
+                </a:solidFill>
+                <a:latin typeface="Calibri" pitchFamily="34" charset="0"/>
+                <a:ea typeface="Calibri" pitchFamily="34" charset="-122"/>
+                <a:cs typeface="Calibri" pitchFamily="34" charset="-120"/>
+              </a:rPr>
+              <a:t>cell-mates stay</a:t>
+            </a:r>
+            <a:endParaRPr lang="en-US" sz="1050" dirty="0"/>
+          </a:p>
+        </p:txBody>
+      </p:sp>
+      <p:sp>
+        <p:nvSpPr>
+          <p:cNvPr id="25" name="Text 23"/>
+          <p:cNvSpPr/>
+          <p:nvPr/>
+        </p:nvSpPr>
+        <p:spPr>
+          <a:xfrm>
+            <a:off x="4800600" y="4480560"/>
+            <a:ext cx="2880360" cy="548640"/>
+          </a:xfrm>
+          <a:prstGeom prst="rect">
+            <a:avLst/>
+          </a:prstGeom>
+          <a:noFill/>
+          <a:ln/>
+        </p:spPr>
+        <p:txBody>
+          <a:bodyPr wrap="square" lIns="0" tIns="0" rIns="0" bIns="0" rtlCol="0" anchor="t"/>
+          <a:lstStyle/>
+          <a:p>
+            <a:pPr indent="0" marL="0">
+              <a:buNone/>
+            </a:pPr>
+            <a:r>
+              <a:rPr lang="en-US" sz="1150" b="1" dirty="0">
+                <a:solidFill>
+                  <a:srgbClr val="2A1618"/>
+                </a:solidFill>
+                <a:latin typeface="Calibri" pitchFamily="34" charset="0"/>
+                <a:ea typeface="Calibri" pitchFamily="34" charset="-122"/>
+                <a:cs typeface="Calibri" pitchFamily="34" charset="-120"/>
+              </a:rPr>
+              <a:t>Held out:  </a:t>
+            </a:r>
+            <a:pPr indent="0" marL="0">
+              <a:buNone/>
+            </a:pPr>
+            <a:r>
+              <a:rPr lang="en-US" sz="1150" dirty="0">
+                <a:solidFill>
+                  <a:srgbClr val="2A1618"/>
+                </a:solidFill>
+                <a:latin typeface="Calibri" pitchFamily="34" charset="0"/>
+                <a:ea typeface="Calibri" pitchFamily="34" charset="-122"/>
+                <a:cs typeface="Calibri" pitchFamily="34" charset="-120"/>
+              </a:rPr>
+              <a:t>one point (its 3 cell-mates ~0.75 in away stay in)</a:t>
+            </a:r>
+            <a:endParaRPr lang="en-US" sz="1150" dirty="0"/>
+          </a:p>
+        </p:txBody>
+      </p:sp>
+      <p:sp>
+        <p:nvSpPr>
+          <p:cNvPr id="26" name="Text 24"/>
+          <p:cNvSpPr/>
+          <p:nvPr/>
+        </p:nvSpPr>
+        <p:spPr>
+          <a:xfrm>
+            <a:off x="4800600" y="5029200"/>
+            <a:ext cx="2880360" cy="685800"/>
+          </a:xfrm>
+          <a:prstGeom prst="rect">
+            <a:avLst/>
+          </a:prstGeom>
+          <a:noFill/>
+          <a:ln/>
+        </p:spPr>
+        <p:txBody>
+          <a:bodyPr wrap="square" lIns="0" tIns="0" rIns="0" bIns="0" rtlCol="0" anchor="t"/>
+          <a:lstStyle/>
+          <a:p>
+            <a:pPr indent="0" marL="0">
+              <a:buNone/>
+            </a:pPr>
+            <a:r>
+              <a:rPr lang="en-US" sz="1150" b="1" dirty="0">
+                <a:solidFill>
+                  <a:srgbClr val="2A1618"/>
+                </a:solidFill>
+                <a:latin typeface="Calibri" pitchFamily="34" charset="0"/>
+                <a:ea typeface="Calibri" pitchFamily="34" charset="-122"/>
+                <a:cs typeface="Calibri" pitchFamily="34" charset="-120"/>
+              </a:rPr>
+              <a:t>Question:  </a:t>
+            </a:r>
+            <a:pPr indent="0" marL="0">
+              <a:buNone/>
+            </a:pPr>
+            <a:r>
+              <a:rPr lang="en-US" sz="1150" dirty="0">
+                <a:solidFill>
+                  <a:srgbClr val="2A1618"/>
+                </a:solidFill>
+                <a:latin typeface="Calibri" pitchFamily="34" charset="0"/>
+                <a:ea typeface="Calibri" pitchFamily="34" charset="-122"/>
+                <a:cs typeface="Calibri" pitchFamily="34" charset="-120"/>
+              </a:rPr>
+              <a:t>Can it reach an unseen point that has close neighbors?</a:t>
+            </a:r>
+            <a:endParaRPr lang="en-US" sz="1150" dirty="0"/>
+          </a:p>
+        </p:txBody>
+      </p:sp>
+      <p:sp>
+        <p:nvSpPr>
+          <p:cNvPr id="27" name="Shape 25"/>
+          <p:cNvSpPr/>
+          <p:nvPr/>
+        </p:nvSpPr>
+        <p:spPr>
+          <a:xfrm>
+            <a:off x="4800600" y="5669280"/>
+            <a:ext cx="1371600" cy="310896"/>
+          </a:xfrm>
+          <a:prstGeom prst="roundRect">
+            <a:avLst>
+              <a:gd name="adj" fmla="val 50000"/>
+            </a:avLst>
+          </a:prstGeom>
+          <a:solidFill>
+            <a:srgbClr val="C0564A"/>
+          </a:solidFill>
+          <a:ln/>
+        </p:spPr>
+      </p:sp>
+      <p:sp>
+        <p:nvSpPr>
+          <p:cNvPr id="28" name="Text 26"/>
+          <p:cNvSpPr/>
+          <p:nvPr/>
+        </p:nvSpPr>
+        <p:spPr>
+          <a:xfrm>
+            <a:off x="4800600" y="5669280"/>
+            <a:ext cx="1371600" cy="310896"/>
+          </a:xfrm>
+          <a:prstGeom prst="rect">
+            <a:avLst/>
+          </a:prstGeom>
+          <a:noFill/>
+          <a:ln/>
+        </p:spPr>
+        <p:txBody>
+          <a:bodyPr wrap="square" lIns="0" tIns="0" rIns="0" bIns="0" rtlCol="0" anchor="ctr"/>
+          <a:lstStyle/>
+          <a:p>
+            <a:pPr algn="ctr" indent="0" marL="0">
+              <a:buNone/>
+            </a:pPr>
+            <a:r>
+              <a:rPr lang="en-US" sz="1100" b="1" dirty="0">
+                <a:solidFill>
+                  <a:srgbClr val="FFFFFF"/>
+                </a:solidFill>
+                <a:latin typeface="Calibri" pitchFamily="34" charset="0"/>
+                <a:ea typeface="Calibri" pitchFamily="34" charset="-122"/>
+                <a:cs typeface="Calibri" pitchFamily="34" charset="-120"/>
+              </a:rPr>
+              <a:t>Medium</a:t>
+            </a:r>
+            <a:endParaRPr lang="en-US" sz="1100" dirty="0"/>
+          </a:p>
+        </p:txBody>
+      </p:sp>
+      <p:sp>
+        <p:nvSpPr>
+          <p:cNvPr id="29" name="Shape 27"/>
+          <p:cNvSpPr/>
+          <p:nvPr/>
+        </p:nvSpPr>
+        <p:spPr>
+          <a:xfrm>
+            <a:off x="8595360" y="1600200"/>
+            <a:ext cx="3246120" cy="4526280"/>
+          </a:xfrm>
+          <a:prstGeom prst="roundRect">
+            <a:avLst>
+              <a:gd name="adj" fmla="val 2535"/>
+            </a:avLst>
+          </a:prstGeom>
+          <a:solidFill>
+            <a:srgbClr val="FBF4F2"/>
+          </a:solidFill>
+          <a:ln w="12700">
+            <a:solidFill>
+              <a:srgbClr val="E7D6D1"/>
+            </a:solidFill>
+            <a:prstDash val="solid"/>
+          </a:ln>
+          <a:effectLst>
+            <a:outerShdw sx="100000" sy="100000" kx="0" ky="0" algn="bl" rotWithShape="0" blurRad="88900" dist="38100" dir="5400000">
+              <a:srgbClr val="7A5C5E">
+                <a:alpha val="18000"/>
+              </a:srgbClr>
+            </a:outerShdw>
+          </a:effectLst>
+        </p:spPr>
+      </p:sp>
+      <p:sp>
+        <p:nvSpPr>
+          <p:cNvPr id="30" name="Text 28"/>
+          <p:cNvSpPr/>
+          <p:nvPr/>
+        </p:nvSpPr>
+        <p:spPr>
+          <a:xfrm>
+            <a:off x="8778240" y="1801368"/>
+            <a:ext cx="2880360" cy="457200"/>
+          </a:xfrm>
+          <a:prstGeom prst="rect">
+            <a:avLst/>
+          </a:prstGeom>
+          <a:noFill/>
+          <a:ln/>
+        </p:spPr>
+        <p:txBody>
+          <a:bodyPr wrap="square" lIns="0" tIns="0" rIns="0" bIns="0" rtlCol="0" anchor="ctr"/>
+          <a:lstStyle/>
+          <a:p>
+            <a:pPr indent="0" marL="0">
+              <a:buNone/>
+            </a:pPr>
+            <a:r>
+              <a:rPr lang="en-US" sz="1900" b="1" dirty="0">
+                <a:solidFill>
+                  <a:srgbClr val="BE0000"/>
+                </a:solidFill>
+                <a:latin typeface="Cambria" pitchFamily="34" charset="0"/>
+                <a:ea typeface="Cambria" pitchFamily="34" charset="-122"/>
+                <a:cs typeface="Cambria" pitchFamily="34" charset="-120"/>
+              </a:rPr>
+              <a:t>LOPO-cell</a:t>
+            </a:r>
+            <a:endParaRPr lang="en-US" sz="1900" dirty="0"/>
+          </a:p>
+        </p:txBody>
+      </p:sp>
+      <p:sp>
+        <p:nvSpPr>
+          <p:cNvPr id="31" name="Text 29"/>
+          <p:cNvSpPr/>
+          <p:nvPr/>
+        </p:nvSpPr>
+        <p:spPr>
+          <a:xfrm>
+            <a:off x="8778240" y="2258568"/>
+            <a:ext cx="2880360" cy="292608"/>
+          </a:xfrm>
+          <a:prstGeom prst="rect">
+            <a:avLst/>
+          </a:prstGeom>
+          <a:noFill/>
+          <a:ln/>
+        </p:spPr>
+        <p:txBody>
+          <a:bodyPr wrap="square" lIns="0" tIns="0" rIns="0" bIns="0" rtlCol="0" anchor="ctr"/>
+          <a:lstStyle/>
+          <a:p>
+            <a:pPr indent="0" marL="0">
+              <a:buNone/>
+            </a:pPr>
+            <a:r>
+              <a:rPr lang="en-US" sz="1250" i="1" dirty="0">
+                <a:solidFill>
+                  <a:srgbClr val="836A68"/>
+                </a:solidFill>
+                <a:latin typeface="Calibri" pitchFamily="34" charset="0"/>
+                <a:ea typeface="Calibri" pitchFamily="34" charset="-122"/>
+                <a:cs typeface="Calibri" pitchFamily="34" charset="-120"/>
+              </a:rPr>
+              <a:t>leave one whole cell out</a:t>
+            </a:r>
+            <a:endParaRPr lang="en-US" sz="1250" dirty="0"/>
+          </a:p>
+        </p:txBody>
+      </p:sp>
+      <p:sp>
+        <p:nvSpPr>
+          <p:cNvPr id="32" name="Shape 30"/>
+          <p:cNvSpPr/>
+          <p:nvPr/>
+        </p:nvSpPr>
+        <p:spPr>
+          <a:xfrm>
+            <a:off x="9573768" y="2766060"/>
+            <a:ext cx="137160" cy="137160"/>
+          </a:xfrm>
+          <a:prstGeom prst="ellipse">
+            <a:avLst/>
+          </a:prstGeom>
+          <a:solidFill>
+            <a:srgbClr val="BE0000"/>
+          </a:solidFill>
+          <a:ln w="12700">
+            <a:solidFill>
+              <a:srgbClr val="BE0000"/>
+            </a:solidFill>
+            <a:prstDash val="solid"/>
+          </a:ln>
+        </p:spPr>
+      </p:sp>
+      <p:sp>
+        <p:nvSpPr>
+          <p:cNvPr id="33" name="Shape 31"/>
+          <p:cNvSpPr/>
+          <p:nvPr/>
+        </p:nvSpPr>
+        <p:spPr>
+          <a:xfrm>
+            <a:off x="9957816" y="2766060"/>
+            <a:ext cx="137160" cy="137160"/>
+          </a:xfrm>
+          <a:prstGeom prst="ellipse">
+            <a:avLst/>
+          </a:prstGeom>
+          <a:solidFill>
+            <a:srgbClr val="BE0000"/>
+          </a:solidFill>
+          <a:ln w="12700">
+            <a:solidFill>
+              <a:srgbClr val="BE0000"/>
+            </a:solidFill>
+            <a:prstDash val="solid"/>
+          </a:ln>
+        </p:spPr>
+      </p:sp>
+      <p:sp>
+        <p:nvSpPr>
+          <p:cNvPr id="34" name="Shape 32"/>
+          <p:cNvSpPr/>
+          <p:nvPr/>
+        </p:nvSpPr>
+        <p:spPr>
+          <a:xfrm>
+            <a:off x="10341864" y="2766060"/>
+            <a:ext cx="137160" cy="137160"/>
+          </a:xfrm>
+          <a:prstGeom prst="ellipse">
+            <a:avLst/>
+          </a:prstGeom>
+          <a:solidFill>
+            <a:srgbClr val="FBF4F2"/>
+          </a:solidFill>
+          <a:ln w="12700">
+            <a:solidFill>
+              <a:srgbClr val="836A68"/>
+            </a:solidFill>
+            <a:prstDash val="solid"/>
+          </a:ln>
+        </p:spPr>
+      </p:sp>
+      <p:sp>
+        <p:nvSpPr>
+          <p:cNvPr id="35" name="Shape 33"/>
+          <p:cNvSpPr/>
+          <p:nvPr/>
+        </p:nvSpPr>
+        <p:spPr>
+          <a:xfrm>
+            <a:off x="10725912" y="2766060"/>
+            <a:ext cx="137160" cy="137160"/>
+          </a:xfrm>
+          <a:prstGeom prst="ellipse">
+            <a:avLst/>
+          </a:prstGeom>
+          <a:solidFill>
+            <a:srgbClr val="FBF4F2"/>
+          </a:solidFill>
+          <a:ln w="12700">
+            <a:solidFill>
+              <a:srgbClr val="836A68"/>
+            </a:solidFill>
+            <a:prstDash val="solid"/>
+          </a:ln>
+        </p:spPr>
+      </p:sp>
+      <p:sp>
+        <p:nvSpPr>
+          <p:cNvPr id="36" name="Shape 34"/>
+          <p:cNvSpPr/>
+          <p:nvPr/>
+        </p:nvSpPr>
+        <p:spPr>
+          <a:xfrm>
+            <a:off x="9573768" y="3150108"/>
+            <a:ext cx="137160" cy="137160"/>
+          </a:xfrm>
+          <a:prstGeom prst="ellipse">
+            <a:avLst/>
+          </a:prstGeom>
+          <a:solidFill>
+            <a:srgbClr val="BE0000"/>
+          </a:solidFill>
+          <a:ln w="12700">
+            <a:solidFill>
+              <a:srgbClr val="BE0000"/>
+            </a:solidFill>
+            <a:prstDash val="solid"/>
+          </a:ln>
+        </p:spPr>
+      </p:sp>
+      <p:sp>
+        <p:nvSpPr>
+          <p:cNvPr id="37" name="Shape 35"/>
+          <p:cNvSpPr/>
+          <p:nvPr/>
+        </p:nvSpPr>
+        <p:spPr>
+          <a:xfrm>
+            <a:off x="9957816" y="3150108"/>
+            <a:ext cx="137160" cy="137160"/>
+          </a:xfrm>
+          <a:prstGeom prst="ellipse">
+            <a:avLst/>
+          </a:prstGeom>
+          <a:solidFill>
+            <a:srgbClr val="BE0000"/>
+          </a:solidFill>
+          <a:ln w="12700">
+            <a:solidFill>
+              <a:srgbClr val="BE0000"/>
+            </a:solidFill>
+            <a:prstDash val="solid"/>
+          </a:ln>
+        </p:spPr>
+      </p:sp>
+      <p:sp>
+        <p:nvSpPr>
+          <p:cNvPr id="38" name="Shape 36"/>
+          <p:cNvSpPr/>
+          <p:nvPr/>
+        </p:nvSpPr>
+        <p:spPr>
+          <a:xfrm>
+            <a:off x="10341864" y="3150108"/>
+            <a:ext cx="137160" cy="137160"/>
+          </a:xfrm>
+          <a:prstGeom prst="ellipse">
+            <a:avLst/>
+          </a:prstGeom>
+          <a:solidFill>
+            <a:srgbClr val="FBF4F2"/>
+          </a:solidFill>
+          <a:ln w="12700">
+            <a:solidFill>
+              <a:srgbClr val="836A68"/>
+            </a:solidFill>
+            <a:prstDash val="solid"/>
+          </a:ln>
+        </p:spPr>
+      </p:sp>
+      <p:sp>
+        <p:nvSpPr>
+          <p:cNvPr id="39" name="Shape 37"/>
+          <p:cNvSpPr/>
+          <p:nvPr/>
+        </p:nvSpPr>
+        <p:spPr>
+          <a:xfrm>
+            <a:off x="10725912" y="3150108"/>
+            <a:ext cx="137160" cy="137160"/>
+          </a:xfrm>
+          <a:prstGeom prst="ellipse">
+            <a:avLst/>
+          </a:prstGeom>
+          <a:solidFill>
+            <a:srgbClr val="FBF4F2"/>
+          </a:solidFill>
+          <a:ln w="12700">
+            <a:solidFill>
+              <a:srgbClr val="836A68"/>
+            </a:solidFill>
+            <a:prstDash val="solid"/>
+          </a:ln>
+        </p:spPr>
+      </p:sp>
+      <p:sp>
+        <p:nvSpPr>
+          <p:cNvPr id="40" name="Shape 38"/>
+          <p:cNvSpPr/>
+          <p:nvPr/>
+        </p:nvSpPr>
+        <p:spPr>
+          <a:xfrm>
+            <a:off x="9573768" y="3534156"/>
+            <a:ext cx="137160" cy="137160"/>
+          </a:xfrm>
+          <a:prstGeom prst="ellipse">
+            <a:avLst/>
+          </a:prstGeom>
+          <a:solidFill>
+            <a:srgbClr val="FBF4F2"/>
+          </a:solidFill>
+          <a:ln w="12700">
+            <a:solidFill>
+              <a:srgbClr val="836A68"/>
+            </a:solidFill>
+            <a:prstDash val="solid"/>
+          </a:ln>
+        </p:spPr>
+      </p:sp>
+      <p:sp>
+        <p:nvSpPr>
+          <p:cNvPr id="41" name="Shape 39"/>
+          <p:cNvSpPr/>
+          <p:nvPr/>
+        </p:nvSpPr>
+        <p:spPr>
+          <a:xfrm>
+            <a:off x="9957816" y="3534156"/>
+            <a:ext cx="137160" cy="137160"/>
+          </a:xfrm>
+          <a:prstGeom prst="ellipse">
+            <a:avLst/>
+          </a:prstGeom>
+          <a:solidFill>
+            <a:srgbClr val="FBF4F2"/>
+          </a:solidFill>
+          <a:ln w="12700">
+            <a:solidFill>
+              <a:srgbClr val="836A68"/>
+            </a:solidFill>
+            <a:prstDash val="solid"/>
+          </a:ln>
+        </p:spPr>
+      </p:sp>
+      <p:sp>
+        <p:nvSpPr>
+          <p:cNvPr id="42" name="Shape 40"/>
+          <p:cNvSpPr/>
+          <p:nvPr/>
+        </p:nvSpPr>
+        <p:spPr>
+          <a:xfrm>
+            <a:off x="10341864" y="3534156"/>
+            <a:ext cx="137160" cy="137160"/>
+          </a:xfrm>
+          <a:prstGeom prst="ellipse">
+            <a:avLst/>
+          </a:prstGeom>
+          <a:solidFill>
+            <a:srgbClr val="FBF4F2"/>
+          </a:solidFill>
+          <a:ln w="12700">
+            <a:solidFill>
+              <a:srgbClr val="836A68"/>
+            </a:solidFill>
+            <a:prstDash val="solid"/>
+          </a:ln>
+        </p:spPr>
+      </p:sp>
+      <p:sp>
+        <p:nvSpPr>
+          <p:cNvPr id="43" name="Shape 41"/>
+          <p:cNvSpPr/>
+          <p:nvPr/>
+        </p:nvSpPr>
+        <p:spPr>
+          <a:xfrm>
+            <a:off x="10725912" y="3534156"/>
+            <a:ext cx="137160" cy="137160"/>
+          </a:xfrm>
+          <a:prstGeom prst="ellipse">
+            <a:avLst/>
+          </a:prstGeom>
+          <a:solidFill>
+            <a:srgbClr val="FBF4F2"/>
+          </a:solidFill>
+          <a:ln w="12700">
+            <a:solidFill>
+              <a:srgbClr val="836A68"/>
+            </a:solidFill>
+            <a:prstDash val="solid"/>
+          </a:ln>
+        </p:spPr>
+      </p:sp>
+      <p:sp>
+        <p:nvSpPr>
+          <p:cNvPr id="44" name="Shape 42"/>
+          <p:cNvSpPr/>
+          <p:nvPr/>
+        </p:nvSpPr>
+        <p:spPr>
+          <a:xfrm>
+            <a:off x="9573768" y="3918204"/>
+            <a:ext cx="137160" cy="137160"/>
+          </a:xfrm>
+          <a:prstGeom prst="ellipse">
+            <a:avLst/>
+          </a:prstGeom>
+          <a:solidFill>
+            <a:srgbClr val="FBF4F2"/>
+          </a:solidFill>
+          <a:ln w="12700">
+            <a:solidFill>
+              <a:srgbClr val="836A68"/>
+            </a:solidFill>
+            <a:prstDash val="solid"/>
+          </a:ln>
+        </p:spPr>
+      </p:sp>
+      <p:sp>
+        <p:nvSpPr>
+          <p:cNvPr id="45" name="Shape 43"/>
+          <p:cNvSpPr/>
+          <p:nvPr/>
+        </p:nvSpPr>
+        <p:spPr>
+          <a:xfrm>
+            <a:off x="9957816" y="3918204"/>
+            <a:ext cx="137160" cy="137160"/>
+          </a:xfrm>
+          <a:prstGeom prst="ellipse">
+            <a:avLst/>
+          </a:prstGeom>
+          <a:solidFill>
+            <a:srgbClr val="FBF4F2"/>
+          </a:solidFill>
+          <a:ln w="12700">
+            <a:solidFill>
+              <a:srgbClr val="836A68"/>
+            </a:solidFill>
+            <a:prstDash val="solid"/>
+          </a:ln>
+        </p:spPr>
+      </p:sp>
+      <p:sp>
+        <p:nvSpPr>
+          <p:cNvPr id="46" name="Shape 44"/>
+          <p:cNvSpPr/>
+          <p:nvPr/>
+        </p:nvSpPr>
+        <p:spPr>
+          <a:xfrm>
+            <a:off x="10341864" y="3918204"/>
+            <a:ext cx="137160" cy="137160"/>
+          </a:xfrm>
+          <a:prstGeom prst="ellipse">
+            <a:avLst/>
+          </a:prstGeom>
+          <a:solidFill>
+            <a:srgbClr val="FBF4F2"/>
+          </a:solidFill>
+          <a:ln w="12700">
+            <a:solidFill>
+              <a:srgbClr val="836A68"/>
+            </a:solidFill>
+            <a:prstDash val="solid"/>
+          </a:ln>
+        </p:spPr>
+      </p:sp>
+      <p:sp>
+        <p:nvSpPr>
+          <p:cNvPr id="47" name="Shape 45"/>
+          <p:cNvSpPr/>
+          <p:nvPr/>
+        </p:nvSpPr>
+        <p:spPr>
+          <a:xfrm>
+            <a:off x="10725912" y="3918204"/>
+            <a:ext cx="137160" cy="137160"/>
+          </a:xfrm>
+          <a:prstGeom prst="ellipse">
+            <a:avLst/>
+          </a:prstGeom>
+          <a:solidFill>
+            <a:srgbClr val="FBF4F2"/>
+          </a:solidFill>
+          <a:ln w="12700">
+            <a:solidFill>
+              <a:srgbClr val="836A68"/>
+            </a:solidFill>
+            <a:prstDash val="solid"/>
+          </a:ln>
+        </p:spPr>
+      </p:sp>
+      <p:sp>
+        <p:nvSpPr>
+          <p:cNvPr id="48" name="Text 46"/>
+          <p:cNvSpPr/>
+          <p:nvPr/>
+        </p:nvSpPr>
+        <p:spPr>
+          <a:xfrm>
+            <a:off x="8778240" y="4233672"/>
+            <a:ext cx="2880360" cy="274320"/>
+          </a:xfrm>
+          <a:prstGeom prst="rect">
+            <a:avLst/>
+          </a:prstGeom>
+          <a:noFill/>
+          <a:ln/>
+        </p:spPr>
+        <p:txBody>
+          <a:bodyPr wrap="square" lIns="0" tIns="0" rIns="0" bIns="0" rtlCol="0" anchor="ctr"/>
+          <a:lstStyle/>
+          <a:p>
+            <a:pPr algn="ctr" indent="0" marL="0">
+              <a:buNone/>
+            </a:pPr>
+            <a:r>
+              <a:rPr lang="en-US" sz="1050" dirty="0">
+                <a:solidFill>
+                  <a:srgbClr val="836A68"/>
+                </a:solidFill>
+                <a:latin typeface="Calibri" pitchFamily="34" charset="0"/>
+                <a:ea typeface="Calibri" pitchFamily="34" charset="-122"/>
+                <a:cs typeface="Calibri" pitchFamily="34" charset="-120"/>
+              </a:rPr>
+              <a:t>one cell held out</a:t>
+            </a:r>
+            <a:endParaRPr lang="en-US" sz="1050" dirty="0"/>
+          </a:p>
+        </p:txBody>
+      </p:sp>
+      <p:sp>
+        <p:nvSpPr>
+          <p:cNvPr id="49" name="Text 47"/>
+          <p:cNvSpPr/>
+          <p:nvPr/>
+        </p:nvSpPr>
+        <p:spPr>
+          <a:xfrm>
+            <a:off x="8778240" y="4480560"/>
+            <a:ext cx="2880360" cy="548640"/>
+          </a:xfrm>
+          <a:prstGeom prst="rect">
+            <a:avLst/>
+          </a:prstGeom>
+          <a:noFill/>
+          <a:ln/>
+        </p:spPr>
+        <p:txBody>
+          <a:bodyPr wrap="square" lIns="0" tIns="0" rIns="0" bIns="0" rtlCol="0" anchor="t"/>
+          <a:lstStyle/>
+          <a:p>
+            <a:pPr indent="0" marL="0">
+              <a:buNone/>
+            </a:pPr>
+            <a:r>
+              <a:rPr lang="en-US" sz="1150" b="1" dirty="0">
+                <a:solidFill>
+                  <a:srgbClr val="2A1618"/>
+                </a:solidFill>
+                <a:latin typeface="Calibri" pitchFamily="34" charset="0"/>
+                <a:ea typeface="Calibri" pitchFamily="34" charset="-122"/>
+                <a:cs typeface="Calibri" pitchFamily="34" charset="-120"/>
+              </a:rPr>
+              <a:t>Held out:  </a:t>
+            </a:r>
+            <a:pPr indent="0" marL="0">
+              <a:buNone/>
+            </a:pPr>
+            <a:r>
+              <a:rPr lang="en-US" sz="1150" dirty="0">
+                <a:solidFill>
+                  <a:srgbClr val="2A1618"/>
+                </a:solidFill>
+                <a:latin typeface="Calibri" pitchFamily="34" charset="0"/>
+                <a:ea typeface="Calibri" pitchFamily="34" charset="-122"/>
+                <a:cs typeface="Calibri" pitchFamily="34" charset="-120"/>
+              </a:rPr>
+              <a:t>all 4 points of a 1 in cell</a:t>
+            </a:r>
+            <a:endParaRPr lang="en-US" sz="1150" dirty="0"/>
+          </a:p>
+        </p:txBody>
+      </p:sp>
+      <p:sp>
+        <p:nvSpPr>
+          <p:cNvPr id="50" name="Text 48"/>
+          <p:cNvSpPr/>
+          <p:nvPr/>
+        </p:nvSpPr>
+        <p:spPr>
+          <a:xfrm>
+            <a:off x="8778240" y="5029200"/>
+            <a:ext cx="2880360" cy="685800"/>
+          </a:xfrm>
+          <a:prstGeom prst="rect">
+            <a:avLst/>
+          </a:prstGeom>
+          <a:noFill/>
+          <a:ln/>
+        </p:spPr>
+        <p:txBody>
+          <a:bodyPr wrap="square" lIns="0" tIns="0" rIns="0" bIns="0" rtlCol="0" anchor="t"/>
+          <a:lstStyle/>
+          <a:p>
+            <a:pPr indent="0" marL="0">
+              <a:buNone/>
+            </a:pPr>
+            <a:r>
+              <a:rPr lang="en-US" sz="1150" b="1" dirty="0">
+                <a:solidFill>
+                  <a:srgbClr val="2A1618"/>
+                </a:solidFill>
+                <a:latin typeface="Calibri" pitchFamily="34" charset="0"/>
+                <a:ea typeface="Calibri" pitchFamily="34" charset="-122"/>
+                <a:cs typeface="Calibri" pitchFamily="34" charset="-120"/>
+              </a:rPr>
+              <a:t>Question:  </a:t>
+            </a:r>
+            <a:pPr indent="0" marL="0">
+              <a:buNone/>
+            </a:pPr>
+            <a:r>
+              <a:rPr lang="en-US" sz="1150" dirty="0">
+                <a:solidFill>
+                  <a:srgbClr val="2A1618"/>
+                </a:solidFill>
+                <a:latin typeface="Calibri" pitchFamily="34" charset="0"/>
+                <a:ea typeface="Calibri" pitchFamily="34" charset="-122"/>
+                <a:cs typeface="Calibri" pitchFamily="34" charset="-120"/>
+              </a:rPr>
+              <a:t>Can it bridge a full inch to a spot with NO nearby signature?</a:t>
+            </a:r>
+            <a:endParaRPr lang="en-US" sz="1150" dirty="0"/>
+          </a:p>
+        </p:txBody>
+      </p:sp>
+      <p:sp>
+        <p:nvSpPr>
+          <p:cNvPr id="51" name="Shape 49"/>
+          <p:cNvSpPr/>
+          <p:nvPr/>
+        </p:nvSpPr>
+        <p:spPr>
+          <a:xfrm>
+            <a:off x="8778240" y="5669280"/>
+            <a:ext cx="1371600" cy="310896"/>
+          </a:xfrm>
+          <a:prstGeom prst="roundRect">
+            <a:avLst>
+              <a:gd name="adj" fmla="val 50000"/>
+            </a:avLst>
+          </a:prstGeom>
+          <a:solidFill>
+            <a:srgbClr val="8E1010"/>
+          </a:solidFill>
+          <a:ln/>
+        </p:spPr>
+      </p:sp>
+      <p:sp>
+        <p:nvSpPr>
+          <p:cNvPr id="52" name="Text 50"/>
+          <p:cNvSpPr/>
+          <p:nvPr/>
+        </p:nvSpPr>
+        <p:spPr>
+          <a:xfrm>
+            <a:off x="8778240" y="5669280"/>
+            <a:ext cx="1371600" cy="310896"/>
+          </a:xfrm>
+          <a:prstGeom prst="rect">
+            <a:avLst/>
+          </a:prstGeom>
+          <a:noFill/>
+          <a:ln/>
+        </p:spPr>
+        <p:txBody>
+          <a:bodyPr wrap="square" lIns="0" tIns="0" rIns="0" bIns="0" rtlCol="0" anchor="ctr"/>
+          <a:lstStyle/>
+          <a:p>
+            <a:pPr algn="ctr" indent="0" marL="0">
+              <a:buNone/>
+            </a:pPr>
+            <a:r>
+              <a:rPr lang="en-US" sz="1100" b="1" dirty="0">
+                <a:solidFill>
+                  <a:srgbClr val="FFFFFF"/>
+                </a:solidFill>
+                <a:latin typeface="Calibri" pitchFamily="34" charset="0"/>
+                <a:ea typeface="Calibri" pitchFamily="34" charset="-122"/>
+                <a:cs typeface="Calibri" pitchFamily="34" charset="-120"/>
+              </a:rPr>
+              <a:t>Hardest</a:t>
+            </a:r>
+            <a:endParaRPr lang="en-US" sz="1100" dirty="0"/>
           </a:p>
         </p:txBody>
       </p:sp>
@@ -6704,13 +9221,13 @@
             <a:r>
               <a:rPr lang="en-US" sz="2900" b="1" dirty="0">
                 <a:solidFill>
-                  <a:srgbClr val="1E293B"/>
+                  <a:srgbClr val="2A1618"/>
                 </a:solidFill>
                 <a:latin typeface="Cambria" pitchFamily="34" charset="0"/>
                 <a:ea typeface="Cambria" pitchFamily="34" charset="-122"/>
                 <a:cs typeface="Cambria" pitchFamily="34" charset="-120"/>
               </a:rPr>
-              <a:t>Predicted vs. actual — LOSO</a:t>
+              <a:t>New scan of a known grid (LOSO)</a:t>
             </a:r>
             <a:endParaRPr lang="en-US" sz="2900" dirty="0"/>
           </a:p>
@@ -6743,76 +9260,68 @@
             <a:r>
               <a:rPr lang="en-US" sz="1400" b="1" dirty="0">
                 <a:solidFill>
-                  <a:srgbClr val="1C9AA8"/>
+                  <a:srgbClr val="BE0000"/>
                 </a:solidFill>
                 <a:latin typeface="Calibri" pitchFamily="34" charset="0"/>
                 <a:ea typeface="Calibri" pitchFamily="34" charset="-122"/>
                 <a:cs typeface="Calibri" pitchFamily="34" charset="-120"/>
               </a:rPr>
-              <a:t>Diamonds = CNN prediction · circles = true position · arrow = the error</a:t>
+              <a:t>Median localization error: the CNN nails it; the MLP lags and physics features break it</a:t>
             </a:r>
             <a:endParaRPr lang="en-US" sz="1400" dirty="0"/>
           </a:p>
         </p:txBody>
       </p:sp>
-      <p:sp>
-        <p:nvSpPr>
-          <p:cNvPr id="4" name="Shape 2"/>
-          <p:cNvSpPr/>
-          <p:nvPr/>
-        </p:nvSpPr>
-        <p:spPr>
-          <a:xfrm>
-            <a:off x="864108" y="1627632"/>
-            <a:ext cx="3419856" cy="3950208"/>
+      <p:graphicFrame>
+        <p:nvGraphicFramePr>
+          <p:cNvPr id="4" name="Chart 0" descr=""/>
+          <p:cNvGraphicFramePr/>
+          <p:nvPr/>
+        </p:nvGraphicFramePr>
+        <p:xfrm>
+          <a:off x="548640" y="1554480"/>
+          <a:ext cx="6858000" cy="4663440"/>
+        </p:xfrm>
+        <a:graphic xmlns:a="http://schemas.openxmlformats.org/drawingml/2006/main">
+          <a:graphicData uri="http://schemas.openxmlformats.org/drawingml/2006/chart">
+            <c:chart xmlns:c="http://schemas.openxmlformats.org/drawingml/2006/chart" r:id="rId1"/>
+          </a:graphicData>
+        </a:graphic>
+      </p:graphicFrame>
+      <p:sp>
+        <p:nvSpPr>
+          <p:cNvPr id="5" name="Shape 2"/>
+          <p:cNvSpPr/>
+          <p:nvPr/>
+        </p:nvSpPr>
+        <p:spPr>
+          <a:xfrm>
+            <a:off x="7772400" y="1554480"/>
+            <a:ext cx="3840480" cy="4663440"/>
           </a:xfrm>
           <a:prstGeom prst="roundRect">
             <a:avLst>
-              <a:gd name="adj" fmla="val 2406"/>
+              <a:gd name="adj" fmla="val 2143"/>
             </a:avLst>
           </a:prstGeom>
           <a:solidFill>
-            <a:srgbClr val="F3F7FA"/>
+            <a:srgbClr val="FBF4F2"/>
           </a:solidFill>
           <a:ln w="12700">
             <a:solidFill>
-              <a:srgbClr val="D8E2EA"/>
+              <a:srgbClr val="E7D6D1"/>
             </a:solidFill>
             <a:prstDash val="solid"/>
           </a:ln>
           <a:effectLst>
             <a:outerShdw sx="100000" sy="100000" kx="0" ky="0" algn="bl" rotWithShape="0" blurRad="88900" dist="38100" dir="5400000">
-              <a:srgbClr val="5B6B7B">
+              <a:srgbClr val="7A5C5E">
                 <a:alpha val="18000"/>
               </a:srgbClr>
             </a:outerShdw>
           </a:effectLst>
         </p:spPr>
       </p:sp>
-      <p:pic>
-        <p:nvPicPr>
-          <p:cNvPr id="5" name="Image 0" descr="pred_vs_actual_loso_empty.png">    </p:cNvPr>
-          <p:cNvPicPr>
-            <a:picLocks noChangeAspect="1"/>
-          </p:cNvPicPr>
-          <p:nvPr/>
-        </p:nvPicPr>
-        <p:blipFill>
-          <a:blip r:embed="rId1"/>
-          <a:stretch>
-            <a:fillRect/>
-          </a:stretch>
-        </p:blipFill>
-        <p:spPr>
-          <a:xfrm>
-            <a:off x="973836" y="1755648"/>
-            <a:ext cx="3200400" cy="3310128"/>
-          </a:xfrm>
-          <a:prstGeom prst="rect">
-            <a:avLst/>
-          </a:prstGeom>
-        </p:spPr>
-      </p:pic>
       <p:sp>
         <p:nvSpPr>
           <p:cNvPr id="6" name="Text 3"/>
@@ -6821,8 +9330,8 @@
         </p:nvSpPr>
         <p:spPr>
           <a:xfrm>
-            <a:off x="864108" y="5084064"/>
-            <a:ext cx="3419856" cy="347472"/>
+            <a:off x="8001000" y="1737360"/>
+            <a:ext cx="3383280" cy="365760"/>
           </a:xfrm>
           <a:prstGeom prst="rect">
             <a:avLst/>
@@ -6834,296 +9343,127 @@
           <a:bodyPr wrap="square" lIns="0" tIns="0" rIns="0" bIns="0" rtlCol="0" anchor="ctr"/>
           <a:lstStyle/>
           <a:p>
-            <a:pPr algn="ctr" indent="0" marL="0">
-              <a:buNone/>
-            </a:pPr>
-            <a:r>
-              <a:rPr lang="en-US" sz="1300" b="1" dirty="0">
-                <a:solidFill>
-                  <a:srgbClr val="1E293B"/>
+            <a:pPr indent="0" marL="0">
+              <a:buNone/>
+            </a:pPr>
+            <a:r>
+              <a:rPr lang="en-US" sz="1600" b="1" dirty="0">
+                <a:solidFill>
+                  <a:srgbClr val="BE0000"/>
+                </a:solidFill>
+                <a:latin typeface="Cambria" pitchFamily="34" charset="0"/>
+                <a:ea typeface="Cambria" pitchFamily="34" charset="-122"/>
+                <a:cs typeface="Cambria" pitchFamily="34" charset="-120"/>
+              </a:rPr>
+              <a:t>What it says</a:t>
+            </a:r>
+            <a:endParaRPr lang="en-US" sz="1600" dirty="0"/>
+          </a:p>
+        </p:txBody>
+      </p:sp>
+      <p:sp>
+        <p:nvSpPr>
+          <p:cNvPr id="7" name="Text 4"/>
+          <p:cNvSpPr/>
+          <p:nvPr/>
+        </p:nvSpPr>
+        <p:spPr>
+          <a:xfrm>
+            <a:off x="8001000" y="2194560"/>
+            <a:ext cx="3383280" cy="3840480"/>
+          </a:xfrm>
+          <a:prstGeom prst="rect">
+            <a:avLst/>
+          </a:prstGeom>
+          <a:noFill/>
+          <a:ln/>
+        </p:spPr>
+        <p:txBody>
+          <a:bodyPr wrap="square" lIns="0" tIns="0" rIns="0" bIns="0" rtlCol="0" anchor="t"/>
+          <a:lstStyle/>
+          <a:p>
+            <a:pPr marL="342900" indent="-342900">
+              <a:spcAft>
+                <a:spcPts val="800"/>
+              </a:spcAft>
+              <a:buSzPct val="100000"/>
+              <a:buChar char="•"/>
+            </a:pPr>
+            <a:r>
+              <a:rPr lang="en-US" sz="1300" dirty="0">
+                <a:solidFill>
+                  <a:srgbClr val="2A1618"/>
                 </a:solidFill>
                 <a:latin typeface="Calibri" pitchFamily="34" charset="0"/>
                 <a:ea typeface="Calibri" pitchFamily="34" charset="-122"/>
                 <a:cs typeface="Calibri" pitchFamily="34" charset="-120"/>
               </a:rPr>
-              <a:t>Empty   </a:t>
-            </a:r>
-            <a:pPr algn="ctr" indent="0" marL="0">
-              <a:buNone/>
-            </a:pPr>
-            <a:r>
-              <a:rPr lang="en-US" sz="1300" b="1" dirty="0">
-                <a:solidFill>
-                  <a:srgbClr val="1C9AA8"/>
+              <a:t>CNN wins everywhere: 0.15 in (3.9 mm) on empty, under a quarter inch even on F5.</a:t>
+            </a:r>
+            <a:endParaRPr lang="en-US" sz="1300" dirty="0"/>
+          </a:p>
+          <a:p>
+            <a:pPr marL="342900" indent="-342900">
+              <a:spcAft>
+                <a:spcPts val="800"/>
+              </a:spcAft>
+              <a:buSzPct val="100000"/>
+              <a:buChar char="•"/>
+            </a:pPr>
+            <a:r>
+              <a:rPr lang="en-US" sz="1300" dirty="0">
+                <a:solidFill>
+                  <a:srgbClr val="2A1618"/>
                 </a:solidFill>
                 <a:latin typeface="Calibri" pitchFamily="34" charset="0"/>
                 <a:ea typeface="Calibri" pitchFamily="34" charset="-122"/>
                 <a:cs typeface="Calibri" pitchFamily="34" charset="-120"/>
               </a:rPr>
-              <a:t>0.15 in</a:t>
+              <a:t>Raw is as good as physics for the CNN, so raw is the pick (simpler, faster).</a:t>
             </a:r>
             <a:endParaRPr lang="en-US" sz="1300" dirty="0"/>
           </a:p>
-        </p:txBody>
-      </p:sp>
-      <p:sp>
-        <p:nvSpPr>
-          <p:cNvPr id="7" name="Shape 4"/>
-          <p:cNvSpPr/>
-          <p:nvPr/>
-        </p:nvSpPr>
-        <p:spPr>
-          <a:xfrm>
-            <a:off x="4384548" y="1627632"/>
-            <a:ext cx="3419856" cy="3950208"/>
-          </a:xfrm>
-          <a:prstGeom prst="roundRect">
-            <a:avLst>
-              <a:gd name="adj" fmla="val 2406"/>
-            </a:avLst>
-          </a:prstGeom>
-          <a:solidFill>
-            <a:srgbClr val="F3F7FA"/>
-          </a:solidFill>
-          <a:ln w="12700">
-            <a:solidFill>
-              <a:srgbClr val="D8E2EA"/>
-            </a:solidFill>
-            <a:prstDash val="solid"/>
-          </a:ln>
-          <a:effectLst>
-            <a:outerShdw sx="100000" sy="100000" kx="0" ky="0" algn="bl" rotWithShape="0" blurRad="88900" dist="38100" dir="5400000">
-              <a:srgbClr val="5B6B7B">
-                <a:alpha val="18000"/>
-              </a:srgbClr>
-            </a:outerShdw>
-          </a:effectLst>
-        </p:spPr>
-      </p:sp>
-      <p:pic>
-        <p:nvPicPr>
-          <p:cNvPr id="8" name="Image 1" descr="pred_vs_actual_loso_f4.png">    </p:cNvPr>
-          <p:cNvPicPr>
-            <a:picLocks noChangeAspect="1"/>
-          </p:cNvPicPr>
-          <p:nvPr/>
-        </p:nvPicPr>
-        <p:blipFill>
-          <a:blip r:embed="rId2"/>
-          <a:stretch>
-            <a:fillRect/>
-          </a:stretch>
-        </p:blipFill>
-        <p:spPr>
-          <a:xfrm>
-            <a:off x="4494276" y="1755648"/>
-            <a:ext cx="3200400" cy="3310128"/>
-          </a:xfrm>
-          <a:prstGeom prst="rect">
-            <a:avLst/>
-          </a:prstGeom>
-        </p:spPr>
-      </p:pic>
-      <p:sp>
-        <p:nvSpPr>
-          <p:cNvPr id="9" name="Text 5"/>
-          <p:cNvSpPr/>
-          <p:nvPr/>
-        </p:nvSpPr>
-        <p:spPr>
-          <a:xfrm>
-            <a:off x="4384548" y="5084064"/>
-            <a:ext cx="3419856" cy="347472"/>
-          </a:xfrm>
-          <a:prstGeom prst="rect">
-            <a:avLst/>
-          </a:prstGeom>
-          <a:noFill/>
-          <a:ln/>
-        </p:spPr>
-        <p:txBody>
-          <a:bodyPr wrap="square" lIns="0" tIns="0" rIns="0" bIns="0" rtlCol="0" anchor="ctr"/>
-          <a:lstStyle/>
-          <a:p>
-            <a:pPr algn="ctr" indent="0" marL="0">
-              <a:buNone/>
-            </a:pPr>
-            <a:r>
-              <a:rPr lang="en-US" sz="1300" b="1" dirty="0">
-                <a:solidFill>
-                  <a:srgbClr val="1E293B"/>
+          <a:p>
+            <a:pPr marL="342900" indent="-342900">
+              <a:spcAft>
+                <a:spcPts val="800"/>
+              </a:spcAft>
+              <a:buSzPct val="100000"/>
+              <a:buChar char="•"/>
+            </a:pPr>
+            <a:r>
+              <a:rPr lang="en-US" sz="1300" dirty="0">
+                <a:solidFill>
+                  <a:srgbClr val="2A1618"/>
                 </a:solidFill>
                 <a:latin typeface="Calibri" pitchFamily="34" charset="0"/>
                 <a:ea typeface="Calibri" pitchFamily="34" charset="-122"/>
                 <a:cs typeface="Calibri" pitchFamily="34" charset="-120"/>
               </a:rPr>
-              <a:t>F4 insert   </a:t>
-            </a:r>
-            <a:pPr algn="ctr" indent="0" marL="0">
-              <a:buNone/>
-            </a:pPr>
-            <a:r>
-              <a:rPr lang="en-US" sz="1300" b="1" dirty="0">
-                <a:solidFill>
-                  <a:srgbClr val="1C9AA8"/>
+              <a:t>MLP is 3 to 4x worse; with physics it collapses to the predict-centre baseline.</a:t>
+            </a:r>
+            <a:endParaRPr lang="en-US" sz="1300" dirty="0"/>
+          </a:p>
+          <a:p>
+            <a:pPr marL="342900" indent="-342900">
+              <a:spcAft>
+                <a:spcPts val="800"/>
+              </a:spcAft>
+              <a:buSzPct val="100000"/>
+              <a:buChar char="•"/>
+            </a:pPr>
+            <a:r>
+              <a:rPr lang="en-US" sz="1300" dirty="0">
+                <a:solidFill>
+                  <a:srgbClr val="2A1618"/>
                 </a:solidFill>
                 <a:latin typeface="Calibri" pitchFamily="34" charset="0"/>
                 <a:ea typeface="Calibri" pitchFamily="34" charset="-122"/>
                 <a:cs typeface="Calibri" pitchFamily="34" charset="-120"/>
               </a:rPr>
-              <a:t>0.16 in</a:t>
+              <a:t>At least 90 percent of positions land within the half-cell on all three phantoms.</a:t>
             </a:r>
             <a:endParaRPr lang="en-US" sz="1300" dirty="0"/>
-          </a:p>
-        </p:txBody>
-      </p:sp>
-      <p:sp>
-        <p:nvSpPr>
-          <p:cNvPr id="10" name="Shape 6"/>
-          <p:cNvSpPr/>
-          <p:nvPr/>
-        </p:nvSpPr>
-        <p:spPr>
-          <a:xfrm>
-            <a:off x="7904988" y="1627632"/>
-            <a:ext cx="3419856" cy="3950208"/>
-          </a:xfrm>
-          <a:prstGeom prst="roundRect">
-            <a:avLst>
-              <a:gd name="adj" fmla="val 2406"/>
-            </a:avLst>
-          </a:prstGeom>
-          <a:solidFill>
-            <a:srgbClr val="F3F7FA"/>
-          </a:solidFill>
-          <a:ln w="12700">
-            <a:solidFill>
-              <a:srgbClr val="D8E2EA"/>
-            </a:solidFill>
-            <a:prstDash val="solid"/>
-          </a:ln>
-          <a:effectLst>
-            <a:outerShdw sx="100000" sy="100000" kx="0" ky="0" algn="bl" rotWithShape="0" blurRad="88900" dist="38100" dir="5400000">
-              <a:srgbClr val="5B6B7B">
-                <a:alpha val="18000"/>
-              </a:srgbClr>
-            </a:outerShdw>
-          </a:effectLst>
-        </p:spPr>
-      </p:sp>
-      <p:pic>
-        <p:nvPicPr>
-          <p:cNvPr id="11" name="Image 2" descr="pred_vs_actual_loso_f5.png">    </p:cNvPr>
-          <p:cNvPicPr>
-            <a:picLocks noChangeAspect="1"/>
-          </p:cNvPicPr>
-          <p:nvPr/>
-        </p:nvPicPr>
-        <p:blipFill>
-          <a:blip r:embed="rId3"/>
-          <a:stretch>
-            <a:fillRect/>
-          </a:stretch>
-        </p:blipFill>
-        <p:spPr>
-          <a:xfrm>
-            <a:off x="8014716" y="1755648"/>
-            <a:ext cx="3200400" cy="3310128"/>
-          </a:xfrm>
-          <a:prstGeom prst="rect">
-            <a:avLst/>
-          </a:prstGeom>
-        </p:spPr>
-      </p:pic>
-      <p:sp>
-        <p:nvSpPr>
-          <p:cNvPr id="12" name="Text 7"/>
-          <p:cNvSpPr/>
-          <p:nvPr/>
-        </p:nvSpPr>
-        <p:spPr>
-          <a:xfrm>
-            <a:off x="7904988" y="5084064"/>
-            <a:ext cx="3419856" cy="347472"/>
-          </a:xfrm>
-          <a:prstGeom prst="rect">
-            <a:avLst/>
-          </a:prstGeom>
-          <a:noFill/>
-          <a:ln/>
-        </p:spPr>
-        <p:txBody>
-          <a:bodyPr wrap="square" lIns="0" tIns="0" rIns="0" bIns="0" rtlCol="0" anchor="ctr"/>
-          <a:lstStyle/>
-          <a:p>
-            <a:pPr algn="ctr" indent="0" marL="0">
-              <a:buNone/>
-            </a:pPr>
-            <a:r>
-              <a:rPr lang="en-US" sz="1300" b="1" dirty="0">
-                <a:solidFill>
-                  <a:srgbClr val="1E293B"/>
-                </a:solidFill>
-                <a:latin typeface="Calibri" pitchFamily="34" charset="0"/>
-                <a:ea typeface="Calibri" pitchFamily="34" charset="-122"/>
-                <a:cs typeface="Calibri" pitchFamily="34" charset="-120"/>
-              </a:rPr>
-              <a:t>F5 insert   </a:t>
-            </a:r>
-            <a:pPr algn="ctr" indent="0" marL="0">
-              <a:buNone/>
-            </a:pPr>
-            <a:r>
-              <a:rPr lang="en-US" sz="1300" b="1" dirty="0">
-                <a:solidFill>
-                  <a:srgbClr val="1C9AA8"/>
-                </a:solidFill>
-                <a:latin typeface="Calibri" pitchFamily="34" charset="0"/>
-                <a:ea typeface="Calibri" pitchFamily="34" charset="-122"/>
-                <a:cs typeface="Calibri" pitchFamily="34" charset="-120"/>
-              </a:rPr>
-              <a:t>0.22 in</a:t>
-            </a:r>
-            <a:endParaRPr lang="en-US" sz="1300" dirty="0"/>
-          </a:p>
-        </p:txBody>
-      </p:sp>
-      <p:sp>
-        <p:nvSpPr>
-          <p:cNvPr id="13" name="Text 8"/>
-          <p:cNvSpPr/>
-          <p:nvPr/>
-        </p:nvSpPr>
-        <p:spPr>
-          <a:xfrm>
-            <a:off x="548640" y="6144768"/>
-            <a:ext cx="11091672" cy="457200"/>
-          </a:xfrm>
-          <a:prstGeom prst="rect">
-            <a:avLst/>
-          </a:prstGeom>
-          <a:noFill/>
-          <a:ln/>
-        </p:spPr>
-        <p:txBody>
-          <a:bodyPr wrap="square" lIns="0" tIns="0" rIns="0" bIns="0" rtlCol="0" anchor="ctr"/>
-          <a:lstStyle/>
-          <a:p>
-            <a:pPr algn="ctr" indent="0" marL="0">
-              <a:buNone/>
-            </a:pPr>
-            <a:r>
-              <a:rPr lang="en-US" sz="1350" i="1" dirty="0">
-                <a:solidFill>
-                  <a:srgbClr val="5B6B7B"/>
-                </a:solidFill>
-                <a:latin typeface="Calibri" pitchFamily="34" charset="0"/>
-                <a:ea typeface="Calibri" pitchFamily="34" charset="-122"/>
-                <a:cs typeface="Calibri" pitchFamily="34" charset="-120"/>
-              </a:rPr>
-              <a:t>Across empty, small (F4) and large (F5) inserts the CNN lands within a fifth of a cell — a new measurement session is not a problem.</a:t>
-            </a:r>
-            <a:endParaRPr lang="en-US" sz="1350" dirty="0"/>
           </a:p>
         </p:txBody>
       </p:sp>
@@ -7186,13 +9526,13 @@
             <a:r>
               <a:rPr lang="en-US" sz="2900" b="1" dirty="0">
                 <a:solidFill>
-                  <a:srgbClr val="1E293B"/>
+                  <a:srgbClr val="2A1618"/>
                 </a:solidFill>
                 <a:latin typeface="Cambria" pitchFamily="34" charset="0"/>
                 <a:ea typeface="Cambria" pitchFamily="34" charset="-122"/>
                 <a:cs typeface="Cambria" pitchFamily="34" charset="-120"/>
               </a:rPr>
-              <a:t>Interpolating to an unseen cell (LOPO-cell)</a:t>
+              <a:t>Predicted vs. actual, LOSO (CNN)</a:t>
             </a:r>
             <a:endParaRPr lang="en-US" sz="2900" dirty="0"/>
           </a:p>
@@ -7225,68 +9565,76 @@
             <a:r>
               <a:rPr lang="en-US" sz="1400" b="1" dirty="0">
                 <a:solidFill>
-                  <a:srgbClr val="1C9AA8"/>
+                  <a:srgbClr val="BE0000"/>
                 </a:solidFill>
                 <a:latin typeface="Calibri" pitchFamily="34" charset="0"/>
                 <a:ea typeface="Calibri" pitchFamily="34" charset="-122"/>
                 <a:cs typeface="Calibri" pitchFamily="34" charset="-120"/>
               </a:rPr>
-              <a:t>Hold a whole 1-in cell out of training — predict a spot with no signature nearby</a:t>
+              <a:t>Crimson diamonds = prediction, open circles = true position, arrow = the error</a:t>
             </a:r>
             <a:endParaRPr lang="en-US" sz="1400" dirty="0"/>
           </a:p>
         </p:txBody>
       </p:sp>
-      <p:graphicFrame>
-        <p:nvGraphicFramePr>
-          <p:cNvPr id="4" name="Chart 0" descr=""/>
-          <p:cNvGraphicFramePr/>
-          <p:nvPr/>
-        </p:nvGraphicFramePr>
-        <p:xfrm>
-          <a:off x="548640" y="1554480"/>
-          <a:ext cx="6858000" cy="4663440"/>
-        </p:xfrm>
-        <a:graphic xmlns:a="http://schemas.openxmlformats.org/drawingml/2006/main">
-          <a:graphicData uri="http://schemas.openxmlformats.org/drawingml/2006/chart">
-            <c:chart xmlns:c="http://schemas.openxmlformats.org/drawingml/2006/chart" r:id="rId1"/>
-          </a:graphicData>
-        </a:graphic>
-      </p:graphicFrame>
-      <p:sp>
-        <p:nvSpPr>
-          <p:cNvPr id="5" name="Shape 2"/>
-          <p:cNvSpPr/>
-          <p:nvPr/>
-        </p:nvSpPr>
-        <p:spPr>
-          <a:xfrm>
-            <a:off x="7772400" y="1554480"/>
-            <a:ext cx="3840480" cy="4663440"/>
+      <p:sp>
+        <p:nvSpPr>
+          <p:cNvPr id="4" name="Shape 2"/>
+          <p:cNvSpPr/>
+          <p:nvPr/>
+        </p:nvSpPr>
+        <p:spPr>
+          <a:xfrm>
+            <a:off x="864108" y="1627632"/>
+            <a:ext cx="3419856" cy="3950208"/>
           </a:xfrm>
           <a:prstGeom prst="roundRect">
             <a:avLst>
-              <a:gd name="adj" fmla="val 2143"/>
+              <a:gd name="adj" fmla="val 2406"/>
             </a:avLst>
           </a:prstGeom>
           <a:solidFill>
-            <a:srgbClr val="F3F7FA"/>
+            <a:srgbClr val="FBF4F2"/>
           </a:solidFill>
           <a:ln w="12700">
             <a:solidFill>
-              <a:srgbClr val="D8E2EA"/>
+              <a:srgbClr val="E7D6D1"/>
             </a:solidFill>
             <a:prstDash val="solid"/>
           </a:ln>
           <a:effectLst>
             <a:outerShdw sx="100000" sy="100000" kx="0" ky="0" algn="bl" rotWithShape="0" blurRad="88900" dist="38100" dir="5400000">
-              <a:srgbClr val="5B6B7B">
+              <a:srgbClr val="7A5C5E">
                 <a:alpha val="18000"/>
               </a:srgbClr>
             </a:outerShdw>
           </a:effectLst>
         </p:spPr>
       </p:sp>
+      <p:pic>
+        <p:nvPicPr>
+          <p:cNvPr id="5" name="Image 0" descr="pred_vs_actual_loso_empty.png">    </p:cNvPr>
+          <p:cNvPicPr>
+            <a:picLocks noChangeAspect="1"/>
+          </p:cNvPicPr>
+          <p:nvPr/>
+        </p:nvPicPr>
+        <p:blipFill>
+          <a:blip r:embed="rId1"/>
+          <a:stretch>
+            <a:fillRect/>
+          </a:stretch>
+        </p:blipFill>
+        <p:spPr>
+          <a:xfrm>
+            <a:off x="973836" y="1755648"/>
+            <a:ext cx="3200400" cy="3310128"/>
+          </a:xfrm>
+          <a:prstGeom prst="rect">
+            <a:avLst/>
+          </a:prstGeom>
+        </p:spPr>
+      </p:pic>
       <p:sp>
         <p:nvSpPr>
           <p:cNvPr id="6" name="Text 3"/>
@@ -7295,8 +9643,8 @@
         </p:nvSpPr>
         <p:spPr>
           <a:xfrm>
-            <a:off x="8001000" y="1737360"/>
-            <a:ext cx="3383280" cy="365760"/>
+            <a:off x="864108" y="5084064"/>
+            <a:ext cx="3419856" cy="347472"/>
           </a:xfrm>
           <a:prstGeom prst="rect">
             <a:avLst/>
@@ -7308,106 +9656,296 @@
           <a:bodyPr wrap="square" lIns="0" tIns="0" rIns="0" bIns="0" rtlCol="0" anchor="ctr"/>
           <a:lstStyle/>
           <a:p>
-            <a:pPr indent="0" marL="0">
-              <a:buNone/>
-            </a:pPr>
-            <a:r>
-              <a:rPr lang="en-US" sz="1600" b="1" dirty="0">
-                <a:solidFill>
-                  <a:srgbClr val="1C9AA8"/>
-                </a:solidFill>
-                <a:latin typeface="Cambria" pitchFamily="34" charset="0"/>
-                <a:ea typeface="Cambria" pitchFamily="34" charset="-122"/>
-                <a:cs typeface="Cambria" pitchFamily="34" charset="-120"/>
-              </a:rPr>
-              <a:t>Three findings</a:t>
-            </a:r>
-            <a:endParaRPr lang="en-US" sz="1600" dirty="0"/>
-          </a:p>
-        </p:txBody>
-      </p:sp>
-      <p:sp>
-        <p:nvSpPr>
-          <p:cNvPr id="7" name="Text 4"/>
-          <p:cNvSpPr/>
-          <p:nvPr/>
-        </p:nvSpPr>
-        <p:spPr>
-          <a:xfrm>
-            <a:off x="8001000" y="2194560"/>
-            <a:ext cx="3383280" cy="3840480"/>
-          </a:xfrm>
-          <a:prstGeom prst="rect">
-            <a:avLst/>
-          </a:prstGeom>
-          <a:noFill/>
-          <a:ln/>
-        </p:spPr>
-        <p:txBody>
-          <a:bodyPr wrap="square" lIns="0" tIns="0" rIns="0" bIns="0" rtlCol="0" anchor="t"/>
-          <a:lstStyle/>
-          <a:p>
-            <a:pPr marL="342900" indent="-342900">
-              <a:spcAft>
-                <a:spcPts val="800"/>
-              </a:spcAft>
-              <a:buSzPct val="100000"/>
-              <a:buChar char="•"/>
-            </a:pPr>
-            <a:r>
-              <a:rPr lang="en-US" sz="1300" dirty="0">
-                <a:solidFill>
-                  <a:srgbClr val="1E293B"/>
+            <a:pPr algn="ctr" indent="0" marL="0">
+              <a:buNone/>
+            </a:pPr>
+            <a:r>
+              <a:rPr lang="en-US" sz="1300" b="1" dirty="0">
+                <a:solidFill>
+                  <a:srgbClr val="2A1618"/>
                 </a:solidFill>
                 <a:latin typeface="Calibri" pitchFamily="34" charset="0"/>
                 <a:ea typeface="Calibri" pitchFamily="34" charset="-122"/>
                 <a:cs typeface="Calibri" pitchFamily="34" charset="-120"/>
               </a:rPr>
-              <a:t>Interpolation is 3–4× harder than session transfer (0.47–0.67 vs 0.15–0.22 in).</a:t>
-            </a:r>
-            <a:endParaRPr lang="en-US" sz="1300" dirty="0"/>
-          </a:p>
-          <a:p>
-            <a:pPr marL="342900" indent="-342900">
-              <a:spcAft>
-                <a:spcPts val="800"/>
-              </a:spcAft>
-              <a:buSzPct val="100000"/>
-              <a:buChar char="•"/>
-            </a:pPr>
-            <a:r>
-              <a:rPr lang="en-US" sz="1300" dirty="0">
-                <a:solidFill>
-                  <a:srgbClr val="1E293B"/>
+              <a:t>Empty   </a:t>
+            </a:r>
+            <a:pPr algn="ctr" indent="0" marL="0">
+              <a:buNone/>
+            </a:pPr>
+            <a:r>
+              <a:rPr lang="en-US" sz="1300" b="1" dirty="0">
+                <a:solidFill>
+                  <a:srgbClr val="BE0000"/>
                 </a:solidFill>
                 <a:latin typeface="Calibri" pitchFamily="34" charset="0"/>
                 <a:ea typeface="Calibri" pitchFamily="34" charset="-122"/>
                 <a:cs typeface="Calibri" pitchFamily="34" charset="-120"/>
               </a:rPr>
-              <a:t>Pooled beats in-session on all three — for interpolation, more data &gt; removing drift.</a:t>
+              <a:t>0.15 in</a:t>
             </a:r>
             <a:endParaRPr lang="en-US" sz="1300" dirty="0"/>
           </a:p>
-          <a:p>
-            <a:pPr marL="342900" indent="-342900">
-              <a:spcAft>
-                <a:spcPts val="800"/>
-              </a:spcAft>
-              <a:buSzPct val="100000"/>
-              <a:buChar char="•"/>
-            </a:pPr>
-            <a:r>
-              <a:rPr lang="en-US" sz="1300" dirty="0">
-                <a:solidFill>
-                  <a:srgbClr val="1E293B"/>
+        </p:txBody>
+      </p:sp>
+      <p:sp>
+        <p:nvSpPr>
+          <p:cNvPr id="7" name="Shape 4"/>
+          <p:cNvSpPr/>
+          <p:nvPr/>
+        </p:nvSpPr>
+        <p:spPr>
+          <a:xfrm>
+            <a:off x="4384548" y="1627632"/>
+            <a:ext cx="3419856" cy="3950208"/>
+          </a:xfrm>
+          <a:prstGeom prst="roundRect">
+            <a:avLst>
+              <a:gd name="adj" fmla="val 2406"/>
+            </a:avLst>
+          </a:prstGeom>
+          <a:solidFill>
+            <a:srgbClr val="FBF4F2"/>
+          </a:solidFill>
+          <a:ln w="12700">
+            <a:solidFill>
+              <a:srgbClr val="E7D6D1"/>
+            </a:solidFill>
+            <a:prstDash val="solid"/>
+          </a:ln>
+          <a:effectLst>
+            <a:outerShdw sx="100000" sy="100000" kx="0" ky="0" algn="bl" rotWithShape="0" blurRad="88900" dist="38100" dir="5400000">
+              <a:srgbClr val="7A5C5E">
+                <a:alpha val="18000"/>
+              </a:srgbClr>
+            </a:outerShdw>
+          </a:effectLst>
+        </p:spPr>
+      </p:sp>
+      <p:pic>
+        <p:nvPicPr>
+          <p:cNvPr id="8" name="Image 1" descr="pred_vs_actual_loso_f4.png">    </p:cNvPr>
+          <p:cNvPicPr>
+            <a:picLocks noChangeAspect="1"/>
+          </p:cNvPicPr>
+          <p:nvPr/>
+        </p:nvPicPr>
+        <p:blipFill>
+          <a:blip r:embed="rId2"/>
+          <a:stretch>
+            <a:fillRect/>
+          </a:stretch>
+        </p:blipFill>
+        <p:spPr>
+          <a:xfrm>
+            <a:off x="4494276" y="1755648"/>
+            <a:ext cx="3200400" cy="3310128"/>
+          </a:xfrm>
+          <a:prstGeom prst="rect">
+            <a:avLst/>
+          </a:prstGeom>
+        </p:spPr>
+      </p:pic>
+      <p:sp>
+        <p:nvSpPr>
+          <p:cNvPr id="9" name="Text 5"/>
+          <p:cNvSpPr/>
+          <p:nvPr/>
+        </p:nvSpPr>
+        <p:spPr>
+          <a:xfrm>
+            <a:off x="4384548" y="5084064"/>
+            <a:ext cx="3419856" cy="347472"/>
+          </a:xfrm>
+          <a:prstGeom prst="rect">
+            <a:avLst/>
+          </a:prstGeom>
+          <a:noFill/>
+          <a:ln/>
+        </p:spPr>
+        <p:txBody>
+          <a:bodyPr wrap="square" lIns="0" tIns="0" rIns="0" bIns="0" rtlCol="0" anchor="ctr"/>
+          <a:lstStyle/>
+          <a:p>
+            <a:pPr algn="ctr" indent="0" marL="0">
+              <a:buNone/>
+            </a:pPr>
+            <a:r>
+              <a:rPr lang="en-US" sz="1300" b="1" dirty="0">
+                <a:solidFill>
+                  <a:srgbClr val="2A1618"/>
                 </a:solidFill>
                 <a:latin typeface="Calibri" pitchFamily="34" charset="0"/>
                 <a:ea typeface="Calibri" pitchFamily="34" charset="-122"/>
                 <a:cs typeface="Calibri" pitchFamily="34" charset="-120"/>
               </a:rPr>
-              <a:t>The glandular barrier surfaces: near-insert cells become WORSE than exterior (reverse of LOSO).</a:t>
+              <a:t>F4 insert   </a:t>
+            </a:r>
+            <a:pPr algn="ctr" indent="0" marL="0">
+              <a:buNone/>
+            </a:pPr>
+            <a:r>
+              <a:rPr lang="en-US" sz="1300" b="1" dirty="0">
+                <a:solidFill>
+                  <a:srgbClr val="BE0000"/>
+                </a:solidFill>
+                <a:latin typeface="Calibri" pitchFamily="34" charset="0"/>
+                <a:ea typeface="Calibri" pitchFamily="34" charset="-122"/>
+                <a:cs typeface="Calibri" pitchFamily="34" charset="-120"/>
+              </a:rPr>
+              <a:t>0.16 in</a:t>
             </a:r>
             <a:endParaRPr lang="en-US" sz="1300" dirty="0"/>
+          </a:p>
+        </p:txBody>
+      </p:sp>
+      <p:sp>
+        <p:nvSpPr>
+          <p:cNvPr id="10" name="Shape 6"/>
+          <p:cNvSpPr/>
+          <p:nvPr/>
+        </p:nvSpPr>
+        <p:spPr>
+          <a:xfrm>
+            <a:off x="7904988" y="1627632"/>
+            <a:ext cx="3419856" cy="3950208"/>
+          </a:xfrm>
+          <a:prstGeom prst="roundRect">
+            <a:avLst>
+              <a:gd name="adj" fmla="val 2406"/>
+            </a:avLst>
+          </a:prstGeom>
+          <a:solidFill>
+            <a:srgbClr val="FBF4F2"/>
+          </a:solidFill>
+          <a:ln w="12700">
+            <a:solidFill>
+              <a:srgbClr val="E7D6D1"/>
+            </a:solidFill>
+            <a:prstDash val="solid"/>
+          </a:ln>
+          <a:effectLst>
+            <a:outerShdw sx="100000" sy="100000" kx="0" ky="0" algn="bl" rotWithShape="0" blurRad="88900" dist="38100" dir="5400000">
+              <a:srgbClr val="7A5C5E">
+                <a:alpha val="18000"/>
+              </a:srgbClr>
+            </a:outerShdw>
+          </a:effectLst>
+        </p:spPr>
+      </p:sp>
+      <p:pic>
+        <p:nvPicPr>
+          <p:cNvPr id="11" name="Image 2" descr="pred_vs_actual_loso_f5.png">    </p:cNvPr>
+          <p:cNvPicPr>
+            <a:picLocks noChangeAspect="1"/>
+          </p:cNvPicPr>
+          <p:nvPr/>
+        </p:nvPicPr>
+        <p:blipFill>
+          <a:blip r:embed="rId3"/>
+          <a:stretch>
+            <a:fillRect/>
+          </a:stretch>
+        </p:blipFill>
+        <p:spPr>
+          <a:xfrm>
+            <a:off x="8014716" y="1755648"/>
+            <a:ext cx="3200400" cy="3310128"/>
+          </a:xfrm>
+          <a:prstGeom prst="rect">
+            <a:avLst/>
+          </a:prstGeom>
+        </p:spPr>
+      </p:pic>
+      <p:sp>
+        <p:nvSpPr>
+          <p:cNvPr id="12" name="Text 7"/>
+          <p:cNvSpPr/>
+          <p:nvPr/>
+        </p:nvSpPr>
+        <p:spPr>
+          <a:xfrm>
+            <a:off x="7904988" y="5084064"/>
+            <a:ext cx="3419856" cy="347472"/>
+          </a:xfrm>
+          <a:prstGeom prst="rect">
+            <a:avLst/>
+          </a:prstGeom>
+          <a:noFill/>
+          <a:ln/>
+        </p:spPr>
+        <p:txBody>
+          <a:bodyPr wrap="square" lIns="0" tIns="0" rIns="0" bIns="0" rtlCol="0" anchor="ctr"/>
+          <a:lstStyle/>
+          <a:p>
+            <a:pPr algn="ctr" indent="0" marL="0">
+              <a:buNone/>
+            </a:pPr>
+            <a:r>
+              <a:rPr lang="en-US" sz="1300" b="1" dirty="0">
+                <a:solidFill>
+                  <a:srgbClr val="2A1618"/>
+                </a:solidFill>
+                <a:latin typeface="Calibri" pitchFamily="34" charset="0"/>
+                <a:ea typeface="Calibri" pitchFamily="34" charset="-122"/>
+                <a:cs typeface="Calibri" pitchFamily="34" charset="-120"/>
+              </a:rPr>
+              <a:t>F5 insert   </a:t>
+            </a:r>
+            <a:pPr algn="ctr" indent="0" marL="0">
+              <a:buNone/>
+            </a:pPr>
+            <a:r>
+              <a:rPr lang="en-US" sz="1300" b="1" dirty="0">
+                <a:solidFill>
+                  <a:srgbClr val="BE0000"/>
+                </a:solidFill>
+                <a:latin typeface="Calibri" pitchFamily="34" charset="0"/>
+                <a:ea typeface="Calibri" pitchFamily="34" charset="-122"/>
+                <a:cs typeface="Calibri" pitchFamily="34" charset="-120"/>
+              </a:rPr>
+              <a:t>0.22 in</a:t>
+            </a:r>
+            <a:endParaRPr lang="en-US" sz="1300" dirty="0"/>
+          </a:p>
+        </p:txBody>
+      </p:sp>
+      <p:sp>
+        <p:nvSpPr>
+          <p:cNvPr id="13" name="Text 8"/>
+          <p:cNvSpPr/>
+          <p:nvPr/>
+        </p:nvSpPr>
+        <p:spPr>
+          <a:xfrm>
+            <a:off x="548640" y="6144768"/>
+            <a:ext cx="11091672" cy="457200"/>
+          </a:xfrm>
+          <a:prstGeom prst="rect">
+            <a:avLst/>
+          </a:prstGeom>
+          <a:noFill/>
+          <a:ln/>
+        </p:spPr>
+        <p:txBody>
+          <a:bodyPr wrap="square" lIns="0" tIns="0" rIns="0" bIns="0" rtlCol="0" anchor="ctr"/>
+          <a:lstStyle/>
+          <a:p>
+            <a:pPr algn="ctr" indent="0" marL="0">
+              <a:buNone/>
+            </a:pPr>
+            <a:r>
+              <a:rPr lang="en-US" sz="1350" i="1" dirty="0">
+                <a:solidFill>
+                  <a:srgbClr val="836A68"/>
+                </a:solidFill>
+                <a:latin typeface="Calibri" pitchFamily="34" charset="0"/>
+                <a:ea typeface="Calibri" pitchFamily="34" charset="-122"/>
+                <a:cs typeface="Calibri" pitchFamily="34" charset="-120"/>
+              </a:rPr>
+              <a:t>Across empty, small (F4) and large (F5) inserts the CNN lands within a fifth of a cell. A new measurement session is not a problem.</a:t>
+            </a:r>
+            <a:endParaRPr lang="en-US" sz="1350" dirty="0"/>
           </a:p>
         </p:txBody>
       </p:sp>
@@ -7470,13 +10008,13 @@
             <a:r>
               <a:rPr lang="en-US" sz="2900" b="1" dirty="0">
                 <a:solidFill>
-                  <a:srgbClr val="1E293B"/>
+                  <a:srgbClr val="2A1618"/>
                 </a:solidFill>
                 <a:latin typeface="Cambria" pitchFamily="34" charset="0"/>
                 <a:ea typeface="Cambria" pitchFamily="34" charset="-122"/>
                 <a:cs typeface="Cambria" pitchFamily="34" charset="-120"/>
               </a:rPr>
-              <a:t>Predicted vs. actual — LOPO-cell (unseen cells)</a:t>
+              <a:t>Interpolating to an unseen cell (LOPO-cell, CNN)</a:t>
             </a:r>
             <a:endParaRPr lang="en-US" sz="2900" dirty="0"/>
           </a:p>
@@ -7509,76 +10047,68 @@
             <a:r>
               <a:rPr lang="en-US" sz="1400" b="1" dirty="0">
                 <a:solidFill>
-                  <a:srgbClr val="1C9AA8"/>
+                  <a:srgbClr val="BE0000"/>
                 </a:solidFill>
                 <a:latin typeface="Calibri" pitchFamily="34" charset="0"/>
                 <a:ea typeface="Calibri" pitchFamily="34" charset="-122"/>
                 <a:cs typeface="Calibri" pitchFamily="34" charset="-120"/>
               </a:rPr>
-              <a:t>Arrows grow and pull inward; red-ringed points sit over the glandular insert</a:t>
+              <a:t>Hold a whole 1 in cell out of training, then predict a spot with no signature nearby</a:t>
             </a:r>
             <a:endParaRPr lang="en-US" sz="1400" dirty="0"/>
           </a:p>
         </p:txBody>
       </p:sp>
-      <p:sp>
-        <p:nvSpPr>
-          <p:cNvPr id="4" name="Shape 2"/>
-          <p:cNvSpPr/>
-          <p:nvPr/>
-        </p:nvSpPr>
-        <p:spPr>
-          <a:xfrm>
-            <a:off x="864108" y="1627632"/>
-            <a:ext cx="3419856" cy="3950208"/>
+      <p:graphicFrame>
+        <p:nvGraphicFramePr>
+          <p:cNvPr id="4" name="Chart 0" descr=""/>
+          <p:cNvGraphicFramePr/>
+          <p:nvPr/>
+        </p:nvGraphicFramePr>
+        <p:xfrm>
+          <a:off x="548640" y="1554480"/>
+          <a:ext cx="6858000" cy="4663440"/>
+        </p:xfrm>
+        <a:graphic xmlns:a="http://schemas.openxmlformats.org/drawingml/2006/main">
+          <a:graphicData uri="http://schemas.openxmlformats.org/drawingml/2006/chart">
+            <c:chart xmlns:c="http://schemas.openxmlformats.org/drawingml/2006/chart" r:id="rId1"/>
+          </a:graphicData>
+        </a:graphic>
+      </p:graphicFrame>
+      <p:sp>
+        <p:nvSpPr>
+          <p:cNvPr id="5" name="Shape 2"/>
+          <p:cNvSpPr/>
+          <p:nvPr/>
+        </p:nvSpPr>
+        <p:spPr>
+          <a:xfrm>
+            <a:off x="7772400" y="1554480"/>
+            <a:ext cx="3840480" cy="4663440"/>
           </a:xfrm>
           <a:prstGeom prst="roundRect">
             <a:avLst>
-              <a:gd name="adj" fmla="val 2406"/>
+              <a:gd name="adj" fmla="val 2143"/>
             </a:avLst>
           </a:prstGeom>
           <a:solidFill>
-            <a:srgbClr val="F3F7FA"/>
+            <a:srgbClr val="FBF4F2"/>
           </a:solidFill>
           <a:ln w="12700">
             <a:solidFill>
-              <a:srgbClr val="D8E2EA"/>
+              <a:srgbClr val="E7D6D1"/>
             </a:solidFill>
             <a:prstDash val="solid"/>
           </a:ln>
           <a:effectLst>
             <a:outerShdw sx="100000" sy="100000" kx="0" ky="0" algn="bl" rotWithShape="0" blurRad="88900" dist="38100" dir="5400000">
-              <a:srgbClr val="5B6B7B">
+              <a:srgbClr val="7A5C5E">
                 <a:alpha val="18000"/>
               </a:srgbClr>
             </a:outerShdw>
           </a:effectLst>
         </p:spPr>
       </p:sp>
-      <p:pic>
-        <p:nvPicPr>
-          <p:cNvPr id="5" name="Image 0" descr="pred_vs_actual_lopo_empty.png">    </p:cNvPr>
-          <p:cNvPicPr>
-            <a:picLocks noChangeAspect="1"/>
-          </p:cNvPicPr>
-          <p:nvPr/>
-        </p:nvPicPr>
-        <p:blipFill>
-          <a:blip r:embed="rId1"/>
-          <a:stretch>
-            <a:fillRect/>
-          </a:stretch>
-        </p:blipFill>
-        <p:spPr>
-          <a:xfrm>
-            <a:off x="973836" y="1755648"/>
-            <a:ext cx="3200400" cy="3310128"/>
-          </a:xfrm>
-          <a:prstGeom prst="rect">
-            <a:avLst/>
-          </a:prstGeom>
-        </p:spPr>
-      </p:pic>
       <p:sp>
         <p:nvSpPr>
           <p:cNvPr id="6" name="Text 3"/>
@@ -7587,8 +10117,8 @@
         </p:nvSpPr>
         <p:spPr>
           <a:xfrm>
-            <a:off x="864108" y="5084064"/>
-            <a:ext cx="3419856" cy="347472"/>
+            <a:off x="8001000" y="1737360"/>
+            <a:ext cx="3383280" cy="365760"/>
           </a:xfrm>
           <a:prstGeom prst="rect">
             <a:avLst/>
@@ -7600,296 +10130,127 @@
           <a:bodyPr wrap="square" lIns="0" tIns="0" rIns="0" bIns="0" rtlCol="0" anchor="ctr"/>
           <a:lstStyle/>
           <a:p>
-            <a:pPr algn="ctr" indent="0" marL="0">
-              <a:buNone/>
-            </a:pPr>
-            <a:r>
-              <a:rPr lang="en-US" sz="1300" b="1" dirty="0">
-                <a:solidFill>
-                  <a:srgbClr val="1E293B"/>
+            <a:pPr indent="0" marL="0">
+              <a:buNone/>
+            </a:pPr>
+            <a:r>
+              <a:rPr lang="en-US" sz="1600" b="1" dirty="0">
+                <a:solidFill>
+                  <a:srgbClr val="BE0000"/>
+                </a:solidFill>
+                <a:latin typeface="Cambria" pitchFamily="34" charset="0"/>
+                <a:ea typeface="Cambria" pitchFamily="34" charset="-122"/>
+                <a:cs typeface="Cambria" pitchFamily="34" charset="-120"/>
+              </a:rPr>
+              <a:t>Three findings</a:t>
+            </a:r>
+            <a:endParaRPr lang="en-US" sz="1600" dirty="0"/>
+          </a:p>
+        </p:txBody>
+      </p:sp>
+      <p:sp>
+        <p:nvSpPr>
+          <p:cNvPr id="7" name="Text 4"/>
+          <p:cNvSpPr/>
+          <p:nvPr/>
+        </p:nvSpPr>
+        <p:spPr>
+          <a:xfrm>
+            <a:off x="8001000" y="2194560"/>
+            <a:ext cx="3383280" cy="3840480"/>
+          </a:xfrm>
+          <a:prstGeom prst="rect">
+            <a:avLst/>
+          </a:prstGeom>
+          <a:noFill/>
+          <a:ln/>
+        </p:spPr>
+        <p:txBody>
+          <a:bodyPr wrap="square" lIns="0" tIns="0" rIns="0" bIns="0" rtlCol="0" anchor="t"/>
+          <a:lstStyle/>
+          <a:p>
+            <a:pPr marL="342900" indent="-342900">
+              <a:spcAft>
+                <a:spcPts val="800"/>
+              </a:spcAft>
+              <a:buSzPct val="100000"/>
+              <a:buChar char="•"/>
+            </a:pPr>
+            <a:r>
+              <a:rPr lang="en-US" sz="1300" dirty="0">
+                <a:solidFill>
+                  <a:srgbClr val="2A1618"/>
                 </a:solidFill>
                 <a:latin typeface="Calibri" pitchFamily="34" charset="0"/>
                 <a:ea typeface="Calibri" pitchFamily="34" charset="-122"/>
                 <a:cs typeface="Calibri" pitchFamily="34" charset="-120"/>
               </a:rPr>
-              <a:t>Empty   </a:t>
-            </a:r>
-            <a:pPr algn="ctr" indent="0" marL="0">
-              <a:buNone/>
-            </a:pPr>
-            <a:r>
-              <a:rPr lang="en-US" sz="1300" b="1" dirty="0">
-                <a:solidFill>
-                  <a:srgbClr val="1C9AA8"/>
+              <a:t>Model = CNN (raw, all 4 antennas), same as LOSO.</a:t>
+            </a:r>
+            <a:endParaRPr lang="en-US" sz="1300" dirty="0"/>
+          </a:p>
+          <a:p>
+            <a:pPr marL="342900" indent="-342900">
+              <a:spcAft>
+                <a:spcPts val="800"/>
+              </a:spcAft>
+              <a:buSzPct val="100000"/>
+              <a:buChar char="•"/>
+            </a:pPr>
+            <a:r>
+              <a:rPr lang="en-US" sz="1300" dirty="0">
+                <a:solidFill>
+                  <a:srgbClr val="2A1618"/>
                 </a:solidFill>
                 <a:latin typeface="Calibri" pitchFamily="34" charset="0"/>
                 <a:ea typeface="Calibri" pitchFamily="34" charset="-122"/>
                 <a:cs typeface="Calibri" pitchFamily="34" charset="-120"/>
               </a:rPr>
-              <a:t>0.47 in</a:t>
+              <a:t>Pooled = the held-out cell is removed from EVERY session, train on all the rest. In-session = train and test inside one session (drift removed).</a:t>
             </a:r>
             <a:endParaRPr lang="en-US" sz="1300" dirty="0"/>
           </a:p>
-        </p:txBody>
-      </p:sp>
-      <p:sp>
-        <p:nvSpPr>
-          <p:cNvPr id="7" name="Shape 4"/>
-          <p:cNvSpPr/>
-          <p:nvPr/>
-        </p:nvSpPr>
-        <p:spPr>
-          <a:xfrm>
-            <a:off x="4384548" y="1627632"/>
-            <a:ext cx="3419856" cy="3950208"/>
-          </a:xfrm>
-          <a:prstGeom prst="roundRect">
-            <a:avLst>
-              <a:gd name="adj" fmla="val 2406"/>
-            </a:avLst>
-          </a:prstGeom>
-          <a:solidFill>
-            <a:srgbClr val="F3F7FA"/>
-          </a:solidFill>
-          <a:ln w="12700">
-            <a:solidFill>
-              <a:srgbClr val="D8E2EA"/>
-            </a:solidFill>
-            <a:prstDash val="solid"/>
-          </a:ln>
-          <a:effectLst>
-            <a:outerShdw sx="100000" sy="100000" kx="0" ky="0" algn="bl" rotWithShape="0" blurRad="88900" dist="38100" dir="5400000">
-              <a:srgbClr val="5B6B7B">
-                <a:alpha val="18000"/>
-              </a:srgbClr>
-            </a:outerShdw>
-          </a:effectLst>
-        </p:spPr>
-      </p:sp>
-      <p:pic>
-        <p:nvPicPr>
-          <p:cNvPr id="8" name="Image 1" descr="pred_vs_actual_lopo_f4.png">    </p:cNvPr>
-          <p:cNvPicPr>
-            <a:picLocks noChangeAspect="1"/>
-          </p:cNvPicPr>
-          <p:nvPr/>
-        </p:nvPicPr>
-        <p:blipFill>
-          <a:blip r:embed="rId2"/>
-          <a:stretch>
-            <a:fillRect/>
-          </a:stretch>
-        </p:blipFill>
-        <p:spPr>
-          <a:xfrm>
-            <a:off x="4494276" y="1755648"/>
-            <a:ext cx="3200400" cy="3310128"/>
-          </a:xfrm>
-          <a:prstGeom prst="rect">
-            <a:avLst/>
-          </a:prstGeom>
-        </p:spPr>
-      </p:pic>
-      <p:sp>
-        <p:nvSpPr>
-          <p:cNvPr id="9" name="Text 5"/>
-          <p:cNvSpPr/>
-          <p:nvPr/>
-        </p:nvSpPr>
-        <p:spPr>
-          <a:xfrm>
-            <a:off x="4384548" y="5084064"/>
-            <a:ext cx="3419856" cy="347472"/>
-          </a:xfrm>
-          <a:prstGeom prst="rect">
-            <a:avLst/>
-          </a:prstGeom>
-          <a:noFill/>
-          <a:ln/>
-        </p:spPr>
-        <p:txBody>
-          <a:bodyPr wrap="square" lIns="0" tIns="0" rIns="0" bIns="0" rtlCol="0" anchor="ctr"/>
-          <a:lstStyle/>
-          <a:p>
-            <a:pPr algn="ctr" indent="0" marL="0">
-              <a:buNone/>
-            </a:pPr>
-            <a:r>
-              <a:rPr lang="en-US" sz="1300" b="1" dirty="0">
-                <a:solidFill>
-                  <a:srgbClr val="1E293B"/>
+          <a:p>
+            <a:pPr marL="342900" indent="-342900">
+              <a:spcAft>
+                <a:spcPts val="800"/>
+              </a:spcAft>
+              <a:buSzPct val="100000"/>
+              <a:buChar char="•"/>
+            </a:pPr>
+            <a:r>
+              <a:rPr lang="en-US" sz="1300" dirty="0">
+                <a:solidFill>
+                  <a:srgbClr val="2A1618"/>
                 </a:solidFill>
                 <a:latin typeface="Calibri" pitchFamily="34" charset="0"/>
                 <a:ea typeface="Calibri" pitchFamily="34" charset="-122"/>
                 <a:cs typeface="Calibri" pitchFamily="34" charset="-120"/>
               </a:rPr>
-              <a:t>F4 insert   </a:t>
-            </a:r>
-            <a:pPr algn="ctr" indent="0" marL="0">
-              <a:buNone/>
-            </a:pPr>
-            <a:r>
-              <a:rPr lang="en-US" sz="1300" b="1" dirty="0">
-                <a:solidFill>
-                  <a:srgbClr val="1C9AA8"/>
+              <a:t>Interpolation is 3 to 4x harder than a new session (0.47 to 0.67 vs 0.15 to 0.22 in).</a:t>
+            </a:r>
+            <a:endParaRPr lang="en-US" sz="1300" dirty="0"/>
+          </a:p>
+          <a:p>
+            <a:pPr marL="342900" indent="-342900">
+              <a:spcAft>
+                <a:spcPts val="800"/>
+              </a:spcAft>
+              <a:buSzPct val="100000"/>
+              <a:buChar char="•"/>
+            </a:pPr>
+            <a:r>
+              <a:rPr lang="en-US" sz="1300" dirty="0">
+                <a:solidFill>
+                  <a:srgbClr val="2A1618"/>
                 </a:solidFill>
                 <a:latin typeface="Calibri" pitchFamily="34" charset="0"/>
                 <a:ea typeface="Calibri" pitchFamily="34" charset="-122"/>
                 <a:cs typeface="Calibri" pitchFamily="34" charset="-120"/>
               </a:rPr>
-              <a:t>0.49 in</a:t>
+              <a:t>Pooled beats in-session on all three: for interpolation, more data beats removing drift.</a:t>
             </a:r>
             <a:endParaRPr lang="en-US" sz="1300" dirty="0"/>
-          </a:p>
-        </p:txBody>
-      </p:sp>
-      <p:sp>
-        <p:nvSpPr>
-          <p:cNvPr id="10" name="Shape 6"/>
-          <p:cNvSpPr/>
-          <p:nvPr/>
-        </p:nvSpPr>
-        <p:spPr>
-          <a:xfrm>
-            <a:off x="7904988" y="1627632"/>
-            <a:ext cx="3419856" cy="3950208"/>
-          </a:xfrm>
-          <a:prstGeom prst="roundRect">
-            <a:avLst>
-              <a:gd name="adj" fmla="val 2406"/>
-            </a:avLst>
-          </a:prstGeom>
-          <a:solidFill>
-            <a:srgbClr val="F3F7FA"/>
-          </a:solidFill>
-          <a:ln w="12700">
-            <a:solidFill>
-              <a:srgbClr val="D8E2EA"/>
-            </a:solidFill>
-            <a:prstDash val="solid"/>
-          </a:ln>
-          <a:effectLst>
-            <a:outerShdw sx="100000" sy="100000" kx="0" ky="0" algn="bl" rotWithShape="0" blurRad="88900" dist="38100" dir="5400000">
-              <a:srgbClr val="5B6B7B">
-                <a:alpha val="18000"/>
-              </a:srgbClr>
-            </a:outerShdw>
-          </a:effectLst>
-        </p:spPr>
-      </p:sp>
-      <p:pic>
-        <p:nvPicPr>
-          <p:cNvPr id="11" name="Image 2" descr="pred_vs_actual_lopo_f5.png">    </p:cNvPr>
-          <p:cNvPicPr>
-            <a:picLocks noChangeAspect="1"/>
-          </p:cNvPicPr>
-          <p:nvPr/>
-        </p:nvPicPr>
-        <p:blipFill>
-          <a:blip r:embed="rId3"/>
-          <a:stretch>
-            <a:fillRect/>
-          </a:stretch>
-        </p:blipFill>
-        <p:spPr>
-          <a:xfrm>
-            <a:off x="8014716" y="1755648"/>
-            <a:ext cx="3200400" cy="3310128"/>
-          </a:xfrm>
-          <a:prstGeom prst="rect">
-            <a:avLst/>
-          </a:prstGeom>
-        </p:spPr>
-      </p:pic>
-      <p:sp>
-        <p:nvSpPr>
-          <p:cNvPr id="12" name="Text 7"/>
-          <p:cNvSpPr/>
-          <p:nvPr/>
-        </p:nvSpPr>
-        <p:spPr>
-          <a:xfrm>
-            <a:off x="7904988" y="5084064"/>
-            <a:ext cx="3419856" cy="347472"/>
-          </a:xfrm>
-          <a:prstGeom prst="rect">
-            <a:avLst/>
-          </a:prstGeom>
-          <a:noFill/>
-          <a:ln/>
-        </p:spPr>
-        <p:txBody>
-          <a:bodyPr wrap="square" lIns="0" tIns="0" rIns="0" bIns="0" rtlCol="0" anchor="ctr"/>
-          <a:lstStyle/>
-          <a:p>
-            <a:pPr algn="ctr" indent="0" marL="0">
-              <a:buNone/>
-            </a:pPr>
-            <a:r>
-              <a:rPr lang="en-US" sz="1300" b="1" dirty="0">
-                <a:solidFill>
-                  <a:srgbClr val="1E293B"/>
-                </a:solidFill>
-                <a:latin typeface="Calibri" pitchFamily="34" charset="0"/>
-                <a:ea typeface="Calibri" pitchFamily="34" charset="-122"/>
-                <a:cs typeface="Calibri" pitchFamily="34" charset="-120"/>
-              </a:rPr>
-              <a:t>F5 insert   </a:t>
-            </a:r>
-            <a:pPr algn="ctr" indent="0" marL="0">
-              <a:buNone/>
-            </a:pPr>
-            <a:r>
-              <a:rPr lang="en-US" sz="1300" b="1" dirty="0">
-                <a:solidFill>
-                  <a:srgbClr val="1C9AA8"/>
-                </a:solidFill>
-                <a:latin typeface="Calibri" pitchFamily="34" charset="0"/>
-                <a:ea typeface="Calibri" pitchFamily="34" charset="-122"/>
-                <a:cs typeface="Calibri" pitchFamily="34" charset="-120"/>
-              </a:rPr>
-              <a:t>0.67 in</a:t>
-            </a:r>
-            <a:endParaRPr lang="en-US" sz="1300" dirty="0"/>
-          </a:p>
-        </p:txBody>
-      </p:sp>
-      <p:sp>
-        <p:nvSpPr>
-          <p:cNvPr id="13" name="Text 8"/>
-          <p:cNvSpPr/>
-          <p:nvPr/>
-        </p:nvSpPr>
-        <p:spPr>
-          <a:xfrm>
-            <a:off x="548640" y="6144768"/>
-            <a:ext cx="11091672" cy="457200"/>
-          </a:xfrm>
-          <a:prstGeom prst="rect">
-            <a:avLst/>
-          </a:prstGeom>
-          <a:noFill/>
-          <a:ln/>
-        </p:spPr>
-        <p:txBody>
-          <a:bodyPr wrap="square" lIns="0" tIns="0" rIns="0" bIns="0" rtlCol="0" anchor="ctr"/>
-          <a:lstStyle/>
-          <a:p>
-            <a:pPr algn="ctr" indent="0" marL="0">
-              <a:buNone/>
-            </a:pPr>
-            <a:r>
-              <a:rPr lang="en-US" sz="1350" i="1" dirty="0">
-                <a:solidFill>
-                  <a:srgbClr val="5B6B7B"/>
-                </a:solidFill>
-                <a:latin typeface="Calibri" pitchFamily="34" charset="0"/>
-                <a:ea typeface="Calibri" pitchFamily="34" charset="-122"/>
-                <a:cs typeface="Calibri" pitchFamily="34" charset="-120"/>
-              </a:rPr>
-              <a:t>Interpolation error climbs with insert size (0.47 → 0.49 → 0.67 in) and concentrates near the insert — the CNN can't bridge a dielectric barrier it never sampled.</a:t>
-            </a:r>
-            <a:endParaRPr lang="en-US" sz="1350" dirty="0"/>
           </a:p>
         </p:txBody>
       </p:sp>
@@ -7952,13 +10313,13 @@
             <a:r>
               <a:rPr lang="en-US" sz="2900" b="1" dirty="0">
                 <a:solidFill>
-                  <a:srgbClr val="1E293B"/>
+                  <a:srgbClr val="2A1618"/>
                 </a:solidFill>
                 <a:latin typeface="Cambria" pitchFamily="34" charset="0"/>
                 <a:ea typeface="Cambria" pitchFamily="34" charset="-122"/>
                 <a:cs typeface="Cambria" pitchFamily="34" charset="-120"/>
               </a:rPr>
-              <a:t>Hold out a single position (LOPO-subpos)</a:t>
+              <a:t>Predicted vs. actual, LOPO-cell (CNN, pooled)</a:t>
             </a:r>
             <a:endParaRPr lang="en-US" sz="2900" dirty="0"/>
           </a:p>
@@ -7991,21 +10352,55 @@
             <a:r>
               <a:rPr lang="en-US" sz="1400" b="1" dirty="0">
                 <a:solidFill>
-                  <a:srgbClr val="1C9AA8"/>
+                  <a:srgbClr val="BE0000"/>
                 </a:solidFill>
                 <a:latin typeface="Calibri" pitchFamily="34" charset="0"/>
                 <a:ea typeface="Calibri" pitchFamily="34" charset="-122"/>
                 <a:cs typeface="Calibri" pitchFamily="34" charset="-120"/>
               </a:rPr>
-              <a:t>Remove ONE sub-position — its 3 cell-mates (~0.375 in away) stay in training</a:t>
+              <a:t>Predicting locations never sampled; the dashed outline is the glandular insert</a:t>
             </a:r>
             <a:endParaRPr lang="en-US" sz="1400" dirty="0"/>
           </a:p>
         </p:txBody>
+      </p:sp>
+      <p:sp>
+        <p:nvSpPr>
+          <p:cNvPr id="4" name="Shape 2"/>
+          <p:cNvSpPr/>
+          <p:nvPr/>
+        </p:nvSpPr>
+        <p:spPr>
+          <a:xfrm>
+            <a:off x="864108" y="1627632"/>
+            <a:ext cx="3419856" cy="3950208"/>
+          </a:xfrm>
+          <a:prstGeom prst="roundRect">
+            <a:avLst>
+              <a:gd name="adj" fmla="val 2406"/>
+            </a:avLst>
+          </a:prstGeom>
+          <a:solidFill>
+            <a:srgbClr val="FBF4F2"/>
+          </a:solidFill>
+          <a:ln w="12700">
+            <a:solidFill>
+              <a:srgbClr val="E7D6D1"/>
+            </a:solidFill>
+            <a:prstDash val="solid"/>
+          </a:ln>
+          <a:effectLst>
+            <a:outerShdw sx="100000" sy="100000" kx="0" ky="0" algn="bl" rotWithShape="0" blurRad="88900" dist="38100" dir="5400000">
+              <a:srgbClr val="7A5C5E">
+                <a:alpha val="18000"/>
+              </a:srgbClr>
+            </a:outerShdw>
+          </a:effectLst>
+        </p:spPr>
       </p:sp>
       <p:pic>
         <p:nvPicPr>
-          <p:cNvPr id="4" name="Image 0" descr="../results/cnn_reglopo_pooled_subpos_June18_remap_raw_spatial.png">    </p:cNvPr>
+          <p:cNvPr id="5" name="Image 0" descr="pred_vs_actual_lopo_empty.png">    </p:cNvPr>
           <p:cNvPicPr>
             <a:picLocks noChangeAspect="1"/>
           </p:cNvPicPr>
@@ -8019,8 +10414,8 @@
         </p:blipFill>
         <p:spPr>
           <a:xfrm>
-            <a:off x="502920" y="1600200"/>
-            <a:ext cx="4572000" cy="4480560"/>
+            <a:off x="973836" y="1755648"/>
+            <a:ext cx="3200400" cy="3310128"/>
           </a:xfrm>
           <a:prstGeom prst="rect">
             <a:avLst/>
@@ -8029,14 +10424,14 @@
       </p:pic>
       <p:sp>
         <p:nvSpPr>
-          <p:cNvPr id="5" name="Text 2"/>
-          <p:cNvSpPr/>
-          <p:nvPr/>
-        </p:nvSpPr>
-        <p:spPr>
-          <a:xfrm>
-            <a:off x="502920" y="6053328"/>
-            <a:ext cx="4572000" cy="320040"/>
+          <p:cNvPr id="6" name="Text 3"/>
+          <p:cNvSpPr/>
+          <p:nvPr/>
+        </p:nvSpPr>
+        <p:spPr>
+          <a:xfrm>
+            <a:off x="864108" y="5084064"/>
+            <a:ext cx="3419856" cy="347472"/>
           </a:xfrm>
           <a:prstGeom prst="rect">
             <a:avLst/>
@@ -8054,21 +10449,69 @@
             <a:r>
               <a:rPr lang="en-US" sz="1300" b="1" dirty="0">
                 <a:solidFill>
-                  <a:srgbClr val="1C9AA8"/>
+                  <a:srgbClr val="2A1618"/>
                 </a:solidFill>
                 <a:latin typeface="Calibri" pitchFamily="34" charset="0"/>
                 <a:ea typeface="Calibri" pitchFamily="34" charset="-122"/>
                 <a:cs typeface="Calibri" pitchFamily="34" charset="-120"/>
               </a:rPr>
-              <a:t>Empty · 0.39 in (9.9 mm)</a:t>
+              <a:t>Empty   </a:t>
+            </a:r>
+            <a:pPr algn="ctr" indent="0" marL="0">
+              <a:buNone/>
+            </a:pPr>
+            <a:r>
+              <a:rPr lang="en-US" sz="1300" b="1" dirty="0">
+                <a:solidFill>
+                  <a:srgbClr val="BE0000"/>
+                </a:solidFill>
+                <a:latin typeface="Calibri" pitchFamily="34" charset="0"/>
+                <a:ea typeface="Calibri" pitchFamily="34" charset="-122"/>
+                <a:cs typeface="Calibri" pitchFamily="34" charset="-120"/>
+              </a:rPr>
+              <a:t>0.47 in</a:t>
             </a:r>
             <a:endParaRPr lang="en-US" sz="1300" dirty="0"/>
           </a:p>
         </p:txBody>
+      </p:sp>
+      <p:sp>
+        <p:nvSpPr>
+          <p:cNvPr id="7" name="Shape 4"/>
+          <p:cNvSpPr/>
+          <p:nvPr/>
+        </p:nvSpPr>
+        <p:spPr>
+          <a:xfrm>
+            <a:off x="4384548" y="1627632"/>
+            <a:ext cx="3419856" cy="3950208"/>
+          </a:xfrm>
+          <a:prstGeom prst="roundRect">
+            <a:avLst>
+              <a:gd name="adj" fmla="val 2406"/>
+            </a:avLst>
+          </a:prstGeom>
+          <a:solidFill>
+            <a:srgbClr val="FBF4F2"/>
+          </a:solidFill>
+          <a:ln w="12700">
+            <a:solidFill>
+              <a:srgbClr val="E7D6D1"/>
+            </a:solidFill>
+            <a:prstDash val="solid"/>
+          </a:ln>
+          <a:effectLst>
+            <a:outerShdw sx="100000" sy="100000" kx="0" ky="0" algn="bl" rotWithShape="0" blurRad="88900" dist="38100" dir="5400000">
+              <a:srgbClr val="7A5C5E">
+                <a:alpha val="18000"/>
+              </a:srgbClr>
+            </a:outerShdw>
+          </a:effectLst>
+        </p:spPr>
       </p:sp>
       <p:pic>
         <p:nvPicPr>
-          <p:cNvPr id="6" name="Image 1" descr="../results/cnn_reglopo_pooled_subpos_A3_F5_SamMed_last3_raw_spatial.png">    </p:cNvPr>
+          <p:cNvPr id="8" name="Image 1" descr="pred_vs_actual_lopo_f4.png">    </p:cNvPr>
           <p:cNvPicPr>
             <a:picLocks noChangeAspect="1"/>
           </p:cNvPicPr>
@@ -8082,8 +10525,8 @@
         </p:blipFill>
         <p:spPr>
           <a:xfrm>
-            <a:off x="5257800" y="1600200"/>
-            <a:ext cx="4572000" cy="4480560"/>
+            <a:off x="4494276" y="1755648"/>
+            <a:ext cx="3200400" cy="3310128"/>
           </a:xfrm>
           <a:prstGeom prst="rect">
             <a:avLst/>
@@ -8092,14 +10535,14 @@
       </p:pic>
       <p:sp>
         <p:nvSpPr>
-          <p:cNvPr id="7" name="Text 3"/>
-          <p:cNvSpPr/>
-          <p:nvPr/>
-        </p:nvSpPr>
-        <p:spPr>
-          <a:xfrm>
-            <a:off x="5257800" y="6053328"/>
-            <a:ext cx="4572000" cy="320040"/>
+          <p:cNvPr id="9" name="Text 5"/>
+          <p:cNvSpPr/>
+          <p:nvPr/>
+        </p:nvSpPr>
+        <p:spPr>
+          <a:xfrm>
+            <a:off x="4384548" y="5084064"/>
+            <a:ext cx="3419856" cy="347472"/>
           </a:xfrm>
           <a:prstGeom prst="rect">
             <a:avLst/>
@@ -8117,13 +10560,27 @@
             <a:r>
               <a:rPr lang="en-US" sz="1300" b="1" dirty="0">
                 <a:solidFill>
-                  <a:srgbClr val="1C9AA8"/>
+                  <a:srgbClr val="2A1618"/>
                 </a:solidFill>
                 <a:latin typeface="Calibri" pitchFamily="34" charset="0"/>
                 <a:ea typeface="Calibri" pitchFamily="34" charset="-122"/>
                 <a:cs typeface="Calibri" pitchFamily="34" charset="-120"/>
               </a:rPr>
-              <a:t>F5 insert · 0.55 in (13.9 mm)</a:t>
+              <a:t>F4 insert   </a:t>
+            </a:r>
+            <a:pPr algn="ctr" indent="0" marL="0">
+              <a:buNone/>
+            </a:pPr>
+            <a:r>
+              <a:rPr lang="en-US" sz="1300" b="1" dirty="0">
+                <a:solidFill>
+                  <a:srgbClr val="BE0000"/>
+                </a:solidFill>
+                <a:latin typeface="Calibri" pitchFamily="34" charset="0"/>
+                <a:ea typeface="Calibri" pitchFamily="34" charset="-122"/>
+                <a:cs typeface="Calibri" pitchFamily="34" charset="-120"/>
+              </a:rPr>
+              <a:t>0.49 in</a:t>
             </a:r>
             <a:endParaRPr lang="en-US" sz="1300" dirty="0"/>
           </a:p>
@@ -8131,48 +10588,72 @@
       </p:sp>
       <p:sp>
         <p:nvSpPr>
-          <p:cNvPr id="8" name="Shape 4"/>
-          <p:cNvSpPr/>
-          <p:nvPr/>
-        </p:nvSpPr>
-        <p:spPr>
-          <a:xfrm>
-            <a:off x="10012680" y="1600200"/>
-            <a:ext cx="1737360" cy="4480560"/>
+          <p:cNvPr id="10" name="Shape 6"/>
+          <p:cNvSpPr/>
+          <p:nvPr/>
+        </p:nvSpPr>
+        <p:spPr>
+          <a:xfrm>
+            <a:off x="7904988" y="1627632"/>
+            <a:ext cx="3419856" cy="3950208"/>
           </a:xfrm>
           <a:prstGeom prst="roundRect">
             <a:avLst>
-              <a:gd name="adj" fmla="val 4737"/>
+              <a:gd name="adj" fmla="val 2406"/>
             </a:avLst>
           </a:prstGeom>
           <a:solidFill>
-            <a:srgbClr val="F3F7FA"/>
+            <a:srgbClr val="FBF4F2"/>
           </a:solidFill>
           <a:ln w="12700">
             <a:solidFill>
-              <a:srgbClr val="D8E2EA"/>
+              <a:srgbClr val="E7D6D1"/>
             </a:solidFill>
             <a:prstDash val="solid"/>
           </a:ln>
           <a:effectLst>
             <a:outerShdw sx="100000" sy="100000" kx="0" ky="0" algn="bl" rotWithShape="0" blurRad="88900" dist="38100" dir="5400000">
-              <a:srgbClr val="5B6B7B">
+              <a:srgbClr val="7A5C5E">
                 <a:alpha val="18000"/>
               </a:srgbClr>
             </a:outerShdw>
           </a:effectLst>
         </p:spPr>
       </p:sp>
-      <p:sp>
-        <p:nvSpPr>
-          <p:cNvPr id="9" name="Text 5"/>
-          <p:cNvSpPr/>
-          <p:nvPr/>
-        </p:nvSpPr>
-        <p:spPr>
-          <a:xfrm>
-            <a:off x="10104120" y="1737360"/>
-            <a:ext cx="1554480" cy="548640"/>
+      <p:pic>
+        <p:nvPicPr>
+          <p:cNvPr id="11" name="Image 2" descr="pred_vs_actual_lopo_f5.png">    </p:cNvPr>
+          <p:cNvPicPr>
+            <a:picLocks noChangeAspect="1"/>
+          </p:cNvPicPr>
+          <p:nvPr/>
+        </p:nvPicPr>
+        <p:blipFill>
+          <a:blip r:embed="rId3"/>
+          <a:stretch>
+            <a:fillRect/>
+          </a:stretch>
+        </p:blipFill>
+        <p:spPr>
+          <a:xfrm>
+            <a:off x="8014716" y="1755648"/>
+            <a:ext cx="3200400" cy="3310128"/>
+          </a:xfrm>
+          <a:prstGeom prst="rect">
+            <a:avLst/>
+          </a:prstGeom>
+        </p:spPr>
+      </p:pic>
+      <p:sp>
+        <p:nvSpPr>
+          <p:cNvPr id="12" name="Text 7"/>
+          <p:cNvSpPr/>
+          <p:nvPr/>
+        </p:nvSpPr>
+        <p:spPr>
+          <a:xfrm>
+            <a:off x="7904988" y="5084064"/>
+            <a:ext cx="3419856" cy="347472"/>
           </a:xfrm>
           <a:prstGeom prst="rect">
             <a:avLst/>
@@ -8184,116 +10665,74 @@
           <a:bodyPr wrap="square" lIns="0" tIns="0" rIns="0" bIns="0" rtlCol="0" anchor="ctr"/>
           <a:lstStyle/>
           <a:p>
-            <a:pPr indent="0" marL="0">
-              <a:buNone/>
-            </a:pPr>
-            <a:r>
-              <a:rPr lang="en-US" sz="1350" b="1" dirty="0">
-                <a:solidFill>
-                  <a:srgbClr val="0B5D7A"/>
-                </a:solidFill>
-                <a:latin typeface="Cambria" pitchFamily="34" charset="0"/>
-                <a:ea typeface="Cambria" pitchFamily="34" charset="-122"/>
-                <a:cs typeface="Cambria" pitchFamily="34" charset="-120"/>
-              </a:rPr>
-              <a:t>Why easier than cell</a:t>
-            </a:r>
-            <a:endParaRPr lang="en-US" sz="1350" dirty="0"/>
-          </a:p>
-        </p:txBody>
-      </p:sp>
-      <p:sp>
-        <p:nvSpPr>
-          <p:cNvPr id="10" name="Text 6"/>
-          <p:cNvSpPr/>
-          <p:nvPr/>
-        </p:nvSpPr>
-        <p:spPr>
-          <a:xfrm>
-            <a:off x="10104120" y="2331720"/>
-            <a:ext cx="1554480" cy="3657600"/>
-          </a:xfrm>
-          <a:prstGeom prst="rect">
-            <a:avLst/>
-          </a:prstGeom>
-          <a:noFill/>
-          <a:ln/>
-        </p:spPr>
-        <p:txBody>
-          <a:bodyPr wrap="square" lIns="0" tIns="0" rIns="0" bIns="0" rtlCol="0" anchor="t"/>
-          <a:lstStyle/>
-          <a:p>
-            <a:pPr indent="0" marL="0">
-              <a:spcAft>
-                <a:spcPts val="600"/>
-              </a:spcAft>
-              <a:buNone/>
-            </a:pPr>
-            <a:r>
-              <a:rPr lang="en-US" sz="1150" dirty="0">
-                <a:solidFill>
-                  <a:srgbClr val="1E293B"/>
+            <a:pPr algn="ctr" indent="0" marL="0">
+              <a:buNone/>
+            </a:pPr>
+            <a:r>
+              <a:rPr lang="en-US" sz="1300" b="1" dirty="0">
+                <a:solidFill>
+                  <a:srgbClr val="2A1618"/>
                 </a:solidFill>
                 <a:latin typeface="Calibri" pitchFamily="34" charset="0"/>
                 <a:ea typeface="Calibri" pitchFamily="34" charset="-122"/>
                 <a:cs typeface="Calibri" pitchFamily="34" charset="-120"/>
               </a:rPr>
-              <a:t>Cell-mates remain as close anchors, so subpos &lt; cell error:</a:t>
-            </a:r>
-            <a:endParaRPr lang="en-US" sz="1150" dirty="0"/>
-          </a:p>
-          <a:p>
-            <a:pPr marL="342900" indent="-342900">
-              <a:buSzPct val="100000"/>
-              <a:buChar char="•"/>
-            </a:pPr>
-            <a:r>
-              <a:rPr lang="en-US" sz="1100" dirty="0">
-                <a:solidFill>
-                  <a:srgbClr val="1E293B"/>
+              <a:t>F5 insert   </a:t>
+            </a:r>
+            <a:pPr algn="ctr" indent="0" marL="0">
+              <a:buNone/>
+            </a:pPr>
+            <a:r>
+              <a:rPr lang="en-US" sz="1300" b="1" dirty="0">
+                <a:solidFill>
+                  <a:srgbClr val="BE0000"/>
                 </a:solidFill>
                 <a:latin typeface="Calibri" pitchFamily="34" charset="0"/>
                 <a:ea typeface="Calibri" pitchFamily="34" charset="-122"/>
                 <a:cs typeface="Calibri" pitchFamily="34" charset="-120"/>
               </a:rPr>
-              <a:t>empty 0.39 vs 0.47 in</a:t>
-            </a:r>
-            <a:endParaRPr lang="en-US" sz="1150" dirty="0"/>
-          </a:p>
-          <a:p>
-            <a:pPr marL="342900" indent="-342900">
-              <a:buSzPct val="100000"/>
-              <a:buChar char="•"/>
-            </a:pPr>
-            <a:r>
-              <a:rPr lang="en-US" sz="1100" dirty="0">
-                <a:solidFill>
-                  <a:srgbClr val="1E293B"/>
+              <a:t>0.67 in</a:t>
+            </a:r>
+            <a:endParaRPr lang="en-US" sz="1300" dirty="0"/>
+          </a:p>
+        </p:txBody>
+      </p:sp>
+      <p:sp>
+        <p:nvSpPr>
+          <p:cNvPr id="13" name="Text 8"/>
+          <p:cNvSpPr/>
+          <p:nvPr/>
+        </p:nvSpPr>
+        <p:spPr>
+          <a:xfrm>
+            <a:off x="548640" y="6144768"/>
+            <a:ext cx="11091672" cy="457200"/>
+          </a:xfrm>
+          <a:prstGeom prst="rect">
+            <a:avLst/>
+          </a:prstGeom>
+          <a:noFill/>
+          <a:ln/>
+        </p:spPr>
+        <p:txBody>
+          <a:bodyPr wrap="square" lIns="0" tIns="0" rIns="0" bIns="0" rtlCol="0" anchor="ctr"/>
+          <a:lstStyle/>
+          <a:p>
+            <a:pPr algn="ctr" indent="0" marL="0">
+              <a:buNone/>
+            </a:pPr>
+            <a:r>
+              <a:rPr lang="en-US" sz="1350" i="1" dirty="0">
+                <a:solidFill>
+                  <a:srgbClr val="836A68"/>
                 </a:solidFill>
                 <a:latin typeface="Calibri" pitchFamily="34" charset="0"/>
                 <a:ea typeface="Calibri" pitchFamily="34" charset="-122"/>
                 <a:cs typeface="Calibri" pitchFamily="34" charset="-120"/>
               </a:rPr>
-              <a:t>F5 0.55 vs 0.67 in</a:t>
-            </a:r>
-            <a:endParaRPr lang="en-US" sz="1150" dirty="0"/>
-          </a:p>
-          <a:p>
-            <a:pPr indent="0" marL="0">
-              <a:buNone/>
-            </a:pPr>
-            <a:r>
-              <a:rPr lang="en-US" sz="1100" dirty="0">
-                <a:solidFill>
-                  <a:srgbClr val="1E293B"/>
-                </a:solidFill>
-                <a:latin typeface="Calibri" pitchFamily="34" charset="0"/>
-                <a:ea typeface="Calibri" pitchFamily="34" charset="-122"/>
-                <a:cs typeface="Calibri" pitchFamily="34" charset="-120"/>
-              </a:rPr>
-              <a:t>Still &gt; the 6 mm k-NN signal floor → the CNN is data-starved on ~50 positions (see Part 3).</a:t>
-            </a:r>
-            <a:endParaRPr lang="en-US" sz="1150" dirty="0"/>
+              <a:t>Interpolation error climbs with insert size (0.47, 0.49, 0.67 in) and predictions pull inward, concentrating over the glandular insert the CNN never sampled.</a:t>
+            </a:r>
+            <a:endParaRPr lang="en-US" sz="1350" dirty="0"/>
           </a:p>
         </p:txBody>
       </p:sp>
@@ -8356,13 +10795,13 @@
             <a:r>
               <a:rPr lang="en-US" sz="2900" b="1" dirty="0">
                 <a:solidFill>
-                  <a:srgbClr val="1E293B"/>
+                  <a:srgbClr val="2A1618"/>
                 </a:solidFill>
                 <a:latin typeface="Cambria" pitchFamily="34" charset="0"/>
                 <a:ea typeface="Cambria" pitchFamily="34" charset="-122"/>
                 <a:cs typeface="Cambria" pitchFamily="34" charset="-120"/>
               </a:rPr>
-              <a:t>All three protocols side by side</a:t>
+              <a:t>Predicted vs. actual, single-position (CNN, pooled)</a:t>
             </a:r>
             <a:endParaRPr lang="en-US" sz="2900" dirty="0"/>
           </a:p>
@@ -8395,68 +10834,76 @@
             <a:r>
               <a:rPr lang="en-US" sz="1400" b="1" dirty="0">
                 <a:solidFill>
-                  <a:srgbClr val="1C9AA8"/>
+                  <a:srgbClr val="BE0000"/>
                 </a:solidFill>
                 <a:latin typeface="Calibri" pitchFamily="34" charset="0"/>
                 <a:ea typeface="Calibri" pitchFamily="34" charset="-122"/>
                 <a:cs typeface="Calibri" pitchFamily="34" charset="-120"/>
               </a:rPr>
-              <a:t>How hard is each generalization task? (raw-CNN median error, inches)</a:t>
+              <a:t>Hold out one sub-position; its 3 cell-mates stay in training</a:t>
             </a:r>
             <a:endParaRPr lang="en-US" sz="1400" dirty="0"/>
           </a:p>
         </p:txBody>
       </p:sp>
-      <p:graphicFrame>
-        <p:nvGraphicFramePr>
-          <p:cNvPr id="4" name="Chart 0" descr=""/>
-          <p:cNvGraphicFramePr/>
-          <p:nvPr/>
-        </p:nvGraphicFramePr>
-        <p:xfrm>
-          <a:off x="548640" y="1554480"/>
-          <a:ext cx="7040880" cy="4663440"/>
-        </p:xfrm>
-        <a:graphic xmlns:a="http://schemas.openxmlformats.org/drawingml/2006/main">
-          <a:graphicData uri="http://schemas.openxmlformats.org/drawingml/2006/chart">
-            <c:chart xmlns:c="http://schemas.openxmlformats.org/drawingml/2006/chart" r:id="rId1"/>
-          </a:graphicData>
-        </a:graphic>
-      </p:graphicFrame>
-      <p:sp>
-        <p:nvSpPr>
-          <p:cNvPr id="5" name="Shape 2"/>
-          <p:cNvSpPr/>
-          <p:nvPr/>
-        </p:nvSpPr>
-        <p:spPr>
-          <a:xfrm>
-            <a:off x="7863840" y="1554480"/>
-            <a:ext cx="3749040" cy="4663440"/>
+      <p:sp>
+        <p:nvSpPr>
+          <p:cNvPr id="4" name="Shape 2"/>
+          <p:cNvSpPr/>
+          <p:nvPr/>
+        </p:nvSpPr>
+        <p:spPr>
+          <a:xfrm>
+            <a:off x="864108" y="1627632"/>
+            <a:ext cx="3419856" cy="3950208"/>
           </a:xfrm>
           <a:prstGeom prst="roundRect">
             <a:avLst>
-              <a:gd name="adj" fmla="val 2195"/>
+              <a:gd name="adj" fmla="val 2406"/>
             </a:avLst>
           </a:prstGeom>
           <a:solidFill>
-            <a:srgbClr val="F3F7FA"/>
+            <a:srgbClr val="FBF4F2"/>
           </a:solidFill>
           <a:ln w="12700">
             <a:solidFill>
-              <a:srgbClr val="D8E2EA"/>
+              <a:srgbClr val="E7D6D1"/>
             </a:solidFill>
             <a:prstDash val="solid"/>
           </a:ln>
           <a:effectLst>
             <a:outerShdw sx="100000" sy="100000" kx="0" ky="0" algn="bl" rotWithShape="0" blurRad="88900" dist="38100" dir="5400000">
-              <a:srgbClr val="5B6B7B">
+              <a:srgbClr val="7A5C5E">
                 <a:alpha val="18000"/>
               </a:srgbClr>
             </a:outerShdw>
           </a:effectLst>
         </p:spPr>
       </p:sp>
+      <p:pic>
+        <p:nvPicPr>
+          <p:cNvPr id="5" name="Image 0" descr="pred_vs_actual_subpos_empty.png">    </p:cNvPr>
+          <p:cNvPicPr>
+            <a:picLocks noChangeAspect="1"/>
+          </p:cNvPicPr>
+          <p:nvPr/>
+        </p:nvPicPr>
+        <p:blipFill>
+          <a:blip r:embed="rId1"/>
+          <a:stretch>
+            <a:fillRect/>
+          </a:stretch>
+        </p:blipFill>
+        <p:spPr>
+          <a:xfrm>
+            <a:off x="973836" y="1755648"/>
+            <a:ext cx="3200400" cy="3310128"/>
+          </a:xfrm>
+          <a:prstGeom prst="rect">
+            <a:avLst/>
+          </a:prstGeom>
+        </p:spPr>
+      </p:pic>
       <p:sp>
         <p:nvSpPr>
           <p:cNvPr id="6" name="Text 3"/>
@@ -8465,8 +10912,8 @@
         </p:nvSpPr>
         <p:spPr>
           <a:xfrm>
-            <a:off x="8092440" y="1737360"/>
-            <a:ext cx="3291840" cy="365760"/>
+            <a:off x="864108" y="5084064"/>
+            <a:ext cx="3419856" cy="347472"/>
           </a:xfrm>
           <a:prstGeom prst="rect">
             <a:avLst/>
@@ -8478,127 +10925,296 @@
           <a:bodyPr wrap="square" lIns="0" tIns="0" rIns="0" bIns="0" rtlCol="0" anchor="ctr"/>
           <a:lstStyle/>
           <a:p>
-            <a:pPr indent="0" marL="0">
-              <a:buNone/>
-            </a:pPr>
-            <a:r>
-              <a:rPr lang="en-US" sz="1500" b="1" dirty="0">
-                <a:solidFill>
-                  <a:srgbClr val="0B5D7A"/>
-                </a:solidFill>
-                <a:latin typeface="Cambria" pitchFamily="34" charset="0"/>
-                <a:ea typeface="Cambria" pitchFamily="34" charset="-122"/>
-                <a:cs typeface="Cambria" pitchFamily="34" charset="-120"/>
-              </a:rPr>
-              <a:t>The ladder of difficulty</a:t>
-            </a:r>
-            <a:endParaRPr lang="en-US" sz="1500" dirty="0"/>
-          </a:p>
-        </p:txBody>
-      </p:sp>
-      <p:sp>
-        <p:nvSpPr>
-          <p:cNvPr id="7" name="Text 4"/>
-          <p:cNvSpPr/>
-          <p:nvPr/>
-        </p:nvSpPr>
-        <p:spPr>
-          <a:xfrm>
-            <a:off x="8092440" y="2194560"/>
-            <a:ext cx="3291840" cy="3840480"/>
-          </a:xfrm>
-          <a:prstGeom prst="rect">
-            <a:avLst/>
-          </a:prstGeom>
-          <a:noFill/>
-          <a:ln/>
-        </p:spPr>
-        <p:txBody>
-          <a:bodyPr wrap="square" lIns="0" tIns="0" rIns="0" bIns="0" rtlCol="0" anchor="t"/>
-          <a:lstStyle/>
-          <a:p>
-            <a:pPr marL="342900" indent="-342900">
-              <a:spcAft>
-                <a:spcPts val="800"/>
-              </a:spcAft>
-              <a:buSzPct val="100000"/>
-              <a:buChar char="•"/>
-            </a:pPr>
-            <a:r>
-              <a:rPr lang="en-US" sz="1300" dirty="0">
-                <a:solidFill>
-                  <a:srgbClr val="1E293B"/>
+            <a:pPr algn="ctr" indent="0" marL="0">
+              <a:buNone/>
+            </a:pPr>
+            <a:r>
+              <a:rPr lang="en-US" sz="1300" b="1" dirty="0">
+                <a:solidFill>
+                  <a:srgbClr val="2A1618"/>
                 </a:solidFill>
                 <a:latin typeface="Calibri" pitchFamily="34" charset="0"/>
                 <a:ea typeface="Calibri" pitchFamily="34" charset="-122"/>
                 <a:cs typeface="Calibri" pitchFamily="34" charset="-120"/>
               </a:rPr>
-              <a:t>LOSO (0.15–0.22 in): a new scan of KNOWN positions — easy.</a:t>
-            </a:r>
-            <a:endParaRPr lang="en-US" sz="1300" dirty="0"/>
-          </a:p>
-          <a:p>
-            <a:pPr marL="342900" indent="-342900">
-              <a:spcAft>
-                <a:spcPts val="800"/>
-              </a:spcAft>
-              <a:buSzPct val="100000"/>
-              <a:buChar char="•"/>
-            </a:pPr>
-            <a:r>
-              <a:rPr lang="en-US" sz="1300" dirty="0">
-                <a:solidFill>
-                  <a:srgbClr val="1E293B"/>
+              <a:t>Empty   </a:t>
+            </a:r>
+            <a:pPr algn="ctr" indent="0" marL="0">
+              <a:buNone/>
+            </a:pPr>
+            <a:r>
+              <a:rPr lang="en-US" sz="1300" b="1" dirty="0">
+                <a:solidFill>
+                  <a:srgbClr val="BE0000"/>
                 </a:solidFill>
                 <a:latin typeface="Calibri" pitchFamily="34" charset="0"/>
                 <a:ea typeface="Calibri" pitchFamily="34" charset="-122"/>
                 <a:cs typeface="Calibri" pitchFamily="34" charset="-120"/>
               </a:rPr>
-              <a:t>LOPO-subpos (0.39–0.55): unseen point, close anchors — medium.</a:t>
+              <a:t>0.39 in</a:t>
             </a:r>
             <a:endParaRPr lang="en-US" sz="1300" dirty="0"/>
           </a:p>
-          <a:p>
-            <a:pPr marL="342900" indent="-342900">
-              <a:spcAft>
-                <a:spcPts val="800"/>
-              </a:spcAft>
-              <a:buSzPct val="100000"/>
-              <a:buChar char="•"/>
-            </a:pPr>
-            <a:r>
-              <a:rPr lang="en-US" sz="1300" dirty="0">
-                <a:solidFill>
-                  <a:srgbClr val="1E293B"/>
+        </p:txBody>
+      </p:sp>
+      <p:sp>
+        <p:nvSpPr>
+          <p:cNvPr id="7" name="Shape 4"/>
+          <p:cNvSpPr/>
+          <p:nvPr/>
+        </p:nvSpPr>
+        <p:spPr>
+          <a:xfrm>
+            <a:off x="4384548" y="1627632"/>
+            <a:ext cx="3419856" cy="3950208"/>
+          </a:xfrm>
+          <a:prstGeom prst="roundRect">
+            <a:avLst>
+              <a:gd name="adj" fmla="val 2406"/>
+            </a:avLst>
+          </a:prstGeom>
+          <a:solidFill>
+            <a:srgbClr val="FBF4F2"/>
+          </a:solidFill>
+          <a:ln w="12700">
+            <a:solidFill>
+              <a:srgbClr val="E7D6D1"/>
+            </a:solidFill>
+            <a:prstDash val="solid"/>
+          </a:ln>
+          <a:effectLst>
+            <a:outerShdw sx="100000" sy="100000" kx="0" ky="0" algn="bl" rotWithShape="0" blurRad="88900" dist="38100" dir="5400000">
+              <a:srgbClr val="7A5C5E">
+                <a:alpha val="18000"/>
+              </a:srgbClr>
+            </a:outerShdw>
+          </a:effectLst>
+        </p:spPr>
+      </p:sp>
+      <p:pic>
+        <p:nvPicPr>
+          <p:cNvPr id="8" name="Image 1" descr="pred_vs_actual_subpos_f4.png">    </p:cNvPr>
+          <p:cNvPicPr>
+            <a:picLocks noChangeAspect="1"/>
+          </p:cNvPicPr>
+          <p:nvPr/>
+        </p:nvPicPr>
+        <p:blipFill>
+          <a:blip r:embed="rId2"/>
+          <a:stretch>
+            <a:fillRect/>
+          </a:stretch>
+        </p:blipFill>
+        <p:spPr>
+          <a:xfrm>
+            <a:off x="4494276" y="1755648"/>
+            <a:ext cx="3200400" cy="3310128"/>
+          </a:xfrm>
+          <a:prstGeom prst="rect">
+            <a:avLst/>
+          </a:prstGeom>
+        </p:spPr>
+      </p:pic>
+      <p:sp>
+        <p:nvSpPr>
+          <p:cNvPr id="9" name="Text 5"/>
+          <p:cNvSpPr/>
+          <p:nvPr/>
+        </p:nvSpPr>
+        <p:spPr>
+          <a:xfrm>
+            <a:off x="4384548" y="5084064"/>
+            <a:ext cx="3419856" cy="347472"/>
+          </a:xfrm>
+          <a:prstGeom prst="rect">
+            <a:avLst/>
+          </a:prstGeom>
+          <a:noFill/>
+          <a:ln/>
+        </p:spPr>
+        <p:txBody>
+          <a:bodyPr wrap="square" lIns="0" tIns="0" rIns="0" bIns="0" rtlCol="0" anchor="ctr"/>
+          <a:lstStyle/>
+          <a:p>
+            <a:pPr algn="ctr" indent="0" marL="0">
+              <a:buNone/>
+            </a:pPr>
+            <a:r>
+              <a:rPr lang="en-US" sz="1300" b="1" dirty="0">
+                <a:solidFill>
+                  <a:srgbClr val="2A1618"/>
                 </a:solidFill>
                 <a:latin typeface="Calibri" pitchFamily="34" charset="0"/>
                 <a:ea typeface="Calibri" pitchFamily="34" charset="-122"/>
                 <a:cs typeface="Calibri" pitchFamily="34" charset="-120"/>
               </a:rPr>
-              <a:t>LOPO-cell (0.47–0.67): unseen 1-in cell, no anchor — hardest.</a:t>
-            </a:r>
-            <a:endParaRPr lang="en-US" sz="1300" dirty="0"/>
-          </a:p>
-          <a:p>
-            <a:pPr marL="342900" indent="-342900">
-              <a:spcAft>
-                <a:spcPts val="800"/>
-              </a:spcAft>
-              <a:buSzPct val="100000"/>
-              <a:buChar char="•"/>
-            </a:pPr>
-            <a:r>
-              <a:rPr lang="en-US" sz="1300" dirty="0">
-                <a:solidFill>
-                  <a:srgbClr val="1E293B"/>
+              <a:t>F4 insert   </a:t>
+            </a:r>
+            <a:pPr algn="ctr" indent="0" marL="0">
+              <a:buNone/>
+            </a:pPr>
+            <a:r>
+              <a:rPr lang="en-US" sz="1300" b="1" dirty="0">
+                <a:solidFill>
+                  <a:srgbClr val="BE0000"/>
                 </a:solidFill>
                 <a:latin typeface="Calibri" pitchFamily="34" charset="0"/>
                 <a:ea typeface="Calibri" pitchFamily="34" charset="-122"/>
                 <a:cs typeface="Calibri" pitchFamily="34" charset="-120"/>
               </a:rPr>
-              <a:t>Insert size raises every bar; the gap widens as the task gets harder.</a:t>
+              <a:t>pending</a:t>
             </a:r>
             <a:endParaRPr lang="en-US" sz="1300" dirty="0"/>
+          </a:p>
+        </p:txBody>
+      </p:sp>
+      <p:sp>
+        <p:nvSpPr>
+          <p:cNvPr id="10" name="Shape 6"/>
+          <p:cNvSpPr/>
+          <p:nvPr/>
+        </p:nvSpPr>
+        <p:spPr>
+          <a:xfrm>
+            <a:off x="7904988" y="1627632"/>
+            <a:ext cx="3419856" cy="3950208"/>
+          </a:xfrm>
+          <a:prstGeom prst="roundRect">
+            <a:avLst>
+              <a:gd name="adj" fmla="val 2406"/>
+            </a:avLst>
+          </a:prstGeom>
+          <a:solidFill>
+            <a:srgbClr val="FBF4F2"/>
+          </a:solidFill>
+          <a:ln w="12700">
+            <a:solidFill>
+              <a:srgbClr val="E7D6D1"/>
+            </a:solidFill>
+            <a:prstDash val="solid"/>
+          </a:ln>
+          <a:effectLst>
+            <a:outerShdw sx="100000" sy="100000" kx="0" ky="0" algn="bl" rotWithShape="0" blurRad="88900" dist="38100" dir="5400000">
+              <a:srgbClr val="7A5C5E">
+                <a:alpha val="18000"/>
+              </a:srgbClr>
+            </a:outerShdw>
+          </a:effectLst>
+        </p:spPr>
+      </p:sp>
+      <p:pic>
+        <p:nvPicPr>
+          <p:cNvPr id="11" name="Image 2" descr="pred_vs_actual_subpos_f5.png">    </p:cNvPr>
+          <p:cNvPicPr>
+            <a:picLocks noChangeAspect="1"/>
+          </p:cNvPicPr>
+          <p:nvPr/>
+        </p:nvPicPr>
+        <p:blipFill>
+          <a:blip r:embed="rId3"/>
+          <a:stretch>
+            <a:fillRect/>
+          </a:stretch>
+        </p:blipFill>
+        <p:spPr>
+          <a:xfrm>
+            <a:off x="8014716" y="1755648"/>
+            <a:ext cx="3200400" cy="3310128"/>
+          </a:xfrm>
+          <a:prstGeom prst="rect">
+            <a:avLst/>
+          </a:prstGeom>
+        </p:spPr>
+      </p:pic>
+      <p:sp>
+        <p:nvSpPr>
+          <p:cNvPr id="12" name="Text 7"/>
+          <p:cNvSpPr/>
+          <p:nvPr/>
+        </p:nvSpPr>
+        <p:spPr>
+          <a:xfrm>
+            <a:off x="7904988" y="5084064"/>
+            <a:ext cx="3419856" cy="347472"/>
+          </a:xfrm>
+          <a:prstGeom prst="rect">
+            <a:avLst/>
+          </a:prstGeom>
+          <a:noFill/>
+          <a:ln/>
+        </p:spPr>
+        <p:txBody>
+          <a:bodyPr wrap="square" lIns="0" tIns="0" rIns="0" bIns="0" rtlCol="0" anchor="ctr"/>
+          <a:lstStyle/>
+          <a:p>
+            <a:pPr algn="ctr" indent="0" marL="0">
+              <a:buNone/>
+            </a:pPr>
+            <a:r>
+              <a:rPr lang="en-US" sz="1300" b="1" dirty="0">
+                <a:solidFill>
+                  <a:srgbClr val="2A1618"/>
+                </a:solidFill>
+                <a:latin typeface="Calibri" pitchFamily="34" charset="0"/>
+                <a:ea typeface="Calibri" pitchFamily="34" charset="-122"/>
+                <a:cs typeface="Calibri" pitchFamily="34" charset="-120"/>
+              </a:rPr>
+              <a:t>F5 insert   </a:t>
+            </a:r>
+            <a:pPr algn="ctr" indent="0" marL="0">
+              <a:buNone/>
+            </a:pPr>
+            <a:r>
+              <a:rPr lang="en-US" sz="1300" b="1" dirty="0">
+                <a:solidFill>
+                  <a:srgbClr val="BE0000"/>
+                </a:solidFill>
+                <a:latin typeface="Calibri" pitchFamily="34" charset="0"/>
+                <a:ea typeface="Calibri" pitchFamily="34" charset="-122"/>
+                <a:cs typeface="Calibri" pitchFamily="34" charset="-120"/>
+              </a:rPr>
+              <a:t>0.55 in</a:t>
+            </a:r>
+            <a:endParaRPr lang="en-US" sz="1300" dirty="0"/>
+          </a:p>
+        </p:txBody>
+      </p:sp>
+      <p:sp>
+        <p:nvSpPr>
+          <p:cNvPr id="13" name="Text 8"/>
+          <p:cNvSpPr/>
+          <p:nvPr/>
+        </p:nvSpPr>
+        <p:spPr>
+          <a:xfrm>
+            <a:off x="548640" y="6144768"/>
+            <a:ext cx="11091672" cy="457200"/>
+          </a:xfrm>
+          <a:prstGeom prst="rect">
+            <a:avLst/>
+          </a:prstGeom>
+          <a:noFill/>
+          <a:ln/>
+        </p:spPr>
+        <p:txBody>
+          <a:bodyPr wrap="square" lIns="0" tIns="0" rIns="0" bIns="0" rtlCol="0" anchor="ctr"/>
+          <a:lstStyle/>
+          <a:p>
+            <a:pPr algn="ctr" indent="0" marL="0">
+              <a:buNone/>
+            </a:pPr>
+            <a:r>
+              <a:rPr lang="en-US" sz="1350" i="1" dirty="0">
+                <a:solidFill>
+                  <a:srgbClr val="836A68"/>
+                </a:solidFill>
+                <a:latin typeface="Calibri" pitchFamily="34" charset="0"/>
+                <a:ea typeface="Calibri" pitchFamily="34" charset="-122"/>
+                <a:cs typeface="Calibri" pitchFamily="34" charset="-120"/>
+              </a:rPr>
+              <a:t>With close cell-mates left in training, single-position error is lower than the whole-cell hold-out (empty 0.39 vs 0.47 in, F5 0.55 vs 0.67 in).</a:t>
+            </a:r>
+            <a:endParaRPr lang="en-US" sz="1350" dirty="0"/>
           </a:p>
         </p:txBody>
       </p:sp>

--- a/regression_deck/Deck1_Measured_Regression.pptx
+++ b/regression_deck/Deck1_Measured_Regression.pptx
@@ -18,9 +18,10 @@
     <p:sldId id="266" r:id="rId12"/>
     <p:sldId id="267" r:id="rId13"/>
     <p:sldId id="268" r:id="rId14"/>
+    <p:sldId id="269" r:id="rId15"/>
   </p:sldIdLst>
   <p:notesMasterIdLst>
-    <p:notesMasterId r:id="rId15"/>
+    <p:notesMasterId r:id="rId16"/>
   </p:notesMasterIdLst>
   <p:sldSz cx="12188952" cy="6858000"/>
   <p:notesSz cx="6858000" cy="12188952"/>
@@ -2816,6 +2817,94 @@
 </p:notes>
 </file>
 
+<file path=ppt/notesSlides/notesSlide14.xml><?xml version="1.0" encoding="utf-8"?>
+<p:notes xmlns:a="http://schemas.openxmlformats.org/drawingml/2006/main" xmlns:r="http://schemas.openxmlformats.org/officeDocument/2006/relationships" xmlns:p="http://schemas.openxmlformats.org/presentationml/2006/main">
+  <p:cSld>
+    <p:spTree>
+      <p:nvGrpSpPr>
+        <p:cNvPr id="1" name=""/>
+        <p:cNvGrpSpPr/>
+        <p:nvPr/>
+      </p:nvGrpSpPr>
+      <p:grpSpPr>
+        <a:xfrm>
+          <a:off x="0" y="0"/>
+          <a:ext cx="0" cy="0"/>
+          <a:chOff x="0" y="0"/>
+          <a:chExt cx="0" cy="0"/>
+        </a:xfrm>
+      </p:grpSpPr>
+      <p:sp>
+        <p:nvSpPr>
+          <p:cNvPr id="2" name="Slide Image Placeholder 1"/>
+          <p:cNvSpPr>
+            <a:spLocks noGrp="1" noRot="1" noChangeAspect="1"/>
+          </p:cNvSpPr>
+          <p:nvPr>
+            <p:ph type="sldImg"/>
+          </p:nvPr>
+        </p:nvSpPr>
+        <p:spPr/>
+      </p:sp>
+      <p:sp>
+        <p:nvSpPr>
+          <p:cNvPr id="3" name="Notes Placeholder 2"/>
+          <p:cNvSpPr>
+            <a:spLocks noGrp="1"/>
+          </p:cNvSpPr>
+          <p:nvPr>
+            <p:ph type="body" idx="1"/>
+          </p:nvPr>
+        </p:nvSpPr>
+        <p:spPr/>
+        <p:txBody>
+          <a:bodyPr/>
+          <a:lstStyle/>
+          <a:p>
+            <a:r>
+              <a:rPr lang="en-US" dirty="0"/>
+              <a:t/>
+            </a:r>
+            <a:endParaRPr lang="en-US" dirty="0"/>
+          </a:p>
+        </p:txBody>
+      </p:sp>
+      <p:sp>
+        <p:nvSpPr>
+          <p:cNvPr id="4" name="Slide Number Placeholder 3"/>
+          <p:cNvSpPr>
+            <a:spLocks noGrp="1"/>
+          </p:cNvSpPr>
+          <p:nvPr>
+            <p:ph type="sldNum" sz="quarter" idx="10"/>
+          </p:nvPr>
+        </p:nvSpPr>
+        <p:spPr/>
+        <p:txBody>
+          <a:bodyPr/>
+          <a:lstStyle/>
+          <a:p>
+            <a:fld id="{F7021451-1387-4CA6-816F-3879F97B5CBC}" type="slidenum">
+              <a:rPr lang="en-US"/>
+              <a:t>14</a:t>
+            </a:fld>
+            <a:endParaRPr lang="en-US"/>
+          </a:p>
+        </p:txBody>
+      </p:sp>
+    </p:spTree>
+    <p:extLst>
+      <p:ext uri="{BB962C8B-B14F-4D97-AF65-F5344CB8AC3E}">
+        <p14:creationId xmlns:p14="http://schemas.microsoft.com/office/powerpoint/2010/main" val="1024086991"/>
+      </p:ext>
+    </p:extLst>
+  </p:cSld>
+  <p:clrMapOvr>
+    <a:masterClrMapping/>
+  </p:clrMapOvr>
+</p:notes>
+</file>
+
 <file path=ppt/notesSlides/notesSlide2.xml><?xml version="1.0" encoding="utf-8"?>
 <p:notes xmlns:a="http://schemas.openxmlformats.org/drawingml/2006/main" xmlns:r="http://schemas.openxmlformats.org/officeDocument/2006/relationships" xmlns:p="http://schemas.openxmlformats.org/presentationml/2006/main">
   <p:cSld>
@@ -3833,7 +3922,7 @@
     <p:bg>
       <p:bgPr>
         <a:solidFill>
-          <a:srgbClr val="2E1214"/>
+          <a:srgbClr val="FDF8F6"/>
         </a:solidFill>
       </p:bgPr>
     </p:bg>
@@ -3860,7 +3949,7 @@
         <p:spPr>
           <a:xfrm>
             <a:off x="0" y="0"/>
-            <a:ext cx="12188952" cy="201168"/>
+            <a:ext cx="12188952" cy="237744"/>
           </a:xfrm>
           <a:prstGeom prst="rect">
             <a:avLst/>
@@ -3873,14 +3962,34 @@
       </p:sp>
       <p:sp>
         <p:nvSpPr>
-          <p:cNvPr id="3" name="Text 1"/>
-          <p:cNvSpPr/>
-          <p:nvPr/>
-        </p:nvSpPr>
-        <p:spPr>
-          <a:xfrm>
-            <a:off x="822960" y="1874520"/>
-            <a:ext cx="10515600" cy="457200"/>
+          <p:cNvPr id="3" name="Shape 1"/>
+          <p:cNvSpPr/>
+          <p:nvPr/>
+        </p:nvSpPr>
+        <p:spPr>
+          <a:xfrm>
+            <a:off x="822960" y="1847088"/>
+            <a:ext cx="82296" cy="1371600"/>
+          </a:xfrm>
+          <a:prstGeom prst="rect">
+            <a:avLst/>
+          </a:prstGeom>
+          <a:solidFill>
+            <a:srgbClr val="BE0000"/>
+          </a:solidFill>
+          <a:ln/>
+        </p:spPr>
+      </p:sp>
+      <p:sp>
+        <p:nvSpPr>
+          <p:cNvPr id="4" name="Text 2"/>
+          <p:cNvSpPr/>
+          <p:nvPr/>
+        </p:nvSpPr>
+        <p:spPr>
+          <a:xfrm>
+            <a:off x="1097280" y="1847088"/>
+            <a:ext cx="10058400" cy="411480"/>
           </a:xfrm>
           <a:prstGeom prst="rect">
             <a:avLst/>
@@ -3898,7 +4007,7 @@
             <a:r>
               <a:rPr lang="en-US" sz="1500" b="1" spc="300" kern="0" dirty="0">
                 <a:solidFill>
-                  <a:srgbClr val="C8890B"/>
+                  <a:srgbClr val="BE0000"/>
                 </a:solidFill>
                 <a:latin typeface="Calibri" pitchFamily="34" charset="0"/>
                 <a:ea typeface="Calibri" pitchFamily="34" charset="-122"/>
@@ -3912,14 +4021,14 @@
       </p:sp>
       <p:sp>
         <p:nvSpPr>
-          <p:cNvPr id="4" name="Text 2"/>
-          <p:cNvSpPr/>
-          <p:nvPr/>
-        </p:nvSpPr>
-        <p:spPr>
-          <a:xfrm>
-            <a:off x="822960" y="2377440"/>
-            <a:ext cx="10515600" cy="1005840"/>
+          <p:cNvPr id="5" name="Text 3"/>
+          <p:cNvSpPr/>
+          <p:nvPr/>
+        </p:nvSpPr>
+        <p:spPr>
+          <a:xfrm>
+            <a:off x="1097280" y="2286000"/>
+            <a:ext cx="10241280" cy="914400"/>
           </a:xfrm>
           <a:prstGeom prst="rect">
             <a:avLst/>
@@ -3935,9 +4044,9 @@
               <a:buNone/>
             </a:pPr>
             <a:r>
-              <a:rPr lang="en-US" sz="3800" b="1" dirty="0">
-                <a:solidFill>
-                  <a:srgbClr val="FFFFFF"/>
+              <a:rPr lang="en-US" sz="3600" b="1" dirty="0">
+                <a:solidFill>
+                  <a:srgbClr val="2A1618"/>
                 </a:solidFill>
                 <a:latin typeface="Cambria" pitchFamily="34" charset="0"/>
                 <a:ea typeface="Cambria" pitchFamily="34" charset="-122"/>
@@ -3945,20 +4054,20 @@
               </a:rPr>
               <a:t>(x, y) tumor localization on the A3 phantom</a:t>
             </a:r>
-            <a:endParaRPr lang="en-US" sz="3800" dirty="0"/>
-          </a:p>
-        </p:txBody>
-      </p:sp>
-      <p:sp>
-        <p:nvSpPr>
-          <p:cNvPr id="5" name="Text 3"/>
-          <p:cNvSpPr/>
-          <p:nvPr/>
-        </p:nvSpPr>
-        <p:spPr>
-          <a:xfrm>
-            <a:off x="822960" y="3520440"/>
-            <a:ext cx="10424160" cy="640080"/>
+            <a:endParaRPr lang="en-US" sz="3600" dirty="0"/>
+          </a:p>
+        </p:txBody>
+      </p:sp>
+      <p:sp>
+        <p:nvSpPr>
+          <p:cNvPr id="6" name="Text 4"/>
+          <p:cNvSpPr/>
+          <p:nvPr/>
+        </p:nvSpPr>
+        <p:spPr>
+          <a:xfrm>
+            <a:off x="1097280" y="3310128"/>
+            <a:ext cx="10058400" cy="640080"/>
           </a:xfrm>
           <a:prstGeom prst="rect">
             <a:avLst/>
@@ -3976,7 +4085,7 @@
             <a:r>
               <a:rPr lang="en-US" sz="1550" dirty="0">
                 <a:solidFill>
-                  <a:srgbClr val="EAD3CB"/>
+                  <a:srgbClr val="836A68"/>
                 </a:solidFill>
                 <a:latin typeface="Calibri" pitchFamily="34" charset="0"/>
                 <a:ea typeface="Calibri" pitchFamily="34" charset="-122"/>
@@ -3990,13 +4099,13 @@
       </p:sp>
       <p:sp>
         <p:nvSpPr>
-          <p:cNvPr id="6" name="Text 4"/>
-          <p:cNvSpPr/>
-          <p:nvPr/>
-        </p:nvSpPr>
-        <p:spPr>
-          <a:xfrm>
-            <a:off x="822960" y="4526280"/>
+          <p:cNvPr id="7" name="Text 5"/>
+          <p:cNvSpPr/>
+          <p:nvPr/>
+        </p:nvSpPr>
+        <p:spPr>
+          <a:xfrm>
+            <a:off x="1097280" y="4526280"/>
             <a:ext cx="3383280" cy="640080"/>
           </a:xfrm>
           <a:prstGeom prst="rect">
@@ -4015,7 +4124,7 @@
             <a:r>
               <a:rPr lang="en-US" sz="2800" b="1" dirty="0">
                 <a:solidFill>
-                  <a:srgbClr val="C8890B"/>
+                  <a:srgbClr val="BE0000"/>
                 </a:solidFill>
                 <a:latin typeface="Cambria" pitchFamily="34" charset="0"/>
                 <a:ea typeface="Cambria" pitchFamily="34" charset="-122"/>
@@ -4029,14 +4138,14 @@
       </p:sp>
       <p:sp>
         <p:nvSpPr>
-          <p:cNvPr id="7" name="Text 5"/>
-          <p:cNvSpPr/>
-          <p:nvPr/>
-        </p:nvSpPr>
-        <p:spPr>
-          <a:xfrm>
-            <a:off x="822960" y="5138928"/>
-            <a:ext cx="3383280" cy="548640"/>
+          <p:cNvPr id="8" name="Text 6"/>
+          <p:cNvSpPr/>
+          <p:nvPr/>
+        </p:nvSpPr>
+        <p:spPr>
+          <a:xfrm>
+            <a:off x="1097280" y="5138928"/>
+            <a:ext cx="3520440" cy="548640"/>
           </a:xfrm>
           <a:prstGeom prst="rect">
             <a:avLst/>
@@ -4054,7 +4163,7 @@
             <a:r>
               <a:rPr lang="en-US" sz="1250" dirty="0">
                 <a:solidFill>
-                  <a:srgbClr val="EAD3CB"/>
+                  <a:srgbClr val="836A68"/>
                 </a:solidFill>
                 <a:latin typeface="Calibri" pitchFamily="34" charset="0"/>
                 <a:ea typeface="Calibri" pitchFamily="34" charset="-122"/>
@@ -4068,13 +4177,13 @@
       </p:sp>
       <p:sp>
         <p:nvSpPr>
-          <p:cNvPr id="8" name="Text 6"/>
-          <p:cNvSpPr/>
-          <p:nvPr/>
-        </p:nvSpPr>
-        <p:spPr>
-          <a:xfrm>
-            <a:off x="4434840" y="4526280"/>
+          <p:cNvPr id="9" name="Text 7"/>
+          <p:cNvSpPr/>
+          <p:nvPr/>
+        </p:nvSpPr>
+        <p:spPr>
+          <a:xfrm>
+            <a:off x="4709160" y="4526280"/>
             <a:ext cx="3383280" cy="640080"/>
           </a:xfrm>
           <a:prstGeom prst="rect">
@@ -4093,7 +4202,7 @@
             <a:r>
               <a:rPr lang="en-US" sz="2800" b="1" dirty="0">
                 <a:solidFill>
-                  <a:srgbClr val="C8890B"/>
+                  <a:srgbClr val="BE0000"/>
                 </a:solidFill>
                 <a:latin typeface="Cambria" pitchFamily="34" charset="0"/>
                 <a:ea typeface="Cambria" pitchFamily="34" charset="-122"/>
@@ -4107,14 +4216,14 @@
       </p:sp>
       <p:sp>
         <p:nvSpPr>
-          <p:cNvPr id="9" name="Text 7"/>
-          <p:cNvSpPr/>
-          <p:nvPr/>
-        </p:nvSpPr>
-        <p:spPr>
-          <a:xfrm>
-            <a:off x="4434840" y="5138928"/>
-            <a:ext cx="3383280" cy="548640"/>
+          <p:cNvPr id="10" name="Text 8"/>
+          <p:cNvSpPr/>
+          <p:nvPr/>
+        </p:nvSpPr>
+        <p:spPr>
+          <a:xfrm>
+            <a:off x="4709160" y="5138928"/>
+            <a:ext cx="3520440" cy="548640"/>
           </a:xfrm>
           <a:prstGeom prst="rect">
             <a:avLst/>
@@ -4132,7 +4241,7 @@
             <a:r>
               <a:rPr lang="en-US" sz="1250" dirty="0">
                 <a:solidFill>
-                  <a:srgbClr val="EAD3CB"/>
+                  <a:srgbClr val="836A68"/>
                 </a:solidFill>
                 <a:latin typeface="Calibri" pitchFamily="34" charset="0"/>
                 <a:ea typeface="Calibri" pitchFamily="34" charset="-122"/>
@@ -4146,13 +4255,13 @@
       </p:sp>
       <p:sp>
         <p:nvSpPr>
-          <p:cNvPr id="10" name="Text 8"/>
-          <p:cNvSpPr/>
-          <p:nvPr/>
-        </p:nvSpPr>
-        <p:spPr>
-          <a:xfrm>
-            <a:off x="8046720" y="4526280"/>
+          <p:cNvPr id="11" name="Text 9"/>
+          <p:cNvSpPr/>
+          <p:nvPr/>
+        </p:nvSpPr>
+        <p:spPr>
+          <a:xfrm>
+            <a:off x="8321040" y="4526280"/>
             <a:ext cx="3383280" cy="640080"/>
           </a:xfrm>
           <a:prstGeom prst="rect">
@@ -4171,7 +4280,7 @@
             <a:r>
               <a:rPr lang="en-US" sz="2800" b="1" dirty="0">
                 <a:solidFill>
-                  <a:srgbClr val="C8890B"/>
+                  <a:srgbClr val="BE0000"/>
                 </a:solidFill>
                 <a:latin typeface="Cambria" pitchFamily="34" charset="0"/>
                 <a:ea typeface="Cambria" pitchFamily="34" charset="-122"/>
@@ -4185,14 +4294,14 @@
       </p:sp>
       <p:sp>
         <p:nvSpPr>
-          <p:cNvPr id="11" name="Text 9"/>
-          <p:cNvSpPr/>
-          <p:nvPr/>
-        </p:nvSpPr>
-        <p:spPr>
-          <a:xfrm>
-            <a:off x="8046720" y="5138928"/>
-            <a:ext cx="3383280" cy="548640"/>
+          <p:cNvPr id="12" name="Text 10"/>
+          <p:cNvSpPr/>
+          <p:nvPr/>
+        </p:nvSpPr>
+        <p:spPr>
+          <a:xfrm>
+            <a:off x="8321040" y="5138928"/>
+            <a:ext cx="3520440" cy="548640"/>
           </a:xfrm>
           <a:prstGeom prst="rect">
             <a:avLst/>
@@ -4210,7 +4319,7 @@
             <a:r>
               <a:rPr lang="en-US" sz="1250" dirty="0">
                 <a:solidFill>
-                  <a:srgbClr val="EAD3CB"/>
+                  <a:srgbClr val="836A68"/>
                 </a:solidFill>
                 <a:latin typeface="Calibri" pitchFamily="34" charset="0"/>
                 <a:ea typeface="Calibri" pitchFamily="34" charset="-122"/>
@@ -4287,7 +4396,7 @@
                 <a:ea typeface="Cambria" pitchFamily="34" charset="-122"/>
                 <a:cs typeface="Cambria" pitchFamily="34" charset="-120"/>
               </a:rPr>
-              <a:t>Single-position accuracy (CNN, pooled)</a:t>
+              <a:t>Predicted vs. actual, single-position (CNN, pooled)</a:t>
             </a:r>
             <a:endParaRPr lang="en-US" sz="2900" dirty="0"/>
           </a:p>
@@ -4326,42 +4435,26 @@
                 <a:ea typeface="Calibri" pitchFamily="34" charset="-122"/>
                 <a:cs typeface="Calibri" pitchFamily="34" charset="-120"/>
               </a:rPr>
-              <a:t>Leaving cell-mates in training makes this the middle rung of difficulty</a:t>
+              <a:t>Hold out one sub-position; its 3 cell-mates stay in training</a:t>
             </a:r>
             <a:endParaRPr lang="en-US" sz="1400" dirty="0"/>
           </a:p>
         </p:txBody>
       </p:sp>
-      <p:graphicFrame>
-        <p:nvGraphicFramePr>
-          <p:cNvPr id="4" name="Chart 0" descr=""/>
-          <p:cNvGraphicFramePr/>
-          <p:nvPr/>
-        </p:nvGraphicFramePr>
-        <p:xfrm>
-          <a:off x="548640" y="1554480"/>
-          <a:ext cx="7040880" cy="4663440"/>
-        </p:xfrm>
-        <a:graphic xmlns:a="http://schemas.openxmlformats.org/drawingml/2006/main">
-          <a:graphicData uri="http://schemas.openxmlformats.org/drawingml/2006/chart">
-            <c:chart xmlns:c="http://schemas.openxmlformats.org/drawingml/2006/chart" r:id="rId1"/>
-          </a:graphicData>
-        </a:graphic>
-      </p:graphicFrame>
-      <p:sp>
-        <p:nvSpPr>
-          <p:cNvPr id="5" name="Shape 2"/>
-          <p:cNvSpPr/>
-          <p:nvPr/>
-        </p:nvSpPr>
-        <p:spPr>
-          <a:xfrm>
-            <a:off x="7863840" y="1554480"/>
-            <a:ext cx="3749040" cy="4663440"/>
+      <p:sp>
+        <p:nvSpPr>
+          <p:cNvPr id="4" name="Shape 2"/>
+          <p:cNvSpPr/>
+          <p:nvPr/>
+        </p:nvSpPr>
+        <p:spPr>
+          <a:xfrm>
+            <a:off x="864108" y="1627632"/>
+            <a:ext cx="3419856" cy="3950208"/>
           </a:xfrm>
           <a:prstGeom prst="roundRect">
             <a:avLst>
-              <a:gd name="adj" fmla="val 2195"/>
+              <a:gd name="adj" fmla="val 2406"/>
             </a:avLst>
           </a:prstGeom>
           <a:solidFill>
@@ -4382,6 +4475,30 @@
           </a:effectLst>
         </p:spPr>
       </p:sp>
+      <p:pic>
+        <p:nvPicPr>
+          <p:cNvPr id="5" name="Image 0" descr="pred_vs_actual_subpos_empty.png">    </p:cNvPr>
+          <p:cNvPicPr>
+            <a:picLocks noChangeAspect="1"/>
+          </p:cNvPicPr>
+          <p:nvPr/>
+        </p:nvPicPr>
+        <p:blipFill>
+          <a:blip r:embed="rId1"/>
+          <a:stretch>
+            <a:fillRect/>
+          </a:stretch>
+        </p:blipFill>
+        <p:spPr>
+          <a:xfrm>
+            <a:off x="973836" y="1755648"/>
+            <a:ext cx="3200400" cy="3310128"/>
+          </a:xfrm>
+          <a:prstGeom prst="rect">
+            <a:avLst/>
+          </a:prstGeom>
+        </p:spPr>
+      </p:pic>
       <p:sp>
         <p:nvSpPr>
           <p:cNvPr id="6" name="Text 3"/>
@@ -4390,8 +4507,8 @@
         </p:nvSpPr>
         <p:spPr>
           <a:xfrm>
-            <a:off x="8092440" y="1737360"/>
-            <a:ext cx="3291840" cy="365760"/>
+            <a:off x="864108" y="5084064"/>
+            <a:ext cx="3419856" cy="347472"/>
           </a:xfrm>
           <a:prstGeom prst="rect">
             <a:avLst/>
@@ -4403,54 +4520,11 @@
           <a:bodyPr wrap="square" lIns="0" tIns="0" rIns="0" bIns="0" rtlCol="0" anchor="ctr"/>
           <a:lstStyle/>
           <a:p>
-            <a:pPr indent="0" marL="0">
-              <a:buNone/>
-            </a:pPr>
-            <a:r>
-              <a:rPr lang="en-US" sz="1600" b="1" dirty="0">
-                <a:solidFill>
-                  <a:srgbClr val="BE0000"/>
-                </a:solidFill>
-                <a:latin typeface="Cambria" pitchFamily="34" charset="0"/>
-                <a:ea typeface="Cambria" pitchFamily="34" charset="-122"/>
-                <a:cs typeface="Cambria" pitchFamily="34" charset="-120"/>
-              </a:rPr>
-              <a:t>Reading it</a:t>
-            </a:r>
-            <a:endParaRPr lang="en-US" sz="1600" dirty="0"/>
-          </a:p>
-        </p:txBody>
-      </p:sp>
-      <p:sp>
-        <p:nvSpPr>
-          <p:cNvPr id="7" name="Text 4"/>
-          <p:cNvSpPr/>
-          <p:nvPr/>
-        </p:nvSpPr>
-        <p:spPr>
-          <a:xfrm>
-            <a:off x="8092440" y="2194560"/>
-            <a:ext cx="3291840" cy="3840480"/>
-          </a:xfrm>
-          <a:prstGeom prst="rect">
-            <a:avLst/>
-          </a:prstGeom>
-          <a:noFill/>
-          <a:ln/>
-        </p:spPr>
-        <p:txBody>
-          <a:bodyPr wrap="square" lIns="0" tIns="0" rIns="0" bIns="0" rtlCol="0" anchor="t"/>
-          <a:lstStyle/>
-          <a:p>
-            <a:pPr marL="342900" indent="-342900">
-              <a:spcAft>
-                <a:spcPts val="800"/>
-              </a:spcAft>
-              <a:buSzPct val="100000"/>
-              <a:buChar char="•"/>
-            </a:pPr>
-            <a:r>
-              <a:rPr lang="en-US" sz="1300" dirty="0">
+            <a:pPr algn="ctr" indent="0" marL="0">
+              <a:buNone/>
+            </a:pPr>
+            <a:r>
+              <a:rPr lang="en-US" sz="1300" b="1" dirty="0">
                 <a:solidFill>
                   <a:srgbClr val="2A1618"/>
                 </a:solidFill>
@@ -4458,41 +4532,110 @@
                 <a:ea typeface="Calibri" pitchFamily="34" charset="-122"/>
                 <a:cs typeface="Calibri" pitchFamily="34" charset="-120"/>
               </a:rPr>
-              <a:t>Empty 0.39 in (9.9 mm), F5 0.55 in (13.9 mm).</a:t>
-            </a:r>
-            <a:endParaRPr lang="en-US" sz="1300" dirty="0"/>
-          </a:p>
-          <a:p>
-            <a:pPr marL="342900" indent="-342900">
-              <a:spcAft>
-                <a:spcPts val="800"/>
-              </a:spcAft>
-              <a:buSzPct val="100000"/>
-              <a:buChar char="•"/>
-            </a:pPr>
-            <a:r>
-              <a:rPr lang="en-US" sz="1300" dirty="0">
-                <a:solidFill>
-                  <a:srgbClr val="2A1618"/>
+              <a:t>Empty   </a:t>
+            </a:r>
+            <a:pPr algn="ctr" indent="0" marL="0">
+              <a:buNone/>
+            </a:pPr>
+            <a:r>
+              <a:rPr lang="en-US" sz="1300" b="1" dirty="0">
+                <a:solidFill>
+                  <a:srgbClr val="BE0000"/>
                 </a:solidFill>
                 <a:latin typeface="Calibri" pitchFamily="34" charset="0"/>
                 <a:ea typeface="Calibri" pitchFamily="34" charset="-122"/>
                 <a:cs typeface="Calibri" pitchFamily="34" charset="-120"/>
               </a:rPr>
-              <a:t>F4 is running and will drop in here.</a:t>
+              <a:t>0.39 in</a:t>
             </a:r>
             <a:endParaRPr lang="en-US" sz="1300" dirty="0"/>
           </a:p>
-          <a:p>
-            <a:pPr marL="342900" indent="-342900">
-              <a:spcAft>
-                <a:spcPts val="800"/>
-              </a:spcAft>
-              <a:buSzPct val="100000"/>
-              <a:buChar char="•"/>
-            </a:pPr>
-            <a:r>
-              <a:rPr lang="en-US" sz="1300" dirty="0">
+        </p:txBody>
+      </p:sp>
+      <p:sp>
+        <p:nvSpPr>
+          <p:cNvPr id="7" name="Shape 4"/>
+          <p:cNvSpPr/>
+          <p:nvPr/>
+        </p:nvSpPr>
+        <p:spPr>
+          <a:xfrm>
+            <a:off x="4384548" y="1627632"/>
+            <a:ext cx="3419856" cy="3950208"/>
+          </a:xfrm>
+          <a:prstGeom prst="roundRect">
+            <a:avLst>
+              <a:gd name="adj" fmla="val 2406"/>
+            </a:avLst>
+          </a:prstGeom>
+          <a:solidFill>
+            <a:srgbClr val="FBF4F2"/>
+          </a:solidFill>
+          <a:ln w="12700">
+            <a:solidFill>
+              <a:srgbClr val="E7D6D1"/>
+            </a:solidFill>
+            <a:prstDash val="solid"/>
+          </a:ln>
+          <a:effectLst>
+            <a:outerShdw sx="100000" sy="100000" kx="0" ky="0" algn="bl" rotWithShape="0" blurRad="88900" dist="38100" dir="5400000">
+              <a:srgbClr val="7A5C5E">
+                <a:alpha val="18000"/>
+              </a:srgbClr>
+            </a:outerShdw>
+          </a:effectLst>
+        </p:spPr>
+      </p:sp>
+      <p:pic>
+        <p:nvPicPr>
+          <p:cNvPr id="8" name="Image 1" descr="pred_vs_actual_subpos_f4.png">    </p:cNvPr>
+          <p:cNvPicPr>
+            <a:picLocks noChangeAspect="1"/>
+          </p:cNvPicPr>
+          <p:nvPr/>
+        </p:nvPicPr>
+        <p:blipFill>
+          <a:blip r:embed="rId2"/>
+          <a:stretch>
+            <a:fillRect/>
+          </a:stretch>
+        </p:blipFill>
+        <p:spPr>
+          <a:xfrm>
+            <a:off x="4494276" y="1755648"/>
+            <a:ext cx="3200400" cy="3310128"/>
+          </a:xfrm>
+          <a:prstGeom prst="rect">
+            <a:avLst/>
+          </a:prstGeom>
+        </p:spPr>
+      </p:pic>
+      <p:sp>
+        <p:nvSpPr>
+          <p:cNvPr id="9" name="Text 5"/>
+          <p:cNvSpPr/>
+          <p:nvPr/>
+        </p:nvSpPr>
+        <p:spPr>
+          <a:xfrm>
+            <a:off x="4384548" y="5084064"/>
+            <a:ext cx="3419856" cy="347472"/>
+          </a:xfrm>
+          <a:prstGeom prst="rect">
+            <a:avLst/>
+          </a:prstGeom>
+          <a:noFill/>
+          <a:ln/>
+        </p:spPr>
+        <p:txBody>
+          <a:bodyPr wrap="square" lIns="0" tIns="0" rIns="0" bIns="0" rtlCol="0" anchor="ctr"/>
+          <a:lstStyle/>
+          <a:p>
+            <a:pPr algn="ctr" indent="0" marL="0">
+              <a:buNone/>
+            </a:pPr>
+            <a:r>
+              <a:rPr lang="en-US" sz="1300" b="1" dirty="0">
                 <a:solidFill>
                   <a:srgbClr val="2A1618"/>
                 </a:solidFill>
@@ -4500,30 +4643,173 @@
                 <a:ea typeface="Calibri" pitchFamily="34" charset="-122"/>
                 <a:cs typeface="Calibri" pitchFamily="34" charset="-120"/>
               </a:rPr>
-              <a:t>Both are below the matching whole-cell numbers, since the 3 cell-mates give close anchors.</a:t>
-            </a:r>
-            <a:endParaRPr lang="en-US" sz="1300" dirty="0"/>
-          </a:p>
-          <a:p>
-            <a:pPr marL="342900" indent="-342900">
-              <a:spcAft>
-                <a:spcPts val="800"/>
-              </a:spcAft>
-              <a:buSzPct val="100000"/>
-              <a:buChar char="•"/>
-            </a:pPr>
-            <a:r>
-              <a:rPr lang="en-US" sz="1300" dirty="0">
-                <a:solidFill>
-                  <a:srgbClr val="2A1618"/>
+              <a:t>F4 insert   </a:t>
+            </a:r>
+            <a:pPr algn="ctr" indent="0" marL="0">
+              <a:buNone/>
+            </a:pPr>
+            <a:r>
+              <a:rPr lang="en-US" sz="1300" b="1" dirty="0">
+                <a:solidFill>
+                  <a:srgbClr val="BE0000"/>
                 </a:solidFill>
                 <a:latin typeface="Calibri" pitchFamily="34" charset="0"/>
                 <a:ea typeface="Calibri" pitchFamily="34" charset="-122"/>
                 <a:cs typeface="Calibri" pitchFamily="34" charset="-120"/>
               </a:rPr>
-              <a:t>Still above the roughly 6 mm signal floor, so the CNN is data-limited on about 50 positions.</a:t>
+              <a:t>pending</a:t>
             </a:r>
             <a:endParaRPr lang="en-US" sz="1300" dirty="0"/>
+          </a:p>
+        </p:txBody>
+      </p:sp>
+      <p:sp>
+        <p:nvSpPr>
+          <p:cNvPr id="10" name="Shape 6"/>
+          <p:cNvSpPr/>
+          <p:nvPr/>
+        </p:nvSpPr>
+        <p:spPr>
+          <a:xfrm>
+            <a:off x="7904988" y="1627632"/>
+            <a:ext cx="3419856" cy="3950208"/>
+          </a:xfrm>
+          <a:prstGeom prst="roundRect">
+            <a:avLst>
+              <a:gd name="adj" fmla="val 2406"/>
+            </a:avLst>
+          </a:prstGeom>
+          <a:solidFill>
+            <a:srgbClr val="FBF4F2"/>
+          </a:solidFill>
+          <a:ln w="12700">
+            <a:solidFill>
+              <a:srgbClr val="E7D6D1"/>
+            </a:solidFill>
+            <a:prstDash val="solid"/>
+          </a:ln>
+          <a:effectLst>
+            <a:outerShdw sx="100000" sy="100000" kx="0" ky="0" algn="bl" rotWithShape="0" blurRad="88900" dist="38100" dir="5400000">
+              <a:srgbClr val="7A5C5E">
+                <a:alpha val="18000"/>
+              </a:srgbClr>
+            </a:outerShdw>
+          </a:effectLst>
+        </p:spPr>
+      </p:sp>
+      <p:pic>
+        <p:nvPicPr>
+          <p:cNvPr id="11" name="Image 2" descr="pred_vs_actual_subpos_f5.png">    </p:cNvPr>
+          <p:cNvPicPr>
+            <a:picLocks noChangeAspect="1"/>
+          </p:cNvPicPr>
+          <p:nvPr/>
+        </p:nvPicPr>
+        <p:blipFill>
+          <a:blip r:embed="rId3"/>
+          <a:stretch>
+            <a:fillRect/>
+          </a:stretch>
+        </p:blipFill>
+        <p:spPr>
+          <a:xfrm>
+            <a:off x="8014716" y="1755648"/>
+            <a:ext cx="3200400" cy="3310128"/>
+          </a:xfrm>
+          <a:prstGeom prst="rect">
+            <a:avLst/>
+          </a:prstGeom>
+        </p:spPr>
+      </p:pic>
+      <p:sp>
+        <p:nvSpPr>
+          <p:cNvPr id="12" name="Text 7"/>
+          <p:cNvSpPr/>
+          <p:nvPr/>
+        </p:nvSpPr>
+        <p:spPr>
+          <a:xfrm>
+            <a:off x="7904988" y="5084064"/>
+            <a:ext cx="3419856" cy="347472"/>
+          </a:xfrm>
+          <a:prstGeom prst="rect">
+            <a:avLst/>
+          </a:prstGeom>
+          <a:noFill/>
+          <a:ln/>
+        </p:spPr>
+        <p:txBody>
+          <a:bodyPr wrap="square" lIns="0" tIns="0" rIns="0" bIns="0" rtlCol="0" anchor="ctr"/>
+          <a:lstStyle/>
+          <a:p>
+            <a:pPr algn="ctr" indent="0" marL="0">
+              <a:buNone/>
+            </a:pPr>
+            <a:r>
+              <a:rPr lang="en-US" sz="1300" b="1" dirty="0">
+                <a:solidFill>
+                  <a:srgbClr val="2A1618"/>
+                </a:solidFill>
+                <a:latin typeface="Calibri" pitchFamily="34" charset="0"/>
+                <a:ea typeface="Calibri" pitchFamily="34" charset="-122"/>
+                <a:cs typeface="Calibri" pitchFamily="34" charset="-120"/>
+              </a:rPr>
+              <a:t>F5 insert   </a:t>
+            </a:r>
+            <a:pPr algn="ctr" indent="0" marL="0">
+              <a:buNone/>
+            </a:pPr>
+            <a:r>
+              <a:rPr lang="en-US" sz="1300" b="1" dirty="0">
+                <a:solidFill>
+                  <a:srgbClr val="BE0000"/>
+                </a:solidFill>
+                <a:latin typeface="Calibri" pitchFamily="34" charset="0"/>
+                <a:ea typeface="Calibri" pitchFamily="34" charset="-122"/>
+                <a:cs typeface="Calibri" pitchFamily="34" charset="-120"/>
+              </a:rPr>
+              <a:t>0.55 in</a:t>
+            </a:r>
+            <a:endParaRPr lang="en-US" sz="1300" dirty="0"/>
+          </a:p>
+        </p:txBody>
+      </p:sp>
+      <p:sp>
+        <p:nvSpPr>
+          <p:cNvPr id="13" name="Text 8"/>
+          <p:cNvSpPr/>
+          <p:nvPr/>
+        </p:nvSpPr>
+        <p:spPr>
+          <a:xfrm>
+            <a:off x="548640" y="6144768"/>
+            <a:ext cx="11091672" cy="457200"/>
+          </a:xfrm>
+          <a:prstGeom prst="rect">
+            <a:avLst/>
+          </a:prstGeom>
+          <a:noFill/>
+          <a:ln/>
+        </p:spPr>
+        <p:txBody>
+          <a:bodyPr wrap="square" lIns="0" tIns="0" rIns="0" bIns="0" rtlCol="0" anchor="ctr"/>
+          <a:lstStyle/>
+          <a:p>
+            <a:pPr algn="ctr" indent="0" marL="0">
+              <a:buNone/>
+            </a:pPr>
+            <a:r>
+              <a:rPr lang="en-US" sz="1350" i="1" dirty="0">
+                <a:solidFill>
+                  <a:srgbClr val="836A68"/>
+                </a:solidFill>
+                <a:latin typeface="Calibri" pitchFamily="34" charset="0"/>
+                <a:ea typeface="Calibri" pitchFamily="34" charset="-122"/>
+                <a:cs typeface="Calibri" pitchFamily="34" charset="-120"/>
+              </a:rPr>
+              <a:t>With close cell-mates left in training, single-position error is lower than the whole-cell hold-out (empty 0.39 vs 0.47 in, F5 0.55 vs 0.67 in).</a:t>
+            </a:r>
+            <a:endParaRPr lang="en-US" sz="1350" dirty="0"/>
           </a:p>
         </p:txBody>
       </p:sp>
@@ -4592,7 +4878,7 @@
                 <a:ea typeface="Cambria" pitchFamily="34" charset="-122"/>
                 <a:cs typeface="Cambria" pitchFamily="34" charset="-120"/>
               </a:rPr>
-              <a:t>All three protocols side by side</a:t>
+              <a:t>Single-position accuracy (CNN, pooled)</a:t>
             </a:r>
             <a:endParaRPr lang="en-US" sz="2900" dirty="0"/>
           </a:p>
@@ -4631,7 +4917,7 @@
                 <a:ea typeface="Calibri" pitchFamily="34" charset="-122"/>
                 <a:cs typeface="Calibri" pitchFamily="34" charset="-120"/>
               </a:rPr>
-              <a:t>How hard is each generalization task? (raw CNN median error, inches)</a:t>
+              <a:t>Leaving cell-mates in training makes this the middle rung of difficulty</a:t>
             </a:r>
             <a:endParaRPr lang="en-US" sz="1400" dirty="0"/>
           </a:p>
@@ -4712,7 +4998,7 @@
               <a:buNone/>
             </a:pPr>
             <a:r>
-              <a:rPr lang="en-US" sz="1500" b="1" dirty="0">
+              <a:rPr lang="en-US" sz="1600" b="1" dirty="0">
                 <a:solidFill>
                   <a:srgbClr val="BE0000"/>
                 </a:solidFill>
@@ -4720,9 +5006,9 @@
                 <a:ea typeface="Cambria" pitchFamily="34" charset="-122"/>
                 <a:cs typeface="Cambria" pitchFamily="34" charset="-120"/>
               </a:rPr>
-              <a:t>The ladder of difficulty</a:t>
-            </a:r>
-            <a:endParaRPr lang="en-US" sz="1500" dirty="0"/>
+              <a:t>Reading it</a:t>
+            </a:r>
+            <a:endParaRPr lang="en-US" sz="1600" dirty="0"/>
           </a:p>
         </p:txBody>
       </p:sp>
@@ -4763,7 +5049,7 @@
                 <a:ea typeface="Calibri" pitchFamily="34" charset="-122"/>
                 <a:cs typeface="Calibri" pitchFamily="34" charset="-120"/>
               </a:rPr>
-              <a:t>LOSO (0.15 to 0.22 in): a new scan of KNOWN positions. Easiest.</a:t>
+              <a:t>Empty 0.39 in (9.9 mm), F5 0.55 in (13.9 mm).</a:t>
             </a:r>
             <a:endParaRPr lang="en-US" sz="1300" dirty="0"/>
           </a:p>
@@ -4784,7 +5070,7 @@
                 <a:ea typeface="Calibri" pitchFamily="34" charset="-122"/>
                 <a:cs typeface="Calibri" pitchFamily="34" charset="-120"/>
               </a:rPr>
-              <a:t>Single-position (0.39 to 0.55): unseen point, close anchors. Medium.</a:t>
+              <a:t>F4 is running and will drop in here.</a:t>
             </a:r>
             <a:endParaRPr lang="en-US" sz="1300" dirty="0"/>
           </a:p>
@@ -4805,7 +5091,7 @@
                 <a:ea typeface="Calibri" pitchFamily="34" charset="-122"/>
                 <a:cs typeface="Calibri" pitchFamily="34" charset="-120"/>
               </a:rPr>
-              <a:t>LOPO-cell (0.47 to 0.67): unseen 1 in cell, no anchor. Hardest.</a:t>
+              <a:t>Both are below the matching whole-cell numbers, since the 3 cell-mates give close anchors.</a:t>
             </a:r>
             <a:endParaRPr lang="en-US" sz="1300" dirty="0"/>
           </a:p>
@@ -4826,7 +5112,7 @@
                 <a:ea typeface="Calibri" pitchFamily="34" charset="-122"/>
                 <a:cs typeface="Calibri" pitchFamily="34" charset="-120"/>
               </a:rPr>
-              <a:t>Insert size raises every bar; the gap widens as the task gets harder.</a:t>
+              <a:t>Still above the roughly 6 mm signal floor, so the CNN is data-limited on about 50 positions.</a:t>
             </a:r>
             <a:endParaRPr lang="en-US" sz="1300" dirty="0"/>
           </a:p>
@@ -4897,7 +5183,7 @@
                 <a:ea typeface="Cambria" pitchFamily="34" charset="-122"/>
                 <a:cs typeface="Cambria" pitchFamily="34" charset="-120"/>
               </a:rPr>
-              <a:t>Can we teach it to interpolate better?</a:t>
+              <a:t>All three protocols side by side</a:t>
             </a:r>
             <a:endParaRPr lang="en-US" sz="2900" dirty="0"/>
           </a:p>
@@ -4936,7 +5222,7 @@
                 <a:ea typeface="Calibri" pitchFamily="34" charset="-122"/>
                 <a:cs typeface="Calibri" pitchFamily="34" charset="-120"/>
               </a:rPr>
-              <a:t>Three tricks tried on the HARDEST case (F5 LOPO-cell, baseline 0.664 in); only one helps</a:t>
+              <a:t>How hard is each generalization task? (raw CNN median error, inches)</a:t>
             </a:r>
             <a:endParaRPr lang="en-US" sz="1400" dirty="0"/>
           </a:p>
@@ -4949,8 +5235,8 @@
           <p:nvPr/>
         </p:nvGraphicFramePr>
         <p:xfrm>
-          <a:off x="548640" y="1600200"/>
-          <a:ext cx="7315200" cy="4572000"/>
+          <a:off x="548640" y="1554480"/>
+          <a:ext cx="7040880" cy="4663440"/>
         </p:xfrm>
         <a:graphic xmlns:a="http://schemas.openxmlformats.org/drawingml/2006/main">
           <a:graphicData uri="http://schemas.openxmlformats.org/drawingml/2006/chart">
@@ -4966,12 +5252,12 @@
         </p:nvSpPr>
         <p:spPr>
           <a:xfrm>
-            <a:off x="8092440" y="1600200"/>
-            <a:ext cx="3520440" cy="4572000"/>
+            <a:off x="7863840" y="1554480"/>
+            <a:ext cx="3749040" cy="4663440"/>
           </a:xfrm>
           <a:prstGeom prst="roundRect">
             <a:avLst>
-              <a:gd name="adj" fmla="val 2338"/>
+              <a:gd name="adj" fmla="val 2195"/>
             </a:avLst>
           </a:prstGeom>
           <a:solidFill>
@@ -5000,8 +5286,8 @@
         </p:nvSpPr>
         <p:spPr>
           <a:xfrm>
-            <a:off x="8321040" y="1783080"/>
-            <a:ext cx="3108960" cy="365760"/>
+            <a:off x="8092440" y="1737360"/>
+            <a:ext cx="3291840" cy="365760"/>
           </a:xfrm>
           <a:prstGeom prst="rect">
             <a:avLst/>
@@ -5017,7 +5303,7 @@
               <a:buNone/>
             </a:pPr>
             <a:r>
-              <a:rPr lang="en-US" sz="1600" b="1" dirty="0">
+              <a:rPr lang="en-US" sz="1500" b="1" dirty="0">
                 <a:solidFill>
                   <a:srgbClr val="BE0000"/>
                 </a:solidFill>
@@ -5025,9 +5311,9 @@
                 <a:ea typeface="Cambria" pitchFamily="34" charset="-122"/>
                 <a:cs typeface="Cambria" pitchFamily="34" charset="-120"/>
               </a:rPr>
-              <a:t>What this shows</a:t>
-            </a:r>
-            <a:endParaRPr lang="en-US" sz="1600" dirty="0"/>
+              <a:t>The ladder of difficulty</a:t>
+            </a:r>
+            <a:endParaRPr lang="en-US" sz="1500" dirty="0"/>
           </a:p>
         </p:txBody>
       </p:sp>
@@ -5039,8 +5325,8 @@
         </p:nvSpPr>
         <p:spPr>
           <a:xfrm>
-            <a:off x="8321040" y="2240280"/>
-            <a:ext cx="3108960" cy="3931920"/>
+            <a:off x="8092440" y="2194560"/>
+            <a:ext cx="3291840" cy="3840480"/>
           </a:xfrm>
           <a:prstGeom prst="rect">
             <a:avLst/>
@@ -5052,14 +5338,15 @@
           <a:bodyPr wrap="square" lIns="0" tIns="0" rIns="0" bIns="0" rtlCol="0" anchor="t"/>
           <a:lstStyle/>
           <a:p>
-            <a:pPr indent="0" marL="0">
+            <a:pPr marL="342900" indent="-342900">
               <a:spcAft>
-                <a:spcPts val="1000"/>
+                <a:spcPts val="800"/>
               </a:spcAft>
-              <a:buNone/>
-            </a:pPr>
-            <a:r>
-              <a:rPr lang="en-US" sz="1200" dirty="0">
+              <a:buSzPct val="100000"/>
+              <a:buChar char="•"/>
+            </a:pPr>
+            <a:r>
+              <a:rPr lang="en-US" sz="1300" dirty="0">
                 <a:solidFill>
                   <a:srgbClr val="2A1618"/>
                 </a:solidFill>
@@ -5067,36 +5354,41 @@
                 <a:ea typeface="Calibri" pitchFamily="34" charset="-122"/>
                 <a:cs typeface="Calibri" pitchFamily="34" charset="-120"/>
               </a:rPr>
-              <a:t>Lower is better. Grey bars made it worse than the baseline; the crimson bar is the only improvement.</a:t>
+              <a:t>LOSO (0.15 to 0.22 in): a new scan of KNOWN positions. Easiest.</a:t>
             </a:r>
             <a:endParaRPr lang="en-US" sz="1300" dirty="0"/>
           </a:p>
           <a:p>
-            <a:pPr indent="0" marL="0">
-              <a:buNone/>
-            </a:pPr>
-            <a:r>
-              <a:rPr lang="en-US" sz="1300" b="1" dirty="0">
-                <a:solidFill>
-                  <a:srgbClr val="BE0000"/>
+            <a:pPr marL="342900" indent="-342900">
+              <a:spcAft>
+                <a:spcPts val="800"/>
+              </a:spcAft>
+              <a:buSzPct val="100000"/>
+              <a:buChar char="•"/>
+            </a:pPr>
+            <a:r>
+              <a:rPr lang="en-US" sz="1300" dirty="0">
+                <a:solidFill>
+                  <a:srgbClr val="2A1618"/>
                 </a:solidFill>
                 <a:latin typeface="Calibri" pitchFamily="34" charset="0"/>
                 <a:ea typeface="Calibri" pitchFamily="34" charset="-122"/>
                 <a:cs typeface="Calibri" pitchFamily="34" charset="-120"/>
               </a:rPr>
-              <a:t>Mixup, WIN</a:t>
+              <a:t>Single-position (0.39 to 0.55): unseen point, close anchors. Medium.</a:t>
             </a:r>
             <a:endParaRPr lang="en-US" sz="1300" dirty="0"/>
           </a:p>
           <a:p>
-            <a:pPr indent="0" marL="0">
+            <a:pPr marL="342900" indent="-342900">
               <a:spcAft>
-                <a:spcPts val="900"/>
+                <a:spcPts val="800"/>
               </a:spcAft>
-              <a:buNone/>
-            </a:pPr>
-            <a:r>
-              <a:rPr lang="en-US" sz="1200" dirty="0">
+              <a:buSzPct val="100000"/>
+              <a:buChar char="•"/>
+            </a:pPr>
+            <a:r>
+              <a:rPr lang="en-US" sz="1300" dirty="0">
                 <a:solidFill>
                   <a:srgbClr val="2A1618"/>
                 </a:solidFill>
@@ -5104,41 +5396,28 @@
                 <a:ea typeface="Calibri" pitchFamily="34" charset="-122"/>
                 <a:cs typeface="Calibri" pitchFamily="34" charset="-120"/>
               </a:rPr>
-              <a:t>blend sample pairs and their (x,y): 0.664 to 0.572, and it helps the insert region most.</a:t>
+              <a:t>LOPO-cell (0.47 to 0.67): unseen 1 in cell, no anchor. Hardest.</a:t>
             </a:r>
             <a:endParaRPr lang="en-US" sz="1300" dirty="0"/>
           </a:p>
           <a:p>
-            <a:pPr indent="0" marL="0">
-              <a:buNone/>
-            </a:pPr>
-            <a:r>
-              <a:rPr lang="en-US" sz="1300" b="1" dirty="0">
-                <a:solidFill>
-                  <a:srgbClr val="836A68"/>
+            <a:pPr marL="342900" indent="-342900">
+              <a:spcAft>
+                <a:spcPts val="800"/>
+              </a:spcAft>
+              <a:buSzPct val="100000"/>
+              <a:buChar char="•"/>
+            </a:pPr>
+            <a:r>
+              <a:rPr lang="en-US" sz="1300" dirty="0">
+                <a:solidFill>
+                  <a:srgbClr val="2A1618"/>
                 </a:solidFill>
                 <a:latin typeface="Calibri" pitchFamily="34" charset="0"/>
                 <a:ea typeface="Calibri" pitchFamily="34" charset="-122"/>
                 <a:cs typeface="Calibri" pitchFamily="34" charset="-120"/>
               </a:rPr>
-              <a:t>Position-split validation and heatmap output, NO</a:t>
-            </a:r>
-            <a:endParaRPr lang="en-US" sz="1300" dirty="0"/>
-          </a:p>
-          <a:p>
-            <a:pPr indent="0" marL="0">
-              <a:buNone/>
-            </a:pPr>
-            <a:r>
-              <a:rPr lang="en-US" sz="1200" dirty="0">
-                <a:solidFill>
-                  <a:srgbClr val="2A1618"/>
-                </a:solidFill>
-                <a:latin typeface="Calibri" pitchFamily="34" charset="0"/>
-                <a:ea typeface="Calibri" pitchFamily="34" charset="-122"/>
-                <a:cs typeface="Calibri" pitchFamily="34" charset="-120"/>
-              </a:rPr>
-              <a:t>one starves the ~30 scarce training positions; the other biases predictions toward centre.</a:t>
+              <a:t>Insert size raises every bar; the gap widens as the task gets harder.</a:t>
             </a:r>
             <a:endParaRPr lang="en-US" sz="1300" dirty="0"/>
           </a:p>
@@ -5158,7 +5437,7 @@
     <p:bg>
       <p:bgPr>
         <a:solidFill>
-          <a:srgbClr val="2E1214"/>
+          <a:srgbClr val="FFFFFF"/>
         </a:solidFill>
       </p:bgPr>
     </p:bg>
@@ -5178,6 +5457,318 @@
       </p:grpSpPr>
       <p:sp>
         <p:nvSpPr>
+          <p:cNvPr id="2" name="Text 0"/>
+          <p:cNvSpPr/>
+          <p:nvPr/>
+        </p:nvSpPr>
+        <p:spPr>
+          <a:xfrm>
+            <a:off x="548640" y="384048"/>
+            <a:ext cx="11091672" cy="640080"/>
+          </a:xfrm>
+          <a:prstGeom prst="rect">
+            <a:avLst/>
+          </a:prstGeom>
+          <a:noFill/>
+          <a:ln/>
+        </p:spPr>
+        <p:txBody>
+          <a:bodyPr wrap="square" lIns="0" tIns="0" rIns="0" bIns="0" rtlCol="0" anchor="ctr"/>
+          <a:lstStyle/>
+          <a:p>
+            <a:pPr indent="0" marL="0">
+              <a:buNone/>
+            </a:pPr>
+            <a:r>
+              <a:rPr lang="en-US" sz="2900" b="1" dirty="0">
+                <a:solidFill>
+                  <a:srgbClr val="2A1618"/>
+                </a:solidFill>
+                <a:latin typeface="Cambria" pitchFamily="34" charset="0"/>
+                <a:ea typeface="Cambria" pitchFamily="34" charset="-122"/>
+                <a:cs typeface="Cambria" pitchFamily="34" charset="-120"/>
+              </a:rPr>
+              <a:t>Can we teach it to interpolate better?</a:t>
+            </a:r>
+            <a:endParaRPr lang="en-US" sz="2900" dirty="0"/>
+          </a:p>
+        </p:txBody>
+      </p:sp>
+      <p:sp>
+        <p:nvSpPr>
+          <p:cNvPr id="3" name="Text 1"/>
+          <p:cNvSpPr/>
+          <p:nvPr/>
+        </p:nvSpPr>
+        <p:spPr>
+          <a:xfrm>
+            <a:off x="548640" y="1033272"/>
+            <a:ext cx="11091672" cy="365760"/>
+          </a:xfrm>
+          <a:prstGeom prst="rect">
+            <a:avLst/>
+          </a:prstGeom>
+          <a:noFill/>
+          <a:ln/>
+        </p:spPr>
+        <p:txBody>
+          <a:bodyPr wrap="square" lIns="0" tIns="0" rIns="0" bIns="0" rtlCol="0" anchor="ctr"/>
+          <a:lstStyle/>
+          <a:p>
+            <a:pPr indent="0" marL="0">
+              <a:buNone/>
+            </a:pPr>
+            <a:r>
+              <a:rPr lang="en-US" sz="1400" b="1" dirty="0">
+                <a:solidFill>
+                  <a:srgbClr val="BE0000"/>
+                </a:solidFill>
+                <a:latin typeface="Calibri" pitchFamily="34" charset="0"/>
+                <a:ea typeface="Calibri" pitchFamily="34" charset="-122"/>
+                <a:cs typeface="Calibri" pitchFamily="34" charset="-120"/>
+              </a:rPr>
+              <a:t>Three tricks tried on the HARDEST case (F5 LOPO-cell, baseline 0.664 in); only one helps</a:t>
+            </a:r>
+            <a:endParaRPr lang="en-US" sz="1400" dirty="0"/>
+          </a:p>
+        </p:txBody>
+      </p:sp>
+      <p:graphicFrame>
+        <p:nvGraphicFramePr>
+          <p:cNvPr id="4" name="Chart 0" descr=""/>
+          <p:cNvGraphicFramePr/>
+          <p:nvPr/>
+        </p:nvGraphicFramePr>
+        <p:xfrm>
+          <a:off x="548640" y="1600200"/>
+          <a:ext cx="7315200" cy="4572000"/>
+        </p:xfrm>
+        <a:graphic xmlns:a="http://schemas.openxmlformats.org/drawingml/2006/main">
+          <a:graphicData uri="http://schemas.openxmlformats.org/drawingml/2006/chart">
+            <c:chart xmlns:c="http://schemas.openxmlformats.org/drawingml/2006/chart" r:id="rId1"/>
+          </a:graphicData>
+        </a:graphic>
+      </p:graphicFrame>
+      <p:sp>
+        <p:nvSpPr>
+          <p:cNvPr id="5" name="Shape 2"/>
+          <p:cNvSpPr/>
+          <p:nvPr/>
+        </p:nvSpPr>
+        <p:spPr>
+          <a:xfrm>
+            <a:off x="8092440" y="1600200"/>
+            <a:ext cx="3520440" cy="4572000"/>
+          </a:xfrm>
+          <a:prstGeom prst="roundRect">
+            <a:avLst>
+              <a:gd name="adj" fmla="val 2338"/>
+            </a:avLst>
+          </a:prstGeom>
+          <a:solidFill>
+            <a:srgbClr val="FBF4F2"/>
+          </a:solidFill>
+          <a:ln w="12700">
+            <a:solidFill>
+              <a:srgbClr val="E7D6D1"/>
+            </a:solidFill>
+            <a:prstDash val="solid"/>
+          </a:ln>
+          <a:effectLst>
+            <a:outerShdw sx="100000" sy="100000" kx="0" ky="0" algn="bl" rotWithShape="0" blurRad="88900" dist="38100" dir="5400000">
+              <a:srgbClr val="7A5C5E">
+                <a:alpha val="18000"/>
+              </a:srgbClr>
+            </a:outerShdw>
+          </a:effectLst>
+        </p:spPr>
+      </p:sp>
+      <p:sp>
+        <p:nvSpPr>
+          <p:cNvPr id="6" name="Text 3"/>
+          <p:cNvSpPr/>
+          <p:nvPr/>
+        </p:nvSpPr>
+        <p:spPr>
+          <a:xfrm>
+            <a:off x="8321040" y="1783080"/>
+            <a:ext cx="3108960" cy="365760"/>
+          </a:xfrm>
+          <a:prstGeom prst="rect">
+            <a:avLst/>
+          </a:prstGeom>
+          <a:noFill/>
+          <a:ln/>
+        </p:spPr>
+        <p:txBody>
+          <a:bodyPr wrap="square" lIns="0" tIns="0" rIns="0" bIns="0" rtlCol="0" anchor="ctr"/>
+          <a:lstStyle/>
+          <a:p>
+            <a:pPr indent="0" marL="0">
+              <a:buNone/>
+            </a:pPr>
+            <a:r>
+              <a:rPr lang="en-US" sz="1600" b="1" dirty="0">
+                <a:solidFill>
+                  <a:srgbClr val="BE0000"/>
+                </a:solidFill>
+                <a:latin typeface="Cambria" pitchFamily="34" charset="0"/>
+                <a:ea typeface="Cambria" pitchFamily="34" charset="-122"/>
+                <a:cs typeface="Cambria" pitchFamily="34" charset="-120"/>
+              </a:rPr>
+              <a:t>What this shows</a:t>
+            </a:r>
+            <a:endParaRPr lang="en-US" sz="1600" dirty="0"/>
+          </a:p>
+        </p:txBody>
+      </p:sp>
+      <p:sp>
+        <p:nvSpPr>
+          <p:cNvPr id="7" name="Text 4"/>
+          <p:cNvSpPr/>
+          <p:nvPr/>
+        </p:nvSpPr>
+        <p:spPr>
+          <a:xfrm>
+            <a:off x="8321040" y="2240280"/>
+            <a:ext cx="3108960" cy="3931920"/>
+          </a:xfrm>
+          <a:prstGeom prst="rect">
+            <a:avLst/>
+          </a:prstGeom>
+          <a:noFill/>
+          <a:ln/>
+        </p:spPr>
+        <p:txBody>
+          <a:bodyPr wrap="square" lIns="0" tIns="0" rIns="0" bIns="0" rtlCol="0" anchor="t"/>
+          <a:lstStyle/>
+          <a:p>
+            <a:pPr indent="0" marL="0">
+              <a:spcAft>
+                <a:spcPts val="1000"/>
+              </a:spcAft>
+              <a:buNone/>
+            </a:pPr>
+            <a:r>
+              <a:rPr lang="en-US" sz="1200" dirty="0">
+                <a:solidFill>
+                  <a:srgbClr val="2A1618"/>
+                </a:solidFill>
+                <a:latin typeface="Calibri" pitchFamily="34" charset="0"/>
+                <a:ea typeface="Calibri" pitchFamily="34" charset="-122"/>
+                <a:cs typeface="Calibri" pitchFamily="34" charset="-120"/>
+              </a:rPr>
+              <a:t>Lower is better. Grey bars made it worse than the baseline; the crimson bar is the only improvement.</a:t>
+            </a:r>
+            <a:endParaRPr lang="en-US" sz="1300" dirty="0"/>
+          </a:p>
+          <a:p>
+            <a:pPr indent="0" marL="0">
+              <a:buNone/>
+            </a:pPr>
+            <a:r>
+              <a:rPr lang="en-US" sz="1300" b="1" dirty="0">
+                <a:solidFill>
+                  <a:srgbClr val="BE0000"/>
+                </a:solidFill>
+                <a:latin typeface="Calibri" pitchFamily="34" charset="0"/>
+                <a:ea typeface="Calibri" pitchFamily="34" charset="-122"/>
+                <a:cs typeface="Calibri" pitchFamily="34" charset="-120"/>
+              </a:rPr>
+              <a:t>Mixup, WIN</a:t>
+            </a:r>
+            <a:endParaRPr lang="en-US" sz="1300" dirty="0"/>
+          </a:p>
+          <a:p>
+            <a:pPr indent="0" marL="0">
+              <a:spcAft>
+                <a:spcPts val="900"/>
+              </a:spcAft>
+              <a:buNone/>
+            </a:pPr>
+            <a:r>
+              <a:rPr lang="en-US" sz="1200" dirty="0">
+                <a:solidFill>
+                  <a:srgbClr val="2A1618"/>
+                </a:solidFill>
+                <a:latin typeface="Calibri" pitchFamily="34" charset="0"/>
+                <a:ea typeface="Calibri" pitchFamily="34" charset="-122"/>
+                <a:cs typeface="Calibri" pitchFamily="34" charset="-120"/>
+              </a:rPr>
+              <a:t>blend sample pairs and their (x,y): 0.664 to 0.572, and it helps the insert region most.</a:t>
+            </a:r>
+            <a:endParaRPr lang="en-US" sz="1300" dirty="0"/>
+          </a:p>
+          <a:p>
+            <a:pPr indent="0" marL="0">
+              <a:buNone/>
+            </a:pPr>
+            <a:r>
+              <a:rPr lang="en-US" sz="1300" b="1" dirty="0">
+                <a:solidFill>
+                  <a:srgbClr val="836A68"/>
+                </a:solidFill>
+                <a:latin typeface="Calibri" pitchFamily="34" charset="0"/>
+                <a:ea typeface="Calibri" pitchFamily="34" charset="-122"/>
+                <a:cs typeface="Calibri" pitchFamily="34" charset="-120"/>
+              </a:rPr>
+              <a:t>Position-split validation and heatmap output, NO</a:t>
+            </a:r>
+            <a:endParaRPr lang="en-US" sz="1300" dirty="0"/>
+          </a:p>
+          <a:p>
+            <a:pPr indent="0" marL="0">
+              <a:buNone/>
+            </a:pPr>
+            <a:r>
+              <a:rPr lang="en-US" sz="1200" dirty="0">
+                <a:solidFill>
+                  <a:srgbClr val="2A1618"/>
+                </a:solidFill>
+                <a:latin typeface="Calibri" pitchFamily="34" charset="0"/>
+                <a:ea typeface="Calibri" pitchFamily="34" charset="-122"/>
+                <a:cs typeface="Calibri" pitchFamily="34" charset="-120"/>
+              </a:rPr>
+              <a:t>one starves the ~30 scarce training positions; the other biases predictions toward centre.</a:t>
+            </a:r>
+            <a:endParaRPr lang="en-US" sz="1300" dirty="0"/>
+          </a:p>
+        </p:txBody>
+      </p:sp>
+    </p:spTree>
+  </p:cSld>
+  <p:clrMapOvr>
+    <a:masterClrMapping/>
+  </p:clrMapOvr>
+</p:sld>
+</file>
+
+<file path=ppt/slides/slide14.xml><?xml version="1.0" encoding="utf-8"?>
+<p:sld xmlns:a="http://schemas.openxmlformats.org/drawingml/2006/main" xmlns:r="http://schemas.openxmlformats.org/officeDocument/2006/relationships" xmlns:p="http://schemas.openxmlformats.org/presentationml/2006/main">
+  <p:cSld name="Slide 14">
+    <p:bg>
+      <p:bgPr>
+        <a:solidFill>
+          <a:srgbClr val="FDF8F6"/>
+        </a:solidFill>
+      </p:bgPr>
+    </p:bg>
+    <p:spTree>
+      <p:nvGrpSpPr>
+        <p:cNvPr id="1" name=""/>
+        <p:cNvGrpSpPr/>
+        <p:nvPr/>
+      </p:nvGrpSpPr>
+      <p:grpSpPr>
+        <a:xfrm>
+          <a:off x="0" y="0"/>
+          <a:ext cx="0" cy="0"/>
+          <a:chOff x="0" y="0"/>
+          <a:chExt cx="0" cy="0"/>
+        </a:xfrm>
+      </p:grpSpPr>
+      <p:sp>
+        <p:nvSpPr>
           <p:cNvPr id="2" name="Shape 0"/>
           <p:cNvSpPr/>
           <p:nvPr/>
@@ -5185,7 +5776,7 @@
         <p:spPr>
           <a:xfrm>
             <a:off x="0" y="0"/>
-            <a:ext cx="12188952" cy="201168"/>
+            <a:ext cx="12188952" cy="237744"/>
           </a:xfrm>
           <a:prstGeom prst="rect">
             <a:avLst/>
@@ -5223,7 +5814,7 @@
             <a:r>
               <a:rPr lang="en-US" sz="2800" b="1" dirty="0">
                 <a:solidFill>
-                  <a:srgbClr val="FFFFFF"/>
+                  <a:srgbClr val="BE0000"/>
                 </a:solidFill>
                 <a:latin typeface="Cambria" pitchFamily="34" charset="0"/>
                 <a:ea typeface="Cambria" pitchFamily="34" charset="-122"/>
@@ -5250,7 +5841,7 @@
             <a:avLst/>
           </a:prstGeom>
           <a:solidFill>
-            <a:srgbClr val="C8890B"/>
+            <a:srgbClr val="BE0000"/>
           </a:solidFill>
           <a:ln/>
         </p:spPr>
@@ -5282,7 +5873,7 @@
             <a:r>
               <a:rPr lang="en-US" sz="1500" b="1" dirty="0">
                 <a:solidFill>
-                  <a:srgbClr val="2E1214"/>
+                  <a:srgbClr val="FFFFFF"/>
                 </a:solidFill>
                 <a:latin typeface="Cambria" pitchFamily="34" charset="0"/>
                 <a:ea typeface="Cambria" pitchFamily="34" charset="-122"/>
@@ -5321,7 +5912,7 @@
             <a:r>
               <a:rPr lang="en-US" sz="1400" b="1" dirty="0">
                 <a:solidFill>
-                  <a:srgbClr val="FFFFFF"/>
+                  <a:srgbClr val="2A1618"/>
                 </a:solidFill>
                 <a:latin typeface="Calibri" pitchFamily="34" charset="0"/>
                 <a:ea typeface="Calibri" pitchFamily="34" charset="-122"/>
@@ -5335,7 +5926,7 @@
             <a:r>
               <a:rPr lang="en-US" sz="1400" dirty="0">
                 <a:solidFill>
-                  <a:srgbClr val="EAD3CB"/>
+                  <a:srgbClr val="836A68"/>
                 </a:solidFill>
                 <a:latin typeface="Calibri" pitchFamily="34" charset="0"/>
                 <a:ea typeface="Calibri" pitchFamily="34" charset="-122"/>
@@ -5362,7 +5953,7 @@
             <a:avLst/>
           </a:prstGeom>
           <a:solidFill>
-            <a:srgbClr val="C8890B"/>
+            <a:srgbClr val="BE0000"/>
           </a:solidFill>
           <a:ln/>
         </p:spPr>
@@ -5394,7 +5985,7 @@
             <a:r>
               <a:rPr lang="en-US" sz="1500" b="1" dirty="0">
                 <a:solidFill>
-                  <a:srgbClr val="2E1214"/>
+                  <a:srgbClr val="FFFFFF"/>
                 </a:solidFill>
                 <a:latin typeface="Cambria" pitchFamily="34" charset="0"/>
                 <a:ea typeface="Cambria" pitchFamily="34" charset="-122"/>
@@ -5433,7 +6024,7 @@
             <a:r>
               <a:rPr lang="en-US" sz="1400" b="1" dirty="0">
                 <a:solidFill>
-                  <a:srgbClr val="FFFFFF"/>
+                  <a:srgbClr val="2A1618"/>
                 </a:solidFill>
                 <a:latin typeface="Calibri" pitchFamily="34" charset="0"/>
                 <a:ea typeface="Calibri" pitchFamily="34" charset="-122"/>
@@ -5447,7 +6038,7 @@
             <a:r>
               <a:rPr lang="en-US" sz="1400" dirty="0">
                 <a:solidFill>
-                  <a:srgbClr val="EAD3CB"/>
+                  <a:srgbClr val="836A68"/>
                 </a:solidFill>
                 <a:latin typeface="Calibri" pitchFamily="34" charset="0"/>
                 <a:ea typeface="Calibri" pitchFamily="34" charset="-122"/>
@@ -5474,7 +6065,7 @@
             <a:avLst/>
           </a:prstGeom>
           <a:solidFill>
-            <a:srgbClr val="C8890B"/>
+            <a:srgbClr val="BE0000"/>
           </a:solidFill>
           <a:ln/>
         </p:spPr>
@@ -5506,7 +6097,7 @@
             <a:r>
               <a:rPr lang="en-US" sz="1500" b="1" dirty="0">
                 <a:solidFill>
-                  <a:srgbClr val="2E1214"/>
+                  <a:srgbClr val="FFFFFF"/>
                 </a:solidFill>
                 <a:latin typeface="Cambria" pitchFamily="34" charset="0"/>
                 <a:ea typeface="Cambria" pitchFamily="34" charset="-122"/>
@@ -5545,7 +6136,7 @@
             <a:r>
               <a:rPr lang="en-US" sz="1400" b="1" dirty="0">
                 <a:solidFill>
-                  <a:srgbClr val="FFFFFF"/>
+                  <a:srgbClr val="2A1618"/>
                 </a:solidFill>
                 <a:latin typeface="Calibri" pitchFamily="34" charset="0"/>
                 <a:ea typeface="Calibri" pitchFamily="34" charset="-122"/>
@@ -5559,7 +6150,7 @@
             <a:r>
               <a:rPr lang="en-US" sz="1400" dirty="0">
                 <a:solidFill>
-                  <a:srgbClr val="EAD3CB"/>
+                  <a:srgbClr val="836A68"/>
                 </a:solidFill>
                 <a:latin typeface="Calibri" pitchFamily="34" charset="0"/>
                 <a:ea typeface="Calibri" pitchFamily="34" charset="-122"/>
@@ -5586,7 +6177,7 @@
             <a:avLst/>
           </a:prstGeom>
           <a:solidFill>
-            <a:srgbClr val="C8890B"/>
+            <a:srgbClr val="BE0000"/>
           </a:solidFill>
           <a:ln/>
         </p:spPr>
@@ -5618,7 +6209,7 @@
             <a:r>
               <a:rPr lang="en-US" sz="1500" b="1" dirty="0">
                 <a:solidFill>
-                  <a:srgbClr val="2E1214"/>
+                  <a:srgbClr val="FFFFFF"/>
                 </a:solidFill>
                 <a:latin typeface="Cambria" pitchFamily="34" charset="0"/>
                 <a:ea typeface="Cambria" pitchFamily="34" charset="-122"/>
@@ -5657,7 +6248,7 @@
             <a:r>
               <a:rPr lang="en-US" sz="1400" b="1" dirty="0">
                 <a:solidFill>
-                  <a:srgbClr val="FFFFFF"/>
+                  <a:srgbClr val="2A1618"/>
                 </a:solidFill>
                 <a:latin typeface="Calibri" pitchFamily="34" charset="0"/>
                 <a:ea typeface="Calibri" pitchFamily="34" charset="-122"/>
@@ -5671,7 +6262,7 @@
             <a:r>
               <a:rPr lang="en-US" sz="1400" dirty="0">
                 <a:solidFill>
-                  <a:srgbClr val="EAD3CB"/>
+                  <a:srgbClr val="836A68"/>
                 </a:solidFill>
                 <a:latin typeface="Calibri" pitchFamily="34" charset="0"/>
                 <a:ea typeface="Calibri" pitchFamily="34" charset="-122"/>
@@ -5698,7 +6289,7 @@
             <a:avLst/>
           </a:prstGeom>
           <a:solidFill>
-            <a:srgbClr val="C8890B"/>
+            <a:srgbClr val="BE0000"/>
           </a:solidFill>
           <a:ln/>
         </p:spPr>
@@ -5730,7 +6321,7 @@
             <a:r>
               <a:rPr lang="en-US" sz="1500" b="1" dirty="0">
                 <a:solidFill>
-                  <a:srgbClr val="2E1214"/>
+                  <a:srgbClr val="FFFFFF"/>
                 </a:solidFill>
                 <a:latin typeface="Cambria" pitchFamily="34" charset="0"/>
                 <a:ea typeface="Cambria" pitchFamily="34" charset="-122"/>
@@ -5769,7 +6360,7 @@
             <a:r>
               <a:rPr lang="en-US" sz="1400" b="1" dirty="0">
                 <a:solidFill>
-                  <a:srgbClr val="FFFFFF"/>
+                  <a:srgbClr val="2A1618"/>
                 </a:solidFill>
                 <a:latin typeface="Calibri" pitchFamily="34" charset="0"/>
                 <a:ea typeface="Calibri" pitchFamily="34" charset="-122"/>
@@ -5783,7 +6374,7 @@
             <a:r>
               <a:rPr lang="en-US" sz="1400" dirty="0">
                 <a:solidFill>
-                  <a:srgbClr val="EAD3CB"/>
+                  <a:srgbClr val="836A68"/>
                 </a:solidFill>
                 <a:latin typeface="Calibri" pitchFamily="34" charset="0"/>
                 <a:ea typeface="Calibri" pitchFamily="34" charset="-122"/>
@@ -5822,7 +6413,7 @@
             <a:r>
               <a:rPr lang="en-US" sz="1100" dirty="0">
                 <a:solidFill>
-                  <a:srgbClr val="C8890B"/>
+                  <a:srgbClr val="BE0000"/>
                 </a:solidFill>
                 <a:latin typeface="Calibri" pitchFamily="34" charset="0"/>
                 <a:ea typeface="Calibri" pitchFamily="34" charset="-122"/>
@@ -6693,7 +7284,7 @@
                 <a:ea typeface="Cambria" pitchFamily="34" charset="-122"/>
                 <a:cs typeface="Cambria" pitchFamily="34" charset="-120"/>
               </a:rPr>
-              <a:t>From “which cell” to “exact (x, y)”</a:t>
+              <a:t>The measurement setup, in pictures</a:t>
             </a:r>
             <a:endParaRPr lang="en-US" sz="2900" dirty="0"/>
           </a:p>
@@ -6732,7 +7323,7 @@
                 <a:ea typeface="Calibri" pitchFamily="34" charset="-122"/>
                 <a:cs typeface="Calibri" pitchFamily="34" charset="-120"/>
               </a:rPr>
-              <a:t>Same CNN and MLP as the classifier, with the head swapped for coordinate regression</a:t>
+              <a:t>The bench VNA, the 4-antenna array, and the A3 phantom on the grid</a:t>
             </a:r>
             <a:endParaRPr lang="en-US" sz="1400" dirty="0"/>
           </a:p>
@@ -6746,12 +7337,12 @@
         </p:nvSpPr>
         <p:spPr>
           <a:xfrm>
-            <a:off x="548640" y="1600200"/>
-            <a:ext cx="11091672" cy="1024128"/>
+            <a:off x="960120" y="1645920"/>
+            <a:ext cx="4937760" cy="4069080"/>
           </a:xfrm>
           <a:prstGeom prst="roundRect">
             <a:avLst>
-              <a:gd name="adj" fmla="val 8036"/>
+              <a:gd name="adj" fmla="val 2022"/>
             </a:avLst>
           </a:prstGeom>
           <a:solidFill>
@@ -6772,36 +7363,40 @@
           </a:effectLst>
         </p:spPr>
       </p:sp>
-      <p:sp>
-        <p:nvSpPr>
-          <p:cNvPr id="5" name="Shape 3"/>
-          <p:cNvSpPr/>
-          <p:nvPr/>
-        </p:nvSpPr>
-        <p:spPr>
-          <a:xfrm>
-            <a:off x="777240" y="1856232"/>
-            <a:ext cx="512064" cy="512064"/>
-          </a:xfrm>
-          <a:prstGeom prst="ellipse">
-            <a:avLst/>
-          </a:prstGeom>
-          <a:solidFill>
-            <a:srgbClr val="BE0000"/>
-          </a:solidFill>
-          <a:ln/>
-        </p:spPr>
-      </p:sp>
-      <p:sp>
-        <p:nvSpPr>
-          <p:cNvPr id="6" name="Text 4"/>
-          <p:cNvSpPr/>
-          <p:nvPr/>
-        </p:nvSpPr>
-        <p:spPr>
-          <a:xfrm>
-            <a:off x="777240" y="1856232"/>
-            <a:ext cx="512064" cy="512064"/>
+      <p:pic>
+        <p:nvPicPr>
+          <p:cNvPr id="5" name="Image 0" descr="setup_photos/measured_bench.png">    </p:cNvPr>
+          <p:cNvPicPr>
+            <a:picLocks noChangeAspect="1"/>
+          </p:cNvPicPr>
+          <p:nvPr/>
+        </p:nvPicPr>
+        <p:blipFill>
+          <a:blip r:embed="rId1"/>
+          <a:stretch>
+            <a:fillRect/>
+          </a:stretch>
+        </p:blipFill>
+        <p:spPr>
+          <a:xfrm>
+            <a:off x="1051560" y="1737360"/>
+            <a:ext cx="4754880" cy="3566160"/>
+          </a:xfrm>
+          <a:prstGeom prst="rect">
+            <a:avLst/>
+          </a:prstGeom>
+        </p:spPr>
+      </p:pic>
+      <p:sp>
+        <p:nvSpPr>
+          <p:cNvPr id="6" name="Text 3"/>
+          <p:cNvSpPr/>
+          <p:nvPr/>
+        </p:nvSpPr>
+        <p:spPr>
+          <a:xfrm>
+            <a:off x="960120" y="5321808"/>
+            <a:ext cx="4937760" cy="365760"/>
           </a:xfrm>
           <a:prstGeom prst="rect">
             <a:avLst/>
@@ -6817,85 +7412,7 @@
               <a:buNone/>
             </a:pPr>
             <a:r>
-              <a:rPr lang="en-US" sz="2000" b="1" dirty="0">
-                <a:solidFill>
-                  <a:srgbClr val="FFFFFF"/>
-                </a:solidFill>
-                <a:latin typeface="Cambria" pitchFamily="34" charset="0"/>
-                <a:ea typeface="Cambria" pitchFamily="34" charset="-122"/>
-                <a:cs typeface="Cambria" pitchFamily="34" charset="-120"/>
-              </a:rPr>
-              <a:t>1</a:t>
-            </a:r>
-            <a:endParaRPr lang="en-US" sz="2000" dirty="0"/>
-          </a:p>
-        </p:txBody>
-      </p:sp>
-      <p:sp>
-        <p:nvSpPr>
-          <p:cNvPr id="7" name="Text 5"/>
-          <p:cNvSpPr/>
-          <p:nvPr/>
-        </p:nvSpPr>
-        <p:spPr>
-          <a:xfrm>
-            <a:off x="1508760" y="1746504"/>
-            <a:ext cx="2286000" cy="731520"/>
-          </a:xfrm>
-          <a:prstGeom prst="rect">
-            <a:avLst/>
-          </a:prstGeom>
-          <a:noFill/>
-          <a:ln/>
-        </p:spPr>
-        <p:txBody>
-          <a:bodyPr wrap="square" lIns="0" tIns="0" rIns="0" bIns="0" rtlCol="0" anchor="ctr"/>
-          <a:lstStyle/>
-          <a:p>
-            <a:pPr indent="0" marL="0">
-              <a:buNone/>
-            </a:pPr>
-            <a:r>
-              <a:rPr lang="en-US" sz="1700" b="1" dirty="0">
-                <a:solidFill>
-                  <a:srgbClr val="BE0000"/>
-                </a:solidFill>
-                <a:latin typeface="Cambria" pitchFamily="34" charset="0"/>
-                <a:ea typeface="Cambria" pitchFamily="34" charset="-122"/>
-                <a:cs typeface="Cambria" pitchFamily="34" charset="-120"/>
-              </a:rPr>
-              <a:t>Targets</a:t>
-            </a:r>
-            <a:endParaRPr lang="en-US" sz="1700" dirty="0"/>
-          </a:p>
-        </p:txBody>
-      </p:sp>
-      <p:sp>
-        <p:nvSpPr>
-          <p:cNvPr id="8" name="Text 6"/>
-          <p:cNvSpPr/>
-          <p:nvPr/>
-        </p:nvSpPr>
-        <p:spPr>
-          <a:xfrm>
-            <a:off x="3886200" y="1655064"/>
-            <a:ext cx="7571232" cy="914400"/>
-          </a:xfrm>
-          <a:prstGeom prst="rect">
-            <a:avLst/>
-          </a:prstGeom>
-          <a:noFill/>
-          <a:ln/>
-        </p:spPr>
-        <p:txBody>
-          <a:bodyPr wrap="square" lIns="0" tIns="0" rIns="0" bIns="0" rtlCol="0" anchor="ctr"/>
-          <a:lstStyle/>
-          <a:p>
-            <a:pPr indent="0" marL="0">
-              <a:buNone/>
-            </a:pPr>
-            <a:r>
-              <a:rPr lang="en-US" sz="1270" dirty="0">
+              <a:rPr lang="en-US" sz="1300" b="1" dirty="0">
                 <a:solidFill>
                   <a:srgbClr val="2A1618"/>
                 </a:solidFill>
@@ -6903,26 +7420,26 @@
                 <a:ea typeface="Calibri" pitchFamily="34" charset="-122"/>
                 <a:cs typeface="Calibri" pitchFamily="34" charset="-120"/>
               </a:rPr>
-              <a:t>Grid label RnCmPp to a true (x,y) in inches (corner offsets of 0.375 in; photo-digitized where an insert blocked a corner). Never snapped to a grid point.</a:t>
-            </a:r>
-            <a:endParaRPr lang="en-US" sz="1270" dirty="0"/>
-          </a:p>
-        </p:txBody>
-      </p:sp>
-      <p:sp>
-        <p:nvSpPr>
-          <p:cNvPr id="9" name="Shape 7"/>
-          <p:cNvSpPr/>
-          <p:nvPr/>
-        </p:nvSpPr>
-        <p:spPr>
-          <a:xfrm>
-            <a:off x="548640" y="2770632"/>
-            <a:ext cx="11091672" cy="1024128"/>
+              <a:t>Bench: VNA + antenna array</a:t>
+            </a:r>
+            <a:endParaRPr lang="en-US" sz="1300" dirty="0"/>
+          </a:p>
+        </p:txBody>
+      </p:sp>
+      <p:sp>
+        <p:nvSpPr>
+          <p:cNvPr id="7" name="Shape 4"/>
+          <p:cNvSpPr/>
+          <p:nvPr/>
+        </p:nvSpPr>
+        <p:spPr>
+          <a:xfrm>
+            <a:off x="6263640" y="1645920"/>
+            <a:ext cx="4937760" cy="4069080"/>
           </a:xfrm>
           <a:prstGeom prst="roundRect">
             <a:avLst>
-              <a:gd name="adj" fmla="val 8036"/>
+              <a:gd name="adj" fmla="val 2022"/>
             </a:avLst>
           </a:prstGeom>
           <a:solidFill>
@@ -6943,36 +7460,40 @@
           </a:effectLst>
         </p:spPr>
       </p:sp>
-      <p:sp>
-        <p:nvSpPr>
-          <p:cNvPr id="10" name="Shape 8"/>
-          <p:cNvSpPr/>
-          <p:nvPr/>
-        </p:nvSpPr>
-        <p:spPr>
-          <a:xfrm>
-            <a:off x="777240" y="3026664"/>
-            <a:ext cx="512064" cy="512064"/>
-          </a:xfrm>
-          <a:prstGeom prst="ellipse">
-            <a:avLst/>
-          </a:prstGeom>
-          <a:solidFill>
-            <a:srgbClr val="BE0000"/>
-          </a:solidFill>
-          <a:ln/>
-        </p:spPr>
-      </p:sp>
-      <p:sp>
-        <p:nvSpPr>
-          <p:cNvPr id="11" name="Text 9"/>
-          <p:cNvSpPr/>
-          <p:nvPr/>
-        </p:nvSpPr>
-        <p:spPr>
-          <a:xfrm>
-            <a:off x="777240" y="3026664"/>
-            <a:ext cx="512064" cy="512064"/>
+      <p:pic>
+        <p:nvPicPr>
+          <p:cNvPr id="8" name="Image 1" descr="setup_photos/measured_grid.png">    </p:cNvPr>
+          <p:cNvPicPr>
+            <a:picLocks noChangeAspect="1"/>
+          </p:cNvPicPr>
+          <p:nvPr/>
+        </p:nvPicPr>
+        <p:blipFill>
+          <a:blip r:embed="rId2"/>
+          <a:stretch>
+            <a:fillRect/>
+          </a:stretch>
+        </p:blipFill>
+        <p:spPr>
+          <a:xfrm>
+            <a:off x="6355080" y="1737360"/>
+            <a:ext cx="4754880" cy="3566160"/>
+          </a:xfrm>
+          <a:prstGeom prst="rect">
+            <a:avLst/>
+          </a:prstGeom>
+        </p:spPr>
+      </p:pic>
+      <p:sp>
+        <p:nvSpPr>
+          <p:cNvPr id="9" name="Text 5"/>
+          <p:cNvSpPr/>
+          <p:nvPr/>
+        </p:nvSpPr>
+        <p:spPr>
+          <a:xfrm>
+            <a:off x="6263640" y="5321808"/>
+            <a:ext cx="4937760" cy="365760"/>
           </a:xfrm>
           <a:prstGeom prst="rect">
             <a:avLst/>
@@ -6988,85 +7509,7 @@
               <a:buNone/>
             </a:pPr>
             <a:r>
-              <a:rPr lang="en-US" sz="2000" b="1" dirty="0">
-                <a:solidFill>
-                  <a:srgbClr val="FFFFFF"/>
-                </a:solidFill>
-                <a:latin typeface="Cambria" pitchFamily="34" charset="0"/>
-                <a:ea typeface="Cambria" pitchFamily="34" charset="-122"/>
-                <a:cs typeface="Cambria" pitchFamily="34" charset="-120"/>
-              </a:rPr>
-              <a:t>2</a:t>
-            </a:r>
-            <a:endParaRPr lang="en-US" sz="2000" dirty="0"/>
-          </a:p>
-        </p:txBody>
-      </p:sp>
-      <p:sp>
-        <p:nvSpPr>
-          <p:cNvPr id="12" name="Text 10"/>
-          <p:cNvSpPr/>
-          <p:nvPr/>
-        </p:nvSpPr>
-        <p:spPr>
-          <a:xfrm>
-            <a:off x="1508760" y="2916936"/>
-            <a:ext cx="2286000" cy="731520"/>
-          </a:xfrm>
-          <a:prstGeom prst="rect">
-            <a:avLst/>
-          </a:prstGeom>
-          <a:noFill/>
-          <a:ln/>
-        </p:spPr>
-        <p:txBody>
-          <a:bodyPr wrap="square" lIns="0" tIns="0" rIns="0" bIns="0" rtlCol="0" anchor="ctr"/>
-          <a:lstStyle/>
-          <a:p>
-            <a:pPr indent="0" marL="0">
-              <a:buNone/>
-            </a:pPr>
-            <a:r>
-              <a:rPr lang="en-US" sz="1700" b="1" dirty="0">
-                <a:solidFill>
-                  <a:srgbClr val="BE0000"/>
-                </a:solidFill>
-                <a:latin typeface="Cambria" pitchFamily="34" charset="0"/>
-                <a:ea typeface="Cambria" pitchFamily="34" charset="-122"/>
-                <a:cs typeface="Cambria" pitchFamily="34" charset="-120"/>
-              </a:rPr>
-              <a:t>Models</a:t>
-            </a:r>
-            <a:endParaRPr lang="en-US" sz="1700" dirty="0"/>
-          </a:p>
-        </p:txBody>
-      </p:sp>
-      <p:sp>
-        <p:nvSpPr>
-          <p:cNvPr id="13" name="Text 11"/>
-          <p:cNvSpPr/>
-          <p:nvPr/>
-        </p:nvSpPr>
-        <p:spPr>
-          <a:xfrm>
-            <a:off x="3886200" y="2825496"/>
-            <a:ext cx="7571232" cy="914400"/>
-          </a:xfrm>
-          <a:prstGeom prst="rect">
-            <a:avLst/>
-          </a:prstGeom>
-          <a:noFill/>
-          <a:ln/>
-        </p:spPr>
-        <p:txBody>
-          <a:bodyPr wrap="square" lIns="0" tIns="0" rIns="0" bIns="0" rtlCol="0" anchor="ctr"/>
-          <a:lstStyle/>
-          <a:p>
-            <a:pPr indent="0" marL="0">
-              <a:buNone/>
-            </a:pPr>
-            <a:r>
-              <a:rPr lang="en-US" sz="1270" dirty="0">
+              <a:rPr lang="en-US" sz="1300" b="1" dirty="0">
                 <a:solidFill>
                   <a:srgbClr val="2A1618"/>
                 </a:solidFill>
@@ -7074,76 +7517,22 @@
                 <a:ea typeface="Calibri" pitchFamily="34" charset="-122"/>
                 <a:cs typeface="Calibri" pitchFamily="34" charset="-120"/>
               </a:rPr>
-              <a:t>CNN: conv trunk (32 to 32) then fc(2) + regression. MLP: 3-seed ensemble. Input = raw 16 S-params as a 32 x freq image; per-session z-score; v2 preprocessing.</a:t>
-            </a:r>
-            <a:endParaRPr lang="en-US" sz="1270" dirty="0"/>
-          </a:p>
-        </p:txBody>
-      </p:sp>
-      <p:sp>
-        <p:nvSpPr>
-          <p:cNvPr id="14" name="Shape 12"/>
-          <p:cNvSpPr/>
-          <p:nvPr/>
-        </p:nvSpPr>
-        <p:spPr>
-          <a:xfrm>
-            <a:off x="548640" y="3941064"/>
-            <a:ext cx="11091672" cy="1024128"/>
-          </a:xfrm>
-          <a:prstGeom prst="roundRect">
-            <a:avLst>
-              <a:gd name="adj" fmla="val 8036"/>
-            </a:avLst>
-          </a:prstGeom>
-          <a:solidFill>
-            <a:srgbClr val="FBF4F2"/>
-          </a:solidFill>
-          <a:ln w="12700">
-            <a:solidFill>
-              <a:srgbClr val="E7D6D1"/>
-            </a:solidFill>
-            <a:prstDash val="solid"/>
-          </a:ln>
-          <a:effectLst>
-            <a:outerShdw sx="100000" sy="100000" kx="0" ky="0" algn="bl" rotWithShape="0" blurRad="88900" dist="38100" dir="5400000">
-              <a:srgbClr val="7A5C5E">
-                <a:alpha val="18000"/>
-              </a:srgbClr>
-            </a:outerShdw>
-          </a:effectLst>
-        </p:spPr>
-      </p:sp>
-      <p:sp>
-        <p:nvSpPr>
-          <p:cNvPr id="15" name="Shape 13"/>
-          <p:cNvSpPr/>
-          <p:nvPr/>
-        </p:nvSpPr>
-        <p:spPr>
-          <a:xfrm>
-            <a:off x="777240" y="4197096"/>
-            <a:ext cx="512064" cy="512064"/>
-          </a:xfrm>
-          <a:prstGeom prst="ellipse">
-            <a:avLst/>
-          </a:prstGeom>
-          <a:solidFill>
-            <a:srgbClr val="BE0000"/>
-          </a:solidFill>
-          <a:ln/>
-        </p:spPr>
-      </p:sp>
-      <p:sp>
-        <p:nvSpPr>
-          <p:cNvPr id="16" name="Text 14"/>
-          <p:cNvSpPr/>
-          <p:nvPr/>
-        </p:nvSpPr>
-        <p:spPr>
-          <a:xfrm>
-            <a:off x="777240" y="4197096"/>
-            <a:ext cx="512064" cy="512064"/>
+              <a:t>Phantom in oil on the grid</a:t>
+            </a:r>
+            <a:endParaRPr lang="en-US" sz="1300" dirty="0"/>
+          </a:p>
+        </p:txBody>
+      </p:sp>
+      <p:sp>
+        <p:nvSpPr>
+          <p:cNvPr id="10" name="Text 6"/>
+          <p:cNvSpPr/>
+          <p:nvPr/>
+        </p:nvSpPr>
+        <p:spPr>
+          <a:xfrm>
+            <a:off x="548640" y="5532120"/>
+            <a:ext cx="11091672" cy="457200"/>
           </a:xfrm>
           <a:prstGeom prst="rect">
             <a:avLst/>
@@ -7159,266 +7548,17 @@
               <a:buNone/>
             </a:pPr>
             <a:r>
-              <a:rPr lang="en-US" sz="2000" b="1" dirty="0">
-                <a:solidFill>
-                  <a:srgbClr val="FFFFFF"/>
-                </a:solidFill>
-                <a:latin typeface="Cambria" pitchFamily="34" charset="0"/>
-                <a:ea typeface="Cambria" pitchFamily="34" charset="-122"/>
-                <a:cs typeface="Cambria" pitchFamily="34" charset="-120"/>
-              </a:rPr>
-              <a:t>3</a:t>
-            </a:r>
-            <a:endParaRPr lang="en-US" sz="2000" dirty="0"/>
-          </a:p>
-        </p:txBody>
-      </p:sp>
-      <p:sp>
-        <p:nvSpPr>
-          <p:cNvPr id="17" name="Text 15"/>
-          <p:cNvSpPr/>
-          <p:nvPr/>
-        </p:nvSpPr>
-        <p:spPr>
-          <a:xfrm>
-            <a:off x="1508760" y="4087368"/>
-            <a:ext cx="2286000" cy="731520"/>
-          </a:xfrm>
-          <a:prstGeom prst="rect">
-            <a:avLst/>
-          </a:prstGeom>
-          <a:noFill/>
-          <a:ln/>
-        </p:spPr>
-        <p:txBody>
-          <a:bodyPr wrap="square" lIns="0" tIns="0" rIns="0" bIns="0" rtlCol="0" anchor="ctr"/>
-          <a:lstStyle/>
-          <a:p>
-            <a:pPr indent="0" marL="0">
-              <a:buNone/>
-            </a:pPr>
-            <a:r>
-              <a:rPr lang="en-US" sz="1700" b="1" dirty="0">
-                <a:solidFill>
-                  <a:srgbClr val="BE0000"/>
-                </a:solidFill>
-                <a:latin typeface="Cambria" pitchFamily="34" charset="0"/>
-                <a:ea typeface="Cambria" pitchFamily="34" charset="-122"/>
-                <a:cs typeface="Cambria" pitchFamily="34" charset="-120"/>
-              </a:rPr>
-              <a:t>Metric</a:t>
-            </a:r>
-            <a:endParaRPr lang="en-US" sz="1700" dirty="0"/>
-          </a:p>
-        </p:txBody>
-      </p:sp>
-      <p:sp>
-        <p:nvSpPr>
-          <p:cNvPr id="18" name="Text 16"/>
-          <p:cNvSpPr/>
-          <p:nvPr/>
-        </p:nvSpPr>
-        <p:spPr>
-          <a:xfrm>
-            <a:off x="3886200" y="3995928"/>
-            <a:ext cx="7571232" cy="914400"/>
-          </a:xfrm>
-          <a:prstGeom prst="rect">
-            <a:avLst/>
-          </a:prstGeom>
-          <a:noFill/>
-          <a:ln/>
-        </p:spPr>
-        <p:txBody>
-          <a:bodyPr wrap="square" lIns="0" tIns="0" rIns="0" bIns="0" rtlCol="0" anchor="ctr"/>
-          <a:lstStyle/>
-          <a:p>
-            <a:pPr indent="0" marL="0">
-              <a:buNone/>
-            </a:pPr>
-            <a:r>
-              <a:rPr lang="en-US" sz="1270" dirty="0">
-                <a:solidFill>
-                  <a:srgbClr val="2A1618"/>
+              <a:rPr lang="en-US" sz="1250" i="1" dirty="0">
+                <a:solidFill>
+                  <a:srgbClr val="836A68"/>
                 </a:solidFill>
                 <a:latin typeface="Calibri" pitchFamily="34" charset="0"/>
                 <a:ea typeface="Calibri" pitchFamily="34" charset="-122"/>
                 <a:cs typeface="Calibri" pitchFamily="34" charset="-120"/>
               </a:rPr>
-              <a:t>Euclidean error in inches (x25.4 = mm). Median error plus percent within the 0.5 in half-cell.</a:t>
-            </a:r>
-            <a:endParaRPr lang="en-US" sz="1270" dirty="0"/>
-          </a:p>
-        </p:txBody>
-      </p:sp>
-      <p:sp>
-        <p:nvSpPr>
-          <p:cNvPr id="19" name="Shape 17"/>
-          <p:cNvSpPr/>
-          <p:nvPr/>
-        </p:nvSpPr>
-        <p:spPr>
-          <a:xfrm>
-            <a:off x="548640" y="5111496"/>
-            <a:ext cx="11091672" cy="1024128"/>
-          </a:xfrm>
-          <a:prstGeom prst="roundRect">
-            <a:avLst>
-              <a:gd name="adj" fmla="val 8036"/>
-            </a:avLst>
-          </a:prstGeom>
-          <a:solidFill>
-            <a:srgbClr val="FBF4F2"/>
-          </a:solidFill>
-          <a:ln w="12700">
-            <a:solidFill>
-              <a:srgbClr val="E7D6D1"/>
-            </a:solidFill>
-            <a:prstDash val="solid"/>
-          </a:ln>
-          <a:effectLst>
-            <a:outerShdw sx="100000" sy="100000" kx="0" ky="0" algn="bl" rotWithShape="0" blurRad="88900" dist="38100" dir="5400000">
-              <a:srgbClr val="7A5C5E">
-                <a:alpha val="18000"/>
-              </a:srgbClr>
-            </a:outerShdw>
-          </a:effectLst>
-        </p:spPr>
-      </p:sp>
-      <p:sp>
-        <p:nvSpPr>
-          <p:cNvPr id="20" name="Shape 18"/>
-          <p:cNvSpPr/>
-          <p:nvPr/>
-        </p:nvSpPr>
-        <p:spPr>
-          <a:xfrm>
-            <a:off x="777240" y="5367528"/>
-            <a:ext cx="512064" cy="512064"/>
-          </a:xfrm>
-          <a:prstGeom prst="ellipse">
-            <a:avLst/>
-          </a:prstGeom>
-          <a:solidFill>
-            <a:srgbClr val="BE0000"/>
-          </a:solidFill>
-          <a:ln/>
-        </p:spPr>
-      </p:sp>
-      <p:sp>
-        <p:nvSpPr>
-          <p:cNvPr id="21" name="Text 19"/>
-          <p:cNvSpPr/>
-          <p:nvPr/>
-        </p:nvSpPr>
-        <p:spPr>
-          <a:xfrm>
-            <a:off x="777240" y="5367528"/>
-            <a:ext cx="512064" cy="512064"/>
-          </a:xfrm>
-          <a:prstGeom prst="rect">
-            <a:avLst/>
-          </a:prstGeom>
-          <a:noFill/>
-          <a:ln/>
-        </p:spPr>
-        <p:txBody>
-          <a:bodyPr wrap="square" lIns="0" tIns="0" rIns="0" bIns="0" rtlCol="0" anchor="ctr"/>
-          <a:lstStyle/>
-          <a:p>
-            <a:pPr algn="ctr" indent="0" marL="0">
-              <a:buNone/>
-            </a:pPr>
-            <a:r>
-              <a:rPr lang="en-US" sz="2000" b="1" dirty="0">
-                <a:solidFill>
-                  <a:srgbClr val="FFFFFF"/>
-                </a:solidFill>
-                <a:latin typeface="Cambria" pitchFamily="34" charset="0"/>
-                <a:ea typeface="Cambria" pitchFamily="34" charset="-122"/>
-                <a:cs typeface="Cambria" pitchFamily="34" charset="-120"/>
-              </a:rPr>
-              <a:t>4</a:t>
-            </a:r>
-            <a:endParaRPr lang="en-US" sz="2000" dirty="0"/>
-          </a:p>
-        </p:txBody>
-      </p:sp>
-      <p:sp>
-        <p:nvSpPr>
-          <p:cNvPr id="22" name="Text 20"/>
-          <p:cNvSpPr/>
-          <p:nvPr/>
-        </p:nvSpPr>
-        <p:spPr>
-          <a:xfrm>
-            <a:off x="1508760" y="5257800"/>
-            <a:ext cx="2286000" cy="731520"/>
-          </a:xfrm>
-          <a:prstGeom prst="rect">
-            <a:avLst/>
-          </a:prstGeom>
-          <a:noFill/>
-          <a:ln/>
-        </p:spPr>
-        <p:txBody>
-          <a:bodyPr wrap="square" lIns="0" tIns="0" rIns="0" bIns="0" rtlCol="0" anchor="ctr"/>
-          <a:lstStyle/>
-          <a:p>
-            <a:pPr indent="0" marL="0">
-              <a:buNone/>
-            </a:pPr>
-            <a:r>
-              <a:rPr lang="en-US" sz="1700" b="1" dirty="0">
-                <a:solidFill>
-                  <a:srgbClr val="BE0000"/>
-                </a:solidFill>
-                <a:latin typeface="Cambria" pitchFamily="34" charset="0"/>
-                <a:ea typeface="Cambria" pitchFamily="34" charset="-122"/>
-                <a:cs typeface="Cambria" pitchFamily="34" charset="-120"/>
-              </a:rPr>
-              <a:t>Protocols</a:t>
-            </a:r>
-            <a:endParaRPr lang="en-US" sz="1700" dirty="0"/>
-          </a:p>
-        </p:txBody>
-      </p:sp>
-      <p:sp>
-        <p:nvSpPr>
-          <p:cNvPr id="23" name="Text 21"/>
-          <p:cNvSpPr/>
-          <p:nvPr/>
-        </p:nvSpPr>
-        <p:spPr>
-          <a:xfrm>
-            <a:off x="3886200" y="5166360"/>
-            <a:ext cx="7571232" cy="914400"/>
-          </a:xfrm>
-          <a:prstGeom prst="rect">
-            <a:avLst/>
-          </a:prstGeom>
-          <a:noFill/>
-          <a:ln/>
-        </p:spPr>
-        <p:txBody>
-          <a:bodyPr wrap="square" lIns="0" tIns="0" rIns="0" bIns="0" rtlCol="0" anchor="ctr"/>
-          <a:lstStyle/>
-          <a:p>
-            <a:pPr indent="0" marL="0">
-              <a:buNone/>
-            </a:pPr>
-            <a:r>
-              <a:rPr lang="en-US" sz="1270" dirty="0">
-                <a:solidFill>
-                  <a:srgbClr val="2A1618"/>
-                </a:solidFill>
-                <a:latin typeface="Calibri" pitchFamily="34" charset="0"/>
-                <a:ea typeface="Calibri" pitchFamily="34" charset="-122"/>
-                <a:cs typeface="Calibri" pitchFamily="34" charset="-120"/>
-              </a:rPr>
-              <a:t>LOSO holds out a whole session. LOPO-cell holds out a whole 1 in cell. LOPO single-position holds out one sub-position (its cell-mates stay in training).</a:t>
-            </a:r>
-            <a:endParaRPr lang="en-US" sz="1270" dirty="0"/>
+              <a:t>Replace the placeholders in regression_deck/setup_photos/ (measured_bench.*, measured_grid.*) with real photos.</a:t>
+            </a:r>
+            <a:endParaRPr lang="en-US" sz="1250" dirty="0"/>
           </a:p>
         </p:txBody>
       </p:sp>
@@ -7487,7 +7627,7 @@
                 <a:ea typeface="Cambria" pitchFamily="34" charset="-122"/>
                 <a:cs typeface="Cambria" pitchFamily="34" charset="-120"/>
               </a:rPr>
-              <a:t>Three ways to test the model</a:t>
+              <a:t>From “which cell” to “exact (x, y)”</a:t>
             </a:r>
             <a:endParaRPr lang="en-US" sz="2900" dirty="0"/>
           </a:p>
@@ -7526,7 +7666,7 @@
                 <a:ea typeface="Calibri" pitchFamily="34" charset="-122"/>
                 <a:cs typeface="Calibri" pitchFamily="34" charset="-120"/>
               </a:rPr>
-              <a:t>Each hold-out asks a harder question about generalization</a:t>
+              <a:t>Same CNN and MLP as the classifier, with the head swapped for coordinate regression</a:t>
             </a:r>
             <a:endParaRPr lang="en-US" sz="1400" dirty="0"/>
           </a:p>
@@ -7540,12 +7680,12 @@
         </p:nvSpPr>
         <p:spPr>
           <a:xfrm>
-            <a:off x="640080" y="1600200"/>
-            <a:ext cx="3246120" cy="4526280"/>
+            <a:off x="548640" y="1600200"/>
+            <a:ext cx="11091672" cy="1024128"/>
           </a:xfrm>
           <a:prstGeom prst="roundRect">
             <a:avLst>
-              <a:gd name="adj" fmla="val 2535"/>
+              <a:gd name="adj" fmla="val 8036"/>
             </a:avLst>
           </a:prstGeom>
           <a:solidFill>
@@ -7568,14 +7708,34 @@
       </p:sp>
       <p:sp>
         <p:nvSpPr>
-          <p:cNvPr id="5" name="Text 3"/>
-          <p:cNvSpPr/>
-          <p:nvPr/>
-        </p:nvSpPr>
-        <p:spPr>
-          <a:xfrm>
-            <a:off x="822960" y="1801368"/>
-            <a:ext cx="2880360" cy="457200"/>
+          <p:cNvPr id="5" name="Shape 3"/>
+          <p:cNvSpPr/>
+          <p:nvPr/>
+        </p:nvSpPr>
+        <p:spPr>
+          <a:xfrm>
+            <a:off x="777240" y="1856232"/>
+            <a:ext cx="512064" cy="512064"/>
+          </a:xfrm>
+          <a:prstGeom prst="ellipse">
+            <a:avLst/>
+          </a:prstGeom>
+          <a:solidFill>
+            <a:srgbClr val="BE0000"/>
+          </a:solidFill>
+          <a:ln/>
+        </p:spPr>
+      </p:sp>
+      <p:sp>
+        <p:nvSpPr>
+          <p:cNvPr id="6" name="Text 4"/>
+          <p:cNvSpPr/>
+          <p:nvPr/>
+        </p:nvSpPr>
+        <p:spPr>
+          <a:xfrm>
+            <a:off x="777240" y="1856232"/>
+            <a:ext cx="512064" cy="512064"/>
           </a:xfrm>
           <a:prstGeom prst="rect">
             <a:avLst/>
@@ -7587,34 +7747,34 @@
           <a:bodyPr wrap="square" lIns="0" tIns="0" rIns="0" bIns="0" rtlCol="0" anchor="ctr"/>
           <a:lstStyle/>
           <a:p>
-            <a:pPr indent="0" marL="0">
-              <a:buNone/>
-            </a:pPr>
-            <a:r>
-              <a:rPr lang="en-US" sz="1900" b="1" dirty="0">
-                <a:solidFill>
-                  <a:srgbClr val="BE0000"/>
+            <a:pPr algn="ctr" indent="0" marL="0">
+              <a:buNone/>
+            </a:pPr>
+            <a:r>
+              <a:rPr lang="en-US" sz="2000" b="1" dirty="0">
+                <a:solidFill>
+                  <a:srgbClr val="FFFFFF"/>
                 </a:solidFill>
                 <a:latin typeface="Cambria" pitchFamily="34" charset="0"/>
                 <a:ea typeface="Cambria" pitchFamily="34" charset="-122"/>
                 <a:cs typeface="Cambria" pitchFamily="34" charset="-120"/>
               </a:rPr>
-              <a:t>LOSO</a:t>
-            </a:r>
-            <a:endParaRPr lang="en-US" sz="1900" dirty="0"/>
-          </a:p>
-        </p:txBody>
-      </p:sp>
-      <p:sp>
-        <p:nvSpPr>
-          <p:cNvPr id="6" name="Text 4"/>
-          <p:cNvSpPr/>
-          <p:nvPr/>
-        </p:nvSpPr>
-        <p:spPr>
-          <a:xfrm>
-            <a:off x="822960" y="2258568"/>
-            <a:ext cx="2880360" cy="292608"/>
+              <a:t>1</a:t>
+            </a:r>
+            <a:endParaRPr lang="en-US" sz="2000" dirty="0"/>
+          </a:p>
+        </p:txBody>
+      </p:sp>
+      <p:sp>
+        <p:nvSpPr>
+          <p:cNvPr id="7" name="Text 5"/>
+          <p:cNvSpPr/>
+          <p:nvPr/>
+        </p:nvSpPr>
+        <p:spPr>
+          <a:xfrm>
+            <a:off x="1508760" y="1746504"/>
+            <a:ext cx="2286000" cy="731520"/>
           </a:xfrm>
           <a:prstGeom prst="rect">
             <a:avLst/>
@@ -7630,399 +7790,73 @@
               <a:buNone/>
             </a:pPr>
             <a:r>
-              <a:rPr lang="en-US" sz="1250" i="1" dirty="0">
-                <a:solidFill>
-                  <a:srgbClr val="836A68"/>
+              <a:rPr lang="en-US" sz="1700" b="1" dirty="0">
+                <a:solidFill>
+                  <a:srgbClr val="BE0000"/>
+                </a:solidFill>
+                <a:latin typeface="Cambria" pitchFamily="34" charset="0"/>
+                <a:ea typeface="Cambria" pitchFamily="34" charset="-122"/>
+                <a:cs typeface="Cambria" pitchFamily="34" charset="-120"/>
+              </a:rPr>
+              <a:t>Targets</a:t>
+            </a:r>
+            <a:endParaRPr lang="en-US" sz="1700" dirty="0"/>
+          </a:p>
+        </p:txBody>
+      </p:sp>
+      <p:sp>
+        <p:nvSpPr>
+          <p:cNvPr id="8" name="Text 6"/>
+          <p:cNvSpPr/>
+          <p:nvPr/>
+        </p:nvSpPr>
+        <p:spPr>
+          <a:xfrm>
+            <a:off x="3886200" y="1655064"/>
+            <a:ext cx="7571232" cy="914400"/>
+          </a:xfrm>
+          <a:prstGeom prst="rect">
+            <a:avLst/>
+          </a:prstGeom>
+          <a:noFill/>
+          <a:ln/>
+        </p:spPr>
+        <p:txBody>
+          <a:bodyPr wrap="square" lIns="0" tIns="0" rIns="0" bIns="0" rtlCol="0" anchor="ctr"/>
+          <a:lstStyle/>
+          <a:p>
+            <a:pPr indent="0" marL="0">
+              <a:buNone/>
+            </a:pPr>
+            <a:r>
+              <a:rPr lang="en-US" sz="1270" dirty="0">
+                <a:solidFill>
+                  <a:srgbClr val="2A1618"/>
                 </a:solidFill>
                 <a:latin typeface="Calibri" pitchFamily="34" charset="0"/>
                 <a:ea typeface="Calibri" pitchFamily="34" charset="-122"/>
                 <a:cs typeface="Calibri" pitchFamily="34" charset="-120"/>
               </a:rPr>
-              <a:t>leave one session out</a:t>
-            </a:r>
-            <a:endParaRPr lang="en-US" sz="1250" dirty="0"/>
-          </a:p>
-        </p:txBody>
-      </p:sp>
-      <p:sp>
-        <p:nvSpPr>
-          <p:cNvPr id="7" name="Shape 5"/>
-          <p:cNvSpPr/>
-          <p:nvPr/>
-        </p:nvSpPr>
-        <p:spPr>
-          <a:xfrm>
-            <a:off x="1143000" y="2651760"/>
-            <a:ext cx="2240280" cy="365760"/>
+              <a:t>Grid label RnCmPp to a true (x,y) in inches (corner offsets of 0.375 in; photo-digitized where an insert blocked a corner). Never snapped to a grid point.</a:t>
+            </a:r>
+            <a:endParaRPr lang="en-US" sz="1270" dirty="0"/>
+          </a:p>
+        </p:txBody>
+      </p:sp>
+      <p:sp>
+        <p:nvSpPr>
+          <p:cNvPr id="9" name="Shape 7"/>
+          <p:cNvSpPr/>
+          <p:nvPr/>
+        </p:nvSpPr>
+        <p:spPr>
+          <a:xfrm>
+            <a:off x="548640" y="2770632"/>
+            <a:ext cx="11091672" cy="1024128"/>
           </a:xfrm>
           <a:prstGeom prst="roundRect">
             <a:avLst>
-              <a:gd name="adj" fmla="val 10000"/>
-            </a:avLst>
-          </a:prstGeom>
-          <a:solidFill>
-            <a:srgbClr val="FBF4F2"/>
-          </a:solidFill>
-          <a:ln w="12700">
-            <a:solidFill>
-              <a:srgbClr val="E7D6D1"/>
-            </a:solidFill>
-            <a:prstDash val="solid"/>
-          </a:ln>
-        </p:spPr>
-      </p:sp>
-      <p:sp>
-        <p:nvSpPr>
-          <p:cNvPr id="8" name="Text 6"/>
-          <p:cNvSpPr/>
-          <p:nvPr/>
-        </p:nvSpPr>
-        <p:spPr>
-          <a:xfrm>
-            <a:off x="1143000" y="2651760"/>
-            <a:ext cx="2240280" cy="365760"/>
-          </a:xfrm>
-          <a:prstGeom prst="rect">
-            <a:avLst/>
-          </a:prstGeom>
-          <a:noFill/>
-          <a:ln/>
-        </p:spPr>
-        <p:txBody>
-          <a:bodyPr wrap="square" lIns="0" tIns="0" rIns="0" bIns="0" rtlCol="0" anchor="ctr"/>
-          <a:lstStyle/>
-          <a:p>
-            <a:pPr algn="ctr" indent="0" marL="0">
-              <a:buNone/>
-            </a:pPr>
-            <a:r>
-              <a:rPr lang="en-US" sz="1100" dirty="0">
-                <a:solidFill>
-                  <a:srgbClr val="836A68"/>
-                </a:solidFill>
-                <a:latin typeface="Calibri" pitchFamily="34" charset="0"/>
-                <a:ea typeface="Calibri" pitchFamily="34" charset="-122"/>
-                <a:cs typeface="Calibri" pitchFamily="34" charset="-120"/>
-              </a:rPr>
-              <a:t>S1 train</a:t>
-            </a:r>
-            <a:endParaRPr lang="en-US" sz="1100" dirty="0"/>
-          </a:p>
-        </p:txBody>
-      </p:sp>
-      <p:sp>
-        <p:nvSpPr>
-          <p:cNvPr id="9" name="Shape 7"/>
-          <p:cNvSpPr/>
-          <p:nvPr/>
-        </p:nvSpPr>
-        <p:spPr>
-          <a:xfrm>
-            <a:off x="1143000" y="3108960"/>
-            <a:ext cx="2240280" cy="365760"/>
-          </a:xfrm>
-          <a:prstGeom prst="roundRect">
-            <a:avLst>
-              <a:gd name="adj" fmla="val 10000"/>
-            </a:avLst>
-          </a:prstGeom>
-          <a:solidFill>
-            <a:srgbClr val="FBF4F2"/>
-          </a:solidFill>
-          <a:ln w="12700">
-            <a:solidFill>
-              <a:srgbClr val="E7D6D1"/>
-            </a:solidFill>
-            <a:prstDash val="solid"/>
-          </a:ln>
-        </p:spPr>
-      </p:sp>
-      <p:sp>
-        <p:nvSpPr>
-          <p:cNvPr id="10" name="Text 8"/>
-          <p:cNvSpPr/>
-          <p:nvPr/>
-        </p:nvSpPr>
-        <p:spPr>
-          <a:xfrm>
-            <a:off x="1143000" y="3108960"/>
-            <a:ext cx="2240280" cy="365760"/>
-          </a:xfrm>
-          <a:prstGeom prst="rect">
-            <a:avLst/>
-          </a:prstGeom>
-          <a:noFill/>
-          <a:ln/>
-        </p:spPr>
-        <p:txBody>
-          <a:bodyPr wrap="square" lIns="0" tIns="0" rIns="0" bIns="0" rtlCol="0" anchor="ctr"/>
-          <a:lstStyle/>
-          <a:p>
-            <a:pPr algn="ctr" indent="0" marL="0">
-              <a:buNone/>
-            </a:pPr>
-            <a:r>
-              <a:rPr lang="en-US" sz="1100" dirty="0">
-                <a:solidFill>
-                  <a:srgbClr val="836A68"/>
-                </a:solidFill>
-                <a:latin typeface="Calibri" pitchFamily="34" charset="0"/>
-                <a:ea typeface="Calibri" pitchFamily="34" charset="-122"/>
-                <a:cs typeface="Calibri" pitchFamily="34" charset="-120"/>
-              </a:rPr>
-              <a:t>S2 train</a:t>
-            </a:r>
-            <a:endParaRPr lang="en-US" sz="1100" dirty="0"/>
-          </a:p>
-        </p:txBody>
-      </p:sp>
-      <p:sp>
-        <p:nvSpPr>
-          <p:cNvPr id="11" name="Shape 9"/>
-          <p:cNvSpPr/>
-          <p:nvPr/>
-        </p:nvSpPr>
-        <p:spPr>
-          <a:xfrm>
-            <a:off x="1143000" y="3566160"/>
-            <a:ext cx="2240280" cy="365760"/>
-          </a:xfrm>
-          <a:prstGeom prst="roundRect">
-            <a:avLst>
-              <a:gd name="adj" fmla="val 10000"/>
-            </a:avLst>
-          </a:prstGeom>
-          <a:solidFill>
-            <a:srgbClr val="BE0000"/>
-          </a:solidFill>
-          <a:ln w="12700">
-            <a:solidFill>
-              <a:srgbClr val="BE0000"/>
-            </a:solidFill>
-            <a:prstDash val="solid"/>
-          </a:ln>
-        </p:spPr>
-      </p:sp>
-      <p:sp>
-        <p:nvSpPr>
-          <p:cNvPr id="12" name="Text 10"/>
-          <p:cNvSpPr/>
-          <p:nvPr/>
-        </p:nvSpPr>
-        <p:spPr>
-          <a:xfrm>
-            <a:off x="1143000" y="3566160"/>
-            <a:ext cx="2240280" cy="365760"/>
-          </a:xfrm>
-          <a:prstGeom prst="rect">
-            <a:avLst/>
-          </a:prstGeom>
-          <a:noFill/>
-          <a:ln/>
-        </p:spPr>
-        <p:txBody>
-          <a:bodyPr wrap="square" lIns="0" tIns="0" rIns="0" bIns="0" rtlCol="0" anchor="ctr"/>
-          <a:lstStyle/>
-          <a:p>
-            <a:pPr algn="ctr" indent="0" marL="0">
-              <a:buNone/>
-            </a:pPr>
-            <a:r>
-              <a:rPr lang="en-US" sz="1100" b="1" dirty="0">
-                <a:solidFill>
-                  <a:srgbClr val="FFFFFF"/>
-                </a:solidFill>
-                <a:latin typeface="Calibri" pitchFamily="34" charset="0"/>
-                <a:ea typeface="Calibri" pitchFamily="34" charset="-122"/>
-                <a:cs typeface="Calibri" pitchFamily="34" charset="-120"/>
-              </a:rPr>
-              <a:t>S3 test</a:t>
-            </a:r>
-            <a:endParaRPr lang="en-US" sz="1100" dirty="0"/>
-          </a:p>
-        </p:txBody>
-      </p:sp>
-      <p:sp>
-        <p:nvSpPr>
-          <p:cNvPr id="13" name="Text 11"/>
-          <p:cNvSpPr/>
-          <p:nvPr/>
-        </p:nvSpPr>
-        <p:spPr>
-          <a:xfrm>
-            <a:off x="822960" y="4480560"/>
-            <a:ext cx="2880360" cy="548640"/>
-          </a:xfrm>
-          <a:prstGeom prst="rect">
-            <a:avLst/>
-          </a:prstGeom>
-          <a:noFill/>
-          <a:ln/>
-        </p:spPr>
-        <p:txBody>
-          <a:bodyPr wrap="square" lIns="0" tIns="0" rIns="0" bIns="0" rtlCol="0" anchor="t"/>
-          <a:lstStyle/>
-          <a:p>
-            <a:pPr indent="0" marL="0">
-              <a:buNone/>
-            </a:pPr>
-            <a:r>
-              <a:rPr lang="en-US" sz="1150" b="1" dirty="0">
-                <a:solidFill>
-                  <a:srgbClr val="2A1618"/>
-                </a:solidFill>
-                <a:latin typeface="Calibri" pitchFamily="34" charset="0"/>
-                <a:ea typeface="Calibri" pitchFamily="34" charset="-122"/>
-                <a:cs typeface="Calibri" pitchFamily="34" charset="-120"/>
-              </a:rPr>
-              <a:t>Held out:  </a:t>
-            </a:r>
-            <a:pPr indent="0" marL="0">
-              <a:buNone/>
-            </a:pPr>
-            <a:r>
-              <a:rPr lang="en-US" sz="1150" dirty="0">
-                <a:solidFill>
-                  <a:srgbClr val="2A1618"/>
-                </a:solidFill>
-                <a:latin typeface="Calibri" pitchFamily="34" charset="0"/>
-                <a:ea typeface="Calibri" pitchFamily="34" charset="-122"/>
-                <a:cs typeface="Calibri" pitchFamily="34" charset="-120"/>
-              </a:rPr>
-              <a:t>a whole recording session</a:t>
-            </a:r>
-            <a:endParaRPr lang="en-US" sz="1150" dirty="0"/>
-          </a:p>
-        </p:txBody>
-      </p:sp>
-      <p:sp>
-        <p:nvSpPr>
-          <p:cNvPr id="14" name="Text 12"/>
-          <p:cNvSpPr/>
-          <p:nvPr/>
-        </p:nvSpPr>
-        <p:spPr>
-          <a:xfrm>
-            <a:off x="822960" y="5029200"/>
-            <a:ext cx="2880360" cy="685800"/>
-          </a:xfrm>
-          <a:prstGeom prst="rect">
-            <a:avLst/>
-          </a:prstGeom>
-          <a:noFill/>
-          <a:ln/>
-        </p:spPr>
-        <p:txBody>
-          <a:bodyPr wrap="square" lIns="0" tIns="0" rIns="0" bIns="0" rtlCol="0" anchor="t"/>
-          <a:lstStyle/>
-          <a:p>
-            <a:pPr indent="0" marL="0">
-              <a:buNone/>
-            </a:pPr>
-            <a:r>
-              <a:rPr lang="en-US" sz="1150" b="1" dirty="0">
-                <a:solidFill>
-                  <a:srgbClr val="2A1618"/>
-                </a:solidFill>
-                <a:latin typeface="Calibri" pitchFamily="34" charset="0"/>
-                <a:ea typeface="Calibri" pitchFamily="34" charset="-122"/>
-                <a:cs typeface="Calibri" pitchFamily="34" charset="-120"/>
-              </a:rPr>
-              <a:t>Question:  </a:t>
-            </a:r>
-            <a:pPr indent="0" marL="0">
-              <a:buNone/>
-            </a:pPr>
-            <a:r>
-              <a:rPr lang="en-US" sz="1150" dirty="0">
-                <a:solidFill>
-                  <a:srgbClr val="2A1618"/>
-                </a:solidFill>
-                <a:latin typeface="Calibri" pitchFamily="34" charset="0"/>
-                <a:ea typeface="Calibri" pitchFamily="34" charset="-122"/>
-                <a:cs typeface="Calibri" pitchFamily="34" charset="-120"/>
-              </a:rPr>
-              <a:t>Can it read a NEW scan of positions it already knows?</a:t>
-            </a:r>
-            <a:endParaRPr lang="en-US" sz="1150" dirty="0"/>
-          </a:p>
-        </p:txBody>
-      </p:sp>
-      <p:sp>
-        <p:nvSpPr>
-          <p:cNvPr id="15" name="Shape 13"/>
-          <p:cNvSpPr/>
-          <p:nvPr/>
-        </p:nvSpPr>
-        <p:spPr>
-          <a:xfrm>
-            <a:off x="822960" y="5669280"/>
-            <a:ext cx="1371600" cy="310896"/>
-          </a:xfrm>
-          <a:prstGeom prst="roundRect">
-            <a:avLst>
-              <a:gd name="adj" fmla="val 50000"/>
-            </a:avLst>
-          </a:prstGeom>
-          <a:solidFill>
-            <a:srgbClr val="C8890B"/>
-          </a:solidFill>
-          <a:ln/>
-        </p:spPr>
-      </p:sp>
-      <p:sp>
-        <p:nvSpPr>
-          <p:cNvPr id="16" name="Text 14"/>
-          <p:cNvSpPr/>
-          <p:nvPr/>
-        </p:nvSpPr>
-        <p:spPr>
-          <a:xfrm>
-            <a:off x="822960" y="5669280"/>
-            <a:ext cx="1371600" cy="310896"/>
-          </a:xfrm>
-          <a:prstGeom prst="rect">
-            <a:avLst/>
-          </a:prstGeom>
-          <a:noFill/>
-          <a:ln/>
-        </p:spPr>
-        <p:txBody>
-          <a:bodyPr wrap="square" lIns="0" tIns="0" rIns="0" bIns="0" rtlCol="0" anchor="ctr"/>
-          <a:lstStyle/>
-          <a:p>
-            <a:pPr algn="ctr" indent="0" marL="0">
-              <a:buNone/>
-            </a:pPr>
-            <a:r>
-              <a:rPr lang="en-US" sz="1100" b="1" dirty="0">
-                <a:solidFill>
-                  <a:srgbClr val="FFFFFF"/>
-                </a:solidFill>
-                <a:latin typeface="Calibri" pitchFamily="34" charset="0"/>
-                <a:ea typeface="Calibri" pitchFamily="34" charset="-122"/>
-                <a:cs typeface="Calibri" pitchFamily="34" charset="-120"/>
-              </a:rPr>
-              <a:t>Easiest</a:t>
-            </a:r>
-            <a:endParaRPr lang="en-US" sz="1100" dirty="0"/>
-          </a:p>
-        </p:txBody>
-      </p:sp>
-      <p:sp>
-        <p:nvSpPr>
-          <p:cNvPr id="17" name="Shape 15"/>
-          <p:cNvSpPr/>
-          <p:nvPr/>
-        </p:nvSpPr>
-        <p:spPr>
-          <a:xfrm>
-            <a:off x="4617720" y="1600200"/>
-            <a:ext cx="3246120" cy="4526280"/>
-          </a:xfrm>
-          <a:prstGeom prst="roundRect">
-            <a:avLst>
-              <a:gd name="adj" fmla="val 2535"/>
+              <a:gd name="adj" fmla="val 8036"/>
             </a:avLst>
           </a:prstGeom>
           <a:solidFill>
@@ -8045,14 +7879,34 @@
       </p:sp>
       <p:sp>
         <p:nvSpPr>
-          <p:cNvPr id="18" name="Text 16"/>
-          <p:cNvSpPr/>
-          <p:nvPr/>
-        </p:nvSpPr>
-        <p:spPr>
-          <a:xfrm>
-            <a:off x="4800600" y="1801368"/>
-            <a:ext cx="2880360" cy="457200"/>
+          <p:cNvPr id="10" name="Shape 8"/>
+          <p:cNvSpPr/>
+          <p:nvPr/>
+        </p:nvSpPr>
+        <p:spPr>
+          <a:xfrm>
+            <a:off x="777240" y="3026664"/>
+            <a:ext cx="512064" cy="512064"/>
+          </a:xfrm>
+          <a:prstGeom prst="ellipse">
+            <a:avLst/>
+          </a:prstGeom>
+          <a:solidFill>
+            <a:srgbClr val="BE0000"/>
+          </a:solidFill>
+          <a:ln/>
+        </p:spPr>
+      </p:sp>
+      <p:sp>
+        <p:nvSpPr>
+          <p:cNvPr id="11" name="Text 9"/>
+          <p:cNvSpPr/>
+          <p:nvPr/>
+        </p:nvSpPr>
+        <p:spPr>
+          <a:xfrm>
+            <a:off x="777240" y="3026664"/>
+            <a:ext cx="512064" cy="512064"/>
           </a:xfrm>
           <a:prstGeom prst="rect">
             <a:avLst/>
@@ -8064,34 +7918,34 @@
           <a:bodyPr wrap="square" lIns="0" tIns="0" rIns="0" bIns="0" rtlCol="0" anchor="ctr"/>
           <a:lstStyle/>
           <a:p>
-            <a:pPr indent="0" marL="0">
-              <a:buNone/>
-            </a:pPr>
-            <a:r>
-              <a:rPr lang="en-US" sz="1900" b="1" dirty="0">
-                <a:solidFill>
-                  <a:srgbClr val="BE0000"/>
+            <a:pPr algn="ctr" indent="0" marL="0">
+              <a:buNone/>
+            </a:pPr>
+            <a:r>
+              <a:rPr lang="en-US" sz="2000" b="1" dirty="0">
+                <a:solidFill>
+                  <a:srgbClr val="FFFFFF"/>
                 </a:solidFill>
                 <a:latin typeface="Cambria" pitchFamily="34" charset="0"/>
                 <a:ea typeface="Cambria" pitchFamily="34" charset="-122"/>
                 <a:cs typeface="Cambria" pitchFamily="34" charset="-120"/>
               </a:rPr>
-              <a:t>LOPO single-position</a:t>
-            </a:r>
-            <a:endParaRPr lang="en-US" sz="1900" dirty="0"/>
-          </a:p>
-        </p:txBody>
-      </p:sp>
-      <p:sp>
-        <p:nvSpPr>
-          <p:cNvPr id="19" name="Text 17"/>
-          <p:cNvSpPr/>
-          <p:nvPr/>
-        </p:nvSpPr>
-        <p:spPr>
-          <a:xfrm>
-            <a:off x="4800600" y="2258568"/>
-            <a:ext cx="2880360" cy="292608"/>
+              <a:t>2</a:t>
+            </a:r>
+            <a:endParaRPr lang="en-US" sz="2000" dirty="0"/>
+          </a:p>
+        </p:txBody>
+      </p:sp>
+      <p:sp>
+        <p:nvSpPr>
+          <p:cNvPr id="12" name="Text 10"/>
+          <p:cNvSpPr/>
+          <p:nvPr/>
+        </p:nvSpPr>
+        <p:spPr>
+          <a:xfrm>
+            <a:off x="1508760" y="2916936"/>
+            <a:ext cx="2286000" cy="731520"/>
           </a:xfrm>
           <a:prstGeom prst="rect">
             <a:avLst/>
@@ -8107,357 +7961,73 @@
               <a:buNone/>
             </a:pPr>
             <a:r>
-              <a:rPr lang="en-US" sz="1250" i="1" dirty="0">
-                <a:solidFill>
-                  <a:srgbClr val="836A68"/>
+              <a:rPr lang="en-US" sz="1700" b="1" dirty="0">
+                <a:solidFill>
+                  <a:srgbClr val="BE0000"/>
+                </a:solidFill>
+                <a:latin typeface="Cambria" pitchFamily="34" charset="0"/>
+                <a:ea typeface="Cambria" pitchFamily="34" charset="-122"/>
+                <a:cs typeface="Cambria" pitchFamily="34" charset="-120"/>
+              </a:rPr>
+              <a:t>Models</a:t>
+            </a:r>
+            <a:endParaRPr lang="en-US" sz="1700" dirty="0"/>
+          </a:p>
+        </p:txBody>
+      </p:sp>
+      <p:sp>
+        <p:nvSpPr>
+          <p:cNvPr id="13" name="Text 11"/>
+          <p:cNvSpPr/>
+          <p:nvPr/>
+        </p:nvSpPr>
+        <p:spPr>
+          <a:xfrm>
+            <a:off x="3886200" y="2825496"/>
+            <a:ext cx="7571232" cy="914400"/>
+          </a:xfrm>
+          <a:prstGeom prst="rect">
+            <a:avLst/>
+          </a:prstGeom>
+          <a:noFill/>
+          <a:ln/>
+        </p:spPr>
+        <p:txBody>
+          <a:bodyPr wrap="square" lIns="0" tIns="0" rIns="0" bIns="0" rtlCol="0" anchor="ctr"/>
+          <a:lstStyle/>
+          <a:p>
+            <a:pPr indent="0" marL="0">
+              <a:buNone/>
+            </a:pPr>
+            <a:r>
+              <a:rPr lang="en-US" sz="1270" dirty="0">
+                <a:solidFill>
+                  <a:srgbClr val="2A1618"/>
                 </a:solidFill>
                 <a:latin typeface="Calibri" pitchFamily="34" charset="0"/>
                 <a:ea typeface="Calibri" pitchFamily="34" charset="-122"/>
                 <a:cs typeface="Calibri" pitchFamily="34" charset="-120"/>
               </a:rPr>
-              <a:t>leave one sub-position out</a:t>
-            </a:r>
-            <a:endParaRPr lang="en-US" sz="1250" dirty="0"/>
-          </a:p>
-        </p:txBody>
-      </p:sp>
-      <p:sp>
-        <p:nvSpPr>
-          <p:cNvPr id="20" name="Shape 18"/>
-          <p:cNvSpPr/>
-          <p:nvPr/>
-        </p:nvSpPr>
-        <p:spPr>
-          <a:xfrm>
-            <a:off x="5856732" y="2916936"/>
-            <a:ext cx="201168" cy="201168"/>
-          </a:xfrm>
-          <a:prstGeom prst="ellipse">
-            <a:avLst/>
-          </a:prstGeom>
-          <a:solidFill>
-            <a:srgbClr val="BE0000"/>
-          </a:solidFill>
-          <a:ln w="12700">
-            <a:solidFill>
-              <a:srgbClr val="BE0000"/>
-            </a:solidFill>
-            <a:prstDash val="solid"/>
-          </a:ln>
-        </p:spPr>
-      </p:sp>
-      <p:sp>
-        <p:nvSpPr>
-          <p:cNvPr id="21" name="Shape 19"/>
-          <p:cNvSpPr/>
-          <p:nvPr/>
-        </p:nvSpPr>
-        <p:spPr>
-          <a:xfrm>
-            <a:off x="6423660" y="2916936"/>
-            <a:ext cx="201168" cy="201168"/>
-          </a:xfrm>
-          <a:prstGeom prst="ellipse">
-            <a:avLst/>
-          </a:prstGeom>
-          <a:solidFill>
-            <a:srgbClr val="FBF4F2"/>
-          </a:solidFill>
-          <a:ln w="12700">
-            <a:solidFill>
-              <a:srgbClr val="836A68"/>
-            </a:solidFill>
-            <a:prstDash val="solid"/>
-          </a:ln>
-        </p:spPr>
-      </p:sp>
-      <p:sp>
-        <p:nvSpPr>
-          <p:cNvPr id="22" name="Shape 20"/>
-          <p:cNvSpPr/>
-          <p:nvPr/>
-        </p:nvSpPr>
-        <p:spPr>
-          <a:xfrm>
-            <a:off x="5856732" y="3483864"/>
-            <a:ext cx="201168" cy="201168"/>
-          </a:xfrm>
-          <a:prstGeom prst="ellipse">
-            <a:avLst/>
-          </a:prstGeom>
-          <a:solidFill>
-            <a:srgbClr val="FBF4F2"/>
-          </a:solidFill>
-          <a:ln w="12700">
-            <a:solidFill>
-              <a:srgbClr val="836A68"/>
-            </a:solidFill>
-            <a:prstDash val="solid"/>
-          </a:ln>
-        </p:spPr>
-      </p:sp>
-      <p:sp>
-        <p:nvSpPr>
-          <p:cNvPr id="23" name="Shape 21"/>
-          <p:cNvSpPr/>
-          <p:nvPr/>
-        </p:nvSpPr>
-        <p:spPr>
-          <a:xfrm>
-            <a:off x="6423660" y="3483864"/>
-            <a:ext cx="201168" cy="201168"/>
-          </a:xfrm>
-          <a:prstGeom prst="ellipse">
-            <a:avLst/>
-          </a:prstGeom>
-          <a:solidFill>
-            <a:srgbClr val="FBF4F2"/>
-          </a:solidFill>
-          <a:ln w="12700">
-            <a:solidFill>
-              <a:srgbClr val="836A68"/>
-            </a:solidFill>
-            <a:prstDash val="solid"/>
-          </a:ln>
-        </p:spPr>
-      </p:sp>
-      <p:sp>
-        <p:nvSpPr>
-          <p:cNvPr id="24" name="Text 22"/>
-          <p:cNvSpPr/>
-          <p:nvPr/>
-        </p:nvSpPr>
-        <p:spPr>
-          <a:xfrm>
-            <a:off x="4800600" y="4105656"/>
-            <a:ext cx="2880360" cy="457200"/>
-          </a:xfrm>
-          <a:prstGeom prst="rect">
-            <a:avLst/>
-          </a:prstGeom>
-          <a:noFill/>
-          <a:ln/>
-        </p:spPr>
-        <p:txBody>
-          <a:bodyPr wrap="square" lIns="0" tIns="0" rIns="0" bIns="0" rtlCol="0" anchor="ctr"/>
-          <a:lstStyle/>
-          <a:p>
-            <a:pPr algn="ctr" indent="0" marL="0">
-              <a:buNone/>
-            </a:pPr>
-            <a:r>
-              <a:rPr lang="en-US" sz="1050" dirty="0">
-                <a:solidFill>
-                  <a:srgbClr val="836A68"/>
-                </a:solidFill>
-                <a:latin typeface="Calibri" pitchFamily="34" charset="0"/>
-                <a:ea typeface="Calibri" pitchFamily="34" charset="-122"/>
-                <a:cs typeface="Calibri" pitchFamily="34" charset="-120"/>
-              </a:rPr>
-              <a:t>one point held out,</a:t>
-            </a:r>
-            <a:endParaRPr lang="en-US" sz="1050" dirty="0"/>
-          </a:p>
-          <a:p>
-            <a:pPr algn="ctr" indent="0" marL="0">
-              <a:buNone/>
-            </a:pPr>
-            <a:r>
-              <a:rPr lang="en-US" sz="1050" dirty="0">
-                <a:solidFill>
-                  <a:srgbClr val="836A68"/>
-                </a:solidFill>
-                <a:latin typeface="Calibri" pitchFamily="34" charset="0"/>
-                <a:ea typeface="Calibri" pitchFamily="34" charset="-122"/>
-                <a:cs typeface="Calibri" pitchFamily="34" charset="-120"/>
-              </a:rPr>
-              <a:t>cell-mates stay</a:t>
-            </a:r>
-            <a:endParaRPr lang="en-US" sz="1050" dirty="0"/>
-          </a:p>
-        </p:txBody>
-      </p:sp>
-      <p:sp>
-        <p:nvSpPr>
-          <p:cNvPr id="25" name="Text 23"/>
-          <p:cNvSpPr/>
-          <p:nvPr/>
-        </p:nvSpPr>
-        <p:spPr>
-          <a:xfrm>
-            <a:off x="4800600" y="4480560"/>
-            <a:ext cx="2880360" cy="548640"/>
-          </a:xfrm>
-          <a:prstGeom prst="rect">
-            <a:avLst/>
-          </a:prstGeom>
-          <a:noFill/>
-          <a:ln/>
-        </p:spPr>
-        <p:txBody>
-          <a:bodyPr wrap="square" lIns="0" tIns="0" rIns="0" bIns="0" rtlCol="0" anchor="t"/>
-          <a:lstStyle/>
-          <a:p>
-            <a:pPr indent="0" marL="0">
-              <a:buNone/>
-            </a:pPr>
-            <a:r>
-              <a:rPr lang="en-US" sz="1150" b="1" dirty="0">
-                <a:solidFill>
-                  <a:srgbClr val="2A1618"/>
-                </a:solidFill>
-                <a:latin typeface="Calibri" pitchFamily="34" charset="0"/>
-                <a:ea typeface="Calibri" pitchFamily="34" charset="-122"/>
-                <a:cs typeface="Calibri" pitchFamily="34" charset="-120"/>
-              </a:rPr>
-              <a:t>Held out:  </a:t>
-            </a:r>
-            <a:pPr indent="0" marL="0">
-              <a:buNone/>
-            </a:pPr>
-            <a:r>
-              <a:rPr lang="en-US" sz="1150" dirty="0">
-                <a:solidFill>
-                  <a:srgbClr val="2A1618"/>
-                </a:solidFill>
-                <a:latin typeface="Calibri" pitchFamily="34" charset="0"/>
-                <a:ea typeface="Calibri" pitchFamily="34" charset="-122"/>
-                <a:cs typeface="Calibri" pitchFamily="34" charset="-120"/>
-              </a:rPr>
-              <a:t>one point (its 3 cell-mates ~0.75 in away stay in)</a:t>
-            </a:r>
-            <a:endParaRPr lang="en-US" sz="1150" dirty="0"/>
-          </a:p>
-        </p:txBody>
-      </p:sp>
-      <p:sp>
-        <p:nvSpPr>
-          <p:cNvPr id="26" name="Text 24"/>
-          <p:cNvSpPr/>
-          <p:nvPr/>
-        </p:nvSpPr>
-        <p:spPr>
-          <a:xfrm>
-            <a:off x="4800600" y="5029200"/>
-            <a:ext cx="2880360" cy="685800"/>
-          </a:xfrm>
-          <a:prstGeom prst="rect">
-            <a:avLst/>
-          </a:prstGeom>
-          <a:noFill/>
-          <a:ln/>
-        </p:spPr>
-        <p:txBody>
-          <a:bodyPr wrap="square" lIns="0" tIns="0" rIns="0" bIns="0" rtlCol="0" anchor="t"/>
-          <a:lstStyle/>
-          <a:p>
-            <a:pPr indent="0" marL="0">
-              <a:buNone/>
-            </a:pPr>
-            <a:r>
-              <a:rPr lang="en-US" sz="1150" b="1" dirty="0">
-                <a:solidFill>
-                  <a:srgbClr val="2A1618"/>
-                </a:solidFill>
-                <a:latin typeface="Calibri" pitchFamily="34" charset="0"/>
-                <a:ea typeface="Calibri" pitchFamily="34" charset="-122"/>
-                <a:cs typeface="Calibri" pitchFamily="34" charset="-120"/>
-              </a:rPr>
-              <a:t>Question:  </a:t>
-            </a:r>
-            <a:pPr indent="0" marL="0">
-              <a:buNone/>
-            </a:pPr>
-            <a:r>
-              <a:rPr lang="en-US" sz="1150" dirty="0">
-                <a:solidFill>
-                  <a:srgbClr val="2A1618"/>
-                </a:solidFill>
-                <a:latin typeface="Calibri" pitchFamily="34" charset="0"/>
-                <a:ea typeface="Calibri" pitchFamily="34" charset="-122"/>
-                <a:cs typeface="Calibri" pitchFamily="34" charset="-120"/>
-              </a:rPr>
-              <a:t>Can it reach an unseen point that has close neighbors?</a:t>
-            </a:r>
-            <a:endParaRPr lang="en-US" sz="1150" dirty="0"/>
-          </a:p>
-        </p:txBody>
-      </p:sp>
-      <p:sp>
-        <p:nvSpPr>
-          <p:cNvPr id="27" name="Shape 25"/>
-          <p:cNvSpPr/>
-          <p:nvPr/>
-        </p:nvSpPr>
-        <p:spPr>
-          <a:xfrm>
-            <a:off x="4800600" y="5669280"/>
-            <a:ext cx="1371600" cy="310896"/>
+              <a:t>CNN: conv trunk (32 to 32) then fc(2) + regression. MLP: 3-seed ensemble. Input = raw 16 S-params as a 32 x freq image; per-session z-score; v2 preprocessing.</a:t>
+            </a:r>
+            <a:endParaRPr lang="en-US" sz="1270" dirty="0"/>
+          </a:p>
+        </p:txBody>
+      </p:sp>
+      <p:sp>
+        <p:nvSpPr>
+          <p:cNvPr id="14" name="Shape 12"/>
+          <p:cNvSpPr/>
+          <p:nvPr/>
+        </p:nvSpPr>
+        <p:spPr>
+          <a:xfrm>
+            <a:off x="548640" y="3941064"/>
+            <a:ext cx="11091672" cy="1024128"/>
           </a:xfrm>
           <a:prstGeom prst="roundRect">
             <a:avLst>
-              <a:gd name="adj" fmla="val 50000"/>
-            </a:avLst>
-          </a:prstGeom>
-          <a:solidFill>
-            <a:srgbClr val="C0564A"/>
-          </a:solidFill>
-          <a:ln/>
-        </p:spPr>
-      </p:sp>
-      <p:sp>
-        <p:nvSpPr>
-          <p:cNvPr id="28" name="Text 26"/>
-          <p:cNvSpPr/>
-          <p:nvPr/>
-        </p:nvSpPr>
-        <p:spPr>
-          <a:xfrm>
-            <a:off x="4800600" y="5669280"/>
-            <a:ext cx="1371600" cy="310896"/>
-          </a:xfrm>
-          <a:prstGeom prst="rect">
-            <a:avLst/>
-          </a:prstGeom>
-          <a:noFill/>
-          <a:ln/>
-        </p:spPr>
-        <p:txBody>
-          <a:bodyPr wrap="square" lIns="0" tIns="0" rIns="0" bIns="0" rtlCol="0" anchor="ctr"/>
-          <a:lstStyle/>
-          <a:p>
-            <a:pPr algn="ctr" indent="0" marL="0">
-              <a:buNone/>
-            </a:pPr>
-            <a:r>
-              <a:rPr lang="en-US" sz="1100" b="1" dirty="0">
-                <a:solidFill>
-                  <a:srgbClr val="FFFFFF"/>
-                </a:solidFill>
-                <a:latin typeface="Calibri" pitchFamily="34" charset="0"/>
-                <a:ea typeface="Calibri" pitchFamily="34" charset="-122"/>
-                <a:cs typeface="Calibri" pitchFamily="34" charset="-120"/>
-              </a:rPr>
-              <a:t>Medium</a:t>
-            </a:r>
-            <a:endParaRPr lang="en-US" sz="1100" dirty="0"/>
-          </a:p>
-        </p:txBody>
-      </p:sp>
-      <p:sp>
-        <p:nvSpPr>
-          <p:cNvPr id="29" name="Shape 27"/>
-          <p:cNvSpPr/>
-          <p:nvPr/>
-        </p:nvSpPr>
-        <p:spPr>
-          <a:xfrm>
-            <a:off x="8595360" y="1600200"/>
-            <a:ext cx="3246120" cy="4526280"/>
-          </a:xfrm>
-          <a:prstGeom prst="roundRect">
-            <a:avLst>
-              <a:gd name="adj" fmla="val 2535"/>
+              <a:gd name="adj" fmla="val 8036"/>
             </a:avLst>
           </a:prstGeom>
           <a:solidFill>
@@ -8480,14 +8050,34 @@
       </p:sp>
       <p:sp>
         <p:nvSpPr>
-          <p:cNvPr id="30" name="Text 28"/>
-          <p:cNvSpPr/>
-          <p:nvPr/>
-        </p:nvSpPr>
-        <p:spPr>
-          <a:xfrm>
-            <a:off x="8778240" y="1801368"/>
-            <a:ext cx="2880360" cy="457200"/>
+          <p:cNvPr id="15" name="Shape 13"/>
+          <p:cNvSpPr/>
+          <p:nvPr/>
+        </p:nvSpPr>
+        <p:spPr>
+          <a:xfrm>
+            <a:off x="777240" y="4197096"/>
+            <a:ext cx="512064" cy="512064"/>
+          </a:xfrm>
+          <a:prstGeom prst="ellipse">
+            <a:avLst/>
+          </a:prstGeom>
+          <a:solidFill>
+            <a:srgbClr val="BE0000"/>
+          </a:solidFill>
+          <a:ln/>
+        </p:spPr>
+      </p:sp>
+      <p:sp>
+        <p:nvSpPr>
+          <p:cNvPr id="16" name="Text 14"/>
+          <p:cNvSpPr/>
+          <p:nvPr/>
+        </p:nvSpPr>
+        <p:spPr>
+          <a:xfrm>
+            <a:off x="777240" y="4197096"/>
+            <a:ext cx="512064" cy="512064"/>
           </a:xfrm>
           <a:prstGeom prst="rect">
             <a:avLst/>
@@ -8499,34 +8089,34 @@
           <a:bodyPr wrap="square" lIns="0" tIns="0" rIns="0" bIns="0" rtlCol="0" anchor="ctr"/>
           <a:lstStyle/>
           <a:p>
-            <a:pPr indent="0" marL="0">
-              <a:buNone/>
-            </a:pPr>
-            <a:r>
-              <a:rPr lang="en-US" sz="1900" b="1" dirty="0">
-                <a:solidFill>
-                  <a:srgbClr val="BE0000"/>
+            <a:pPr algn="ctr" indent="0" marL="0">
+              <a:buNone/>
+            </a:pPr>
+            <a:r>
+              <a:rPr lang="en-US" sz="2000" b="1" dirty="0">
+                <a:solidFill>
+                  <a:srgbClr val="FFFFFF"/>
                 </a:solidFill>
                 <a:latin typeface="Cambria" pitchFamily="34" charset="0"/>
                 <a:ea typeface="Cambria" pitchFamily="34" charset="-122"/>
                 <a:cs typeface="Cambria" pitchFamily="34" charset="-120"/>
               </a:rPr>
-              <a:t>LOPO-cell</a:t>
-            </a:r>
-            <a:endParaRPr lang="en-US" sz="1900" dirty="0"/>
-          </a:p>
-        </p:txBody>
-      </p:sp>
-      <p:sp>
-        <p:nvSpPr>
-          <p:cNvPr id="31" name="Text 29"/>
-          <p:cNvSpPr/>
-          <p:nvPr/>
-        </p:nvSpPr>
-        <p:spPr>
-          <a:xfrm>
-            <a:off x="8778240" y="2258568"/>
-            <a:ext cx="2880360" cy="292608"/>
+              <a:t>3</a:t>
+            </a:r>
+            <a:endParaRPr lang="en-US" sz="2000" dirty="0"/>
+          </a:p>
+        </p:txBody>
+      </p:sp>
+      <p:sp>
+        <p:nvSpPr>
+          <p:cNvPr id="17" name="Text 15"/>
+          <p:cNvSpPr/>
+          <p:nvPr/>
+        </p:nvSpPr>
+        <p:spPr>
+          <a:xfrm>
+            <a:off x="1508760" y="4087368"/>
+            <a:ext cx="2286000" cy="731520"/>
           </a:xfrm>
           <a:prstGeom prst="rect">
             <a:avLst/>
@@ -8542,130 +8132,103 @@
               <a:buNone/>
             </a:pPr>
             <a:r>
-              <a:rPr lang="en-US" sz="1250" i="1" dirty="0">
-                <a:solidFill>
-                  <a:srgbClr val="836A68"/>
+              <a:rPr lang="en-US" sz="1700" b="1" dirty="0">
+                <a:solidFill>
+                  <a:srgbClr val="BE0000"/>
+                </a:solidFill>
+                <a:latin typeface="Cambria" pitchFamily="34" charset="0"/>
+                <a:ea typeface="Cambria" pitchFamily="34" charset="-122"/>
+                <a:cs typeface="Cambria" pitchFamily="34" charset="-120"/>
+              </a:rPr>
+              <a:t>Metric</a:t>
+            </a:r>
+            <a:endParaRPr lang="en-US" sz="1700" dirty="0"/>
+          </a:p>
+        </p:txBody>
+      </p:sp>
+      <p:sp>
+        <p:nvSpPr>
+          <p:cNvPr id="18" name="Text 16"/>
+          <p:cNvSpPr/>
+          <p:nvPr/>
+        </p:nvSpPr>
+        <p:spPr>
+          <a:xfrm>
+            <a:off x="3886200" y="3995928"/>
+            <a:ext cx="7571232" cy="914400"/>
+          </a:xfrm>
+          <a:prstGeom prst="rect">
+            <a:avLst/>
+          </a:prstGeom>
+          <a:noFill/>
+          <a:ln/>
+        </p:spPr>
+        <p:txBody>
+          <a:bodyPr wrap="square" lIns="0" tIns="0" rIns="0" bIns="0" rtlCol="0" anchor="ctr"/>
+          <a:lstStyle/>
+          <a:p>
+            <a:pPr indent="0" marL="0">
+              <a:buNone/>
+            </a:pPr>
+            <a:r>
+              <a:rPr lang="en-US" sz="1270" dirty="0">
+                <a:solidFill>
+                  <a:srgbClr val="2A1618"/>
                 </a:solidFill>
                 <a:latin typeface="Calibri" pitchFamily="34" charset="0"/>
                 <a:ea typeface="Calibri" pitchFamily="34" charset="-122"/>
                 <a:cs typeface="Calibri" pitchFamily="34" charset="-120"/>
               </a:rPr>
-              <a:t>leave one whole cell out</a:t>
-            </a:r>
-            <a:endParaRPr lang="en-US" sz="1250" dirty="0"/>
-          </a:p>
-        </p:txBody>
-      </p:sp>
-      <p:sp>
-        <p:nvSpPr>
-          <p:cNvPr id="32" name="Shape 30"/>
-          <p:cNvSpPr/>
-          <p:nvPr/>
-        </p:nvSpPr>
-        <p:spPr>
-          <a:xfrm>
-            <a:off x="9573768" y="2766060"/>
-            <a:ext cx="137160" cy="137160"/>
-          </a:xfrm>
-          <a:prstGeom prst="ellipse">
-            <a:avLst/>
-          </a:prstGeom>
-          <a:solidFill>
-            <a:srgbClr val="BE0000"/>
-          </a:solidFill>
-          <a:ln w="12700">
-            <a:solidFill>
-              <a:srgbClr val="BE0000"/>
-            </a:solidFill>
-            <a:prstDash val="solid"/>
-          </a:ln>
-        </p:spPr>
-      </p:sp>
-      <p:sp>
-        <p:nvSpPr>
-          <p:cNvPr id="33" name="Shape 31"/>
-          <p:cNvSpPr/>
-          <p:nvPr/>
-        </p:nvSpPr>
-        <p:spPr>
-          <a:xfrm>
-            <a:off x="9957816" y="2766060"/>
-            <a:ext cx="137160" cy="137160"/>
-          </a:xfrm>
-          <a:prstGeom prst="ellipse">
-            <a:avLst/>
-          </a:prstGeom>
-          <a:solidFill>
-            <a:srgbClr val="BE0000"/>
-          </a:solidFill>
-          <a:ln w="12700">
-            <a:solidFill>
-              <a:srgbClr val="BE0000"/>
-            </a:solidFill>
-            <a:prstDash val="solid"/>
-          </a:ln>
-        </p:spPr>
-      </p:sp>
-      <p:sp>
-        <p:nvSpPr>
-          <p:cNvPr id="34" name="Shape 32"/>
-          <p:cNvSpPr/>
-          <p:nvPr/>
-        </p:nvSpPr>
-        <p:spPr>
-          <a:xfrm>
-            <a:off x="10341864" y="2766060"/>
-            <a:ext cx="137160" cy="137160"/>
-          </a:xfrm>
-          <a:prstGeom prst="ellipse">
-            <a:avLst/>
+              <a:t>Euclidean error in inches (x25.4 = mm). Median error plus percent within the 0.5 in half-cell.</a:t>
+            </a:r>
+            <a:endParaRPr lang="en-US" sz="1270" dirty="0"/>
+          </a:p>
+        </p:txBody>
+      </p:sp>
+      <p:sp>
+        <p:nvSpPr>
+          <p:cNvPr id="19" name="Shape 17"/>
+          <p:cNvSpPr/>
+          <p:nvPr/>
+        </p:nvSpPr>
+        <p:spPr>
+          <a:xfrm>
+            <a:off x="548640" y="5111496"/>
+            <a:ext cx="11091672" cy="1024128"/>
+          </a:xfrm>
+          <a:prstGeom prst="roundRect">
+            <a:avLst>
+              <a:gd name="adj" fmla="val 8036"/>
+            </a:avLst>
           </a:prstGeom>
           <a:solidFill>
             <a:srgbClr val="FBF4F2"/>
           </a:solidFill>
           <a:ln w="12700">
             <a:solidFill>
-              <a:srgbClr val="836A68"/>
+              <a:srgbClr val="E7D6D1"/>
             </a:solidFill>
             <a:prstDash val="solid"/>
           </a:ln>
-        </p:spPr>
-      </p:sp>
-      <p:sp>
-        <p:nvSpPr>
-          <p:cNvPr id="35" name="Shape 33"/>
-          <p:cNvSpPr/>
-          <p:nvPr/>
-        </p:nvSpPr>
-        <p:spPr>
-          <a:xfrm>
-            <a:off x="10725912" y="2766060"/>
-            <a:ext cx="137160" cy="137160"/>
-          </a:xfrm>
-          <a:prstGeom prst="ellipse">
-            <a:avLst/>
-          </a:prstGeom>
-          <a:solidFill>
-            <a:srgbClr val="FBF4F2"/>
-          </a:solidFill>
-          <a:ln w="12700">
-            <a:solidFill>
-              <a:srgbClr val="836A68"/>
-            </a:solidFill>
-            <a:prstDash val="solid"/>
-          </a:ln>
-        </p:spPr>
-      </p:sp>
-      <p:sp>
-        <p:nvSpPr>
-          <p:cNvPr id="36" name="Shape 34"/>
-          <p:cNvSpPr/>
-          <p:nvPr/>
-        </p:nvSpPr>
-        <p:spPr>
-          <a:xfrm>
-            <a:off x="9573768" y="3150108"/>
-            <a:ext cx="137160" cy="137160"/>
+          <a:effectLst>
+            <a:outerShdw sx="100000" sy="100000" kx="0" ky="0" algn="bl" rotWithShape="0" blurRad="88900" dist="38100" dir="5400000">
+              <a:srgbClr val="7A5C5E">
+                <a:alpha val="18000"/>
+              </a:srgbClr>
+            </a:outerShdw>
+          </a:effectLst>
+        </p:spPr>
+      </p:sp>
+      <p:sp>
+        <p:nvSpPr>
+          <p:cNvPr id="20" name="Shape 18"/>
+          <p:cNvSpPr/>
+          <p:nvPr/>
+        </p:nvSpPr>
+        <p:spPr>
+          <a:xfrm>
+            <a:off x="777240" y="5367528"/>
+            <a:ext cx="512064" cy="512064"/>
           </a:xfrm>
           <a:prstGeom prst="ellipse">
             <a:avLst/>
@@ -8673,299 +8236,19 @@
           <a:solidFill>
             <a:srgbClr val="BE0000"/>
           </a:solidFill>
-          <a:ln w="12700">
-            <a:solidFill>
-              <a:srgbClr val="BE0000"/>
-            </a:solidFill>
-            <a:prstDash val="solid"/>
-          </a:ln>
-        </p:spPr>
-      </p:sp>
-      <p:sp>
-        <p:nvSpPr>
-          <p:cNvPr id="37" name="Shape 35"/>
-          <p:cNvSpPr/>
-          <p:nvPr/>
-        </p:nvSpPr>
-        <p:spPr>
-          <a:xfrm>
-            <a:off x="9957816" y="3150108"/>
-            <a:ext cx="137160" cy="137160"/>
-          </a:xfrm>
-          <a:prstGeom prst="ellipse">
-            <a:avLst/>
-          </a:prstGeom>
-          <a:solidFill>
-            <a:srgbClr val="BE0000"/>
-          </a:solidFill>
-          <a:ln w="12700">
-            <a:solidFill>
-              <a:srgbClr val="BE0000"/>
-            </a:solidFill>
-            <a:prstDash val="solid"/>
-          </a:ln>
-        </p:spPr>
-      </p:sp>
-      <p:sp>
-        <p:nvSpPr>
-          <p:cNvPr id="38" name="Shape 36"/>
-          <p:cNvSpPr/>
-          <p:nvPr/>
-        </p:nvSpPr>
-        <p:spPr>
-          <a:xfrm>
-            <a:off x="10341864" y="3150108"/>
-            <a:ext cx="137160" cy="137160"/>
-          </a:xfrm>
-          <a:prstGeom prst="ellipse">
-            <a:avLst/>
-          </a:prstGeom>
-          <a:solidFill>
-            <a:srgbClr val="FBF4F2"/>
-          </a:solidFill>
-          <a:ln w="12700">
-            <a:solidFill>
-              <a:srgbClr val="836A68"/>
-            </a:solidFill>
-            <a:prstDash val="solid"/>
-          </a:ln>
-        </p:spPr>
-      </p:sp>
-      <p:sp>
-        <p:nvSpPr>
-          <p:cNvPr id="39" name="Shape 37"/>
-          <p:cNvSpPr/>
-          <p:nvPr/>
-        </p:nvSpPr>
-        <p:spPr>
-          <a:xfrm>
-            <a:off x="10725912" y="3150108"/>
-            <a:ext cx="137160" cy="137160"/>
-          </a:xfrm>
-          <a:prstGeom prst="ellipse">
-            <a:avLst/>
-          </a:prstGeom>
-          <a:solidFill>
-            <a:srgbClr val="FBF4F2"/>
-          </a:solidFill>
-          <a:ln w="12700">
-            <a:solidFill>
-              <a:srgbClr val="836A68"/>
-            </a:solidFill>
-            <a:prstDash val="solid"/>
-          </a:ln>
-        </p:spPr>
-      </p:sp>
-      <p:sp>
-        <p:nvSpPr>
-          <p:cNvPr id="40" name="Shape 38"/>
-          <p:cNvSpPr/>
-          <p:nvPr/>
-        </p:nvSpPr>
-        <p:spPr>
-          <a:xfrm>
-            <a:off x="9573768" y="3534156"/>
-            <a:ext cx="137160" cy="137160"/>
-          </a:xfrm>
-          <a:prstGeom prst="ellipse">
-            <a:avLst/>
-          </a:prstGeom>
-          <a:solidFill>
-            <a:srgbClr val="FBF4F2"/>
-          </a:solidFill>
-          <a:ln w="12700">
-            <a:solidFill>
-              <a:srgbClr val="836A68"/>
-            </a:solidFill>
-            <a:prstDash val="solid"/>
-          </a:ln>
-        </p:spPr>
-      </p:sp>
-      <p:sp>
-        <p:nvSpPr>
-          <p:cNvPr id="41" name="Shape 39"/>
-          <p:cNvSpPr/>
-          <p:nvPr/>
-        </p:nvSpPr>
-        <p:spPr>
-          <a:xfrm>
-            <a:off x="9957816" y="3534156"/>
-            <a:ext cx="137160" cy="137160"/>
-          </a:xfrm>
-          <a:prstGeom prst="ellipse">
-            <a:avLst/>
-          </a:prstGeom>
-          <a:solidFill>
-            <a:srgbClr val="FBF4F2"/>
-          </a:solidFill>
-          <a:ln w="12700">
-            <a:solidFill>
-              <a:srgbClr val="836A68"/>
-            </a:solidFill>
-            <a:prstDash val="solid"/>
-          </a:ln>
-        </p:spPr>
-      </p:sp>
-      <p:sp>
-        <p:nvSpPr>
-          <p:cNvPr id="42" name="Shape 40"/>
-          <p:cNvSpPr/>
-          <p:nvPr/>
-        </p:nvSpPr>
-        <p:spPr>
-          <a:xfrm>
-            <a:off x="10341864" y="3534156"/>
-            <a:ext cx="137160" cy="137160"/>
-          </a:xfrm>
-          <a:prstGeom prst="ellipse">
-            <a:avLst/>
-          </a:prstGeom>
-          <a:solidFill>
-            <a:srgbClr val="FBF4F2"/>
-          </a:solidFill>
-          <a:ln w="12700">
-            <a:solidFill>
-              <a:srgbClr val="836A68"/>
-            </a:solidFill>
-            <a:prstDash val="solid"/>
-          </a:ln>
-        </p:spPr>
-      </p:sp>
-      <p:sp>
-        <p:nvSpPr>
-          <p:cNvPr id="43" name="Shape 41"/>
-          <p:cNvSpPr/>
-          <p:nvPr/>
-        </p:nvSpPr>
-        <p:spPr>
-          <a:xfrm>
-            <a:off x="10725912" y="3534156"/>
-            <a:ext cx="137160" cy="137160"/>
-          </a:xfrm>
-          <a:prstGeom prst="ellipse">
-            <a:avLst/>
-          </a:prstGeom>
-          <a:solidFill>
-            <a:srgbClr val="FBF4F2"/>
-          </a:solidFill>
-          <a:ln w="12700">
-            <a:solidFill>
-              <a:srgbClr val="836A68"/>
-            </a:solidFill>
-            <a:prstDash val="solid"/>
-          </a:ln>
-        </p:spPr>
-      </p:sp>
-      <p:sp>
-        <p:nvSpPr>
-          <p:cNvPr id="44" name="Shape 42"/>
-          <p:cNvSpPr/>
-          <p:nvPr/>
-        </p:nvSpPr>
-        <p:spPr>
-          <a:xfrm>
-            <a:off x="9573768" y="3918204"/>
-            <a:ext cx="137160" cy="137160"/>
-          </a:xfrm>
-          <a:prstGeom prst="ellipse">
-            <a:avLst/>
-          </a:prstGeom>
-          <a:solidFill>
-            <a:srgbClr val="FBF4F2"/>
-          </a:solidFill>
-          <a:ln w="12700">
-            <a:solidFill>
-              <a:srgbClr val="836A68"/>
-            </a:solidFill>
-            <a:prstDash val="solid"/>
-          </a:ln>
-        </p:spPr>
-      </p:sp>
-      <p:sp>
-        <p:nvSpPr>
-          <p:cNvPr id="45" name="Shape 43"/>
-          <p:cNvSpPr/>
-          <p:nvPr/>
-        </p:nvSpPr>
-        <p:spPr>
-          <a:xfrm>
-            <a:off x="9957816" y="3918204"/>
-            <a:ext cx="137160" cy="137160"/>
-          </a:xfrm>
-          <a:prstGeom prst="ellipse">
-            <a:avLst/>
-          </a:prstGeom>
-          <a:solidFill>
-            <a:srgbClr val="FBF4F2"/>
-          </a:solidFill>
-          <a:ln w="12700">
-            <a:solidFill>
-              <a:srgbClr val="836A68"/>
-            </a:solidFill>
-            <a:prstDash val="solid"/>
-          </a:ln>
-        </p:spPr>
-      </p:sp>
-      <p:sp>
-        <p:nvSpPr>
-          <p:cNvPr id="46" name="Shape 44"/>
-          <p:cNvSpPr/>
-          <p:nvPr/>
-        </p:nvSpPr>
-        <p:spPr>
-          <a:xfrm>
-            <a:off x="10341864" y="3918204"/>
-            <a:ext cx="137160" cy="137160"/>
-          </a:xfrm>
-          <a:prstGeom prst="ellipse">
-            <a:avLst/>
-          </a:prstGeom>
-          <a:solidFill>
-            <a:srgbClr val="FBF4F2"/>
-          </a:solidFill>
-          <a:ln w="12700">
-            <a:solidFill>
-              <a:srgbClr val="836A68"/>
-            </a:solidFill>
-            <a:prstDash val="solid"/>
-          </a:ln>
-        </p:spPr>
-      </p:sp>
-      <p:sp>
-        <p:nvSpPr>
-          <p:cNvPr id="47" name="Shape 45"/>
-          <p:cNvSpPr/>
-          <p:nvPr/>
-        </p:nvSpPr>
-        <p:spPr>
-          <a:xfrm>
-            <a:off x="10725912" y="3918204"/>
-            <a:ext cx="137160" cy="137160"/>
-          </a:xfrm>
-          <a:prstGeom prst="ellipse">
-            <a:avLst/>
-          </a:prstGeom>
-          <a:solidFill>
-            <a:srgbClr val="FBF4F2"/>
-          </a:solidFill>
-          <a:ln w="12700">
-            <a:solidFill>
-              <a:srgbClr val="836A68"/>
-            </a:solidFill>
-            <a:prstDash val="solid"/>
-          </a:ln>
-        </p:spPr>
-      </p:sp>
-      <p:sp>
-        <p:nvSpPr>
-          <p:cNvPr id="48" name="Text 46"/>
-          <p:cNvSpPr/>
-          <p:nvPr/>
-        </p:nvSpPr>
-        <p:spPr>
-          <a:xfrm>
-            <a:off x="8778240" y="4233672"/>
-            <a:ext cx="2880360" cy="274320"/>
+          <a:ln/>
+        </p:spPr>
+      </p:sp>
+      <p:sp>
+        <p:nvSpPr>
+          <p:cNvPr id="21" name="Text 19"/>
+          <p:cNvSpPr/>
+          <p:nvPr/>
+        </p:nvSpPr>
+        <p:spPr>
+          <a:xfrm>
+            <a:off x="777240" y="5367528"/>
+            <a:ext cx="512064" cy="512064"/>
           </a:xfrm>
           <a:prstGeom prst="rect">
             <a:avLst/>
@@ -8981,184 +8264,95 @@
               <a:buNone/>
             </a:pPr>
             <a:r>
-              <a:rPr lang="en-US" sz="1050" dirty="0">
-                <a:solidFill>
-                  <a:srgbClr val="836A68"/>
+              <a:rPr lang="en-US" sz="2000" b="1" dirty="0">
+                <a:solidFill>
+                  <a:srgbClr val="FFFFFF"/>
+                </a:solidFill>
+                <a:latin typeface="Cambria" pitchFamily="34" charset="0"/>
+                <a:ea typeface="Cambria" pitchFamily="34" charset="-122"/>
+                <a:cs typeface="Cambria" pitchFamily="34" charset="-120"/>
+              </a:rPr>
+              <a:t>4</a:t>
+            </a:r>
+            <a:endParaRPr lang="en-US" sz="2000" dirty="0"/>
+          </a:p>
+        </p:txBody>
+      </p:sp>
+      <p:sp>
+        <p:nvSpPr>
+          <p:cNvPr id="22" name="Text 20"/>
+          <p:cNvSpPr/>
+          <p:nvPr/>
+        </p:nvSpPr>
+        <p:spPr>
+          <a:xfrm>
+            <a:off x="1508760" y="5257800"/>
+            <a:ext cx="2286000" cy="731520"/>
+          </a:xfrm>
+          <a:prstGeom prst="rect">
+            <a:avLst/>
+          </a:prstGeom>
+          <a:noFill/>
+          <a:ln/>
+        </p:spPr>
+        <p:txBody>
+          <a:bodyPr wrap="square" lIns="0" tIns="0" rIns="0" bIns="0" rtlCol="0" anchor="ctr"/>
+          <a:lstStyle/>
+          <a:p>
+            <a:pPr indent="0" marL="0">
+              <a:buNone/>
+            </a:pPr>
+            <a:r>
+              <a:rPr lang="en-US" sz="1700" b="1" dirty="0">
+                <a:solidFill>
+                  <a:srgbClr val="BE0000"/>
+                </a:solidFill>
+                <a:latin typeface="Cambria" pitchFamily="34" charset="0"/>
+                <a:ea typeface="Cambria" pitchFamily="34" charset="-122"/>
+                <a:cs typeface="Cambria" pitchFamily="34" charset="-120"/>
+              </a:rPr>
+              <a:t>Protocols</a:t>
+            </a:r>
+            <a:endParaRPr lang="en-US" sz="1700" dirty="0"/>
+          </a:p>
+        </p:txBody>
+      </p:sp>
+      <p:sp>
+        <p:nvSpPr>
+          <p:cNvPr id="23" name="Text 21"/>
+          <p:cNvSpPr/>
+          <p:nvPr/>
+        </p:nvSpPr>
+        <p:spPr>
+          <a:xfrm>
+            <a:off x="3886200" y="5166360"/>
+            <a:ext cx="7571232" cy="914400"/>
+          </a:xfrm>
+          <a:prstGeom prst="rect">
+            <a:avLst/>
+          </a:prstGeom>
+          <a:noFill/>
+          <a:ln/>
+        </p:spPr>
+        <p:txBody>
+          <a:bodyPr wrap="square" lIns="0" tIns="0" rIns="0" bIns="0" rtlCol="0" anchor="ctr"/>
+          <a:lstStyle/>
+          <a:p>
+            <a:pPr indent="0" marL="0">
+              <a:buNone/>
+            </a:pPr>
+            <a:r>
+              <a:rPr lang="en-US" sz="1270" dirty="0">
+                <a:solidFill>
+                  <a:srgbClr val="2A1618"/>
                 </a:solidFill>
                 <a:latin typeface="Calibri" pitchFamily="34" charset="0"/>
                 <a:ea typeface="Calibri" pitchFamily="34" charset="-122"/>
                 <a:cs typeface="Calibri" pitchFamily="34" charset="-120"/>
               </a:rPr>
-              <a:t>one cell held out</a:t>
-            </a:r>
-            <a:endParaRPr lang="en-US" sz="1050" dirty="0"/>
-          </a:p>
-        </p:txBody>
-      </p:sp>
-      <p:sp>
-        <p:nvSpPr>
-          <p:cNvPr id="49" name="Text 47"/>
-          <p:cNvSpPr/>
-          <p:nvPr/>
-        </p:nvSpPr>
-        <p:spPr>
-          <a:xfrm>
-            <a:off x="8778240" y="4480560"/>
-            <a:ext cx="2880360" cy="548640"/>
-          </a:xfrm>
-          <a:prstGeom prst="rect">
-            <a:avLst/>
-          </a:prstGeom>
-          <a:noFill/>
-          <a:ln/>
-        </p:spPr>
-        <p:txBody>
-          <a:bodyPr wrap="square" lIns="0" tIns="0" rIns="0" bIns="0" rtlCol="0" anchor="t"/>
-          <a:lstStyle/>
-          <a:p>
-            <a:pPr indent="0" marL="0">
-              <a:buNone/>
-            </a:pPr>
-            <a:r>
-              <a:rPr lang="en-US" sz="1150" b="1" dirty="0">
-                <a:solidFill>
-                  <a:srgbClr val="2A1618"/>
-                </a:solidFill>
-                <a:latin typeface="Calibri" pitchFamily="34" charset="0"/>
-                <a:ea typeface="Calibri" pitchFamily="34" charset="-122"/>
-                <a:cs typeface="Calibri" pitchFamily="34" charset="-120"/>
-              </a:rPr>
-              <a:t>Held out:  </a:t>
-            </a:r>
-            <a:pPr indent="0" marL="0">
-              <a:buNone/>
-            </a:pPr>
-            <a:r>
-              <a:rPr lang="en-US" sz="1150" dirty="0">
-                <a:solidFill>
-                  <a:srgbClr val="2A1618"/>
-                </a:solidFill>
-                <a:latin typeface="Calibri" pitchFamily="34" charset="0"/>
-                <a:ea typeface="Calibri" pitchFamily="34" charset="-122"/>
-                <a:cs typeface="Calibri" pitchFamily="34" charset="-120"/>
-              </a:rPr>
-              <a:t>all 4 points of a 1 in cell</a:t>
-            </a:r>
-            <a:endParaRPr lang="en-US" sz="1150" dirty="0"/>
-          </a:p>
-        </p:txBody>
-      </p:sp>
-      <p:sp>
-        <p:nvSpPr>
-          <p:cNvPr id="50" name="Text 48"/>
-          <p:cNvSpPr/>
-          <p:nvPr/>
-        </p:nvSpPr>
-        <p:spPr>
-          <a:xfrm>
-            <a:off x="8778240" y="5029200"/>
-            <a:ext cx="2880360" cy="685800"/>
-          </a:xfrm>
-          <a:prstGeom prst="rect">
-            <a:avLst/>
-          </a:prstGeom>
-          <a:noFill/>
-          <a:ln/>
-        </p:spPr>
-        <p:txBody>
-          <a:bodyPr wrap="square" lIns="0" tIns="0" rIns="0" bIns="0" rtlCol="0" anchor="t"/>
-          <a:lstStyle/>
-          <a:p>
-            <a:pPr indent="0" marL="0">
-              <a:buNone/>
-            </a:pPr>
-            <a:r>
-              <a:rPr lang="en-US" sz="1150" b="1" dirty="0">
-                <a:solidFill>
-                  <a:srgbClr val="2A1618"/>
-                </a:solidFill>
-                <a:latin typeface="Calibri" pitchFamily="34" charset="0"/>
-                <a:ea typeface="Calibri" pitchFamily="34" charset="-122"/>
-                <a:cs typeface="Calibri" pitchFamily="34" charset="-120"/>
-              </a:rPr>
-              <a:t>Question:  </a:t>
-            </a:r>
-            <a:pPr indent="0" marL="0">
-              <a:buNone/>
-            </a:pPr>
-            <a:r>
-              <a:rPr lang="en-US" sz="1150" dirty="0">
-                <a:solidFill>
-                  <a:srgbClr val="2A1618"/>
-                </a:solidFill>
-                <a:latin typeface="Calibri" pitchFamily="34" charset="0"/>
-                <a:ea typeface="Calibri" pitchFamily="34" charset="-122"/>
-                <a:cs typeface="Calibri" pitchFamily="34" charset="-120"/>
-              </a:rPr>
-              <a:t>Can it bridge a full inch to a spot with NO nearby signature?</a:t>
-            </a:r>
-            <a:endParaRPr lang="en-US" sz="1150" dirty="0"/>
-          </a:p>
-        </p:txBody>
-      </p:sp>
-      <p:sp>
-        <p:nvSpPr>
-          <p:cNvPr id="51" name="Shape 49"/>
-          <p:cNvSpPr/>
-          <p:nvPr/>
-        </p:nvSpPr>
-        <p:spPr>
-          <a:xfrm>
-            <a:off x="8778240" y="5669280"/>
-            <a:ext cx="1371600" cy="310896"/>
-          </a:xfrm>
-          <a:prstGeom prst="roundRect">
-            <a:avLst>
-              <a:gd name="adj" fmla="val 50000"/>
-            </a:avLst>
-          </a:prstGeom>
-          <a:solidFill>
-            <a:srgbClr val="8E1010"/>
-          </a:solidFill>
-          <a:ln/>
-        </p:spPr>
-      </p:sp>
-      <p:sp>
-        <p:nvSpPr>
-          <p:cNvPr id="52" name="Text 50"/>
-          <p:cNvSpPr/>
-          <p:nvPr/>
-        </p:nvSpPr>
-        <p:spPr>
-          <a:xfrm>
-            <a:off x="8778240" y="5669280"/>
-            <a:ext cx="1371600" cy="310896"/>
-          </a:xfrm>
-          <a:prstGeom prst="rect">
-            <a:avLst/>
-          </a:prstGeom>
-          <a:noFill/>
-          <a:ln/>
-        </p:spPr>
-        <p:txBody>
-          <a:bodyPr wrap="square" lIns="0" tIns="0" rIns="0" bIns="0" rtlCol="0" anchor="ctr"/>
-          <a:lstStyle/>
-          <a:p>
-            <a:pPr algn="ctr" indent="0" marL="0">
-              <a:buNone/>
-            </a:pPr>
-            <a:r>
-              <a:rPr lang="en-US" sz="1100" b="1" dirty="0">
-                <a:solidFill>
-                  <a:srgbClr val="FFFFFF"/>
-                </a:solidFill>
-                <a:latin typeface="Calibri" pitchFamily="34" charset="0"/>
-                <a:ea typeface="Calibri" pitchFamily="34" charset="-122"/>
-                <a:cs typeface="Calibri" pitchFamily="34" charset="-120"/>
-              </a:rPr>
-              <a:t>Hardest</a:t>
-            </a:r>
-            <a:endParaRPr lang="en-US" sz="1100" dirty="0"/>
+              <a:t>LOSO holds out a whole session. LOPO-cell holds out a whole 1 in cell. LOPO single-position holds out one sub-position (its cell-mates stay in training).</a:t>
+            </a:r>
+            <a:endParaRPr lang="en-US" sz="1270" dirty="0"/>
           </a:p>
         </p:txBody>
       </p:sp>
@@ -9227,7 +8421,7 @@
                 <a:ea typeface="Cambria" pitchFamily="34" charset="-122"/>
                 <a:cs typeface="Cambria" pitchFamily="34" charset="-120"/>
               </a:rPr>
-              <a:t>New scan of a known grid (LOSO)</a:t>
+              <a:t>Three ways to test the model</a:t>
             </a:r>
             <a:endParaRPr lang="en-US" sz="2900" dirty="0"/>
           </a:p>
@@ -9266,42 +8460,26 @@
                 <a:ea typeface="Calibri" pitchFamily="34" charset="-122"/>
                 <a:cs typeface="Calibri" pitchFamily="34" charset="-120"/>
               </a:rPr>
-              <a:t>Median localization error: the CNN nails it; the MLP lags and physics features break it</a:t>
+              <a:t>Each hold-out asks a harder question about generalization</a:t>
             </a:r>
             <a:endParaRPr lang="en-US" sz="1400" dirty="0"/>
           </a:p>
         </p:txBody>
       </p:sp>
-      <p:graphicFrame>
-        <p:nvGraphicFramePr>
-          <p:cNvPr id="4" name="Chart 0" descr=""/>
-          <p:cNvGraphicFramePr/>
-          <p:nvPr/>
-        </p:nvGraphicFramePr>
-        <p:xfrm>
-          <a:off x="548640" y="1554480"/>
-          <a:ext cx="6858000" cy="4663440"/>
-        </p:xfrm>
-        <a:graphic xmlns:a="http://schemas.openxmlformats.org/drawingml/2006/main">
-          <a:graphicData uri="http://schemas.openxmlformats.org/drawingml/2006/chart">
-            <c:chart xmlns:c="http://schemas.openxmlformats.org/drawingml/2006/chart" r:id="rId1"/>
-          </a:graphicData>
-        </a:graphic>
-      </p:graphicFrame>
-      <p:sp>
-        <p:nvSpPr>
-          <p:cNvPr id="5" name="Shape 2"/>
-          <p:cNvSpPr/>
-          <p:nvPr/>
-        </p:nvSpPr>
-        <p:spPr>
-          <a:xfrm>
-            <a:off x="7772400" y="1554480"/>
-            <a:ext cx="3840480" cy="4663440"/>
+      <p:sp>
+        <p:nvSpPr>
+          <p:cNvPr id="4" name="Shape 2"/>
+          <p:cNvSpPr/>
+          <p:nvPr/>
+        </p:nvSpPr>
+        <p:spPr>
+          <a:xfrm>
+            <a:off x="640080" y="1600200"/>
+            <a:ext cx="3246120" cy="4526280"/>
           </a:xfrm>
           <a:prstGeom prst="roundRect">
             <a:avLst>
-              <a:gd name="adj" fmla="val 2143"/>
+              <a:gd name="adj" fmla="val 2535"/>
             </a:avLst>
           </a:prstGeom>
           <a:solidFill>
@@ -9324,14 +8502,14 @@
       </p:sp>
       <p:sp>
         <p:nvSpPr>
-          <p:cNvPr id="6" name="Text 3"/>
-          <p:cNvSpPr/>
-          <p:nvPr/>
-        </p:nvSpPr>
-        <p:spPr>
-          <a:xfrm>
-            <a:off x="8001000" y="1737360"/>
-            <a:ext cx="3383280" cy="365760"/>
+          <p:cNvPr id="5" name="Text 3"/>
+          <p:cNvSpPr/>
+          <p:nvPr/>
+        </p:nvSpPr>
+        <p:spPr>
+          <a:xfrm>
+            <a:off x="822960" y="1801368"/>
+            <a:ext cx="2880360" cy="457200"/>
           </a:xfrm>
           <a:prstGeom prst="rect">
             <a:avLst/>
@@ -9347,7 +8525,7 @@
               <a:buNone/>
             </a:pPr>
             <a:r>
-              <a:rPr lang="en-US" sz="1600" b="1" dirty="0">
+              <a:rPr lang="en-US" sz="1900" b="1" dirty="0">
                 <a:solidFill>
                   <a:srgbClr val="BE0000"/>
                 </a:solidFill>
@@ -9355,22 +8533,22 @@
                 <a:ea typeface="Cambria" pitchFamily="34" charset="-122"/>
                 <a:cs typeface="Cambria" pitchFamily="34" charset="-120"/>
               </a:rPr>
-              <a:t>What it says</a:t>
-            </a:r>
-            <a:endParaRPr lang="en-US" sz="1600" dirty="0"/>
-          </a:p>
-        </p:txBody>
-      </p:sp>
-      <p:sp>
-        <p:nvSpPr>
-          <p:cNvPr id="7" name="Text 4"/>
-          <p:cNvSpPr/>
-          <p:nvPr/>
-        </p:nvSpPr>
-        <p:spPr>
-          <a:xfrm>
-            <a:off x="8001000" y="2194560"/>
-            <a:ext cx="3383280" cy="3840480"/>
+              <a:t>LOSO</a:t>
+            </a:r>
+            <a:endParaRPr lang="en-US" sz="1900" dirty="0"/>
+          </a:p>
+        </p:txBody>
+      </p:sp>
+      <p:sp>
+        <p:nvSpPr>
+          <p:cNvPr id="6" name="Text 4"/>
+          <p:cNvSpPr/>
+          <p:nvPr/>
+        </p:nvSpPr>
+        <p:spPr>
+          <a:xfrm>
+            <a:off x="822960" y="2258568"/>
+            <a:ext cx="2880360" cy="292608"/>
           </a:xfrm>
           <a:prstGeom prst="rect">
             <a:avLst/>
@@ -9379,91 +8557,1542 @@
           <a:ln/>
         </p:spPr>
         <p:txBody>
-          <a:bodyPr wrap="square" lIns="0" tIns="0" rIns="0" bIns="0" rtlCol="0" anchor="t"/>
-          <a:lstStyle/>
-          <a:p>
-            <a:pPr marL="342900" indent="-342900">
-              <a:spcAft>
-                <a:spcPts val="800"/>
-              </a:spcAft>
-              <a:buSzPct val="100000"/>
-              <a:buChar char="•"/>
-            </a:pPr>
-            <a:r>
-              <a:rPr lang="en-US" sz="1300" dirty="0">
-                <a:solidFill>
-                  <a:srgbClr val="2A1618"/>
+          <a:bodyPr wrap="square" lIns="0" tIns="0" rIns="0" bIns="0" rtlCol="0" anchor="ctr"/>
+          <a:lstStyle/>
+          <a:p>
+            <a:pPr indent="0" marL="0">
+              <a:buNone/>
+            </a:pPr>
+            <a:r>
+              <a:rPr lang="en-US" sz="1250" i="1" dirty="0">
+                <a:solidFill>
+                  <a:srgbClr val="836A68"/>
                 </a:solidFill>
                 <a:latin typeface="Calibri" pitchFamily="34" charset="0"/>
                 <a:ea typeface="Calibri" pitchFamily="34" charset="-122"/>
                 <a:cs typeface="Calibri" pitchFamily="34" charset="-120"/>
               </a:rPr>
-              <a:t>CNN wins everywhere: 0.15 in (3.9 mm) on empty, under a quarter inch even on F5.</a:t>
-            </a:r>
-            <a:endParaRPr lang="en-US" sz="1300" dirty="0"/>
-          </a:p>
-          <a:p>
-            <a:pPr marL="342900" indent="-342900">
-              <a:spcAft>
-                <a:spcPts val="800"/>
-              </a:spcAft>
-              <a:buSzPct val="100000"/>
-              <a:buChar char="•"/>
-            </a:pPr>
-            <a:r>
-              <a:rPr lang="en-US" sz="1300" dirty="0">
-                <a:solidFill>
-                  <a:srgbClr val="2A1618"/>
+              <a:t>leave one session out</a:t>
+            </a:r>
+            <a:endParaRPr lang="en-US" sz="1250" dirty="0"/>
+          </a:p>
+        </p:txBody>
+      </p:sp>
+      <p:sp>
+        <p:nvSpPr>
+          <p:cNvPr id="7" name="Shape 5"/>
+          <p:cNvSpPr/>
+          <p:nvPr/>
+        </p:nvSpPr>
+        <p:spPr>
+          <a:xfrm>
+            <a:off x="1143000" y="2651760"/>
+            <a:ext cx="2240280" cy="365760"/>
+          </a:xfrm>
+          <a:prstGeom prst="roundRect">
+            <a:avLst>
+              <a:gd name="adj" fmla="val 10000"/>
+            </a:avLst>
+          </a:prstGeom>
+          <a:solidFill>
+            <a:srgbClr val="FBF4F2"/>
+          </a:solidFill>
+          <a:ln w="12700">
+            <a:solidFill>
+              <a:srgbClr val="E7D6D1"/>
+            </a:solidFill>
+            <a:prstDash val="solid"/>
+          </a:ln>
+        </p:spPr>
+      </p:sp>
+      <p:sp>
+        <p:nvSpPr>
+          <p:cNvPr id="8" name="Text 6"/>
+          <p:cNvSpPr/>
+          <p:nvPr/>
+        </p:nvSpPr>
+        <p:spPr>
+          <a:xfrm>
+            <a:off x="1143000" y="2651760"/>
+            <a:ext cx="2240280" cy="365760"/>
+          </a:xfrm>
+          <a:prstGeom prst="rect">
+            <a:avLst/>
+          </a:prstGeom>
+          <a:noFill/>
+          <a:ln/>
+        </p:spPr>
+        <p:txBody>
+          <a:bodyPr wrap="square" lIns="0" tIns="0" rIns="0" bIns="0" rtlCol="0" anchor="ctr"/>
+          <a:lstStyle/>
+          <a:p>
+            <a:pPr algn="ctr" indent="0" marL="0">
+              <a:buNone/>
+            </a:pPr>
+            <a:r>
+              <a:rPr lang="en-US" sz="1100" dirty="0">
+                <a:solidFill>
+                  <a:srgbClr val="836A68"/>
                 </a:solidFill>
                 <a:latin typeface="Calibri" pitchFamily="34" charset="0"/>
                 <a:ea typeface="Calibri" pitchFamily="34" charset="-122"/>
                 <a:cs typeface="Calibri" pitchFamily="34" charset="-120"/>
               </a:rPr>
-              <a:t>Raw is as good as physics for the CNN, so raw is the pick (simpler, faster).</a:t>
-            </a:r>
-            <a:endParaRPr lang="en-US" sz="1300" dirty="0"/>
-          </a:p>
-          <a:p>
-            <a:pPr marL="342900" indent="-342900">
-              <a:spcAft>
-                <a:spcPts val="800"/>
-              </a:spcAft>
-              <a:buSzPct val="100000"/>
-              <a:buChar char="•"/>
-            </a:pPr>
-            <a:r>
-              <a:rPr lang="en-US" sz="1300" dirty="0">
-                <a:solidFill>
-                  <a:srgbClr val="2A1618"/>
+              <a:t>S1 train</a:t>
+            </a:r>
+            <a:endParaRPr lang="en-US" sz="1100" dirty="0"/>
+          </a:p>
+        </p:txBody>
+      </p:sp>
+      <p:sp>
+        <p:nvSpPr>
+          <p:cNvPr id="9" name="Shape 7"/>
+          <p:cNvSpPr/>
+          <p:nvPr/>
+        </p:nvSpPr>
+        <p:spPr>
+          <a:xfrm>
+            <a:off x="1143000" y="3108960"/>
+            <a:ext cx="2240280" cy="365760"/>
+          </a:xfrm>
+          <a:prstGeom prst="roundRect">
+            <a:avLst>
+              <a:gd name="adj" fmla="val 10000"/>
+            </a:avLst>
+          </a:prstGeom>
+          <a:solidFill>
+            <a:srgbClr val="FBF4F2"/>
+          </a:solidFill>
+          <a:ln w="12700">
+            <a:solidFill>
+              <a:srgbClr val="E7D6D1"/>
+            </a:solidFill>
+            <a:prstDash val="solid"/>
+          </a:ln>
+        </p:spPr>
+      </p:sp>
+      <p:sp>
+        <p:nvSpPr>
+          <p:cNvPr id="10" name="Text 8"/>
+          <p:cNvSpPr/>
+          <p:nvPr/>
+        </p:nvSpPr>
+        <p:spPr>
+          <a:xfrm>
+            <a:off x="1143000" y="3108960"/>
+            <a:ext cx="2240280" cy="365760"/>
+          </a:xfrm>
+          <a:prstGeom prst="rect">
+            <a:avLst/>
+          </a:prstGeom>
+          <a:noFill/>
+          <a:ln/>
+        </p:spPr>
+        <p:txBody>
+          <a:bodyPr wrap="square" lIns="0" tIns="0" rIns="0" bIns="0" rtlCol="0" anchor="ctr"/>
+          <a:lstStyle/>
+          <a:p>
+            <a:pPr algn="ctr" indent="0" marL="0">
+              <a:buNone/>
+            </a:pPr>
+            <a:r>
+              <a:rPr lang="en-US" sz="1100" dirty="0">
+                <a:solidFill>
+                  <a:srgbClr val="836A68"/>
                 </a:solidFill>
                 <a:latin typeface="Calibri" pitchFamily="34" charset="0"/>
                 <a:ea typeface="Calibri" pitchFamily="34" charset="-122"/>
                 <a:cs typeface="Calibri" pitchFamily="34" charset="-120"/>
               </a:rPr>
-              <a:t>MLP is 3 to 4x worse; with physics it collapses to the predict-centre baseline.</a:t>
-            </a:r>
-            <a:endParaRPr lang="en-US" sz="1300" dirty="0"/>
-          </a:p>
-          <a:p>
-            <a:pPr marL="342900" indent="-342900">
-              <a:spcAft>
-                <a:spcPts val="800"/>
-              </a:spcAft>
-              <a:buSzPct val="100000"/>
-              <a:buChar char="•"/>
-            </a:pPr>
-            <a:r>
-              <a:rPr lang="en-US" sz="1300" dirty="0">
-                <a:solidFill>
-                  <a:srgbClr val="2A1618"/>
+              <a:t>S2 train</a:t>
+            </a:r>
+            <a:endParaRPr lang="en-US" sz="1100" dirty="0"/>
+          </a:p>
+        </p:txBody>
+      </p:sp>
+      <p:sp>
+        <p:nvSpPr>
+          <p:cNvPr id="11" name="Shape 9"/>
+          <p:cNvSpPr/>
+          <p:nvPr/>
+        </p:nvSpPr>
+        <p:spPr>
+          <a:xfrm>
+            <a:off x="1143000" y="3566160"/>
+            <a:ext cx="2240280" cy="365760"/>
+          </a:xfrm>
+          <a:prstGeom prst="roundRect">
+            <a:avLst>
+              <a:gd name="adj" fmla="val 10000"/>
+            </a:avLst>
+          </a:prstGeom>
+          <a:solidFill>
+            <a:srgbClr val="BE0000"/>
+          </a:solidFill>
+          <a:ln w="12700">
+            <a:solidFill>
+              <a:srgbClr val="BE0000"/>
+            </a:solidFill>
+            <a:prstDash val="solid"/>
+          </a:ln>
+        </p:spPr>
+      </p:sp>
+      <p:sp>
+        <p:nvSpPr>
+          <p:cNvPr id="12" name="Text 10"/>
+          <p:cNvSpPr/>
+          <p:nvPr/>
+        </p:nvSpPr>
+        <p:spPr>
+          <a:xfrm>
+            <a:off x="1143000" y="3566160"/>
+            <a:ext cx="2240280" cy="365760"/>
+          </a:xfrm>
+          <a:prstGeom prst="rect">
+            <a:avLst/>
+          </a:prstGeom>
+          <a:noFill/>
+          <a:ln/>
+        </p:spPr>
+        <p:txBody>
+          <a:bodyPr wrap="square" lIns="0" tIns="0" rIns="0" bIns="0" rtlCol="0" anchor="ctr"/>
+          <a:lstStyle/>
+          <a:p>
+            <a:pPr algn="ctr" indent="0" marL="0">
+              <a:buNone/>
+            </a:pPr>
+            <a:r>
+              <a:rPr lang="en-US" sz="1100" b="1" dirty="0">
+                <a:solidFill>
+                  <a:srgbClr val="FFFFFF"/>
                 </a:solidFill>
                 <a:latin typeface="Calibri" pitchFamily="34" charset="0"/>
                 <a:ea typeface="Calibri" pitchFamily="34" charset="-122"/>
                 <a:cs typeface="Calibri" pitchFamily="34" charset="-120"/>
               </a:rPr>
-              <a:t>At least 90 percent of positions land within the half-cell on all three phantoms.</a:t>
-            </a:r>
-            <a:endParaRPr lang="en-US" sz="1300" dirty="0"/>
+              <a:t>S3 test</a:t>
+            </a:r>
+            <a:endParaRPr lang="en-US" sz="1100" dirty="0"/>
+          </a:p>
+        </p:txBody>
+      </p:sp>
+      <p:sp>
+        <p:nvSpPr>
+          <p:cNvPr id="13" name="Text 11"/>
+          <p:cNvSpPr/>
+          <p:nvPr/>
+        </p:nvSpPr>
+        <p:spPr>
+          <a:xfrm>
+            <a:off x="822960" y="4480560"/>
+            <a:ext cx="2880360" cy="548640"/>
+          </a:xfrm>
+          <a:prstGeom prst="rect">
+            <a:avLst/>
+          </a:prstGeom>
+          <a:noFill/>
+          <a:ln/>
+        </p:spPr>
+        <p:txBody>
+          <a:bodyPr wrap="square" lIns="0" tIns="0" rIns="0" bIns="0" rtlCol="0" anchor="t"/>
+          <a:lstStyle/>
+          <a:p>
+            <a:pPr indent="0" marL="0">
+              <a:buNone/>
+            </a:pPr>
+            <a:r>
+              <a:rPr lang="en-US" sz="1150" b="1" dirty="0">
+                <a:solidFill>
+                  <a:srgbClr val="2A1618"/>
+                </a:solidFill>
+                <a:latin typeface="Calibri" pitchFamily="34" charset="0"/>
+                <a:ea typeface="Calibri" pitchFamily="34" charset="-122"/>
+                <a:cs typeface="Calibri" pitchFamily="34" charset="-120"/>
+              </a:rPr>
+              <a:t>Held out:  </a:t>
+            </a:r>
+            <a:pPr indent="0" marL="0">
+              <a:buNone/>
+            </a:pPr>
+            <a:r>
+              <a:rPr lang="en-US" sz="1150" dirty="0">
+                <a:solidFill>
+                  <a:srgbClr val="2A1618"/>
+                </a:solidFill>
+                <a:latin typeface="Calibri" pitchFamily="34" charset="0"/>
+                <a:ea typeface="Calibri" pitchFamily="34" charset="-122"/>
+                <a:cs typeface="Calibri" pitchFamily="34" charset="-120"/>
+              </a:rPr>
+              <a:t>a whole recording session</a:t>
+            </a:r>
+            <a:endParaRPr lang="en-US" sz="1150" dirty="0"/>
+          </a:p>
+        </p:txBody>
+      </p:sp>
+      <p:sp>
+        <p:nvSpPr>
+          <p:cNvPr id="14" name="Text 12"/>
+          <p:cNvSpPr/>
+          <p:nvPr/>
+        </p:nvSpPr>
+        <p:spPr>
+          <a:xfrm>
+            <a:off x="822960" y="5029200"/>
+            <a:ext cx="2880360" cy="685800"/>
+          </a:xfrm>
+          <a:prstGeom prst="rect">
+            <a:avLst/>
+          </a:prstGeom>
+          <a:noFill/>
+          <a:ln/>
+        </p:spPr>
+        <p:txBody>
+          <a:bodyPr wrap="square" lIns="0" tIns="0" rIns="0" bIns="0" rtlCol="0" anchor="t"/>
+          <a:lstStyle/>
+          <a:p>
+            <a:pPr indent="0" marL="0">
+              <a:buNone/>
+            </a:pPr>
+            <a:r>
+              <a:rPr lang="en-US" sz="1150" b="1" dirty="0">
+                <a:solidFill>
+                  <a:srgbClr val="2A1618"/>
+                </a:solidFill>
+                <a:latin typeface="Calibri" pitchFamily="34" charset="0"/>
+                <a:ea typeface="Calibri" pitchFamily="34" charset="-122"/>
+                <a:cs typeface="Calibri" pitchFamily="34" charset="-120"/>
+              </a:rPr>
+              <a:t>Question:  </a:t>
+            </a:r>
+            <a:pPr indent="0" marL="0">
+              <a:buNone/>
+            </a:pPr>
+            <a:r>
+              <a:rPr lang="en-US" sz="1150" dirty="0">
+                <a:solidFill>
+                  <a:srgbClr val="2A1618"/>
+                </a:solidFill>
+                <a:latin typeface="Calibri" pitchFamily="34" charset="0"/>
+                <a:ea typeface="Calibri" pitchFamily="34" charset="-122"/>
+                <a:cs typeface="Calibri" pitchFamily="34" charset="-120"/>
+              </a:rPr>
+              <a:t>Can it read a NEW scan of positions it already knows?</a:t>
+            </a:r>
+            <a:endParaRPr lang="en-US" sz="1150" dirty="0"/>
+          </a:p>
+        </p:txBody>
+      </p:sp>
+      <p:sp>
+        <p:nvSpPr>
+          <p:cNvPr id="15" name="Shape 13"/>
+          <p:cNvSpPr/>
+          <p:nvPr/>
+        </p:nvSpPr>
+        <p:spPr>
+          <a:xfrm>
+            <a:off x="822960" y="5669280"/>
+            <a:ext cx="1371600" cy="310896"/>
+          </a:xfrm>
+          <a:prstGeom prst="roundRect">
+            <a:avLst>
+              <a:gd name="adj" fmla="val 50000"/>
+            </a:avLst>
+          </a:prstGeom>
+          <a:solidFill>
+            <a:srgbClr val="C8890B"/>
+          </a:solidFill>
+          <a:ln/>
+        </p:spPr>
+      </p:sp>
+      <p:sp>
+        <p:nvSpPr>
+          <p:cNvPr id="16" name="Text 14"/>
+          <p:cNvSpPr/>
+          <p:nvPr/>
+        </p:nvSpPr>
+        <p:spPr>
+          <a:xfrm>
+            <a:off x="822960" y="5669280"/>
+            <a:ext cx="1371600" cy="310896"/>
+          </a:xfrm>
+          <a:prstGeom prst="rect">
+            <a:avLst/>
+          </a:prstGeom>
+          <a:noFill/>
+          <a:ln/>
+        </p:spPr>
+        <p:txBody>
+          <a:bodyPr wrap="square" lIns="0" tIns="0" rIns="0" bIns="0" rtlCol="0" anchor="ctr"/>
+          <a:lstStyle/>
+          <a:p>
+            <a:pPr algn="ctr" indent="0" marL="0">
+              <a:buNone/>
+            </a:pPr>
+            <a:r>
+              <a:rPr lang="en-US" sz="1100" b="1" dirty="0">
+                <a:solidFill>
+                  <a:srgbClr val="FFFFFF"/>
+                </a:solidFill>
+                <a:latin typeface="Calibri" pitchFamily="34" charset="0"/>
+                <a:ea typeface="Calibri" pitchFamily="34" charset="-122"/>
+                <a:cs typeface="Calibri" pitchFamily="34" charset="-120"/>
+              </a:rPr>
+              <a:t>Easiest</a:t>
+            </a:r>
+            <a:endParaRPr lang="en-US" sz="1100" dirty="0"/>
+          </a:p>
+        </p:txBody>
+      </p:sp>
+      <p:sp>
+        <p:nvSpPr>
+          <p:cNvPr id="17" name="Shape 15"/>
+          <p:cNvSpPr/>
+          <p:nvPr/>
+        </p:nvSpPr>
+        <p:spPr>
+          <a:xfrm>
+            <a:off x="4617720" y="1600200"/>
+            <a:ext cx="3246120" cy="4526280"/>
+          </a:xfrm>
+          <a:prstGeom prst="roundRect">
+            <a:avLst>
+              <a:gd name="adj" fmla="val 2535"/>
+            </a:avLst>
+          </a:prstGeom>
+          <a:solidFill>
+            <a:srgbClr val="FBF4F2"/>
+          </a:solidFill>
+          <a:ln w="12700">
+            <a:solidFill>
+              <a:srgbClr val="E7D6D1"/>
+            </a:solidFill>
+            <a:prstDash val="solid"/>
+          </a:ln>
+          <a:effectLst>
+            <a:outerShdw sx="100000" sy="100000" kx="0" ky="0" algn="bl" rotWithShape="0" blurRad="88900" dist="38100" dir="5400000">
+              <a:srgbClr val="7A5C5E">
+                <a:alpha val="18000"/>
+              </a:srgbClr>
+            </a:outerShdw>
+          </a:effectLst>
+        </p:spPr>
+      </p:sp>
+      <p:sp>
+        <p:nvSpPr>
+          <p:cNvPr id="18" name="Text 16"/>
+          <p:cNvSpPr/>
+          <p:nvPr/>
+        </p:nvSpPr>
+        <p:spPr>
+          <a:xfrm>
+            <a:off x="4800600" y="1801368"/>
+            <a:ext cx="2880360" cy="457200"/>
+          </a:xfrm>
+          <a:prstGeom prst="rect">
+            <a:avLst/>
+          </a:prstGeom>
+          <a:noFill/>
+          <a:ln/>
+        </p:spPr>
+        <p:txBody>
+          <a:bodyPr wrap="square" lIns="0" tIns="0" rIns="0" bIns="0" rtlCol="0" anchor="ctr"/>
+          <a:lstStyle/>
+          <a:p>
+            <a:pPr indent="0" marL="0">
+              <a:buNone/>
+            </a:pPr>
+            <a:r>
+              <a:rPr lang="en-US" sz="1900" b="1" dirty="0">
+                <a:solidFill>
+                  <a:srgbClr val="BE0000"/>
+                </a:solidFill>
+                <a:latin typeface="Cambria" pitchFamily="34" charset="0"/>
+                <a:ea typeface="Cambria" pitchFamily="34" charset="-122"/>
+                <a:cs typeface="Cambria" pitchFamily="34" charset="-120"/>
+              </a:rPr>
+              <a:t>LOPO single-position</a:t>
+            </a:r>
+            <a:endParaRPr lang="en-US" sz="1900" dirty="0"/>
+          </a:p>
+        </p:txBody>
+      </p:sp>
+      <p:sp>
+        <p:nvSpPr>
+          <p:cNvPr id="19" name="Text 17"/>
+          <p:cNvSpPr/>
+          <p:nvPr/>
+        </p:nvSpPr>
+        <p:spPr>
+          <a:xfrm>
+            <a:off x="4800600" y="2258568"/>
+            <a:ext cx="2880360" cy="292608"/>
+          </a:xfrm>
+          <a:prstGeom prst="rect">
+            <a:avLst/>
+          </a:prstGeom>
+          <a:noFill/>
+          <a:ln/>
+        </p:spPr>
+        <p:txBody>
+          <a:bodyPr wrap="square" lIns="0" tIns="0" rIns="0" bIns="0" rtlCol="0" anchor="ctr"/>
+          <a:lstStyle/>
+          <a:p>
+            <a:pPr indent="0" marL="0">
+              <a:buNone/>
+            </a:pPr>
+            <a:r>
+              <a:rPr lang="en-US" sz="1250" i="1" dirty="0">
+                <a:solidFill>
+                  <a:srgbClr val="836A68"/>
+                </a:solidFill>
+                <a:latin typeface="Calibri" pitchFamily="34" charset="0"/>
+                <a:ea typeface="Calibri" pitchFamily="34" charset="-122"/>
+                <a:cs typeface="Calibri" pitchFamily="34" charset="-120"/>
+              </a:rPr>
+              <a:t>leave one sub-position out</a:t>
+            </a:r>
+            <a:endParaRPr lang="en-US" sz="1250" dirty="0"/>
+          </a:p>
+        </p:txBody>
+      </p:sp>
+      <p:sp>
+        <p:nvSpPr>
+          <p:cNvPr id="20" name="Shape 18"/>
+          <p:cNvSpPr/>
+          <p:nvPr/>
+        </p:nvSpPr>
+        <p:spPr>
+          <a:xfrm>
+            <a:off x="5856732" y="2916936"/>
+            <a:ext cx="201168" cy="201168"/>
+          </a:xfrm>
+          <a:prstGeom prst="ellipse">
+            <a:avLst/>
+          </a:prstGeom>
+          <a:solidFill>
+            <a:srgbClr val="BE0000"/>
+          </a:solidFill>
+          <a:ln w="12700">
+            <a:solidFill>
+              <a:srgbClr val="BE0000"/>
+            </a:solidFill>
+            <a:prstDash val="solid"/>
+          </a:ln>
+        </p:spPr>
+      </p:sp>
+      <p:sp>
+        <p:nvSpPr>
+          <p:cNvPr id="21" name="Shape 19"/>
+          <p:cNvSpPr/>
+          <p:nvPr/>
+        </p:nvSpPr>
+        <p:spPr>
+          <a:xfrm>
+            <a:off x="6423660" y="2916936"/>
+            <a:ext cx="201168" cy="201168"/>
+          </a:xfrm>
+          <a:prstGeom prst="ellipse">
+            <a:avLst/>
+          </a:prstGeom>
+          <a:solidFill>
+            <a:srgbClr val="FBF4F2"/>
+          </a:solidFill>
+          <a:ln w="12700">
+            <a:solidFill>
+              <a:srgbClr val="836A68"/>
+            </a:solidFill>
+            <a:prstDash val="solid"/>
+          </a:ln>
+        </p:spPr>
+      </p:sp>
+      <p:sp>
+        <p:nvSpPr>
+          <p:cNvPr id="22" name="Shape 20"/>
+          <p:cNvSpPr/>
+          <p:nvPr/>
+        </p:nvSpPr>
+        <p:spPr>
+          <a:xfrm>
+            <a:off x="5856732" y="3483864"/>
+            <a:ext cx="201168" cy="201168"/>
+          </a:xfrm>
+          <a:prstGeom prst="ellipse">
+            <a:avLst/>
+          </a:prstGeom>
+          <a:solidFill>
+            <a:srgbClr val="FBF4F2"/>
+          </a:solidFill>
+          <a:ln w="12700">
+            <a:solidFill>
+              <a:srgbClr val="836A68"/>
+            </a:solidFill>
+            <a:prstDash val="solid"/>
+          </a:ln>
+        </p:spPr>
+      </p:sp>
+      <p:sp>
+        <p:nvSpPr>
+          <p:cNvPr id="23" name="Shape 21"/>
+          <p:cNvSpPr/>
+          <p:nvPr/>
+        </p:nvSpPr>
+        <p:spPr>
+          <a:xfrm>
+            <a:off x="6423660" y="3483864"/>
+            <a:ext cx="201168" cy="201168"/>
+          </a:xfrm>
+          <a:prstGeom prst="ellipse">
+            <a:avLst/>
+          </a:prstGeom>
+          <a:solidFill>
+            <a:srgbClr val="FBF4F2"/>
+          </a:solidFill>
+          <a:ln w="12700">
+            <a:solidFill>
+              <a:srgbClr val="836A68"/>
+            </a:solidFill>
+            <a:prstDash val="solid"/>
+          </a:ln>
+        </p:spPr>
+      </p:sp>
+      <p:sp>
+        <p:nvSpPr>
+          <p:cNvPr id="24" name="Text 22"/>
+          <p:cNvSpPr/>
+          <p:nvPr/>
+        </p:nvSpPr>
+        <p:spPr>
+          <a:xfrm>
+            <a:off x="4800600" y="4105656"/>
+            <a:ext cx="2880360" cy="457200"/>
+          </a:xfrm>
+          <a:prstGeom prst="rect">
+            <a:avLst/>
+          </a:prstGeom>
+          <a:noFill/>
+          <a:ln/>
+        </p:spPr>
+        <p:txBody>
+          <a:bodyPr wrap="square" lIns="0" tIns="0" rIns="0" bIns="0" rtlCol="0" anchor="ctr"/>
+          <a:lstStyle/>
+          <a:p>
+            <a:pPr algn="ctr" indent="0" marL="0">
+              <a:buNone/>
+            </a:pPr>
+            <a:r>
+              <a:rPr lang="en-US" sz="1050" dirty="0">
+                <a:solidFill>
+                  <a:srgbClr val="836A68"/>
+                </a:solidFill>
+                <a:latin typeface="Calibri" pitchFamily="34" charset="0"/>
+                <a:ea typeface="Calibri" pitchFamily="34" charset="-122"/>
+                <a:cs typeface="Calibri" pitchFamily="34" charset="-120"/>
+              </a:rPr>
+              <a:t>one point held out,</a:t>
+            </a:r>
+            <a:endParaRPr lang="en-US" sz="1050" dirty="0"/>
+          </a:p>
+          <a:p>
+            <a:pPr algn="ctr" indent="0" marL="0">
+              <a:buNone/>
+            </a:pPr>
+            <a:r>
+              <a:rPr lang="en-US" sz="1050" dirty="0">
+                <a:solidFill>
+                  <a:srgbClr val="836A68"/>
+                </a:solidFill>
+                <a:latin typeface="Calibri" pitchFamily="34" charset="0"/>
+                <a:ea typeface="Calibri" pitchFamily="34" charset="-122"/>
+                <a:cs typeface="Calibri" pitchFamily="34" charset="-120"/>
+              </a:rPr>
+              <a:t>cell-mates stay</a:t>
+            </a:r>
+            <a:endParaRPr lang="en-US" sz="1050" dirty="0"/>
+          </a:p>
+        </p:txBody>
+      </p:sp>
+      <p:sp>
+        <p:nvSpPr>
+          <p:cNvPr id="25" name="Text 23"/>
+          <p:cNvSpPr/>
+          <p:nvPr/>
+        </p:nvSpPr>
+        <p:spPr>
+          <a:xfrm>
+            <a:off x="4800600" y="4480560"/>
+            <a:ext cx="2880360" cy="548640"/>
+          </a:xfrm>
+          <a:prstGeom prst="rect">
+            <a:avLst/>
+          </a:prstGeom>
+          <a:noFill/>
+          <a:ln/>
+        </p:spPr>
+        <p:txBody>
+          <a:bodyPr wrap="square" lIns="0" tIns="0" rIns="0" bIns="0" rtlCol="0" anchor="t"/>
+          <a:lstStyle/>
+          <a:p>
+            <a:pPr indent="0" marL="0">
+              <a:buNone/>
+            </a:pPr>
+            <a:r>
+              <a:rPr lang="en-US" sz="1150" b="1" dirty="0">
+                <a:solidFill>
+                  <a:srgbClr val="2A1618"/>
+                </a:solidFill>
+                <a:latin typeface="Calibri" pitchFamily="34" charset="0"/>
+                <a:ea typeface="Calibri" pitchFamily="34" charset="-122"/>
+                <a:cs typeface="Calibri" pitchFamily="34" charset="-120"/>
+              </a:rPr>
+              <a:t>Held out:  </a:t>
+            </a:r>
+            <a:pPr indent="0" marL="0">
+              <a:buNone/>
+            </a:pPr>
+            <a:r>
+              <a:rPr lang="en-US" sz="1150" dirty="0">
+                <a:solidFill>
+                  <a:srgbClr val="2A1618"/>
+                </a:solidFill>
+                <a:latin typeface="Calibri" pitchFamily="34" charset="0"/>
+                <a:ea typeface="Calibri" pitchFamily="34" charset="-122"/>
+                <a:cs typeface="Calibri" pitchFamily="34" charset="-120"/>
+              </a:rPr>
+              <a:t>one point (its 3 cell-mates ~0.75 in away stay in)</a:t>
+            </a:r>
+            <a:endParaRPr lang="en-US" sz="1150" dirty="0"/>
+          </a:p>
+        </p:txBody>
+      </p:sp>
+      <p:sp>
+        <p:nvSpPr>
+          <p:cNvPr id="26" name="Text 24"/>
+          <p:cNvSpPr/>
+          <p:nvPr/>
+        </p:nvSpPr>
+        <p:spPr>
+          <a:xfrm>
+            <a:off x="4800600" y="5029200"/>
+            <a:ext cx="2880360" cy="685800"/>
+          </a:xfrm>
+          <a:prstGeom prst="rect">
+            <a:avLst/>
+          </a:prstGeom>
+          <a:noFill/>
+          <a:ln/>
+        </p:spPr>
+        <p:txBody>
+          <a:bodyPr wrap="square" lIns="0" tIns="0" rIns="0" bIns="0" rtlCol="0" anchor="t"/>
+          <a:lstStyle/>
+          <a:p>
+            <a:pPr indent="0" marL="0">
+              <a:buNone/>
+            </a:pPr>
+            <a:r>
+              <a:rPr lang="en-US" sz="1150" b="1" dirty="0">
+                <a:solidFill>
+                  <a:srgbClr val="2A1618"/>
+                </a:solidFill>
+                <a:latin typeface="Calibri" pitchFamily="34" charset="0"/>
+                <a:ea typeface="Calibri" pitchFamily="34" charset="-122"/>
+                <a:cs typeface="Calibri" pitchFamily="34" charset="-120"/>
+              </a:rPr>
+              <a:t>Question:  </a:t>
+            </a:r>
+            <a:pPr indent="0" marL="0">
+              <a:buNone/>
+            </a:pPr>
+            <a:r>
+              <a:rPr lang="en-US" sz="1150" dirty="0">
+                <a:solidFill>
+                  <a:srgbClr val="2A1618"/>
+                </a:solidFill>
+                <a:latin typeface="Calibri" pitchFamily="34" charset="0"/>
+                <a:ea typeface="Calibri" pitchFamily="34" charset="-122"/>
+                <a:cs typeface="Calibri" pitchFamily="34" charset="-120"/>
+              </a:rPr>
+              <a:t>Can it reach an unseen point that has close neighbors?</a:t>
+            </a:r>
+            <a:endParaRPr lang="en-US" sz="1150" dirty="0"/>
+          </a:p>
+        </p:txBody>
+      </p:sp>
+      <p:sp>
+        <p:nvSpPr>
+          <p:cNvPr id="27" name="Shape 25"/>
+          <p:cNvSpPr/>
+          <p:nvPr/>
+        </p:nvSpPr>
+        <p:spPr>
+          <a:xfrm>
+            <a:off x="4800600" y="5669280"/>
+            <a:ext cx="1371600" cy="310896"/>
+          </a:xfrm>
+          <a:prstGeom prst="roundRect">
+            <a:avLst>
+              <a:gd name="adj" fmla="val 50000"/>
+            </a:avLst>
+          </a:prstGeom>
+          <a:solidFill>
+            <a:srgbClr val="C0564A"/>
+          </a:solidFill>
+          <a:ln/>
+        </p:spPr>
+      </p:sp>
+      <p:sp>
+        <p:nvSpPr>
+          <p:cNvPr id="28" name="Text 26"/>
+          <p:cNvSpPr/>
+          <p:nvPr/>
+        </p:nvSpPr>
+        <p:spPr>
+          <a:xfrm>
+            <a:off x="4800600" y="5669280"/>
+            <a:ext cx="1371600" cy="310896"/>
+          </a:xfrm>
+          <a:prstGeom prst="rect">
+            <a:avLst/>
+          </a:prstGeom>
+          <a:noFill/>
+          <a:ln/>
+        </p:spPr>
+        <p:txBody>
+          <a:bodyPr wrap="square" lIns="0" tIns="0" rIns="0" bIns="0" rtlCol="0" anchor="ctr"/>
+          <a:lstStyle/>
+          <a:p>
+            <a:pPr algn="ctr" indent="0" marL="0">
+              <a:buNone/>
+            </a:pPr>
+            <a:r>
+              <a:rPr lang="en-US" sz="1100" b="1" dirty="0">
+                <a:solidFill>
+                  <a:srgbClr val="FFFFFF"/>
+                </a:solidFill>
+                <a:latin typeface="Calibri" pitchFamily="34" charset="0"/>
+                <a:ea typeface="Calibri" pitchFamily="34" charset="-122"/>
+                <a:cs typeface="Calibri" pitchFamily="34" charset="-120"/>
+              </a:rPr>
+              <a:t>Medium</a:t>
+            </a:r>
+            <a:endParaRPr lang="en-US" sz="1100" dirty="0"/>
+          </a:p>
+        </p:txBody>
+      </p:sp>
+      <p:sp>
+        <p:nvSpPr>
+          <p:cNvPr id="29" name="Shape 27"/>
+          <p:cNvSpPr/>
+          <p:nvPr/>
+        </p:nvSpPr>
+        <p:spPr>
+          <a:xfrm>
+            <a:off x="8595360" y="1600200"/>
+            <a:ext cx="3246120" cy="4526280"/>
+          </a:xfrm>
+          <a:prstGeom prst="roundRect">
+            <a:avLst>
+              <a:gd name="adj" fmla="val 2535"/>
+            </a:avLst>
+          </a:prstGeom>
+          <a:solidFill>
+            <a:srgbClr val="FBF4F2"/>
+          </a:solidFill>
+          <a:ln w="12700">
+            <a:solidFill>
+              <a:srgbClr val="E7D6D1"/>
+            </a:solidFill>
+            <a:prstDash val="solid"/>
+          </a:ln>
+          <a:effectLst>
+            <a:outerShdw sx="100000" sy="100000" kx="0" ky="0" algn="bl" rotWithShape="0" blurRad="88900" dist="38100" dir="5400000">
+              <a:srgbClr val="7A5C5E">
+                <a:alpha val="18000"/>
+              </a:srgbClr>
+            </a:outerShdw>
+          </a:effectLst>
+        </p:spPr>
+      </p:sp>
+      <p:sp>
+        <p:nvSpPr>
+          <p:cNvPr id="30" name="Text 28"/>
+          <p:cNvSpPr/>
+          <p:nvPr/>
+        </p:nvSpPr>
+        <p:spPr>
+          <a:xfrm>
+            <a:off x="8778240" y="1801368"/>
+            <a:ext cx="2880360" cy="457200"/>
+          </a:xfrm>
+          <a:prstGeom prst="rect">
+            <a:avLst/>
+          </a:prstGeom>
+          <a:noFill/>
+          <a:ln/>
+        </p:spPr>
+        <p:txBody>
+          <a:bodyPr wrap="square" lIns="0" tIns="0" rIns="0" bIns="0" rtlCol="0" anchor="ctr"/>
+          <a:lstStyle/>
+          <a:p>
+            <a:pPr indent="0" marL="0">
+              <a:buNone/>
+            </a:pPr>
+            <a:r>
+              <a:rPr lang="en-US" sz="1900" b="1" dirty="0">
+                <a:solidFill>
+                  <a:srgbClr val="BE0000"/>
+                </a:solidFill>
+                <a:latin typeface="Cambria" pitchFamily="34" charset="0"/>
+                <a:ea typeface="Cambria" pitchFamily="34" charset="-122"/>
+                <a:cs typeface="Cambria" pitchFamily="34" charset="-120"/>
+              </a:rPr>
+              <a:t>LOPO-cell</a:t>
+            </a:r>
+            <a:endParaRPr lang="en-US" sz="1900" dirty="0"/>
+          </a:p>
+        </p:txBody>
+      </p:sp>
+      <p:sp>
+        <p:nvSpPr>
+          <p:cNvPr id="31" name="Text 29"/>
+          <p:cNvSpPr/>
+          <p:nvPr/>
+        </p:nvSpPr>
+        <p:spPr>
+          <a:xfrm>
+            <a:off x="8778240" y="2258568"/>
+            <a:ext cx="2880360" cy="292608"/>
+          </a:xfrm>
+          <a:prstGeom prst="rect">
+            <a:avLst/>
+          </a:prstGeom>
+          <a:noFill/>
+          <a:ln/>
+        </p:spPr>
+        <p:txBody>
+          <a:bodyPr wrap="square" lIns="0" tIns="0" rIns="0" bIns="0" rtlCol="0" anchor="ctr"/>
+          <a:lstStyle/>
+          <a:p>
+            <a:pPr indent="0" marL="0">
+              <a:buNone/>
+            </a:pPr>
+            <a:r>
+              <a:rPr lang="en-US" sz="1250" i="1" dirty="0">
+                <a:solidFill>
+                  <a:srgbClr val="836A68"/>
+                </a:solidFill>
+                <a:latin typeface="Calibri" pitchFamily="34" charset="0"/>
+                <a:ea typeface="Calibri" pitchFamily="34" charset="-122"/>
+                <a:cs typeface="Calibri" pitchFamily="34" charset="-120"/>
+              </a:rPr>
+              <a:t>leave one whole cell out</a:t>
+            </a:r>
+            <a:endParaRPr lang="en-US" sz="1250" dirty="0"/>
+          </a:p>
+        </p:txBody>
+      </p:sp>
+      <p:sp>
+        <p:nvSpPr>
+          <p:cNvPr id="32" name="Shape 30"/>
+          <p:cNvSpPr/>
+          <p:nvPr/>
+        </p:nvSpPr>
+        <p:spPr>
+          <a:xfrm>
+            <a:off x="9573768" y="2766060"/>
+            <a:ext cx="137160" cy="137160"/>
+          </a:xfrm>
+          <a:prstGeom prst="ellipse">
+            <a:avLst/>
+          </a:prstGeom>
+          <a:solidFill>
+            <a:srgbClr val="BE0000"/>
+          </a:solidFill>
+          <a:ln w="12700">
+            <a:solidFill>
+              <a:srgbClr val="BE0000"/>
+            </a:solidFill>
+            <a:prstDash val="solid"/>
+          </a:ln>
+        </p:spPr>
+      </p:sp>
+      <p:sp>
+        <p:nvSpPr>
+          <p:cNvPr id="33" name="Shape 31"/>
+          <p:cNvSpPr/>
+          <p:nvPr/>
+        </p:nvSpPr>
+        <p:spPr>
+          <a:xfrm>
+            <a:off x="9957816" y="2766060"/>
+            <a:ext cx="137160" cy="137160"/>
+          </a:xfrm>
+          <a:prstGeom prst="ellipse">
+            <a:avLst/>
+          </a:prstGeom>
+          <a:solidFill>
+            <a:srgbClr val="BE0000"/>
+          </a:solidFill>
+          <a:ln w="12700">
+            <a:solidFill>
+              <a:srgbClr val="BE0000"/>
+            </a:solidFill>
+            <a:prstDash val="solid"/>
+          </a:ln>
+        </p:spPr>
+      </p:sp>
+      <p:sp>
+        <p:nvSpPr>
+          <p:cNvPr id="34" name="Shape 32"/>
+          <p:cNvSpPr/>
+          <p:nvPr/>
+        </p:nvSpPr>
+        <p:spPr>
+          <a:xfrm>
+            <a:off x="10341864" y="2766060"/>
+            <a:ext cx="137160" cy="137160"/>
+          </a:xfrm>
+          <a:prstGeom prst="ellipse">
+            <a:avLst/>
+          </a:prstGeom>
+          <a:solidFill>
+            <a:srgbClr val="FBF4F2"/>
+          </a:solidFill>
+          <a:ln w="12700">
+            <a:solidFill>
+              <a:srgbClr val="836A68"/>
+            </a:solidFill>
+            <a:prstDash val="solid"/>
+          </a:ln>
+        </p:spPr>
+      </p:sp>
+      <p:sp>
+        <p:nvSpPr>
+          <p:cNvPr id="35" name="Shape 33"/>
+          <p:cNvSpPr/>
+          <p:nvPr/>
+        </p:nvSpPr>
+        <p:spPr>
+          <a:xfrm>
+            <a:off x="10725912" y="2766060"/>
+            <a:ext cx="137160" cy="137160"/>
+          </a:xfrm>
+          <a:prstGeom prst="ellipse">
+            <a:avLst/>
+          </a:prstGeom>
+          <a:solidFill>
+            <a:srgbClr val="FBF4F2"/>
+          </a:solidFill>
+          <a:ln w="12700">
+            <a:solidFill>
+              <a:srgbClr val="836A68"/>
+            </a:solidFill>
+            <a:prstDash val="solid"/>
+          </a:ln>
+        </p:spPr>
+      </p:sp>
+      <p:sp>
+        <p:nvSpPr>
+          <p:cNvPr id="36" name="Shape 34"/>
+          <p:cNvSpPr/>
+          <p:nvPr/>
+        </p:nvSpPr>
+        <p:spPr>
+          <a:xfrm>
+            <a:off x="9573768" y="3150108"/>
+            <a:ext cx="137160" cy="137160"/>
+          </a:xfrm>
+          <a:prstGeom prst="ellipse">
+            <a:avLst/>
+          </a:prstGeom>
+          <a:solidFill>
+            <a:srgbClr val="BE0000"/>
+          </a:solidFill>
+          <a:ln w="12700">
+            <a:solidFill>
+              <a:srgbClr val="BE0000"/>
+            </a:solidFill>
+            <a:prstDash val="solid"/>
+          </a:ln>
+        </p:spPr>
+      </p:sp>
+      <p:sp>
+        <p:nvSpPr>
+          <p:cNvPr id="37" name="Shape 35"/>
+          <p:cNvSpPr/>
+          <p:nvPr/>
+        </p:nvSpPr>
+        <p:spPr>
+          <a:xfrm>
+            <a:off x="9957816" y="3150108"/>
+            <a:ext cx="137160" cy="137160"/>
+          </a:xfrm>
+          <a:prstGeom prst="ellipse">
+            <a:avLst/>
+          </a:prstGeom>
+          <a:solidFill>
+            <a:srgbClr val="BE0000"/>
+          </a:solidFill>
+          <a:ln w="12700">
+            <a:solidFill>
+              <a:srgbClr val="BE0000"/>
+            </a:solidFill>
+            <a:prstDash val="solid"/>
+          </a:ln>
+        </p:spPr>
+      </p:sp>
+      <p:sp>
+        <p:nvSpPr>
+          <p:cNvPr id="38" name="Shape 36"/>
+          <p:cNvSpPr/>
+          <p:nvPr/>
+        </p:nvSpPr>
+        <p:spPr>
+          <a:xfrm>
+            <a:off x="10341864" y="3150108"/>
+            <a:ext cx="137160" cy="137160"/>
+          </a:xfrm>
+          <a:prstGeom prst="ellipse">
+            <a:avLst/>
+          </a:prstGeom>
+          <a:solidFill>
+            <a:srgbClr val="FBF4F2"/>
+          </a:solidFill>
+          <a:ln w="12700">
+            <a:solidFill>
+              <a:srgbClr val="836A68"/>
+            </a:solidFill>
+            <a:prstDash val="solid"/>
+          </a:ln>
+        </p:spPr>
+      </p:sp>
+      <p:sp>
+        <p:nvSpPr>
+          <p:cNvPr id="39" name="Shape 37"/>
+          <p:cNvSpPr/>
+          <p:nvPr/>
+        </p:nvSpPr>
+        <p:spPr>
+          <a:xfrm>
+            <a:off x="10725912" y="3150108"/>
+            <a:ext cx="137160" cy="137160"/>
+          </a:xfrm>
+          <a:prstGeom prst="ellipse">
+            <a:avLst/>
+          </a:prstGeom>
+          <a:solidFill>
+            <a:srgbClr val="FBF4F2"/>
+          </a:solidFill>
+          <a:ln w="12700">
+            <a:solidFill>
+              <a:srgbClr val="836A68"/>
+            </a:solidFill>
+            <a:prstDash val="solid"/>
+          </a:ln>
+        </p:spPr>
+      </p:sp>
+      <p:sp>
+        <p:nvSpPr>
+          <p:cNvPr id="40" name="Shape 38"/>
+          <p:cNvSpPr/>
+          <p:nvPr/>
+        </p:nvSpPr>
+        <p:spPr>
+          <a:xfrm>
+            <a:off x="9573768" y="3534156"/>
+            <a:ext cx="137160" cy="137160"/>
+          </a:xfrm>
+          <a:prstGeom prst="ellipse">
+            <a:avLst/>
+          </a:prstGeom>
+          <a:solidFill>
+            <a:srgbClr val="FBF4F2"/>
+          </a:solidFill>
+          <a:ln w="12700">
+            <a:solidFill>
+              <a:srgbClr val="836A68"/>
+            </a:solidFill>
+            <a:prstDash val="solid"/>
+          </a:ln>
+        </p:spPr>
+      </p:sp>
+      <p:sp>
+        <p:nvSpPr>
+          <p:cNvPr id="41" name="Shape 39"/>
+          <p:cNvSpPr/>
+          <p:nvPr/>
+        </p:nvSpPr>
+        <p:spPr>
+          <a:xfrm>
+            <a:off x="9957816" y="3534156"/>
+            <a:ext cx="137160" cy="137160"/>
+          </a:xfrm>
+          <a:prstGeom prst="ellipse">
+            <a:avLst/>
+          </a:prstGeom>
+          <a:solidFill>
+            <a:srgbClr val="FBF4F2"/>
+          </a:solidFill>
+          <a:ln w="12700">
+            <a:solidFill>
+              <a:srgbClr val="836A68"/>
+            </a:solidFill>
+            <a:prstDash val="solid"/>
+          </a:ln>
+        </p:spPr>
+      </p:sp>
+      <p:sp>
+        <p:nvSpPr>
+          <p:cNvPr id="42" name="Shape 40"/>
+          <p:cNvSpPr/>
+          <p:nvPr/>
+        </p:nvSpPr>
+        <p:spPr>
+          <a:xfrm>
+            <a:off x="10341864" y="3534156"/>
+            <a:ext cx="137160" cy="137160"/>
+          </a:xfrm>
+          <a:prstGeom prst="ellipse">
+            <a:avLst/>
+          </a:prstGeom>
+          <a:solidFill>
+            <a:srgbClr val="FBF4F2"/>
+          </a:solidFill>
+          <a:ln w="12700">
+            <a:solidFill>
+              <a:srgbClr val="836A68"/>
+            </a:solidFill>
+            <a:prstDash val="solid"/>
+          </a:ln>
+        </p:spPr>
+      </p:sp>
+      <p:sp>
+        <p:nvSpPr>
+          <p:cNvPr id="43" name="Shape 41"/>
+          <p:cNvSpPr/>
+          <p:nvPr/>
+        </p:nvSpPr>
+        <p:spPr>
+          <a:xfrm>
+            <a:off x="10725912" y="3534156"/>
+            <a:ext cx="137160" cy="137160"/>
+          </a:xfrm>
+          <a:prstGeom prst="ellipse">
+            <a:avLst/>
+          </a:prstGeom>
+          <a:solidFill>
+            <a:srgbClr val="FBF4F2"/>
+          </a:solidFill>
+          <a:ln w="12700">
+            <a:solidFill>
+              <a:srgbClr val="836A68"/>
+            </a:solidFill>
+            <a:prstDash val="solid"/>
+          </a:ln>
+        </p:spPr>
+      </p:sp>
+      <p:sp>
+        <p:nvSpPr>
+          <p:cNvPr id="44" name="Shape 42"/>
+          <p:cNvSpPr/>
+          <p:nvPr/>
+        </p:nvSpPr>
+        <p:spPr>
+          <a:xfrm>
+            <a:off x="9573768" y="3918204"/>
+            <a:ext cx="137160" cy="137160"/>
+          </a:xfrm>
+          <a:prstGeom prst="ellipse">
+            <a:avLst/>
+          </a:prstGeom>
+          <a:solidFill>
+            <a:srgbClr val="FBF4F2"/>
+          </a:solidFill>
+          <a:ln w="12700">
+            <a:solidFill>
+              <a:srgbClr val="836A68"/>
+            </a:solidFill>
+            <a:prstDash val="solid"/>
+          </a:ln>
+        </p:spPr>
+      </p:sp>
+      <p:sp>
+        <p:nvSpPr>
+          <p:cNvPr id="45" name="Shape 43"/>
+          <p:cNvSpPr/>
+          <p:nvPr/>
+        </p:nvSpPr>
+        <p:spPr>
+          <a:xfrm>
+            <a:off x="9957816" y="3918204"/>
+            <a:ext cx="137160" cy="137160"/>
+          </a:xfrm>
+          <a:prstGeom prst="ellipse">
+            <a:avLst/>
+          </a:prstGeom>
+          <a:solidFill>
+            <a:srgbClr val="FBF4F2"/>
+          </a:solidFill>
+          <a:ln w="12700">
+            <a:solidFill>
+              <a:srgbClr val="836A68"/>
+            </a:solidFill>
+            <a:prstDash val="solid"/>
+          </a:ln>
+        </p:spPr>
+      </p:sp>
+      <p:sp>
+        <p:nvSpPr>
+          <p:cNvPr id="46" name="Shape 44"/>
+          <p:cNvSpPr/>
+          <p:nvPr/>
+        </p:nvSpPr>
+        <p:spPr>
+          <a:xfrm>
+            <a:off x="10341864" y="3918204"/>
+            <a:ext cx="137160" cy="137160"/>
+          </a:xfrm>
+          <a:prstGeom prst="ellipse">
+            <a:avLst/>
+          </a:prstGeom>
+          <a:solidFill>
+            <a:srgbClr val="FBF4F2"/>
+          </a:solidFill>
+          <a:ln w="12700">
+            <a:solidFill>
+              <a:srgbClr val="836A68"/>
+            </a:solidFill>
+            <a:prstDash val="solid"/>
+          </a:ln>
+        </p:spPr>
+      </p:sp>
+      <p:sp>
+        <p:nvSpPr>
+          <p:cNvPr id="47" name="Shape 45"/>
+          <p:cNvSpPr/>
+          <p:nvPr/>
+        </p:nvSpPr>
+        <p:spPr>
+          <a:xfrm>
+            <a:off x="10725912" y="3918204"/>
+            <a:ext cx="137160" cy="137160"/>
+          </a:xfrm>
+          <a:prstGeom prst="ellipse">
+            <a:avLst/>
+          </a:prstGeom>
+          <a:solidFill>
+            <a:srgbClr val="FBF4F2"/>
+          </a:solidFill>
+          <a:ln w="12700">
+            <a:solidFill>
+              <a:srgbClr val="836A68"/>
+            </a:solidFill>
+            <a:prstDash val="solid"/>
+          </a:ln>
+        </p:spPr>
+      </p:sp>
+      <p:sp>
+        <p:nvSpPr>
+          <p:cNvPr id="48" name="Text 46"/>
+          <p:cNvSpPr/>
+          <p:nvPr/>
+        </p:nvSpPr>
+        <p:spPr>
+          <a:xfrm>
+            <a:off x="8778240" y="4233672"/>
+            <a:ext cx="2880360" cy="274320"/>
+          </a:xfrm>
+          <a:prstGeom prst="rect">
+            <a:avLst/>
+          </a:prstGeom>
+          <a:noFill/>
+          <a:ln/>
+        </p:spPr>
+        <p:txBody>
+          <a:bodyPr wrap="square" lIns="0" tIns="0" rIns="0" bIns="0" rtlCol="0" anchor="ctr"/>
+          <a:lstStyle/>
+          <a:p>
+            <a:pPr algn="ctr" indent="0" marL="0">
+              <a:buNone/>
+            </a:pPr>
+            <a:r>
+              <a:rPr lang="en-US" sz="1050" dirty="0">
+                <a:solidFill>
+                  <a:srgbClr val="836A68"/>
+                </a:solidFill>
+                <a:latin typeface="Calibri" pitchFamily="34" charset="0"/>
+                <a:ea typeface="Calibri" pitchFamily="34" charset="-122"/>
+                <a:cs typeface="Calibri" pitchFamily="34" charset="-120"/>
+              </a:rPr>
+              <a:t>one cell held out</a:t>
+            </a:r>
+            <a:endParaRPr lang="en-US" sz="1050" dirty="0"/>
+          </a:p>
+        </p:txBody>
+      </p:sp>
+      <p:sp>
+        <p:nvSpPr>
+          <p:cNvPr id="49" name="Text 47"/>
+          <p:cNvSpPr/>
+          <p:nvPr/>
+        </p:nvSpPr>
+        <p:spPr>
+          <a:xfrm>
+            <a:off x="8778240" y="4480560"/>
+            <a:ext cx="2880360" cy="548640"/>
+          </a:xfrm>
+          <a:prstGeom prst="rect">
+            <a:avLst/>
+          </a:prstGeom>
+          <a:noFill/>
+          <a:ln/>
+        </p:spPr>
+        <p:txBody>
+          <a:bodyPr wrap="square" lIns="0" tIns="0" rIns="0" bIns="0" rtlCol="0" anchor="t"/>
+          <a:lstStyle/>
+          <a:p>
+            <a:pPr indent="0" marL="0">
+              <a:buNone/>
+            </a:pPr>
+            <a:r>
+              <a:rPr lang="en-US" sz="1150" b="1" dirty="0">
+                <a:solidFill>
+                  <a:srgbClr val="2A1618"/>
+                </a:solidFill>
+                <a:latin typeface="Calibri" pitchFamily="34" charset="0"/>
+                <a:ea typeface="Calibri" pitchFamily="34" charset="-122"/>
+                <a:cs typeface="Calibri" pitchFamily="34" charset="-120"/>
+              </a:rPr>
+              <a:t>Held out:  </a:t>
+            </a:r>
+            <a:pPr indent="0" marL="0">
+              <a:buNone/>
+            </a:pPr>
+            <a:r>
+              <a:rPr lang="en-US" sz="1150" dirty="0">
+                <a:solidFill>
+                  <a:srgbClr val="2A1618"/>
+                </a:solidFill>
+                <a:latin typeface="Calibri" pitchFamily="34" charset="0"/>
+                <a:ea typeface="Calibri" pitchFamily="34" charset="-122"/>
+                <a:cs typeface="Calibri" pitchFamily="34" charset="-120"/>
+              </a:rPr>
+              <a:t>all 4 points of a 1 in cell</a:t>
+            </a:r>
+            <a:endParaRPr lang="en-US" sz="1150" dirty="0"/>
+          </a:p>
+        </p:txBody>
+      </p:sp>
+      <p:sp>
+        <p:nvSpPr>
+          <p:cNvPr id="50" name="Text 48"/>
+          <p:cNvSpPr/>
+          <p:nvPr/>
+        </p:nvSpPr>
+        <p:spPr>
+          <a:xfrm>
+            <a:off x="8778240" y="5029200"/>
+            <a:ext cx="2880360" cy="685800"/>
+          </a:xfrm>
+          <a:prstGeom prst="rect">
+            <a:avLst/>
+          </a:prstGeom>
+          <a:noFill/>
+          <a:ln/>
+        </p:spPr>
+        <p:txBody>
+          <a:bodyPr wrap="square" lIns="0" tIns="0" rIns="0" bIns="0" rtlCol="0" anchor="t"/>
+          <a:lstStyle/>
+          <a:p>
+            <a:pPr indent="0" marL="0">
+              <a:buNone/>
+            </a:pPr>
+            <a:r>
+              <a:rPr lang="en-US" sz="1150" b="1" dirty="0">
+                <a:solidFill>
+                  <a:srgbClr val="2A1618"/>
+                </a:solidFill>
+                <a:latin typeface="Calibri" pitchFamily="34" charset="0"/>
+                <a:ea typeface="Calibri" pitchFamily="34" charset="-122"/>
+                <a:cs typeface="Calibri" pitchFamily="34" charset="-120"/>
+              </a:rPr>
+              <a:t>Question:  </a:t>
+            </a:r>
+            <a:pPr indent="0" marL="0">
+              <a:buNone/>
+            </a:pPr>
+            <a:r>
+              <a:rPr lang="en-US" sz="1150" dirty="0">
+                <a:solidFill>
+                  <a:srgbClr val="2A1618"/>
+                </a:solidFill>
+                <a:latin typeface="Calibri" pitchFamily="34" charset="0"/>
+                <a:ea typeface="Calibri" pitchFamily="34" charset="-122"/>
+                <a:cs typeface="Calibri" pitchFamily="34" charset="-120"/>
+              </a:rPr>
+              <a:t>Can it bridge a full inch to a spot with NO nearby signature?</a:t>
+            </a:r>
+            <a:endParaRPr lang="en-US" sz="1150" dirty="0"/>
+          </a:p>
+        </p:txBody>
+      </p:sp>
+      <p:sp>
+        <p:nvSpPr>
+          <p:cNvPr id="51" name="Shape 49"/>
+          <p:cNvSpPr/>
+          <p:nvPr/>
+        </p:nvSpPr>
+        <p:spPr>
+          <a:xfrm>
+            <a:off x="8778240" y="5669280"/>
+            <a:ext cx="1371600" cy="310896"/>
+          </a:xfrm>
+          <a:prstGeom prst="roundRect">
+            <a:avLst>
+              <a:gd name="adj" fmla="val 50000"/>
+            </a:avLst>
+          </a:prstGeom>
+          <a:solidFill>
+            <a:srgbClr val="8E1010"/>
+          </a:solidFill>
+          <a:ln/>
+        </p:spPr>
+      </p:sp>
+      <p:sp>
+        <p:nvSpPr>
+          <p:cNvPr id="52" name="Text 50"/>
+          <p:cNvSpPr/>
+          <p:nvPr/>
+        </p:nvSpPr>
+        <p:spPr>
+          <a:xfrm>
+            <a:off x="8778240" y="5669280"/>
+            <a:ext cx="1371600" cy="310896"/>
+          </a:xfrm>
+          <a:prstGeom prst="rect">
+            <a:avLst/>
+          </a:prstGeom>
+          <a:noFill/>
+          <a:ln/>
+        </p:spPr>
+        <p:txBody>
+          <a:bodyPr wrap="square" lIns="0" tIns="0" rIns="0" bIns="0" rtlCol="0" anchor="ctr"/>
+          <a:lstStyle/>
+          <a:p>
+            <a:pPr algn="ctr" indent="0" marL="0">
+              <a:buNone/>
+            </a:pPr>
+            <a:r>
+              <a:rPr lang="en-US" sz="1100" b="1" dirty="0">
+                <a:solidFill>
+                  <a:srgbClr val="FFFFFF"/>
+                </a:solidFill>
+                <a:latin typeface="Calibri" pitchFamily="34" charset="0"/>
+                <a:ea typeface="Calibri" pitchFamily="34" charset="-122"/>
+                <a:cs typeface="Calibri" pitchFamily="34" charset="-120"/>
+              </a:rPr>
+              <a:t>Hardest</a:t>
+            </a:r>
+            <a:endParaRPr lang="en-US" sz="1100" dirty="0"/>
           </a:p>
         </p:txBody>
       </p:sp>
@@ -9532,7 +10161,7 @@
                 <a:ea typeface="Cambria" pitchFamily="34" charset="-122"/>
                 <a:cs typeface="Cambria" pitchFamily="34" charset="-120"/>
               </a:rPr>
-              <a:t>Predicted vs. actual, LOSO (CNN)</a:t>
+              <a:t>New scan of a known grid (LOSO)</a:t>
             </a:r>
             <a:endParaRPr lang="en-US" sz="2900" dirty="0"/>
           </a:p>
@@ -9571,26 +10200,42 @@
                 <a:ea typeface="Calibri" pitchFamily="34" charset="-122"/>
                 <a:cs typeface="Calibri" pitchFamily="34" charset="-120"/>
               </a:rPr>
-              <a:t>Crimson diamonds = prediction, open circles = true position, arrow = the error</a:t>
+              <a:t>Median localization error: the CNN nails it; the MLP lags and physics features break it</a:t>
             </a:r>
             <a:endParaRPr lang="en-US" sz="1400" dirty="0"/>
           </a:p>
         </p:txBody>
       </p:sp>
-      <p:sp>
-        <p:nvSpPr>
-          <p:cNvPr id="4" name="Shape 2"/>
-          <p:cNvSpPr/>
-          <p:nvPr/>
-        </p:nvSpPr>
-        <p:spPr>
-          <a:xfrm>
-            <a:off x="864108" y="1627632"/>
-            <a:ext cx="3419856" cy="3950208"/>
+      <p:graphicFrame>
+        <p:nvGraphicFramePr>
+          <p:cNvPr id="4" name="Chart 0" descr=""/>
+          <p:cNvGraphicFramePr/>
+          <p:nvPr/>
+        </p:nvGraphicFramePr>
+        <p:xfrm>
+          <a:off x="548640" y="1554480"/>
+          <a:ext cx="6858000" cy="4663440"/>
+        </p:xfrm>
+        <a:graphic xmlns:a="http://schemas.openxmlformats.org/drawingml/2006/main">
+          <a:graphicData uri="http://schemas.openxmlformats.org/drawingml/2006/chart">
+            <c:chart xmlns:c="http://schemas.openxmlformats.org/drawingml/2006/chart" r:id="rId1"/>
+          </a:graphicData>
+        </a:graphic>
+      </p:graphicFrame>
+      <p:sp>
+        <p:nvSpPr>
+          <p:cNvPr id="5" name="Shape 2"/>
+          <p:cNvSpPr/>
+          <p:nvPr/>
+        </p:nvSpPr>
+        <p:spPr>
+          <a:xfrm>
+            <a:off x="7772400" y="1554480"/>
+            <a:ext cx="3840480" cy="4663440"/>
           </a:xfrm>
           <a:prstGeom prst="roundRect">
             <a:avLst>
-              <a:gd name="adj" fmla="val 2406"/>
+              <a:gd name="adj" fmla="val 2143"/>
             </a:avLst>
           </a:prstGeom>
           <a:solidFill>
@@ -9611,30 +10256,6 @@
           </a:effectLst>
         </p:spPr>
       </p:sp>
-      <p:pic>
-        <p:nvPicPr>
-          <p:cNvPr id="5" name="Image 0" descr="pred_vs_actual_loso_empty.png">    </p:cNvPr>
-          <p:cNvPicPr>
-            <a:picLocks noChangeAspect="1"/>
-          </p:cNvPicPr>
-          <p:nvPr/>
-        </p:nvPicPr>
-        <p:blipFill>
-          <a:blip r:embed="rId1"/>
-          <a:stretch>
-            <a:fillRect/>
-          </a:stretch>
-        </p:blipFill>
-        <p:spPr>
-          <a:xfrm>
-            <a:off x="973836" y="1755648"/>
-            <a:ext cx="3200400" cy="3310128"/>
-          </a:xfrm>
-          <a:prstGeom prst="rect">
-            <a:avLst/>
-          </a:prstGeom>
-        </p:spPr>
-      </p:pic>
       <p:sp>
         <p:nvSpPr>
           <p:cNvPr id="6" name="Text 3"/>
@@ -9643,8 +10264,8 @@
         </p:nvSpPr>
         <p:spPr>
           <a:xfrm>
-            <a:off x="864108" y="5084064"/>
-            <a:ext cx="3419856" cy="347472"/>
+            <a:off x="8001000" y="1737360"/>
+            <a:ext cx="3383280" cy="365760"/>
           </a:xfrm>
           <a:prstGeom prst="rect">
             <a:avLst/>
@@ -9656,11 +10277,54 @@
           <a:bodyPr wrap="square" lIns="0" tIns="0" rIns="0" bIns="0" rtlCol="0" anchor="ctr"/>
           <a:lstStyle/>
           <a:p>
-            <a:pPr algn="ctr" indent="0" marL="0">
-              <a:buNone/>
-            </a:pPr>
-            <a:r>
-              <a:rPr lang="en-US" sz="1300" b="1" dirty="0">
+            <a:pPr indent="0" marL="0">
+              <a:buNone/>
+            </a:pPr>
+            <a:r>
+              <a:rPr lang="en-US" sz="1600" b="1" dirty="0">
+                <a:solidFill>
+                  <a:srgbClr val="BE0000"/>
+                </a:solidFill>
+                <a:latin typeface="Cambria" pitchFamily="34" charset="0"/>
+                <a:ea typeface="Cambria" pitchFamily="34" charset="-122"/>
+                <a:cs typeface="Cambria" pitchFamily="34" charset="-120"/>
+              </a:rPr>
+              <a:t>What it says</a:t>
+            </a:r>
+            <a:endParaRPr lang="en-US" sz="1600" dirty="0"/>
+          </a:p>
+        </p:txBody>
+      </p:sp>
+      <p:sp>
+        <p:nvSpPr>
+          <p:cNvPr id="7" name="Text 4"/>
+          <p:cNvSpPr/>
+          <p:nvPr/>
+        </p:nvSpPr>
+        <p:spPr>
+          <a:xfrm>
+            <a:off x="8001000" y="2194560"/>
+            <a:ext cx="3383280" cy="3840480"/>
+          </a:xfrm>
+          <a:prstGeom prst="rect">
+            <a:avLst/>
+          </a:prstGeom>
+          <a:noFill/>
+          <a:ln/>
+        </p:spPr>
+        <p:txBody>
+          <a:bodyPr wrap="square" lIns="0" tIns="0" rIns="0" bIns="0" rtlCol="0" anchor="t"/>
+          <a:lstStyle/>
+          <a:p>
+            <a:pPr marL="342900" indent="-342900">
+              <a:spcAft>
+                <a:spcPts val="800"/>
+              </a:spcAft>
+              <a:buSzPct val="100000"/>
+              <a:buChar char="•"/>
+            </a:pPr>
+            <a:r>
+              <a:rPr lang="en-US" sz="1300" dirty="0">
                 <a:solidFill>
                   <a:srgbClr val="2A1618"/>
                 </a:solidFill>
@@ -9668,110 +10332,41 @@
                 <a:ea typeface="Calibri" pitchFamily="34" charset="-122"/>
                 <a:cs typeface="Calibri" pitchFamily="34" charset="-120"/>
               </a:rPr>
-              <a:t>Empty   </a:t>
-            </a:r>
-            <a:pPr algn="ctr" indent="0" marL="0">
-              <a:buNone/>
-            </a:pPr>
-            <a:r>
-              <a:rPr lang="en-US" sz="1300" b="1" dirty="0">
-                <a:solidFill>
-                  <a:srgbClr val="BE0000"/>
+              <a:t>CNN wins everywhere: 0.15 in (3.9 mm) on empty, under a quarter inch even on F5.</a:t>
+            </a:r>
+            <a:endParaRPr lang="en-US" sz="1300" dirty="0"/>
+          </a:p>
+          <a:p>
+            <a:pPr marL="342900" indent="-342900">
+              <a:spcAft>
+                <a:spcPts val="800"/>
+              </a:spcAft>
+              <a:buSzPct val="100000"/>
+              <a:buChar char="•"/>
+            </a:pPr>
+            <a:r>
+              <a:rPr lang="en-US" sz="1300" dirty="0">
+                <a:solidFill>
+                  <a:srgbClr val="2A1618"/>
                 </a:solidFill>
                 <a:latin typeface="Calibri" pitchFamily="34" charset="0"/>
                 <a:ea typeface="Calibri" pitchFamily="34" charset="-122"/>
                 <a:cs typeface="Calibri" pitchFamily="34" charset="-120"/>
               </a:rPr>
-              <a:t>0.15 in</a:t>
+              <a:t>Raw is as good as physics for the CNN, so raw is the pick (simpler, faster).</a:t>
             </a:r>
             <a:endParaRPr lang="en-US" sz="1300" dirty="0"/>
           </a:p>
-        </p:txBody>
-      </p:sp>
-      <p:sp>
-        <p:nvSpPr>
-          <p:cNvPr id="7" name="Shape 4"/>
-          <p:cNvSpPr/>
-          <p:nvPr/>
-        </p:nvSpPr>
-        <p:spPr>
-          <a:xfrm>
-            <a:off x="4384548" y="1627632"/>
-            <a:ext cx="3419856" cy="3950208"/>
-          </a:xfrm>
-          <a:prstGeom prst="roundRect">
-            <a:avLst>
-              <a:gd name="adj" fmla="val 2406"/>
-            </a:avLst>
-          </a:prstGeom>
-          <a:solidFill>
-            <a:srgbClr val="FBF4F2"/>
-          </a:solidFill>
-          <a:ln w="12700">
-            <a:solidFill>
-              <a:srgbClr val="E7D6D1"/>
-            </a:solidFill>
-            <a:prstDash val="solid"/>
-          </a:ln>
-          <a:effectLst>
-            <a:outerShdw sx="100000" sy="100000" kx="0" ky="0" algn="bl" rotWithShape="0" blurRad="88900" dist="38100" dir="5400000">
-              <a:srgbClr val="7A5C5E">
-                <a:alpha val="18000"/>
-              </a:srgbClr>
-            </a:outerShdw>
-          </a:effectLst>
-        </p:spPr>
-      </p:sp>
-      <p:pic>
-        <p:nvPicPr>
-          <p:cNvPr id="8" name="Image 1" descr="pred_vs_actual_loso_f4.png">    </p:cNvPr>
-          <p:cNvPicPr>
-            <a:picLocks noChangeAspect="1"/>
-          </p:cNvPicPr>
-          <p:nvPr/>
-        </p:nvPicPr>
-        <p:blipFill>
-          <a:blip r:embed="rId2"/>
-          <a:stretch>
-            <a:fillRect/>
-          </a:stretch>
-        </p:blipFill>
-        <p:spPr>
-          <a:xfrm>
-            <a:off x="4494276" y="1755648"/>
-            <a:ext cx="3200400" cy="3310128"/>
-          </a:xfrm>
-          <a:prstGeom prst="rect">
-            <a:avLst/>
-          </a:prstGeom>
-        </p:spPr>
-      </p:pic>
-      <p:sp>
-        <p:nvSpPr>
-          <p:cNvPr id="9" name="Text 5"/>
-          <p:cNvSpPr/>
-          <p:nvPr/>
-        </p:nvSpPr>
-        <p:spPr>
-          <a:xfrm>
-            <a:off x="4384548" y="5084064"/>
-            <a:ext cx="3419856" cy="347472"/>
-          </a:xfrm>
-          <a:prstGeom prst="rect">
-            <a:avLst/>
-          </a:prstGeom>
-          <a:noFill/>
-          <a:ln/>
-        </p:spPr>
-        <p:txBody>
-          <a:bodyPr wrap="square" lIns="0" tIns="0" rIns="0" bIns="0" rtlCol="0" anchor="ctr"/>
-          <a:lstStyle/>
-          <a:p>
-            <a:pPr algn="ctr" indent="0" marL="0">
-              <a:buNone/>
-            </a:pPr>
-            <a:r>
-              <a:rPr lang="en-US" sz="1300" b="1" dirty="0">
+          <a:p>
+            <a:pPr marL="342900" indent="-342900">
+              <a:spcAft>
+                <a:spcPts val="800"/>
+              </a:spcAft>
+              <a:buSzPct val="100000"/>
+              <a:buChar char="•"/>
+            </a:pPr>
+            <a:r>
+              <a:rPr lang="en-US" sz="1300" dirty="0">
                 <a:solidFill>
                   <a:srgbClr val="2A1618"/>
                 </a:solidFill>
@@ -9779,173 +10374,30 @@
                 <a:ea typeface="Calibri" pitchFamily="34" charset="-122"/>
                 <a:cs typeface="Calibri" pitchFamily="34" charset="-120"/>
               </a:rPr>
-              <a:t>F4 insert   </a:t>
-            </a:r>
-            <a:pPr algn="ctr" indent="0" marL="0">
-              <a:buNone/>
-            </a:pPr>
-            <a:r>
-              <a:rPr lang="en-US" sz="1300" b="1" dirty="0">
-                <a:solidFill>
-                  <a:srgbClr val="BE0000"/>
+              <a:t>MLP is 3 to 4x worse; with physics it collapses to the predict-centre baseline.</a:t>
+            </a:r>
+            <a:endParaRPr lang="en-US" sz="1300" dirty="0"/>
+          </a:p>
+          <a:p>
+            <a:pPr marL="342900" indent="-342900">
+              <a:spcAft>
+                <a:spcPts val="800"/>
+              </a:spcAft>
+              <a:buSzPct val="100000"/>
+              <a:buChar char="•"/>
+            </a:pPr>
+            <a:r>
+              <a:rPr lang="en-US" sz="1300" dirty="0">
+                <a:solidFill>
+                  <a:srgbClr val="2A1618"/>
                 </a:solidFill>
                 <a:latin typeface="Calibri" pitchFamily="34" charset="0"/>
                 <a:ea typeface="Calibri" pitchFamily="34" charset="-122"/>
                 <a:cs typeface="Calibri" pitchFamily="34" charset="-120"/>
               </a:rPr>
-              <a:t>0.16 in</a:t>
+              <a:t>At least 90 percent of positions land within the half-cell on all three phantoms.</a:t>
             </a:r>
             <a:endParaRPr lang="en-US" sz="1300" dirty="0"/>
-          </a:p>
-        </p:txBody>
-      </p:sp>
-      <p:sp>
-        <p:nvSpPr>
-          <p:cNvPr id="10" name="Shape 6"/>
-          <p:cNvSpPr/>
-          <p:nvPr/>
-        </p:nvSpPr>
-        <p:spPr>
-          <a:xfrm>
-            <a:off x="7904988" y="1627632"/>
-            <a:ext cx="3419856" cy="3950208"/>
-          </a:xfrm>
-          <a:prstGeom prst="roundRect">
-            <a:avLst>
-              <a:gd name="adj" fmla="val 2406"/>
-            </a:avLst>
-          </a:prstGeom>
-          <a:solidFill>
-            <a:srgbClr val="FBF4F2"/>
-          </a:solidFill>
-          <a:ln w="12700">
-            <a:solidFill>
-              <a:srgbClr val="E7D6D1"/>
-            </a:solidFill>
-            <a:prstDash val="solid"/>
-          </a:ln>
-          <a:effectLst>
-            <a:outerShdw sx="100000" sy="100000" kx="0" ky="0" algn="bl" rotWithShape="0" blurRad="88900" dist="38100" dir="5400000">
-              <a:srgbClr val="7A5C5E">
-                <a:alpha val="18000"/>
-              </a:srgbClr>
-            </a:outerShdw>
-          </a:effectLst>
-        </p:spPr>
-      </p:sp>
-      <p:pic>
-        <p:nvPicPr>
-          <p:cNvPr id="11" name="Image 2" descr="pred_vs_actual_loso_f5.png">    </p:cNvPr>
-          <p:cNvPicPr>
-            <a:picLocks noChangeAspect="1"/>
-          </p:cNvPicPr>
-          <p:nvPr/>
-        </p:nvPicPr>
-        <p:blipFill>
-          <a:blip r:embed="rId3"/>
-          <a:stretch>
-            <a:fillRect/>
-          </a:stretch>
-        </p:blipFill>
-        <p:spPr>
-          <a:xfrm>
-            <a:off x="8014716" y="1755648"/>
-            <a:ext cx="3200400" cy="3310128"/>
-          </a:xfrm>
-          <a:prstGeom prst="rect">
-            <a:avLst/>
-          </a:prstGeom>
-        </p:spPr>
-      </p:pic>
-      <p:sp>
-        <p:nvSpPr>
-          <p:cNvPr id="12" name="Text 7"/>
-          <p:cNvSpPr/>
-          <p:nvPr/>
-        </p:nvSpPr>
-        <p:spPr>
-          <a:xfrm>
-            <a:off x="7904988" y="5084064"/>
-            <a:ext cx="3419856" cy="347472"/>
-          </a:xfrm>
-          <a:prstGeom prst="rect">
-            <a:avLst/>
-          </a:prstGeom>
-          <a:noFill/>
-          <a:ln/>
-        </p:spPr>
-        <p:txBody>
-          <a:bodyPr wrap="square" lIns="0" tIns="0" rIns="0" bIns="0" rtlCol="0" anchor="ctr"/>
-          <a:lstStyle/>
-          <a:p>
-            <a:pPr algn="ctr" indent="0" marL="0">
-              <a:buNone/>
-            </a:pPr>
-            <a:r>
-              <a:rPr lang="en-US" sz="1300" b="1" dirty="0">
-                <a:solidFill>
-                  <a:srgbClr val="2A1618"/>
-                </a:solidFill>
-                <a:latin typeface="Calibri" pitchFamily="34" charset="0"/>
-                <a:ea typeface="Calibri" pitchFamily="34" charset="-122"/>
-                <a:cs typeface="Calibri" pitchFamily="34" charset="-120"/>
-              </a:rPr>
-              <a:t>F5 insert   </a:t>
-            </a:r>
-            <a:pPr algn="ctr" indent="0" marL="0">
-              <a:buNone/>
-            </a:pPr>
-            <a:r>
-              <a:rPr lang="en-US" sz="1300" b="1" dirty="0">
-                <a:solidFill>
-                  <a:srgbClr val="BE0000"/>
-                </a:solidFill>
-                <a:latin typeface="Calibri" pitchFamily="34" charset="0"/>
-                <a:ea typeface="Calibri" pitchFamily="34" charset="-122"/>
-                <a:cs typeface="Calibri" pitchFamily="34" charset="-120"/>
-              </a:rPr>
-              <a:t>0.22 in</a:t>
-            </a:r>
-            <a:endParaRPr lang="en-US" sz="1300" dirty="0"/>
-          </a:p>
-        </p:txBody>
-      </p:sp>
-      <p:sp>
-        <p:nvSpPr>
-          <p:cNvPr id="13" name="Text 8"/>
-          <p:cNvSpPr/>
-          <p:nvPr/>
-        </p:nvSpPr>
-        <p:spPr>
-          <a:xfrm>
-            <a:off x="548640" y="6144768"/>
-            <a:ext cx="11091672" cy="457200"/>
-          </a:xfrm>
-          <a:prstGeom prst="rect">
-            <a:avLst/>
-          </a:prstGeom>
-          <a:noFill/>
-          <a:ln/>
-        </p:spPr>
-        <p:txBody>
-          <a:bodyPr wrap="square" lIns="0" tIns="0" rIns="0" bIns="0" rtlCol="0" anchor="ctr"/>
-          <a:lstStyle/>
-          <a:p>
-            <a:pPr algn="ctr" indent="0" marL="0">
-              <a:buNone/>
-            </a:pPr>
-            <a:r>
-              <a:rPr lang="en-US" sz="1350" i="1" dirty="0">
-                <a:solidFill>
-                  <a:srgbClr val="836A68"/>
-                </a:solidFill>
-                <a:latin typeface="Calibri" pitchFamily="34" charset="0"/>
-                <a:ea typeface="Calibri" pitchFamily="34" charset="-122"/>
-                <a:cs typeface="Calibri" pitchFamily="34" charset="-120"/>
-              </a:rPr>
-              <a:t>Across empty, small (F4) and large (F5) inserts the CNN lands within a fifth of a cell. A new measurement session is not a problem.</a:t>
-            </a:r>
-            <a:endParaRPr lang="en-US" sz="1350" dirty="0"/>
           </a:p>
         </p:txBody>
       </p:sp>
@@ -10014,7 +10466,7 @@
                 <a:ea typeface="Cambria" pitchFamily="34" charset="-122"/>
                 <a:cs typeface="Cambria" pitchFamily="34" charset="-120"/>
               </a:rPr>
-              <a:t>Interpolating to an unseen cell (LOPO-cell, CNN)</a:t>
+              <a:t>Predicted vs. actual, LOSO (CNN)</a:t>
             </a:r>
             <a:endParaRPr lang="en-US" sz="2900" dirty="0"/>
           </a:p>
@@ -10053,42 +10505,26 @@
                 <a:ea typeface="Calibri" pitchFamily="34" charset="-122"/>
                 <a:cs typeface="Calibri" pitchFamily="34" charset="-120"/>
               </a:rPr>
-              <a:t>Hold a whole 1 in cell out of training, then predict a spot with no signature nearby</a:t>
+              <a:t>Crimson diamonds = prediction, open circles = true position, arrow = the error</a:t>
             </a:r>
             <a:endParaRPr lang="en-US" sz="1400" dirty="0"/>
           </a:p>
         </p:txBody>
       </p:sp>
-      <p:graphicFrame>
-        <p:nvGraphicFramePr>
-          <p:cNvPr id="4" name="Chart 0" descr=""/>
-          <p:cNvGraphicFramePr/>
-          <p:nvPr/>
-        </p:nvGraphicFramePr>
-        <p:xfrm>
-          <a:off x="548640" y="1554480"/>
-          <a:ext cx="6858000" cy="4663440"/>
-        </p:xfrm>
-        <a:graphic xmlns:a="http://schemas.openxmlformats.org/drawingml/2006/main">
-          <a:graphicData uri="http://schemas.openxmlformats.org/drawingml/2006/chart">
-            <c:chart xmlns:c="http://schemas.openxmlformats.org/drawingml/2006/chart" r:id="rId1"/>
-          </a:graphicData>
-        </a:graphic>
-      </p:graphicFrame>
-      <p:sp>
-        <p:nvSpPr>
-          <p:cNvPr id="5" name="Shape 2"/>
-          <p:cNvSpPr/>
-          <p:nvPr/>
-        </p:nvSpPr>
-        <p:spPr>
-          <a:xfrm>
-            <a:off x="7772400" y="1554480"/>
-            <a:ext cx="3840480" cy="4663440"/>
+      <p:sp>
+        <p:nvSpPr>
+          <p:cNvPr id="4" name="Shape 2"/>
+          <p:cNvSpPr/>
+          <p:nvPr/>
+        </p:nvSpPr>
+        <p:spPr>
+          <a:xfrm>
+            <a:off x="864108" y="1627632"/>
+            <a:ext cx="3419856" cy="3950208"/>
           </a:xfrm>
           <a:prstGeom prst="roundRect">
             <a:avLst>
-              <a:gd name="adj" fmla="val 2143"/>
+              <a:gd name="adj" fmla="val 2406"/>
             </a:avLst>
           </a:prstGeom>
           <a:solidFill>
@@ -10109,6 +10545,30 @@
           </a:effectLst>
         </p:spPr>
       </p:sp>
+      <p:pic>
+        <p:nvPicPr>
+          <p:cNvPr id="5" name="Image 0" descr="pred_vs_actual_loso_empty.png">    </p:cNvPr>
+          <p:cNvPicPr>
+            <a:picLocks noChangeAspect="1"/>
+          </p:cNvPicPr>
+          <p:nvPr/>
+        </p:nvPicPr>
+        <p:blipFill>
+          <a:blip r:embed="rId1"/>
+          <a:stretch>
+            <a:fillRect/>
+          </a:stretch>
+        </p:blipFill>
+        <p:spPr>
+          <a:xfrm>
+            <a:off x="973836" y="1755648"/>
+            <a:ext cx="3200400" cy="3310128"/>
+          </a:xfrm>
+          <a:prstGeom prst="rect">
+            <a:avLst/>
+          </a:prstGeom>
+        </p:spPr>
+      </p:pic>
       <p:sp>
         <p:nvSpPr>
           <p:cNvPr id="6" name="Text 3"/>
@@ -10117,8 +10577,8 @@
         </p:nvSpPr>
         <p:spPr>
           <a:xfrm>
-            <a:off x="8001000" y="1737360"/>
-            <a:ext cx="3383280" cy="365760"/>
+            <a:off x="864108" y="5084064"/>
+            <a:ext cx="3419856" cy="347472"/>
           </a:xfrm>
           <a:prstGeom prst="rect">
             <a:avLst/>
@@ -10130,54 +10590,11 @@
           <a:bodyPr wrap="square" lIns="0" tIns="0" rIns="0" bIns="0" rtlCol="0" anchor="ctr"/>
           <a:lstStyle/>
           <a:p>
-            <a:pPr indent="0" marL="0">
-              <a:buNone/>
-            </a:pPr>
-            <a:r>
-              <a:rPr lang="en-US" sz="1600" b="1" dirty="0">
-                <a:solidFill>
-                  <a:srgbClr val="BE0000"/>
-                </a:solidFill>
-                <a:latin typeface="Cambria" pitchFamily="34" charset="0"/>
-                <a:ea typeface="Cambria" pitchFamily="34" charset="-122"/>
-                <a:cs typeface="Cambria" pitchFamily="34" charset="-120"/>
-              </a:rPr>
-              <a:t>Three findings</a:t>
-            </a:r>
-            <a:endParaRPr lang="en-US" sz="1600" dirty="0"/>
-          </a:p>
-        </p:txBody>
-      </p:sp>
-      <p:sp>
-        <p:nvSpPr>
-          <p:cNvPr id="7" name="Text 4"/>
-          <p:cNvSpPr/>
-          <p:nvPr/>
-        </p:nvSpPr>
-        <p:spPr>
-          <a:xfrm>
-            <a:off x="8001000" y="2194560"/>
-            <a:ext cx="3383280" cy="3840480"/>
-          </a:xfrm>
-          <a:prstGeom prst="rect">
-            <a:avLst/>
-          </a:prstGeom>
-          <a:noFill/>
-          <a:ln/>
-        </p:spPr>
-        <p:txBody>
-          <a:bodyPr wrap="square" lIns="0" tIns="0" rIns="0" bIns="0" rtlCol="0" anchor="t"/>
-          <a:lstStyle/>
-          <a:p>
-            <a:pPr marL="342900" indent="-342900">
-              <a:spcAft>
-                <a:spcPts val="800"/>
-              </a:spcAft>
-              <a:buSzPct val="100000"/>
-              <a:buChar char="•"/>
-            </a:pPr>
-            <a:r>
-              <a:rPr lang="en-US" sz="1300" dirty="0">
+            <a:pPr algn="ctr" indent="0" marL="0">
+              <a:buNone/>
+            </a:pPr>
+            <a:r>
+              <a:rPr lang="en-US" sz="1300" b="1" dirty="0">
                 <a:solidFill>
                   <a:srgbClr val="2A1618"/>
                 </a:solidFill>
@@ -10185,41 +10602,110 @@
                 <a:ea typeface="Calibri" pitchFamily="34" charset="-122"/>
                 <a:cs typeface="Calibri" pitchFamily="34" charset="-120"/>
               </a:rPr>
-              <a:t>Model = CNN (raw, all 4 antennas), same as LOSO.</a:t>
-            </a:r>
-            <a:endParaRPr lang="en-US" sz="1300" dirty="0"/>
-          </a:p>
-          <a:p>
-            <a:pPr marL="342900" indent="-342900">
-              <a:spcAft>
-                <a:spcPts val="800"/>
-              </a:spcAft>
-              <a:buSzPct val="100000"/>
-              <a:buChar char="•"/>
-            </a:pPr>
-            <a:r>
-              <a:rPr lang="en-US" sz="1300" dirty="0">
-                <a:solidFill>
-                  <a:srgbClr val="2A1618"/>
+              <a:t>Empty   </a:t>
+            </a:r>
+            <a:pPr algn="ctr" indent="0" marL="0">
+              <a:buNone/>
+            </a:pPr>
+            <a:r>
+              <a:rPr lang="en-US" sz="1300" b="1" dirty="0">
+                <a:solidFill>
+                  <a:srgbClr val="BE0000"/>
                 </a:solidFill>
                 <a:latin typeface="Calibri" pitchFamily="34" charset="0"/>
                 <a:ea typeface="Calibri" pitchFamily="34" charset="-122"/>
                 <a:cs typeface="Calibri" pitchFamily="34" charset="-120"/>
               </a:rPr>
-              <a:t>Pooled = the held-out cell is removed from EVERY session, train on all the rest. In-session = train and test inside one session (drift removed).</a:t>
+              <a:t>0.15 in</a:t>
             </a:r>
             <a:endParaRPr lang="en-US" sz="1300" dirty="0"/>
           </a:p>
-          <a:p>
-            <a:pPr marL="342900" indent="-342900">
-              <a:spcAft>
-                <a:spcPts val="800"/>
-              </a:spcAft>
-              <a:buSzPct val="100000"/>
-              <a:buChar char="•"/>
-            </a:pPr>
-            <a:r>
-              <a:rPr lang="en-US" sz="1300" dirty="0">
+        </p:txBody>
+      </p:sp>
+      <p:sp>
+        <p:nvSpPr>
+          <p:cNvPr id="7" name="Shape 4"/>
+          <p:cNvSpPr/>
+          <p:nvPr/>
+        </p:nvSpPr>
+        <p:spPr>
+          <a:xfrm>
+            <a:off x="4384548" y="1627632"/>
+            <a:ext cx="3419856" cy="3950208"/>
+          </a:xfrm>
+          <a:prstGeom prst="roundRect">
+            <a:avLst>
+              <a:gd name="adj" fmla="val 2406"/>
+            </a:avLst>
+          </a:prstGeom>
+          <a:solidFill>
+            <a:srgbClr val="FBF4F2"/>
+          </a:solidFill>
+          <a:ln w="12700">
+            <a:solidFill>
+              <a:srgbClr val="E7D6D1"/>
+            </a:solidFill>
+            <a:prstDash val="solid"/>
+          </a:ln>
+          <a:effectLst>
+            <a:outerShdw sx="100000" sy="100000" kx="0" ky="0" algn="bl" rotWithShape="0" blurRad="88900" dist="38100" dir="5400000">
+              <a:srgbClr val="7A5C5E">
+                <a:alpha val="18000"/>
+              </a:srgbClr>
+            </a:outerShdw>
+          </a:effectLst>
+        </p:spPr>
+      </p:sp>
+      <p:pic>
+        <p:nvPicPr>
+          <p:cNvPr id="8" name="Image 1" descr="pred_vs_actual_loso_f4.png">    </p:cNvPr>
+          <p:cNvPicPr>
+            <a:picLocks noChangeAspect="1"/>
+          </p:cNvPicPr>
+          <p:nvPr/>
+        </p:nvPicPr>
+        <p:blipFill>
+          <a:blip r:embed="rId2"/>
+          <a:stretch>
+            <a:fillRect/>
+          </a:stretch>
+        </p:blipFill>
+        <p:spPr>
+          <a:xfrm>
+            <a:off x="4494276" y="1755648"/>
+            <a:ext cx="3200400" cy="3310128"/>
+          </a:xfrm>
+          <a:prstGeom prst="rect">
+            <a:avLst/>
+          </a:prstGeom>
+        </p:spPr>
+      </p:pic>
+      <p:sp>
+        <p:nvSpPr>
+          <p:cNvPr id="9" name="Text 5"/>
+          <p:cNvSpPr/>
+          <p:nvPr/>
+        </p:nvSpPr>
+        <p:spPr>
+          <a:xfrm>
+            <a:off x="4384548" y="5084064"/>
+            <a:ext cx="3419856" cy="347472"/>
+          </a:xfrm>
+          <a:prstGeom prst="rect">
+            <a:avLst/>
+          </a:prstGeom>
+          <a:noFill/>
+          <a:ln/>
+        </p:spPr>
+        <p:txBody>
+          <a:bodyPr wrap="square" lIns="0" tIns="0" rIns="0" bIns="0" rtlCol="0" anchor="ctr"/>
+          <a:lstStyle/>
+          <a:p>
+            <a:pPr algn="ctr" indent="0" marL="0">
+              <a:buNone/>
+            </a:pPr>
+            <a:r>
+              <a:rPr lang="en-US" sz="1300" b="1" dirty="0">
                 <a:solidFill>
                   <a:srgbClr val="2A1618"/>
                 </a:solidFill>
@@ -10227,30 +10713,173 @@
                 <a:ea typeface="Calibri" pitchFamily="34" charset="-122"/>
                 <a:cs typeface="Calibri" pitchFamily="34" charset="-120"/>
               </a:rPr>
-              <a:t>Interpolation is 3 to 4x harder than a new session (0.47 to 0.67 vs 0.15 to 0.22 in).</a:t>
-            </a:r>
-            <a:endParaRPr lang="en-US" sz="1300" dirty="0"/>
-          </a:p>
-          <a:p>
-            <a:pPr marL="342900" indent="-342900">
-              <a:spcAft>
-                <a:spcPts val="800"/>
-              </a:spcAft>
-              <a:buSzPct val="100000"/>
-              <a:buChar char="•"/>
-            </a:pPr>
-            <a:r>
-              <a:rPr lang="en-US" sz="1300" dirty="0">
-                <a:solidFill>
-                  <a:srgbClr val="2A1618"/>
+              <a:t>F4 insert   </a:t>
+            </a:r>
+            <a:pPr algn="ctr" indent="0" marL="0">
+              <a:buNone/>
+            </a:pPr>
+            <a:r>
+              <a:rPr lang="en-US" sz="1300" b="1" dirty="0">
+                <a:solidFill>
+                  <a:srgbClr val="BE0000"/>
                 </a:solidFill>
                 <a:latin typeface="Calibri" pitchFamily="34" charset="0"/>
                 <a:ea typeface="Calibri" pitchFamily="34" charset="-122"/>
                 <a:cs typeface="Calibri" pitchFamily="34" charset="-120"/>
               </a:rPr>
-              <a:t>Pooled beats in-session on all three: for interpolation, more data beats removing drift.</a:t>
+              <a:t>0.16 in</a:t>
             </a:r>
             <a:endParaRPr lang="en-US" sz="1300" dirty="0"/>
+          </a:p>
+        </p:txBody>
+      </p:sp>
+      <p:sp>
+        <p:nvSpPr>
+          <p:cNvPr id="10" name="Shape 6"/>
+          <p:cNvSpPr/>
+          <p:nvPr/>
+        </p:nvSpPr>
+        <p:spPr>
+          <a:xfrm>
+            <a:off x="7904988" y="1627632"/>
+            <a:ext cx="3419856" cy="3950208"/>
+          </a:xfrm>
+          <a:prstGeom prst="roundRect">
+            <a:avLst>
+              <a:gd name="adj" fmla="val 2406"/>
+            </a:avLst>
+          </a:prstGeom>
+          <a:solidFill>
+            <a:srgbClr val="FBF4F2"/>
+          </a:solidFill>
+          <a:ln w="12700">
+            <a:solidFill>
+              <a:srgbClr val="E7D6D1"/>
+            </a:solidFill>
+            <a:prstDash val="solid"/>
+          </a:ln>
+          <a:effectLst>
+            <a:outerShdw sx="100000" sy="100000" kx="0" ky="0" algn="bl" rotWithShape="0" blurRad="88900" dist="38100" dir="5400000">
+              <a:srgbClr val="7A5C5E">
+                <a:alpha val="18000"/>
+              </a:srgbClr>
+            </a:outerShdw>
+          </a:effectLst>
+        </p:spPr>
+      </p:sp>
+      <p:pic>
+        <p:nvPicPr>
+          <p:cNvPr id="11" name="Image 2" descr="pred_vs_actual_loso_f5.png">    </p:cNvPr>
+          <p:cNvPicPr>
+            <a:picLocks noChangeAspect="1"/>
+          </p:cNvPicPr>
+          <p:nvPr/>
+        </p:nvPicPr>
+        <p:blipFill>
+          <a:blip r:embed="rId3"/>
+          <a:stretch>
+            <a:fillRect/>
+          </a:stretch>
+        </p:blipFill>
+        <p:spPr>
+          <a:xfrm>
+            <a:off x="8014716" y="1755648"/>
+            <a:ext cx="3200400" cy="3310128"/>
+          </a:xfrm>
+          <a:prstGeom prst="rect">
+            <a:avLst/>
+          </a:prstGeom>
+        </p:spPr>
+      </p:pic>
+      <p:sp>
+        <p:nvSpPr>
+          <p:cNvPr id="12" name="Text 7"/>
+          <p:cNvSpPr/>
+          <p:nvPr/>
+        </p:nvSpPr>
+        <p:spPr>
+          <a:xfrm>
+            <a:off x="7904988" y="5084064"/>
+            <a:ext cx="3419856" cy="347472"/>
+          </a:xfrm>
+          <a:prstGeom prst="rect">
+            <a:avLst/>
+          </a:prstGeom>
+          <a:noFill/>
+          <a:ln/>
+        </p:spPr>
+        <p:txBody>
+          <a:bodyPr wrap="square" lIns="0" tIns="0" rIns="0" bIns="0" rtlCol="0" anchor="ctr"/>
+          <a:lstStyle/>
+          <a:p>
+            <a:pPr algn="ctr" indent="0" marL="0">
+              <a:buNone/>
+            </a:pPr>
+            <a:r>
+              <a:rPr lang="en-US" sz="1300" b="1" dirty="0">
+                <a:solidFill>
+                  <a:srgbClr val="2A1618"/>
+                </a:solidFill>
+                <a:latin typeface="Calibri" pitchFamily="34" charset="0"/>
+                <a:ea typeface="Calibri" pitchFamily="34" charset="-122"/>
+                <a:cs typeface="Calibri" pitchFamily="34" charset="-120"/>
+              </a:rPr>
+              <a:t>F5 insert   </a:t>
+            </a:r>
+            <a:pPr algn="ctr" indent="0" marL="0">
+              <a:buNone/>
+            </a:pPr>
+            <a:r>
+              <a:rPr lang="en-US" sz="1300" b="1" dirty="0">
+                <a:solidFill>
+                  <a:srgbClr val="BE0000"/>
+                </a:solidFill>
+                <a:latin typeface="Calibri" pitchFamily="34" charset="0"/>
+                <a:ea typeface="Calibri" pitchFamily="34" charset="-122"/>
+                <a:cs typeface="Calibri" pitchFamily="34" charset="-120"/>
+              </a:rPr>
+              <a:t>0.22 in</a:t>
+            </a:r>
+            <a:endParaRPr lang="en-US" sz="1300" dirty="0"/>
+          </a:p>
+        </p:txBody>
+      </p:sp>
+      <p:sp>
+        <p:nvSpPr>
+          <p:cNvPr id="13" name="Text 8"/>
+          <p:cNvSpPr/>
+          <p:nvPr/>
+        </p:nvSpPr>
+        <p:spPr>
+          <a:xfrm>
+            <a:off x="548640" y="6144768"/>
+            <a:ext cx="11091672" cy="457200"/>
+          </a:xfrm>
+          <a:prstGeom prst="rect">
+            <a:avLst/>
+          </a:prstGeom>
+          <a:noFill/>
+          <a:ln/>
+        </p:spPr>
+        <p:txBody>
+          <a:bodyPr wrap="square" lIns="0" tIns="0" rIns="0" bIns="0" rtlCol="0" anchor="ctr"/>
+          <a:lstStyle/>
+          <a:p>
+            <a:pPr algn="ctr" indent="0" marL="0">
+              <a:buNone/>
+            </a:pPr>
+            <a:r>
+              <a:rPr lang="en-US" sz="1350" i="1" dirty="0">
+                <a:solidFill>
+                  <a:srgbClr val="836A68"/>
+                </a:solidFill>
+                <a:latin typeface="Calibri" pitchFamily="34" charset="0"/>
+                <a:ea typeface="Calibri" pitchFamily="34" charset="-122"/>
+                <a:cs typeface="Calibri" pitchFamily="34" charset="-120"/>
+              </a:rPr>
+              <a:t>Across empty, small (F4) and large (F5) inserts the CNN lands within a fifth of a cell. A new measurement session is not a problem.</a:t>
+            </a:r>
+            <a:endParaRPr lang="en-US" sz="1350" dirty="0"/>
           </a:p>
         </p:txBody>
       </p:sp>
@@ -10319,7 +10948,7 @@
                 <a:ea typeface="Cambria" pitchFamily="34" charset="-122"/>
                 <a:cs typeface="Cambria" pitchFamily="34" charset="-120"/>
               </a:rPr>
-              <a:t>Predicted vs. actual, LOPO-cell (CNN, pooled)</a:t>
+              <a:t>Interpolating to an unseen cell (LOPO-cell, CNN)</a:t>
             </a:r>
             <a:endParaRPr lang="en-US" sz="2900" dirty="0"/>
           </a:p>
@@ -10358,26 +10987,42 @@
                 <a:ea typeface="Calibri" pitchFamily="34" charset="-122"/>
                 <a:cs typeface="Calibri" pitchFamily="34" charset="-120"/>
               </a:rPr>
-              <a:t>Predicting locations never sampled; the dashed outline is the glandular insert</a:t>
+              <a:t>Hold a whole 1 in cell out of training, then predict a spot with no signature nearby</a:t>
             </a:r>
             <a:endParaRPr lang="en-US" sz="1400" dirty="0"/>
           </a:p>
         </p:txBody>
       </p:sp>
-      <p:sp>
-        <p:nvSpPr>
-          <p:cNvPr id="4" name="Shape 2"/>
-          <p:cNvSpPr/>
-          <p:nvPr/>
-        </p:nvSpPr>
-        <p:spPr>
-          <a:xfrm>
-            <a:off x="864108" y="1627632"/>
-            <a:ext cx="3419856" cy="3950208"/>
+      <p:graphicFrame>
+        <p:nvGraphicFramePr>
+          <p:cNvPr id="4" name="Chart 0" descr=""/>
+          <p:cNvGraphicFramePr/>
+          <p:nvPr/>
+        </p:nvGraphicFramePr>
+        <p:xfrm>
+          <a:off x="548640" y="1554480"/>
+          <a:ext cx="6858000" cy="4663440"/>
+        </p:xfrm>
+        <a:graphic xmlns:a="http://schemas.openxmlformats.org/drawingml/2006/main">
+          <a:graphicData uri="http://schemas.openxmlformats.org/drawingml/2006/chart">
+            <c:chart xmlns:c="http://schemas.openxmlformats.org/drawingml/2006/chart" r:id="rId1"/>
+          </a:graphicData>
+        </a:graphic>
+      </p:graphicFrame>
+      <p:sp>
+        <p:nvSpPr>
+          <p:cNvPr id="5" name="Shape 2"/>
+          <p:cNvSpPr/>
+          <p:nvPr/>
+        </p:nvSpPr>
+        <p:spPr>
+          <a:xfrm>
+            <a:off x="7772400" y="1554480"/>
+            <a:ext cx="3840480" cy="4663440"/>
           </a:xfrm>
           <a:prstGeom prst="roundRect">
             <a:avLst>
-              <a:gd name="adj" fmla="val 2406"/>
+              <a:gd name="adj" fmla="val 2143"/>
             </a:avLst>
           </a:prstGeom>
           <a:solidFill>
@@ -10398,30 +11043,6 @@
           </a:effectLst>
         </p:spPr>
       </p:sp>
-      <p:pic>
-        <p:nvPicPr>
-          <p:cNvPr id="5" name="Image 0" descr="pred_vs_actual_lopo_empty.png">    </p:cNvPr>
-          <p:cNvPicPr>
-            <a:picLocks noChangeAspect="1"/>
-          </p:cNvPicPr>
-          <p:nvPr/>
-        </p:nvPicPr>
-        <p:blipFill>
-          <a:blip r:embed="rId1"/>
-          <a:stretch>
-            <a:fillRect/>
-          </a:stretch>
-        </p:blipFill>
-        <p:spPr>
-          <a:xfrm>
-            <a:off x="973836" y="1755648"/>
-            <a:ext cx="3200400" cy="3310128"/>
-          </a:xfrm>
-          <a:prstGeom prst="rect">
-            <a:avLst/>
-          </a:prstGeom>
-        </p:spPr>
-      </p:pic>
       <p:sp>
         <p:nvSpPr>
           <p:cNvPr id="6" name="Text 3"/>
@@ -10430,8 +11051,8 @@
         </p:nvSpPr>
         <p:spPr>
           <a:xfrm>
-            <a:off x="864108" y="5084064"/>
-            <a:ext cx="3419856" cy="347472"/>
+            <a:off x="8001000" y="1737360"/>
+            <a:ext cx="3383280" cy="365760"/>
           </a:xfrm>
           <a:prstGeom prst="rect">
             <a:avLst/>
@@ -10443,11 +11064,54 @@
           <a:bodyPr wrap="square" lIns="0" tIns="0" rIns="0" bIns="0" rtlCol="0" anchor="ctr"/>
           <a:lstStyle/>
           <a:p>
-            <a:pPr algn="ctr" indent="0" marL="0">
-              <a:buNone/>
-            </a:pPr>
-            <a:r>
-              <a:rPr lang="en-US" sz="1300" b="1" dirty="0">
+            <a:pPr indent="0" marL="0">
+              <a:buNone/>
+            </a:pPr>
+            <a:r>
+              <a:rPr lang="en-US" sz="1600" b="1" dirty="0">
+                <a:solidFill>
+                  <a:srgbClr val="BE0000"/>
+                </a:solidFill>
+                <a:latin typeface="Cambria" pitchFamily="34" charset="0"/>
+                <a:ea typeface="Cambria" pitchFamily="34" charset="-122"/>
+                <a:cs typeface="Cambria" pitchFamily="34" charset="-120"/>
+              </a:rPr>
+              <a:t>Three findings</a:t>
+            </a:r>
+            <a:endParaRPr lang="en-US" sz="1600" dirty="0"/>
+          </a:p>
+        </p:txBody>
+      </p:sp>
+      <p:sp>
+        <p:nvSpPr>
+          <p:cNvPr id="7" name="Text 4"/>
+          <p:cNvSpPr/>
+          <p:nvPr/>
+        </p:nvSpPr>
+        <p:spPr>
+          <a:xfrm>
+            <a:off x="8001000" y="2194560"/>
+            <a:ext cx="3383280" cy="3840480"/>
+          </a:xfrm>
+          <a:prstGeom prst="rect">
+            <a:avLst/>
+          </a:prstGeom>
+          <a:noFill/>
+          <a:ln/>
+        </p:spPr>
+        <p:txBody>
+          <a:bodyPr wrap="square" lIns="0" tIns="0" rIns="0" bIns="0" rtlCol="0" anchor="t"/>
+          <a:lstStyle/>
+          <a:p>
+            <a:pPr marL="342900" indent="-342900">
+              <a:spcAft>
+                <a:spcPts val="800"/>
+              </a:spcAft>
+              <a:buSzPct val="100000"/>
+              <a:buChar char="•"/>
+            </a:pPr>
+            <a:r>
+              <a:rPr lang="en-US" sz="1300" dirty="0">
                 <a:solidFill>
                   <a:srgbClr val="2A1618"/>
                 </a:solidFill>
@@ -10455,110 +11119,41 @@
                 <a:ea typeface="Calibri" pitchFamily="34" charset="-122"/>
                 <a:cs typeface="Calibri" pitchFamily="34" charset="-120"/>
               </a:rPr>
-              <a:t>Empty   </a:t>
-            </a:r>
-            <a:pPr algn="ctr" indent="0" marL="0">
-              <a:buNone/>
-            </a:pPr>
-            <a:r>
-              <a:rPr lang="en-US" sz="1300" b="1" dirty="0">
-                <a:solidFill>
-                  <a:srgbClr val="BE0000"/>
+              <a:t>Model = CNN (raw, all 4 antennas), same as LOSO.</a:t>
+            </a:r>
+            <a:endParaRPr lang="en-US" sz="1300" dirty="0"/>
+          </a:p>
+          <a:p>
+            <a:pPr marL="342900" indent="-342900">
+              <a:spcAft>
+                <a:spcPts val="800"/>
+              </a:spcAft>
+              <a:buSzPct val="100000"/>
+              <a:buChar char="•"/>
+            </a:pPr>
+            <a:r>
+              <a:rPr lang="en-US" sz="1300" dirty="0">
+                <a:solidFill>
+                  <a:srgbClr val="2A1618"/>
                 </a:solidFill>
                 <a:latin typeface="Calibri" pitchFamily="34" charset="0"/>
                 <a:ea typeface="Calibri" pitchFamily="34" charset="-122"/>
                 <a:cs typeface="Calibri" pitchFamily="34" charset="-120"/>
               </a:rPr>
-              <a:t>0.47 in</a:t>
+              <a:t>Pooled = the held-out cell is removed from EVERY session, train on all the rest. In-session = train and test inside one session (drift removed).</a:t>
             </a:r>
             <a:endParaRPr lang="en-US" sz="1300" dirty="0"/>
           </a:p>
-        </p:txBody>
-      </p:sp>
-      <p:sp>
-        <p:nvSpPr>
-          <p:cNvPr id="7" name="Shape 4"/>
-          <p:cNvSpPr/>
-          <p:nvPr/>
-        </p:nvSpPr>
-        <p:spPr>
-          <a:xfrm>
-            <a:off x="4384548" y="1627632"/>
-            <a:ext cx="3419856" cy="3950208"/>
-          </a:xfrm>
-          <a:prstGeom prst="roundRect">
-            <a:avLst>
-              <a:gd name="adj" fmla="val 2406"/>
-            </a:avLst>
-          </a:prstGeom>
-          <a:solidFill>
-            <a:srgbClr val="FBF4F2"/>
-          </a:solidFill>
-          <a:ln w="12700">
-            <a:solidFill>
-              <a:srgbClr val="E7D6D1"/>
-            </a:solidFill>
-            <a:prstDash val="solid"/>
-          </a:ln>
-          <a:effectLst>
-            <a:outerShdw sx="100000" sy="100000" kx="0" ky="0" algn="bl" rotWithShape="0" blurRad="88900" dist="38100" dir="5400000">
-              <a:srgbClr val="7A5C5E">
-                <a:alpha val="18000"/>
-              </a:srgbClr>
-            </a:outerShdw>
-          </a:effectLst>
-        </p:spPr>
-      </p:sp>
-      <p:pic>
-        <p:nvPicPr>
-          <p:cNvPr id="8" name="Image 1" descr="pred_vs_actual_lopo_f4.png">    </p:cNvPr>
-          <p:cNvPicPr>
-            <a:picLocks noChangeAspect="1"/>
-          </p:cNvPicPr>
-          <p:nvPr/>
-        </p:nvPicPr>
-        <p:blipFill>
-          <a:blip r:embed="rId2"/>
-          <a:stretch>
-            <a:fillRect/>
-          </a:stretch>
-        </p:blipFill>
-        <p:spPr>
-          <a:xfrm>
-            <a:off x="4494276" y="1755648"/>
-            <a:ext cx="3200400" cy="3310128"/>
-          </a:xfrm>
-          <a:prstGeom prst="rect">
-            <a:avLst/>
-          </a:prstGeom>
-        </p:spPr>
-      </p:pic>
-      <p:sp>
-        <p:nvSpPr>
-          <p:cNvPr id="9" name="Text 5"/>
-          <p:cNvSpPr/>
-          <p:nvPr/>
-        </p:nvSpPr>
-        <p:spPr>
-          <a:xfrm>
-            <a:off x="4384548" y="5084064"/>
-            <a:ext cx="3419856" cy="347472"/>
-          </a:xfrm>
-          <a:prstGeom prst="rect">
-            <a:avLst/>
-          </a:prstGeom>
-          <a:noFill/>
-          <a:ln/>
-        </p:spPr>
-        <p:txBody>
-          <a:bodyPr wrap="square" lIns="0" tIns="0" rIns="0" bIns="0" rtlCol="0" anchor="ctr"/>
-          <a:lstStyle/>
-          <a:p>
-            <a:pPr algn="ctr" indent="0" marL="0">
-              <a:buNone/>
-            </a:pPr>
-            <a:r>
-              <a:rPr lang="en-US" sz="1300" b="1" dirty="0">
+          <a:p>
+            <a:pPr marL="342900" indent="-342900">
+              <a:spcAft>
+                <a:spcPts val="800"/>
+              </a:spcAft>
+              <a:buSzPct val="100000"/>
+              <a:buChar char="•"/>
+            </a:pPr>
+            <a:r>
+              <a:rPr lang="en-US" sz="1300" dirty="0">
                 <a:solidFill>
                   <a:srgbClr val="2A1618"/>
                 </a:solidFill>
@@ -10566,173 +11161,30 @@
                 <a:ea typeface="Calibri" pitchFamily="34" charset="-122"/>
                 <a:cs typeface="Calibri" pitchFamily="34" charset="-120"/>
               </a:rPr>
-              <a:t>F4 insert   </a:t>
-            </a:r>
-            <a:pPr algn="ctr" indent="0" marL="0">
-              <a:buNone/>
-            </a:pPr>
-            <a:r>
-              <a:rPr lang="en-US" sz="1300" b="1" dirty="0">
-                <a:solidFill>
-                  <a:srgbClr val="BE0000"/>
+              <a:t>Interpolation is 3 to 4x harder than a new session (0.47 to 0.67 vs 0.15 to 0.22 in).</a:t>
+            </a:r>
+            <a:endParaRPr lang="en-US" sz="1300" dirty="0"/>
+          </a:p>
+          <a:p>
+            <a:pPr marL="342900" indent="-342900">
+              <a:spcAft>
+                <a:spcPts val="800"/>
+              </a:spcAft>
+              <a:buSzPct val="100000"/>
+              <a:buChar char="•"/>
+            </a:pPr>
+            <a:r>
+              <a:rPr lang="en-US" sz="1300" dirty="0">
+                <a:solidFill>
+                  <a:srgbClr val="2A1618"/>
                 </a:solidFill>
                 <a:latin typeface="Calibri" pitchFamily="34" charset="0"/>
                 <a:ea typeface="Calibri" pitchFamily="34" charset="-122"/>
                 <a:cs typeface="Calibri" pitchFamily="34" charset="-120"/>
               </a:rPr>
-              <a:t>0.49 in</a:t>
+              <a:t>Pooled beats in-session on all three: for interpolation, more data beats removing drift.</a:t>
             </a:r>
             <a:endParaRPr lang="en-US" sz="1300" dirty="0"/>
-          </a:p>
-        </p:txBody>
-      </p:sp>
-      <p:sp>
-        <p:nvSpPr>
-          <p:cNvPr id="10" name="Shape 6"/>
-          <p:cNvSpPr/>
-          <p:nvPr/>
-        </p:nvSpPr>
-        <p:spPr>
-          <a:xfrm>
-            <a:off x="7904988" y="1627632"/>
-            <a:ext cx="3419856" cy="3950208"/>
-          </a:xfrm>
-          <a:prstGeom prst="roundRect">
-            <a:avLst>
-              <a:gd name="adj" fmla="val 2406"/>
-            </a:avLst>
-          </a:prstGeom>
-          <a:solidFill>
-            <a:srgbClr val="FBF4F2"/>
-          </a:solidFill>
-          <a:ln w="12700">
-            <a:solidFill>
-              <a:srgbClr val="E7D6D1"/>
-            </a:solidFill>
-            <a:prstDash val="solid"/>
-          </a:ln>
-          <a:effectLst>
-            <a:outerShdw sx="100000" sy="100000" kx="0" ky="0" algn="bl" rotWithShape="0" blurRad="88900" dist="38100" dir="5400000">
-              <a:srgbClr val="7A5C5E">
-                <a:alpha val="18000"/>
-              </a:srgbClr>
-            </a:outerShdw>
-          </a:effectLst>
-        </p:spPr>
-      </p:sp>
-      <p:pic>
-        <p:nvPicPr>
-          <p:cNvPr id="11" name="Image 2" descr="pred_vs_actual_lopo_f5.png">    </p:cNvPr>
-          <p:cNvPicPr>
-            <a:picLocks noChangeAspect="1"/>
-          </p:cNvPicPr>
-          <p:nvPr/>
-        </p:nvPicPr>
-        <p:blipFill>
-          <a:blip r:embed="rId3"/>
-          <a:stretch>
-            <a:fillRect/>
-          </a:stretch>
-        </p:blipFill>
-        <p:spPr>
-          <a:xfrm>
-            <a:off x="8014716" y="1755648"/>
-            <a:ext cx="3200400" cy="3310128"/>
-          </a:xfrm>
-          <a:prstGeom prst="rect">
-            <a:avLst/>
-          </a:prstGeom>
-        </p:spPr>
-      </p:pic>
-      <p:sp>
-        <p:nvSpPr>
-          <p:cNvPr id="12" name="Text 7"/>
-          <p:cNvSpPr/>
-          <p:nvPr/>
-        </p:nvSpPr>
-        <p:spPr>
-          <a:xfrm>
-            <a:off x="7904988" y="5084064"/>
-            <a:ext cx="3419856" cy="347472"/>
-          </a:xfrm>
-          <a:prstGeom prst="rect">
-            <a:avLst/>
-          </a:prstGeom>
-          <a:noFill/>
-          <a:ln/>
-        </p:spPr>
-        <p:txBody>
-          <a:bodyPr wrap="square" lIns="0" tIns="0" rIns="0" bIns="0" rtlCol="0" anchor="ctr"/>
-          <a:lstStyle/>
-          <a:p>
-            <a:pPr algn="ctr" indent="0" marL="0">
-              <a:buNone/>
-            </a:pPr>
-            <a:r>
-              <a:rPr lang="en-US" sz="1300" b="1" dirty="0">
-                <a:solidFill>
-                  <a:srgbClr val="2A1618"/>
-                </a:solidFill>
-                <a:latin typeface="Calibri" pitchFamily="34" charset="0"/>
-                <a:ea typeface="Calibri" pitchFamily="34" charset="-122"/>
-                <a:cs typeface="Calibri" pitchFamily="34" charset="-120"/>
-              </a:rPr>
-              <a:t>F5 insert   </a:t>
-            </a:r>
-            <a:pPr algn="ctr" indent="0" marL="0">
-              <a:buNone/>
-            </a:pPr>
-            <a:r>
-              <a:rPr lang="en-US" sz="1300" b="1" dirty="0">
-                <a:solidFill>
-                  <a:srgbClr val="BE0000"/>
-                </a:solidFill>
-                <a:latin typeface="Calibri" pitchFamily="34" charset="0"/>
-                <a:ea typeface="Calibri" pitchFamily="34" charset="-122"/>
-                <a:cs typeface="Calibri" pitchFamily="34" charset="-120"/>
-              </a:rPr>
-              <a:t>0.67 in</a:t>
-            </a:r>
-            <a:endParaRPr lang="en-US" sz="1300" dirty="0"/>
-          </a:p>
-        </p:txBody>
-      </p:sp>
-      <p:sp>
-        <p:nvSpPr>
-          <p:cNvPr id="13" name="Text 8"/>
-          <p:cNvSpPr/>
-          <p:nvPr/>
-        </p:nvSpPr>
-        <p:spPr>
-          <a:xfrm>
-            <a:off x="548640" y="6144768"/>
-            <a:ext cx="11091672" cy="457200"/>
-          </a:xfrm>
-          <a:prstGeom prst="rect">
-            <a:avLst/>
-          </a:prstGeom>
-          <a:noFill/>
-          <a:ln/>
-        </p:spPr>
-        <p:txBody>
-          <a:bodyPr wrap="square" lIns="0" tIns="0" rIns="0" bIns="0" rtlCol="0" anchor="ctr"/>
-          <a:lstStyle/>
-          <a:p>
-            <a:pPr algn="ctr" indent="0" marL="0">
-              <a:buNone/>
-            </a:pPr>
-            <a:r>
-              <a:rPr lang="en-US" sz="1350" i="1" dirty="0">
-                <a:solidFill>
-                  <a:srgbClr val="836A68"/>
-                </a:solidFill>
-                <a:latin typeface="Calibri" pitchFamily="34" charset="0"/>
-                <a:ea typeface="Calibri" pitchFamily="34" charset="-122"/>
-                <a:cs typeface="Calibri" pitchFamily="34" charset="-120"/>
-              </a:rPr>
-              <a:t>Interpolation error climbs with insert size (0.47, 0.49, 0.67 in) and predictions pull inward, concentrating over the glandular insert the CNN never sampled.</a:t>
-            </a:r>
-            <a:endParaRPr lang="en-US" sz="1350" dirty="0"/>
           </a:p>
         </p:txBody>
       </p:sp>
@@ -10801,7 +11253,7 @@
                 <a:ea typeface="Cambria" pitchFamily="34" charset="-122"/>
                 <a:cs typeface="Cambria" pitchFamily="34" charset="-120"/>
               </a:rPr>
-              <a:t>Predicted vs. actual, single-position (CNN, pooled)</a:t>
+              <a:t>Predicted vs. actual, LOPO-cell (CNN, pooled)</a:t>
             </a:r>
             <a:endParaRPr lang="en-US" sz="2900" dirty="0"/>
           </a:p>
@@ -10840,7 +11292,7 @@
                 <a:ea typeface="Calibri" pitchFamily="34" charset="-122"/>
                 <a:cs typeface="Calibri" pitchFamily="34" charset="-120"/>
               </a:rPr>
-              <a:t>Hold out one sub-position; its 3 cell-mates stay in training</a:t>
+              <a:t>Predicting locations never sampled; the dashed outline is the glandular insert</a:t>
             </a:r>
             <a:endParaRPr lang="en-US" sz="1400" dirty="0"/>
           </a:p>
@@ -10882,7 +11334,7 @@
       </p:sp>
       <p:pic>
         <p:nvPicPr>
-          <p:cNvPr id="5" name="Image 0" descr="pred_vs_actual_subpos_empty.png">    </p:cNvPr>
+          <p:cNvPr id="5" name="Image 0" descr="pred_vs_actual_lopo_empty.png">    </p:cNvPr>
           <p:cNvPicPr>
             <a:picLocks noChangeAspect="1"/>
           </p:cNvPicPr>
@@ -10951,7 +11403,7 @@
                 <a:ea typeface="Calibri" pitchFamily="34" charset="-122"/>
                 <a:cs typeface="Calibri" pitchFamily="34" charset="-120"/>
               </a:rPr>
-              <a:t>0.39 in</a:t>
+              <a:t>0.47 in</a:t>
             </a:r>
             <a:endParaRPr lang="en-US" sz="1300" dirty="0"/>
           </a:p>
@@ -10993,7 +11445,7 @@
       </p:sp>
       <p:pic>
         <p:nvPicPr>
-          <p:cNvPr id="8" name="Image 1" descr="pred_vs_actual_subpos_f4.png">    </p:cNvPr>
+          <p:cNvPr id="8" name="Image 1" descr="pred_vs_actual_lopo_f4.png">    </p:cNvPr>
           <p:cNvPicPr>
             <a:picLocks noChangeAspect="1"/>
           </p:cNvPicPr>
@@ -11062,7 +11514,7 @@
                 <a:ea typeface="Calibri" pitchFamily="34" charset="-122"/>
                 <a:cs typeface="Calibri" pitchFamily="34" charset="-120"/>
               </a:rPr>
-              <a:t>pending</a:t>
+              <a:t>0.49 in</a:t>
             </a:r>
             <a:endParaRPr lang="en-US" sz="1300" dirty="0"/>
           </a:p>
@@ -11104,7 +11556,7 @@
       </p:sp>
       <p:pic>
         <p:nvPicPr>
-          <p:cNvPr id="11" name="Image 2" descr="pred_vs_actual_subpos_f5.png">    </p:cNvPr>
+          <p:cNvPr id="11" name="Image 2" descr="pred_vs_actual_lopo_f5.png">    </p:cNvPr>
           <p:cNvPicPr>
             <a:picLocks noChangeAspect="1"/>
           </p:cNvPicPr>
@@ -11173,7 +11625,7 @@
                 <a:ea typeface="Calibri" pitchFamily="34" charset="-122"/>
                 <a:cs typeface="Calibri" pitchFamily="34" charset="-120"/>
               </a:rPr>
-              <a:t>0.55 in</a:t>
+              <a:t>0.67 in</a:t>
             </a:r>
             <a:endParaRPr lang="en-US" sz="1300" dirty="0"/>
           </a:p>
@@ -11212,7 +11664,7 @@
                 <a:ea typeface="Calibri" pitchFamily="34" charset="-122"/>
                 <a:cs typeface="Calibri" pitchFamily="34" charset="-120"/>
               </a:rPr>
-              <a:t>With close cell-mates left in training, single-position error is lower than the whole-cell hold-out (empty 0.39 vs 0.47 in, F5 0.55 vs 0.67 in).</a:t>
+              <a:t>Interpolation error climbs with insert size (0.47, 0.49, 0.67 in) and predictions pull inward, concentrating over the glandular insert the CNN never sampled.</a:t>
             </a:r>
             <a:endParaRPr lang="en-US" sz="1350" dirty="0"/>
           </a:p>
